--- a/presentation/ReDeEP_presentation.pptx
+++ b/presentation/ReDeEP_presentation.pptx
@@ -118,32 +118,32 @@
   <p:extLst>
     <p:ext uri="{521415D9-36F7-43E2-AB2F-B90AF26B5E84}">
       <p14:sectionLst xmlns:p14="http://schemas.microsoft.com/office/powerpoint/2010/main">
-        <p14:section name="Introduction" id="{7345ca32-136a-05a1-70c8-5ea36144c384}">
+        <p14:section name="Introduction" id="{612beb09-5ff7-1dee-b238-c7eeb06b5a7c}">
           <p14:sldIdLst>
             <p14:sldId id="256"/>
             <p14:sldId id="257"/>
           </p14:sldIdLst>
         </p14:section>
-        <p14:section name="Method" id="{2254f2be-06c6-c733-b8ba-a378262f5100}">
+        <p14:section name="Method" id="{0a4aa9d6-56eb-0c70-9a97-3159870280c3}">
           <p14:sldIdLst>
             <p14:sldId id="258"/>
             <p14:sldId id="259"/>
           </p14:sldIdLst>
         </p14:section>
-        <p14:section name="Results" id="{99b35349-ef7c-07e1-e0c5-bf3b3dcd01de}">
+        <p14:section name="Results" id="{ca6bceef-8223-2fd9-8564-f20be8f82f3e}">
           <p14:sldIdLst>
             <p14:sldId id="260"/>
             <p14:sldId id="261"/>
           </p14:sldIdLst>
         </p14:section>
-        <p14:section name="Extension" id="{14cfce59-0ff9-0b71-492f-78079f426827}">
+        <p14:section name="Extension" id="{c2a04e89-20aa-9536-5dd1-a9a091c907d3}">
           <p14:sldIdLst>
             <p14:sldId id="262"/>
             <p14:sldId id="263"/>
             <p14:sldId id="264"/>
           </p14:sldIdLst>
         </p14:section>
-        <p14:section name="Comparison" id="{01545098-825c-da97-a643-ef2ed439a724}">
+        <p14:section name="Comparison" id="{cb2b1d73-dfc5-0575-5aed-f04c33040aac}">
           <p14:sldIdLst>
             <p14:sldId id="265"/>
             <p14:sldId id="266"/>
@@ -3401,7 +3401,7 @@
                   <a:schemeClr val="bg1"/>
                 </a:solidFill>
               </a:rPr>
-              <a:t>Catching RAG hallucinations from inside the model</a:t>
+              <a:t>ReDeEP: Detecting Hallucination in Retrieval-Augmented Generation via Mechanistic Interpretability</a:t>
             </a:r>
             <a:endParaRPr lang="en-US" sz="3800" dirty="0"/>
           </a:p>
@@ -3439,7 +3439,7 @@
                   <a:schemeClr val="bg2"/>
                 </a:solidFill>
               </a:rPr>
-              <a:t>Reproducing ReDeEP (ICLR 2025) on a 6 GB laptop GPU, and finding its blind spot</a:t>
+              <a:t>A reproduction and robustness study on a 6 GB laptop GPU</a:t>
             </a:r>
             <a:endParaRPr lang="en-US" sz="1800" dirty="0"/>
           </a:p>
@@ -3453,7 +3453,7 @@
                   <a:schemeClr val="bg2"/>
                 </a:solidFill>
               </a:rPr>
-              <a:t>Adithya K</a:t>
+              <a:t>Gourilakshmi S (23BCS21) &amp; Adithya K (23BCS51)</a:t>
             </a:r>
             <a:endParaRPr lang="en-US" sz="1800" dirty="0"/>
           </a:p>

--- a/presentation/ReDeEP_presentation.pptx
+++ b/presentation/ReDeEP_presentation.pptx
@@ -17,9 +17,12 @@
     <p:sldId id="265" r:id="rId11"/>
     <p:sldId id="266" r:id="rId12"/>
     <p:sldId id="267" r:id="rId13"/>
+    <p:sldId id="268" r:id="rId14"/>
+    <p:sldId id="269" r:id="rId15"/>
+    <p:sldId id="270" r:id="rId16"/>
   </p:sldIdLst>
   <p:notesMasterIdLst>
-    <p:notesMasterId r:id="rId14"/>
+    <p:notesMasterId r:id="rId17"/>
   </p:notesMasterIdLst>
   <p:sldSz cx="9144000" cy="5143500"/>
   <p:notesSz cx="5143500" cy="9144000"/>
@@ -118,36 +121,43 @@
   <p:extLst>
     <p:ext uri="{521415D9-36F7-43E2-AB2F-B90AF26B5E84}">
       <p14:sectionLst xmlns:p14="http://schemas.microsoft.com/office/powerpoint/2010/main">
-        <p14:section name="Introduction" id="{612beb09-5ff7-1dee-b238-c7eeb06b5a7c}">
+        <p14:section name="Introduction" id="{0a33fdc9-dac5-1572-fb9e-fea19f53a309}">
           <p14:sldIdLst>
             <p14:sldId id="256"/>
             <p14:sldId id="257"/>
           </p14:sldIdLst>
         </p14:section>
-        <p14:section name="Method" id="{0a4aa9d6-56eb-0c70-9a97-3159870280c3}">
+        <p14:section name="Method" id="{6db351fe-7566-5cce-f51b-25dd765461e2}">
           <p14:sldIdLst>
             <p14:sldId id="258"/>
             <p14:sldId id="259"/>
           </p14:sldIdLst>
         </p14:section>
-        <p14:section name="Results" id="{ca6bceef-8223-2fd9-8564-f20be8f82f3e}">
+        <p14:section name="Results" id="{04ab5fb2-a2e3-2818-3a86-ab56e3d56f33}">
           <p14:sldIdLst>
             <p14:sldId id="260"/>
             <p14:sldId id="261"/>
           </p14:sldIdLst>
         </p14:section>
-        <p14:section name="Extension" id="{c2a04e89-20aa-9536-5dd1-a9a091c907d3}">
+        <p14:section name="Extension" id="{bbacbfdd-3eba-d925-77a0-3f52065c93d7}">
           <p14:sldIdLst>
             <p14:sldId id="262"/>
             <p14:sldId id="263"/>
             <p14:sldId id="264"/>
           </p14:sldIdLst>
         </p14:section>
-        <p14:section name="Comparison" id="{cb2b1d73-dfc5-0575-5aed-f04c33040aac}">
+        <p14:section name="Comparison" id="{1a724dab-8b2f-1d31-0ef6-55374084e332}">
           <p14:sldIdLst>
             <p14:sldId id="265"/>
+          </p14:sldIdLst>
+        </p14:section>
+        <p14:section name="Official code" id="{acfb7b87-3d5c-002e-9b83-541114361f04}">
+          <p14:sldIdLst>
             <p14:sldId id="266"/>
             <p14:sldId id="267"/>
+            <p14:sldId id="268"/>
+            <p14:sldId id="269"/>
+            <p14:sldId id="270"/>
           </p14:sldIdLst>
         </p14:section>
       </p14:sectionLst>
@@ -1331,6 +1341,373 @@
 </c:chartSpace>
 </file>
 
+<file path=ppt/charts/chart4.xml><?xml version="1.0" encoding="utf-8"?>
+<c:chartSpace xmlns:c="http://schemas.openxmlformats.org/drawingml/2006/chart" xmlns:a="http://schemas.openxmlformats.org/drawingml/2006/main" xmlns:r="http://schemas.openxmlformats.org/officeDocument/2006/relationships">
+  <c:date1904 val="0"/>
+  <c:roundedCorners val="1"/>
+  <c:chart>
+    <c:autoTitleDeleted val="1"/>
+    <c:plotArea>
+      <c:layout/>
+      <c:barChart>
+        <c:barDir val="col"/>
+        <c:grouping val="clustered"/>
+        <c:varyColors val="0"/>
+        <c:ser>
+          <c:idx val="0"/>
+          <c:order val="0"/>
+          <c:tx>
+            <c:strRef>
+              <c:f>Sheet1!$B$1</c:f>
+              <c:strCache>
+                <c:ptCount val="1"/>
+                <c:pt idx="0">
+                  <c:v>Official protocol (selected on test)</c:v>
+                </c:pt>
+              </c:strCache>
+            </c:strRef>
+          </c:tx>
+          <c:spPr>
+            <a:solidFill>
+              <a:srgbClr val="8C9796"/>
+            </a:solidFill>
+            <a:effectLst/>
+          </c:spPr>
+          <c:invertIfNegative val="0"/>
+          <c:dLbls>
+            <c:numFmt formatCode="0.000" sourceLinked="0"/>
+            <c:txPr>
+              <a:bodyPr/>
+              <a:lstStyle/>
+              <a:p>
+                <a:pPr>
+                  <a:defRPr b="0" i="0" strike="noStrike" sz="1100" u="none">
+                    <a:solidFill>
+                      <a:srgbClr val="1B1B1B"/>
+                    </a:solidFill>
+                    <a:latin typeface="+mn-lt"/>
+                  </a:defRPr>
+                </a:pPr>
+              </a:p>
+            </c:txPr>
+            <c:showLegendKey val="0"/>
+            <c:showVal val="1"/>
+            <c:showCatName val="0"/>
+            <c:showSerName val="0"/>
+            <c:showPercent val="0"/>
+            <c:showBubbleSize val="0"/>
+            <c:showLeaderLines val="0"/>
+          </c:dLbls>
+          <c:cat>
+            <c:multiLvlStrRef>
+              <c:f>Sheet1!$A$2:$A$6</c:f>
+              <c:multiLvlStrCache>
+                <c:ptCount val="5"/>
+                <c:lvl>
+                  <c:pt idx="0">
+                    <c:v>Authors' logs, RAGTruth 7B</c:v>
+                  </c:pt>
+                  <c:pt idx="1">
+                    <c:v>Ours, RAGTruth 7B</c:v>
+                  </c:pt>
+                  <c:pt idx="2">
+                    <c:v>Ours, Dolly 7B</c:v>
+                  </c:pt>
+                  <c:pt idx="3">
+                    <c:v>Ours, Dolly 13B</c:v>
+                  </c:pt>
+                  <c:pt idx="4">
+                    <c:v>Ours, Dolly 8B</c:v>
+                  </c:pt>
+                </c:lvl>
+              </c:multiLvlStrCache>
+            </c:multiLvlStrRef>
+          </c:cat>
+          <c:val>
+            <c:numRef>
+              <c:f>Sheet1!$B$2:$B$6</c:f>
+              <c:numCache>
+                <c:formatCode>General</c:formatCode>
+                <c:ptCount val="5"/>
+                <c:pt idx="0">
+                  <c:v>0.747</c:v>
+                </c:pt>
+                <c:pt idx="1">
+                  <c:v>0.74</c:v>
+                </c:pt>
+                <c:pt idx="2">
+                  <c:v>0.795</c:v>
+                </c:pt>
+                <c:pt idx="3">
+                  <c:v>0.768</c:v>
+                </c:pt>
+                <c:pt idx="4">
+                  <c:v>0.717</c:v>
+                </c:pt>
+              </c:numCache>
+            </c:numRef>
+          </c:val>
+        </c:ser>
+        <c:ser>
+          <c:idx val="1"/>
+          <c:order val="1"/>
+          <c:tx>
+            <c:strRef>
+              <c:f>Sheet1!$C$1</c:f>
+              <c:strCache>
+                <c:ptCount val="1"/>
+                <c:pt idx="0">
+                  <c:v>Leakage-free nested CV</c:v>
+                </c:pt>
+              </c:strCache>
+            </c:strRef>
+          </c:tx>
+          <c:spPr>
+            <a:solidFill>
+              <a:srgbClr val="F2A541"/>
+            </a:solidFill>
+            <a:effectLst/>
+          </c:spPr>
+          <c:invertIfNegative val="0"/>
+          <c:dLbls>
+            <c:numFmt formatCode="0.000" sourceLinked="0"/>
+            <c:txPr>
+              <a:bodyPr/>
+              <a:lstStyle/>
+              <a:p>
+                <a:pPr>
+                  <a:defRPr b="0" i="0" strike="noStrike" sz="1100" u="none">
+                    <a:solidFill>
+                      <a:srgbClr val="1B1B1B"/>
+                    </a:solidFill>
+                    <a:latin typeface="+mn-lt"/>
+                  </a:defRPr>
+                </a:pPr>
+              </a:p>
+            </c:txPr>
+            <c:showLegendKey val="0"/>
+            <c:showVal val="1"/>
+            <c:showCatName val="0"/>
+            <c:showSerName val="0"/>
+            <c:showPercent val="0"/>
+            <c:showBubbleSize val="0"/>
+            <c:showLeaderLines val="0"/>
+          </c:dLbls>
+          <c:cat>
+            <c:multiLvlStrRef>
+              <c:f>Sheet1!$A$2:$A$6</c:f>
+              <c:multiLvlStrCache>
+                <c:ptCount val="5"/>
+                <c:lvl>
+                  <c:pt idx="0">
+                    <c:v>Authors' logs, RAGTruth 7B</c:v>
+                  </c:pt>
+                  <c:pt idx="1">
+                    <c:v>Ours, RAGTruth 7B</c:v>
+                  </c:pt>
+                  <c:pt idx="2">
+                    <c:v>Ours, Dolly 7B</c:v>
+                  </c:pt>
+                  <c:pt idx="3">
+                    <c:v>Ours, Dolly 13B</c:v>
+                  </c:pt>
+                  <c:pt idx="4">
+                    <c:v>Ours, Dolly 8B</c:v>
+                  </c:pt>
+                </c:lvl>
+              </c:multiLvlStrCache>
+            </c:multiLvlStrRef>
+          </c:cat>
+          <c:val>
+            <c:numRef>
+              <c:f>Sheet1!$C$2:$C$6</c:f>
+              <c:numCache>
+                <c:formatCode>General</c:formatCode>
+                <c:ptCount val="5"/>
+                <c:pt idx="0">
+                  <c:v>0.731</c:v>
+                </c:pt>
+                <c:pt idx="1">
+                  <c:v>0.731</c:v>
+                </c:pt>
+                <c:pt idx="2">
+                  <c:v>0.713</c:v>
+                </c:pt>
+                <c:pt idx="3">
+                  <c:v>0.683</c:v>
+                </c:pt>
+                <c:pt idx="4">
+                  <c:v>0.634</c:v>
+                </c:pt>
+              </c:numCache>
+            </c:numRef>
+          </c:val>
+        </c:ser>
+        <c:dLbls>
+          <c:numFmt formatCode="0.000" sourceLinked="0"/>
+          <c:txPr>
+            <a:bodyPr/>
+            <a:lstStyle/>
+            <a:p>
+              <a:pPr>
+                <a:defRPr b="0" i="0" strike="noStrike" sz="1100" u="none">
+                  <a:solidFill>
+                    <a:srgbClr val="1B1B1B"/>
+                  </a:solidFill>
+                  <a:latin typeface="+mn-lt"/>
+                </a:defRPr>
+              </a:pPr>
+            </a:p>
+          </c:txPr>
+          <c:showLegendKey val="0"/>
+          <c:showVal val="1"/>
+          <c:showCatName val="0"/>
+          <c:showSerName val="0"/>
+          <c:showPercent val="0"/>
+          <c:showBubbleSize val="0"/>
+          <c:showLeaderLines val="0"/>
+        </c:dLbls>
+        <c:gapWidth val="60"/>
+        <c:overlap val="0"/>
+        <c:axId val="2094734554"/>
+        <c:axId val="2094734552"/>
+        <c:axId val="2094734556"/>
+      </c:barChart>
+      <c:catAx>
+        <c:axId val="2094734554"/>
+        <c:scaling>
+          <c:orientation val="minMax"/>
+        </c:scaling>
+        <c:delete val="0"/>
+        <c:axPos val="b"/>
+        <c:numFmt formatCode="General" sourceLinked="1"/>
+        <c:majorTickMark val="out"/>
+        <c:minorTickMark val="none"/>
+        <c:tickLblPos val="low"/>
+        <c:spPr>
+          <a:ln w="12700" cap="flat">
+            <a:solidFill>
+              <a:srgbClr val="888888"/>
+            </a:solidFill>
+            <a:prstDash val="solid"/>
+            <a:round/>
+          </a:ln>
+        </c:spPr>
+        <c:txPr>
+          <a:bodyPr/>
+          <a:lstStyle/>
+          <a:p>
+            <a:pPr>
+              <a:defRPr sz="1200" b="0" i="0" u="none" strike="noStrike">
+                <a:solidFill>
+                  <a:srgbClr val="4A4A4A"/>
+                </a:solidFill>
+                <a:latin typeface="+mn-lt"/>
+              </a:defRPr>
+            </a:pPr>
+            <a:endParaRPr lang="en-US"/>
+          </a:p>
+        </c:txPr>
+        <c:crossAx val="2094734552"/>
+        <c:crosses val="autoZero"/>
+        <c:auto val="1"/>
+        <c:lblAlgn val="ctr"/>
+        <c:noMultiLvlLbl val="1"/>
+      </c:catAx>
+      <c:valAx>
+        <c:axId val="2094734552"/>
+        <c:scaling>
+          <c:orientation val="minMax"/>
+          <c:max val="0.85"/>
+          <c:min val="0.6"/>
+        </c:scaling>
+        <c:delete val="0"/>
+        <c:axPos val="l"/>
+        <c:majorGridlines>
+          <c:spPr>
+            <a:ln w="6350" cap="flat">
+              <a:solidFill>
+                <a:srgbClr val="E3E3E3"/>
+              </a:solidFill>
+              <a:prstDash val="solid"/>
+              <a:round/>
+            </a:ln>
+          </c:spPr>
+        </c:majorGridlines>
+        <c:numFmt formatCode="0.00" sourceLinked="0"/>
+        <c:majorTickMark val="out"/>
+        <c:minorTickMark val="none"/>
+        <c:tickLblPos val="nextTo"/>
+        <c:spPr>
+          <a:ln w="12700" cap="flat">
+            <a:solidFill>
+              <a:srgbClr val="888888"/>
+            </a:solidFill>
+            <a:prstDash val="solid"/>
+            <a:round/>
+          </a:ln>
+        </c:spPr>
+        <c:txPr>
+          <a:bodyPr/>
+          <a:lstStyle/>
+          <a:p>
+            <a:pPr>
+              <a:defRPr sz="1100" b="0" i="0" u="none" strike="noStrike">
+                <a:solidFill>
+                  <a:srgbClr val="4A4A4A"/>
+                </a:solidFill>
+                <a:latin typeface="+mn-lt"/>
+              </a:defRPr>
+            </a:pPr>
+            <a:endParaRPr lang="en-US"/>
+          </a:p>
+        </c:txPr>
+        <c:crossAx val="2094734554"/>
+        <c:crosses val="autoZero"/>
+        <c:crossBetween val="between"/>
+        <c:majorUnit val="0.05"/>
+      </c:valAx>
+      <c:spPr>
+        <a:noFill/>
+        <a:ln>
+          <a:noFill/>
+        </a:ln>
+        <a:effectLst/>
+      </c:spPr>
+    </c:plotArea>
+    <c:legend>
+      <c:legendPos val="t"/>
+      <c:overlay val="0"/>
+      <c:txPr>
+        <a:bodyPr/>
+        <a:lstStyle/>
+        <a:p>
+          <a:pPr>
+            <a:defRPr sz="1200">
+              <a:latin typeface="+mn-lt"/>
+              <a:cs typeface="+mn-lt"/>
+            </a:defRPr>
+          </a:pPr>
+          <a:endParaRPr lang="en-US"/>
+        </a:p>
+      </c:txPr>
+    </c:legend>
+    <c:plotVisOnly val="1"/>
+    <c:dispBlanksAs val="span"/>
+  </c:chart>
+  <c:spPr>
+    <a:noFill/>
+    <a:ln>
+      <a:noFill/>
+    </a:ln>
+    <a:effectLst/>
+  </c:spPr>
+  <c:externalData r:id="rId1">
+    <c:autoUpdate val="0"/>
+  </c:externalData>
+</c:chartSpace>
+</file>
+
 <file path=ppt/notesMasters/notesMaster1.xml><?xml version="1.0" encoding="utf-8"?>
 <p:notesMaster xmlns:a="http://schemas.openxmlformats.org/drawingml/2006/main" xmlns:r="http://schemas.openxmlformats.org/officeDocument/2006/relationships" xmlns:p="http://schemas.openxmlformats.org/presentationml/2006/main">
   <p:cSld>
@@ -1902,7 +2279,7 @@
           <a:p>
             <a:r>
               <a:rPr lang="en-US" dirty="0"/>
-              <a:t>Also: copying heads scored on 500 sampled vocabulary tokens; 415 responses give fold std of 0.03-0.05 AUC.</a:t>
+              <a:t>Chunk-level ECS uses BGE embeddings of the most-attended prompt chunk, as in the official code; our features agree with the authors' logged values head by head in 148/160 spot checks.</a:t>
             </a:r>
             <a:endParaRPr lang="en-US" dirty="0"/>
           </a:p>
@@ -1990,7 +2367,7 @@
           <a:p>
             <a:r>
               <a:rPr lang="en-US" dirty="0"/>
-              <a:t>Future work: entity and negation corruptions; combine ECS with a numeric consistency check; run at full precision on a larger GPU; score responses generated by each backbone.</a:t>
+              <a:t>We first reproduced the authors' exact stored result (AUC 0.7473) from their own logs, then moved feature and hyperparameter selection into training folds.</a:t>
             </a:r>
             <a:endParaRPr lang="en-US" dirty="0"/>
           </a:p>
@@ -2014,6 +2391,270 @@
             <a:fld id="{F7021451-1387-4CA6-816F-3879F97B5CBC}" type="slidenum">
               <a:rPr lang="en-US"/>
               <a:t>12</a:t>
+            </a:fld>
+            <a:endParaRPr lang="en-US"/>
+          </a:p>
+        </p:txBody>
+      </p:sp>
+    </p:spTree>
+    <p:extLst>
+      <p:ext uri="{BB962C8B-B14F-4D97-AF65-F5344CB8AC3E}">
+        <p14:creationId xmlns:p14="http://schemas.microsoft.com/office/powerpoint/2010/main" val="1024086991"/>
+      </p:ext>
+    </p:extLst>
+  </p:cSld>
+  <p:clrMapOvr>
+    <a:masterClrMapping/>
+  </p:clrMapOvr>
+</p:notes>
+</file>
+
+<file path=ppt/notesSlides/notesSlide13.xml><?xml version="1.0" encoding="utf-8"?>
+<p:notes xmlns:a="http://schemas.openxmlformats.org/drawingml/2006/main" xmlns:r="http://schemas.openxmlformats.org/officeDocument/2006/relationships" xmlns:p="http://schemas.openxmlformats.org/presentationml/2006/main">
+  <p:cSld>
+    <p:spTree>
+      <p:nvGrpSpPr>
+        <p:cNvPr id="1" name=""/>
+        <p:cNvGrpSpPr/>
+        <p:nvPr/>
+      </p:nvGrpSpPr>
+      <p:grpSpPr>
+        <a:xfrm>
+          <a:off x="0" y="0"/>
+          <a:ext cx="0" cy="0"/>
+          <a:chOff x="0" y="0"/>
+          <a:chExt cx="0" cy="0"/>
+        </a:xfrm>
+      </p:grpSpPr>
+      <p:sp>
+        <p:nvSpPr>
+          <p:cNvPr id="2" name="Slide Image Placeholder 1"/>
+          <p:cNvSpPr>
+            <a:spLocks noGrp="1" noRot="1" noChangeAspect="1"/>
+          </p:cNvSpPr>
+          <p:nvPr>
+            <p:ph type="sldImg"/>
+          </p:nvPr>
+        </p:nvSpPr>
+        <p:spPr/>
+      </p:sp>
+      <p:sp>
+        <p:nvSpPr>
+          <p:cNvPr id="3" name="Notes Placeholder 2"/>
+          <p:cNvSpPr>
+            <a:spLocks noGrp="1"/>
+          </p:cNvSpPr>
+          <p:nvPr>
+            <p:ph type="body" idx="1"/>
+          </p:nvPr>
+        </p:nvSpPr>
+        <p:spPr/>
+        <p:txBody>
+          <a:bodyPr/>
+          <a:lstStyle/>
+          <a:p>
+            <a:r>
+              <a:rPr lang="en-US" dirty="0"/>
+              <a:t>AARF: amplify copying heads x1.2 and damp knowledge FFNs x0.8 when the token hallucination score exceeds 0.6. Authors judged with GPT-4o in a fixed order (AARF first).</a:t>
+            </a:r>
+            <a:endParaRPr lang="en-US" dirty="0"/>
+          </a:p>
+        </p:txBody>
+      </p:sp>
+      <p:sp>
+        <p:nvSpPr>
+          <p:cNvPr id="4" name="Slide Number Placeholder 3"/>
+          <p:cNvSpPr>
+            <a:spLocks noGrp="1"/>
+          </p:cNvSpPr>
+          <p:nvPr>
+            <p:ph type="sldNum" sz="quarter" idx="10"/>
+          </p:nvPr>
+        </p:nvSpPr>
+        <p:spPr/>
+        <p:txBody>
+          <a:bodyPr/>
+          <a:lstStyle/>
+          <a:p>
+            <a:fld id="{F7021451-1387-4CA6-816F-3879F97B5CBC}" type="slidenum">
+              <a:rPr lang="en-US"/>
+              <a:t>13</a:t>
+            </a:fld>
+            <a:endParaRPr lang="en-US"/>
+          </a:p>
+        </p:txBody>
+      </p:sp>
+    </p:spTree>
+    <p:extLst>
+      <p:ext uri="{BB962C8B-B14F-4D97-AF65-F5344CB8AC3E}">
+        <p14:creationId xmlns:p14="http://schemas.microsoft.com/office/powerpoint/2010/main" val="1024086991"/>
+      </p:ext>
+    </p:extLst>
+  </p:cSld>
+  <p:clrMapOvr>
+    <a:masterClrMapping/>
+  </p:clrMapOvr>
+</p:notes>
+</file>
+
+<file path=ppt/notesSlides/notesSlide14.xml><?xml version="1.0" encoding="utf-8"?>
+<p:notes xmlns:a="http://schemas.openxmlformats.org/drawingml/2006/main" xmlns:r="http://schemas.openxmlformats.org/officeDocument/2006/relationships" xmlns:p="http://schemas.openxmlformats.org/presentationml/2006/main">
+  <p:cSld>
+    <p:spTree>
+      <p:nvGrpSpPr>
+        <p:cNvPr id="1" name=""/>
+        <p:cNvGrpSpPr/>
+        <p:nvPr/>
+      </p:nvGrpSpPr>
+      <p:grpSpPr>
+        <a:xfrm>
+          <a:off x="0" y="0"/>
+          <a:ext cx="0" cy="0"/>
+          <a:chOff x="0" y="0"/>
+          <a:chExt cx="0" cy="0"/>
+        </a:xfrm>
+      </p:grpSpPr>
+      <p:sp>
+        <p:nvSpPr>
+          <p:cNvPr id="2" name="Slide Image Placeholder 1"/>
+          <p:cNvSpPr>
+            <a:spLocks noGrp="1" noRot="1" noChangeAspect="1"/>
+          </p:cNvSpPr>
+          <p:nvPr>
+            <p:ph type="sldImg"/>
+          </p:nvPr>
+        </p:nvSpPr>
+        <p:spPr/>
+      </p:sp>
+      <p:sp>
+        <p:nvSpPr>
+          <p:cNvPr id="3" name="Notes Placeholder 2"/>
+          <p:cNvSpPr>
+            <a:spLocks noGrp="1"/>
+          </p:cNvSpPr>
+          <p:nvPr>
+            <p:ph type="body" idx="1"/>
+          </p:nvPr>
+        </p:nvSpPr>
+        <p:spPr/>
+        <p:txBody>
+          <a:bodyPr/>
+          <a:lstStyle/>
+          <a:p>
+            <a:r>
+              <a:rPr lang="en-US" dirty="0"/>
+              <a:t>Also: copying heads scored on 500 sampled vocabulary tokens; 415 responses give fold std of 0.03-0.05 AUC.</a:t>
+            </a:r>
+            <a:endParaRPr lang="en-US" dirty="0"/>
+          </a:p>
+        </p:txBody>
+      </p:sp>
+      <p:sp>
+        <p:nvSpPr>
+          <p:cNvPr id="4" name="Slide Number Placeholder 3"/>
+          <p:cNvSpPr>
+            <a:spLocks noGrp="1"/>
+          </p:cNvSpPr>
+          <p:nvPr>
+            <p:ph type="sldNum" sz="quarter" idx="10"/>
+          </p:nvPr>
+        </p:nvSpPr>
+        <p:spPr/>
+        <p:txBody>
+          <a:bodyPr/>
+          <a:lstStyle/>
+          <a:p>
+            <a:fld id="{F7021451-1387-4CA6-816F-3879F97B5CBC}" type="slidenum">
+              <a:rPr lang="en-US"/>
+              <a:t>14</a:t>
+            </a:fld>
+            <a:endParaRPr lang="en-US"/>
+          </a:p>
+        </p:txBody>
+      </p:sp>
+    </p:spTree>
+    <p:extLst>
+      <p:ext uri="{BB962C8B-B14F-4D97-AF65-F5344CB8AC3E}">
+        <p14:creationId xmlns:p14="http://schemas.microsoft.com/office/powerpoint/2010/main" val="1024086991"/>
+      </p:ext>
+    </p:extLst>
+  </p:cSld>
+  <p:clrMapOvr>
+    <a:masterClrMapping/>
+  </p:clrMapOvr>
+</p:notes>
+</file>
+
+<file path=ppt/notesSlides/notesSlide15.xml><?xml version="1.0" encoding="utf-8"?>
+<p:notes xmlns:a="http://schemas.openxmlformats.org/drawingml/2006/main" xmlns:r="http://schemas.openxmlformats.org/officeDocument/2006/relationships" xmlns:p="http://schemas.openxmlformats.org/presentationml/2006/main">
+  <p:cSld>
+    <p:spTree>
+      <p:nvGrpSpPr>
+        <p:cNvPr id="1" name=""/>
+        <p:cNvGrpSpPr/>
+        <p:nvPr/>
+      </p:nvGrpSpPr>
+      <p:grpSpPr>
+        <a:xfrm>
+          <a:off x="0" y="0"/>
+          <a:ext cx="0" cy="0"/>
+          <a:chOff x="0" y="0"/>
+          <a:chExt cx="0" cy="0"/>
+        </a:xfrm>
+      </p:grpSpPr>
+      <p:sp>
+        <p:nvSpPr>
+          <p:cNvPr id="2" name="Slide Image Placeholder 1"/>
+          <p:cNvSpPr>
+            <a:spLocks noGrp="1" noRot="1" noChangeAspect="1"/>
+          </p:cNvSpPr>
+          <p:nvPr>
+            <p:ph type="sldImg"/>
+          </p:nvPr>
+        </p:nvSpPr>
+        <p:spPr/>
+      </p:sp>
+      <p:sp>
+        <p:nvSpPr>
+          <p:cNvPr id="3" name="Notes Placeholder 2"/>
+          <p:cNvSpPr>
+            <a:spLocks noGrp="1"/>
+          </p:cNvSpPr>
+          <p:nvPr>
+            <p:ph type="body" idx="1"/>
+          </p:nvPr>
+        </p:nvSpPr>
+        <p:spPr/>
+        <p:txBody>
+          <a:bodyPr/>
+          <a:lstStyle/>
+          <a:p>
+            <a:r>
+              <a:rPr lang="en-US" dirty="0"/>
+              <a:t>Future work: entity and negation corruptions; combine ECS with a numeric consistency check; run at full precision on a larger GPU; score responses generated by each backbone.</a:t>
+            </a:r>
+            <a:endParaRPr lang="en-US" dirty="0"/>
+          </a:p>
+        </p:txBody>
+      </p:sp>
+      <p:sp>
+        <p:nvSpPr>
+          <p:cNvPr id="4" name="Slide Number Placeholder 3"/>
+          <p:cNvSpPr>
+            <a:spLocks noGrp="1"/>
+          </p:cNvSpPr>
+          <p:nvPr>
+            <p:ph type="sldNum" sz="quarter" idx="10"/>
+          </p:nvPr>
+        </p:nvSpPr>
+        <p:spPr/>
+        <p:txBody>
+          <a:bodyPr/>
+          <a:lstStyle/>
+          <a:p>
+            <a:fld id="{F7021451-1387-4CA6-816F-3879F97B5CBC}" type="slidenum">
+              <a:rPr lang="en-US"/>
+              <a:t>15</a:t>
             </a:fld>
             <a:endParaRPr lang="en-US"/>
           </a:p>
@@ -3748,26 +4389,1463 @@
                   <a:schemeClr val="tx2"/>
                 </a:solidFill>
               </a:rPr>
-              <a:t>Limitations to keep in mind</a:t>
+              <a:t>With the authors' code and data, chunk level matches and 13B is strongest</a:t>
             </a:r>
             <a:endParaRPr lang="en-US" sz="2400" dirty="0"/>
           </a:p>
         </p:txBody>
       </p:sp>
-      <p:sp>
-        <p:nvSpPr>
-          <p:cNvPr id="3" name="Shape 1"/>
+      <p:graphicFrame>
+        <p:nvGraphicFramePr>
+          <p:cNvPr id="12" name="Table 0"/>
+          <p:cNvGraphicFramePr>
+            <a:graphicFrameLocks noGrp="1"/>
+          </p:cNvGraphicFramePr>
+          <p:nvPr>
+            <p:extLst>
+              <p:ext uri="{D42A27DB-BD31-4B8C-83A1-F6EECF244321}">
+                <p14:modId xmlns:p14="http://schemas.microsoft.com/office/powerpoint/2010/main" val="1579011935"/>
+              </p:ext>
+            </p:extLst>
+          </p:nvPr>
+        </p:nvGraphicFramePr>
+        <p:xfrm>
+          <a:off x="457200" y="1188720"/>
+          <a:ext cx="5669280" cy="914400"/>
+        </p:xfrm>
+        <a:graphic>
+          <a:graphicData uri="http://schemas.openxmlformats.org/drawingml/2006/table">
+            <a:tbl>
+              <a:tblPr/>
+              <a:tblGrid>
+                <a:gridCol w="1463040"/>
+                <a:gridCol w="1051560"/>
+                <a:gridCol w="1051560"/>
+                <a:gridCol w="1051560"/>
+                <a:gridCol w="1051560"/>
+              </a:tblGrid>
+              <a:tr h="411480">
+                <a:tc>
+                  <a:txBody>
+                    <a:bodyPr/>
+                    <a:lstStyle/>
+                    <a:p>
+                      <a:pPr algn="l" indent="0" marL="0">
+                        <a:buNone/>
+                      </a:pPr>
+                      <a:r>
+                        <a:rPr lang="en-US" sz="1300" b="1" dirty="0">
+                          <a:solidFill>
+                            <a:srgbClr val="FFFFFF"/>
+                          </a:solidFill>
+                          <a:latin typeface="Calibri" pitchFamily="34" charset="0"/>
+                          <a:ea typeface="Calibri" pitchFamily="34" charset="-122"/>
+                          <a:cs typeface="Calibri" pitchFamily="34" charset="-120"/>
+                        </a:rPr>
+                        <a:t>Backbone</a:t>
+                      </a:r>
+                      <a:endParaRPr lang="en-US" sz="1300" dirty="0">
+                        <a:latin typeface="Calibri" charset="0"/>
+                        <a:ea typeface="Calibri" charset="0"/>
+                        <a:cs typeface="Calibri" charset="0"/>
+                      </a:endParaRPr>
+                    </a:p>
+                  </a:txBody>
+                  <a:tcPr marL="91440" marR="91440" marT="45720" marB="45720">
+                    <a:lnL w="6350" cap="flat" cmpd="sng" algn="ctr">
+                      <a:solidFill>
+                        <a:srgbClr val="D0D7D6"/>
+                      </a:solidFill>
+                      <a:prstDash val="solid"/>
+                      <a:round/>
+                      <a:headEnd type="none" w="med" len="med"/>
+                      <a:tailEnd type="none" w="med" len="med"/>
+                    </a:lnL>
+                    <a:lnR w="6350" cap="flat" cmpd="sng" algn="ctr">
+                      <a:solidFill>
+                        <a:srgbClr val="D0D7D6"/>
+                      </a:solidFill>
+                      <a:prstDash val="solid"/>
+                      <a:round/>
+                      <a:headEnd type="none" w="med" len="med"/>
+                      <a:tailEnd type="none" w="med" len="med"/>
+                    </a:lnR>
+                    <a:lnT w="6350" cap="flat" cmpd="sng" algn="ctr">
+                      <a:solidFill>
+                        <a:srgbClr val="D0D7D6"/>
+                      </a:solidFill>
+                      <a:prstDash val="solid"/>
+                      <a:round/>
+                      <a:headEnd type="none" w="med" len="med"/>
+                      <a:tailEnd type="none" w="med" len="med"/>
+                    </a:lnT>
+                    <a:lnB w="6350" cap="flat" cmpd="sng" algn="ctr">
+                      <a:solidFill>
+                        <a:srgbClr val="D0D7D6"/>
+                      </a:solidFill>
+                      <a:prstDash val="solid"/>
+                      <a:round/>
+                      <a:headEnd type="none" w="med" len="med"/>
+                      <a:tailEnd type="none" w="med" len="med"/>
+                    </a:lnB>
+                    <a:solidFill>
+                      <a:srgbClr val="0F3D3E"/>
+                    </a:solidFill>
+                  </a:tcPr>
+                </a:tc>
+                <a:tc>
+                  <a:txBody>
+                    <a:bodyPr/>
+                    <a:lstStyle/>
+                    <a:p>
+                      <a:pPr algn="ctr" indent="0" marL="0">
+                        <a:buNone/>
+                      </a:pPr>
+                      <a:r>
+                        <a:rPr lang="en-US" sz="1300" b="1" dirty="0">
+                          <a:solidFill>
+                            <a:srgbClr val="FFFFFF"/>
+                          </a:solidFill>
+                          <a:latin typeface="Calibri" pitchFamily="34" charset="0"/>
+                          <a:ea typeface="Calibri" pitchFamily="34" charset="-122"/>
+                          <a:cs typeface="Calibri" pitchFamily="34" charset="-120"/>
+                        </a:rPr>
+                        <a:t>RAGTruth token</a:t>
+                      </a:r>
+                      <a:endParaRPr lang="en-US" sz="1300" dirty="0">
+                        <a:latin typeface="Calibri" charset="0"/>
+                        <a:ea typeface="Calibri" charset="0"/>
+                        <a:cs typeface="Calibri" charset="0"/>
+                      </a:endParaRPr>
+                    </a:p>
+                  </a:txBody>
+                  <a:tcPr marL="91440" marR="91440" marT="45720" marB="45720">
+                    <a:lnL w="6350" cap="flat" cmpd="sng" algn="ctr">
+                      <a:solidFill>
+                        <a:srgbClr val="D0D7D6"/>
+                      </a:solidFill>
+                      <a:prstDash val="solid"/>
+                      <a:round/>
+                      <a:headEnd type="none" w="med" len="med"/>
+                      <a:tailEnd type="none" w="med" len="med"/>
+                    </a:lnL>
+                    <a:lnR w="6350" cap="flat" cmpd="sng" algn="ctr">
+                      <a:solidFill>
+                        <a:srgbClr val="D0D7D6"/>
+                      </a:solidFill>
+                      <a:prstDash val="solid"/>
+                      <a:round/>
+                      <a:headEnd type="none" w="med" len="med"/>
+                      <a:tailEnd type="none" w="med" len="med"/>
+                    </a:lnR>
+                    <a:lnT w="6350" cap="flat" cmpd="sng" algn="ctr">
+                      <a:solidFill>
+                        <a:srgbClr val="D0D7D6"/>
+                      </a:solidFill>
+                      <a:prstDash val="solid"/>
+                      <a:round/>
+                      <a:headEnd type="none" w="med" len="med"/>
+                      <a:tailEnd type="none" w="med" len="med"/>
+                    </a:lnT>
+                    <a:lnB w="6350" cap="flat" cmpd="sng" algn="ctr">
+                      <a:solidFill>
+                        <a:srgbClr val="D0D7D6"/>
+                      </a:solidFill>
+                      <a:prstDash val="solid"/>
+                      <a:round/>
+                      <a:headEnd type="none" w="med" len="med"/>
+                      <a:tailEnd type="none" w="med" len="med"/>
+                    </a:lnB>
+                    <a:solidFill>
+                      <a:srgbClr val="0F3D3E"/>
+                    </a:solidFill>
+                  </a:tcPr>
+                </a:tc>
+                <a:tc>
+                  <a:txBody>
+                    <a:bodyPr/>
+                    <a:lstStyle/>
+                    <a:p>
+                      <a:pPr algn="ctr" indent="0" marL="0">
+                        <a:buNone/>
+                      </a:pPr>
+                      <a:r>
+                        <a:rPr lang="en-US" sz="1300" b="1" dirty="0">
+                          <a:solidFill>
+                            <a:srgbClr val="FFFFFF"/>
+                          </a:solidFill>
+                          <a:latin typeface="Calibri" pitchFamily="34" charset="0"/>
+                          <a:ea typeface="Calibri" pitchFamily="34" charset="-122"/>
+                          <a:cs typeface="Calibri" pitchFamily="34" charset="-120"/>
+                        </a:rPr>
+                        <a:t>RAGTruth chunk</a:t>
+                      </a:r>
+                      <a:endParaRPr lang="en-US" sz="1300" dirty="0">
+                        <a:latin typeface="Calibri" charset="0"/>
+                        <a:ea typeface="Calibri" charset="0"/>
+                        <a:cs typeface="Calibri" charset="0"/>
+                      </a:endParaRPr>
+                    </a:p>
+                  </a:txBody>
+                  <a:tcPr marL="91440" marR="91440" marT="45720" marB="45720">
+                    <a:lnL w="6350" cap="flat" cmpd="sng" algn="ctr">
+                      <a:solidFill>
+                        <a:srgbClr val="D0D7D6"/>
+                      </a:solidFill>
+                      <a:prstDash val="solid"/>
+                      <a:round/>
+                      <a:headEnd type="none" w="med" len="med"/>
+                      <a:tailEnd type="none" w="med" len="med"/>
+                    </a:lnL>
+                    <a:lnR w="6350" cap="flat" cmpd="sng" algn="ctr">
+                      <a:solidFill>
+                        <a:srgbClr val="D0D7D6"/>
+                      </a:solidFill>
+                      <a:prstDash val="solid"/>
+                      <a:round/>
+                      <a:headEnd type="none" w="med" len="med"/>
+                      <a:tailEnd type="none" w="med" len="med"/>
+                    </a:lnR>
+                    <a:lnT w="6350" cap="flat" cmpd="sng" algn="ctr">
+                      <a:solidFill>
+                        <a:srgbClr val="D0D7D6"/>
+                      </a:solidFill>
+                      <a:prstDash val="solid"/>
+                      <a:round/>
+                      <a:headEnd type="none" w="med" len="med"/>
+                      <a:tailEnd type="none" w="med" len="med"/>
+                    </a:lnT>
+                    <a:lnB w="6350" cap="flat" cmpd="sng" algn="ctr">
+                      <a:solidFill>
+                        <a:srgbClr val="D0D7D6"/>
+                      </a:solidFill>
+                      <a:prstDash val="solid"/>
+                      <a:round/>
+                      <a:headEnd type="none" w="med" len="med"/>
+                      <a:tailEnd type="none" w="med" len="med"/>
+                    </a:lnB>
+                    <a:solidFill>
+                      <a:srgbClr val="0F3D3E"/>
+                    </a:solidFill>
+                  </a:tcPr>
+                </a:tc>
+                <a:tc>
+                  <a:txBody>
+                    <a:bodyPr/>
+                    <a:lstStyle/>
+                    <a:p>
+                      <a:pPr algn="ctr" indent="0" marL="0">
+                        <a:buNone/>
+                      </a:pPr>
+                      <a:r>
+                        <a:rPr lang="en-US" sz="1300" b="1" dirty="0">
+                          <a:solidFill>
+                            <a:srgbClr val="FFFFFF"/>
+                          </a:solidFill>
+                          <a:latin typeface="Calibri" pitchFamily="34" charset="0"/>
+                          <a:ea typeface="Calibri" pitchFamily="34" charset="-122"/>
+                          <a:cs typeface="Calibri" pitchFamily="34" charset="-120"/>
+                        </a:rPr>
+                        <a:t>Dolly token</a:t>
+                      </a:r>
+                      <a:endParaRPr lang="en-US" sz="1300" dirty="0">
+                        <a:latin typeface="Calibri" charset="0"/>
+                        <a:ea typeface="Calibri" charset="0"/>
+                        <a:cs typeface="Calibri" charset="0"/>
+                      </a:endParaRPr>
+                    </a:p>
+                  </a:txBody>
+                  <a:tcPr marL="91440" marR="91440" marT="45720" marB="45720">
+                    <a:lnL w="6350" cap="flat" cmpd="sng" algn="ctr">
+                      <a:solidFill>
+                        <a:srgbClr val="D0D7D6"/>
+                      </a:solidFill>
+                      <a:prstDash val="solid"/>
+                      <a:round/>
+                      <a:headEnd type="none" w="med" len="med"/>
+                      <a:tailEnd type="none" w="med" len="med"/>
+                    </a:lnL>
+                    <a:lnR w="6350" cap="flat" cmpd="sng" algn="ctr">
+                      <a:solidFill>
+                        <a:srgbClr val="D0D7D6"/>
+                      </a:solidFill>
+                      <a:prstDash val="solid"/>
+                      <a:round/>
+                      <a:headEnd type="none" w="med" len="med"/>
+                      <a:tailEnd type="none" w="med" len="med"/>
+                    </a:lnR>
+                    <a:lnT w="6350" cap="flat" cmpd="sng" algn="ctr">
+                      <a:solidFill>
+                        <a:srgbClr val="D0D7D6"/>
+                      </a:solidFill>
+                      <a:prstDash val="solid"/>
+                      <a:round/>
+                      <a:headEnd type="none" w="med" len="med"/>
+                      <a:tailEnd type="none" w="med" len="med"/>
+                    </a:lnT>
+                    <a:lnB w="6350" cap="flat" cmpd="sng" algn="ctr">
+                      <a:solidFill>
+                        <a:srgbClr val="D0D7D6"/>
+                      </a:solidFill>
+                      <a:prstDash val="solid"/>
+                      <a:round/>
+                      <a:headEnd type="none" w="med" len="med"/>
+                      <a:tailEnd type="none" w="med" len="med"/>
+                    </a:lnB>
+                    <a:solidFill>
+                      <a:srgbClr val="0F3D3E"/>
+                    </a:solidFill>
+                  </a:tcPr>
+                </a:tc>
+                <a:tc>
+                  <a:txBody>
+                    <a:bodyPr/>
+                    <a:lstStyle/>
+                    <a:p>
+                      <a:pPr algn="ctr" indent="0" marL="0">
+                        <a:buNone/>
+                      </a:pPr>
+                      <a:r>
+                        <a:rPr lang="en-US" sz="1300" b="1" dirty="0">
+                          <a:solidFill>
+                            <a:srgbClr val="FFFFFF"/>
+                          </a:solidFill>
+                          <a:latin typeface="Calibri" pitchFamily="34" charset="0"/>
+                          <a:ea typeface="Calibri" pitchFamily="34" charset="-122"/>
+                          <a:cs typeface="Calibri" pitchFamily="34" charset="-120"/>
+                        </a:rPr>
+                        <a:t>Dolly chunk</a:t>
+                      </a:r>
+                      <a:endParaRPr lang="en-US" sz="1300" dirty="0">
+                        <a:latin typeface="Calibri" charset="0"/>
+                        <a:ea typeface="Calibri" charset="0"/>
+                        <a:cs typeface="Calibri" charset="0"/>
+                      </a:endParaRPr>
+                    </a:p>
+                  </a:txBody>
+                  <a:tcPr marL="91440" marR="91440" marT="45720" marB="45720">
+                    <a:lnL w="6350" cap="flat" cmpd="sng" algn="ctr">
+                      <a:solidFill>
+                        <a:srgbClr val="D0D7D6"/>
+                      </a:solidFill>
+                      <a:prstDash val="solid"/>
+                      <a:round/>
+                      <a:headEnd type="none" w="med" len="med"/>
+                      <a:tailEnd type="none" w="med" len="med"/>
+                    </a:lnL>
+                    <a:lnR w="6350" cap="flat" cmpd="sng" algn="ctr">
+                      <a:solidFill>
+                        <a:srgbClr val="D0D7D6"/>
+                      </a:solidFill>
+                      <a:prstDash val="solid"/>
+                      <a:round/>
+                      <a:headEnd type="none" w="med" len="med"/>
+                      <a:tailEnd type="none" w="med" len="med"/>
+                    </a:lnR>
+                    <a:lnT w="6350" cap="flat" cmpd="sng" algn="ctr">
+                      <a:solidFill>
+                        <a:srgbClr val="D0D7D6"/>
+                      </a:solidFill>
+                      <a:prstDash val="solid"/>
+                      <a:round/>
+                      <a:headEnd type="none" w="med" len="med"/>
+                      <a:tailEnd type="none" w="med" len="med"/>
+                    </a:lnT>
+                    <a:lnB w="6350" cap="flat" cmpd="sng" algn="ctr">
+                      <a:solidFill>
+                        <a:srgbClr val="D0D7D6"/>
+                      </a:solidFill>
+                      <a:prstDash val="solid"/>
+                      <a:round/>
+                      <a:headEnd type="none" w="med" len="med"/>
+                      <a:tailEnd type="none" w="med" len="med"/>
+                    </a:lnB>
+                    <a:solidFill>
+                      <a:srgbClr val="0F3D3E"/>
+                    </a:solidFill>
+                  </a:tcPr>
+                </a:tc>
+              </a:tr>
+              <a:tr h="411480">
+                <a:tc>
+                  <a:txBody>
+                    <a:bodyPr/>
+                    <a:lstStyle/>
+                    <a:p>
+                      <a:pPr algn="l" indent="0" marL="0">
+                        <a:buNone/>
+                      </a:pPr>
+                      <a:r>
+                        <a:rPr lang="en-US" sz="1300" b="1" dirty="0">
+                          <a:solidFill>
+                            <a:srgbClr val="000000"/>
+                          </a:solidFill>
+                          <a:latin typeface="Calibri" pitchFamily="34" charset="0"/>
+                          <a:ea typeface="Calibri" pitchFamily="34" charset="-122"/>
+                          <a:cs typeface="Calibri" pitchFamily="34" charset="-120"/>
+                        </a:rPr>
+                        <a:t>Llama-2-7B</a:t>
+                      </a:r>
+                      <a:endParaRPr lang="en-US" sz="1300" dirty="0">
+                        <a:latin typeface="Calibri" charset="0"/>
+                        <a:ea typeface="Calibri" charset="0"/>
+                        <a:cs typeface="Calibri" charset="0"/>
+                      </a:endParaRPr>
+                    </a:p>
+                  </a:txBody>
+                  <a:tcPr marL="91440" marR="91440" marT="45720" marB="45720">
+                    <a:lnL w="6350" cap="flat" cmpd="sng" algn="ctr">
+                      <a:solidFill>
+                        <a:srgbClr val="D0D7D6"/>
+                      </a:solidFill>
+                      <a:prstDash val="solid"/>
+                      <a:round/>
+                      <a:headEnd type="none" w="med" len="med"/>
+                      <a:tailEnd type="none" w="med" len="med"/>
+                    </a:lnL>
+                    <a:lnR w="6350" cap="flat" cmpd="sng" algn="ctr">
+                      <a:solidFill>
+                        <a:srgbClr val="D0D7D6"/>
+                      </a:solidFill>
+                      <a:prstDash val="solid"/>
+                      <a:round/>
+                      <a:headEnd type="none" w="med" len="med"/>
+                      <a:tailEnd type="none" w="med" len="med"/>
+                    </a:lnR>
+                    <a:lnT w="6350" cap="flat" cmpd="sng" algn="ctr">
+                      <a:solidFill>
+                        <a:srgbClr val="D0D7D6"/>
+                      </a:solidFill>
+                      <a:prstDash val="solid"/>
+                      <a:round/>
+                      <a:headEnd type="none" w="med" len="med"/>
+                      <a:tailEnd type="none" w="med" len="med"/>
+                    </a:lnT>
+                    <a:lnB w="6350" cap="flat" cmpd="sng" algn="ctr">
+                      <a:solidFill>
+                        <a:srgbClr val="D0D7D6"/>
+                      </a:solidFill>
+                      <a:prstDash val="solid"/>
+                      <a:round/>
+                      <a:headEnd type="none" w="med" len="med"/>
+                      <a:tailEnd type="none" w="med" len="med"/>
+                    </a:lnB>
+                    <a:solidFill>
+                      <a:srgbClr val="FFFFFF"/>
+                    </a:solidFill>
+                  </a:tcPr>
+                </a:tc>
+                <a:tc>
+                  <a:txBody>
+                    <a:bodyPr/>
+                    <a:lstStyle/>
+                    <a:p>
+                      <a:pPr algn="ctr" indent="0" marL="0">
+                        <a:buNone/>
+                      </a:pPr>
+                      <a:r>
+                        <a:rPr lang="en-US" sz="1300" dirty="0">
+                          <a:solidFill>
+                            <a:srgbClr val="000000"/>
+                          </a:solidFill>
+                          <a:latin typeface="Calibri" pitchFamily="34" charset="0"/>
+                          <a:ea typeface="Calibri" pitchFamily="34" charset="-122"/>
+                          <a:cs typeface="Calibri" pitchFamily="34" charset="-120"/>
+                        </a:rPr>
+                        <a:t>0.739</a:t>
+                      </a:r>
+                      <a:endParaRPr lang="en-US" sz="1300" dirty="0">
+                        <a:latin typeface="Calibri" charset="0"/>
+                        <a:ea typeface="Calibri" charset="0"/>
+                        <a:cs typeface="Calibri" charset="0"/>
+                      </a:endParaRPr>
+                    </a:p>
+                  </a:txBody>
+                  <a:tcPr marL="91440" marR="91440" marT="45720" marB="45720">
+                    <a:lnL w="6350" cap="flat" cmpd="sng" algn="ctr">
+                      <a:solidFill>
+                        <a:srgbClr val="D0D7D6"/>
+                      </a:solidFill>
+                      <a:prstDash val="solid"/>
+                      <a:round/>
+                      <a:headEnd type="none" w="med" len="med"/>
+                      <a:tailEnd type="none" w="med" len="med"/>
+                    </a:lnL>
+                    <a:lnR w="6350" cap="flat" cmpd="sng" algn="ctr">
+                      <a:solidFill>
+                        <a:srgbClr val="D0D7D6"/>
+                      </a:solidFill>
+                      <a:prstDash val="solid"/>
+                      <a:round/>
+                      <a:headEnd type="none" w="med" len="med"/>
+                      <a:tailEnd type="none" w="med" len="med"/>
+                    </a:lnR>
+                    <a:lnT w="6350" cap="flat" cmpd="sng" algn="ctr">
+                      <a:solidFill>
+                        <a:srgbClr val="D0D7D6"/>
+                      </a:solidFill>
+                      <a:prstDash val="solid"/>
+                      <a:round/>
+                      <a:headEnd type="none" w="med" len="med"/>
+                      <a:tailEnd type="none" w="med" len="med"/>
+                    </a:lnT>
+                    <a:lnB w="6350" cap="flat" cmpd="sng" algn="ctr">
+                      <a:solidFill>
+                        <a:srgbClr val="D0D7D6"/>
+                      </a:solidFill>
+                      <a:prstDash val="solid"/>
+                      <a:round/>
+                      <a:headEnd type="none" w="med" len="med"/>
+                      <a:tailEnd type="none" w="med" len="med"/>
+                    </a:lnB>
+                    <a:solidFill>
+                      <a:srgbClr val="FFFFFF"/>
+                    </a:solidFill>
+                  </a:tcPr>
+                </a:tc>
+                <a:tc>
+                  <a:txBody>
+                    <a:bodyPr/>
+                    <a:lstStyle/>
+                    <a:p>
+                      <a:pPr algn="ctr" indent="0" marL="0">
+                        <a:buNone/>
+                      </a:pPr>
+                      <a:r>
+                        <a:rPr lang="en-US" sz="1300" dirty="0">
+                          <a:solidFill>
+                            <a:srgbClr val="000000"/>
+                          </a:solidFill>
+                          <a:latin typeface="Calibri" pitchFamily="34" charset="0"/>
+                          <a:ea typeface="Calibri" pitchFamily="34" charset="-122"/>
+                          <a:cs typeface="Calibri" pitchFamily="34" charset="-120"/>
+                        </a:rPr>
+                        <a:t>0.731</a:t>
+                      </a:r>
+                      <a:endParaRPr lang="en-US" sz="1300" dirty="0">
+                        <a:latin typeface="Calibri" charset="0"/>
+                        <a:ea typeface="Calibri" charset="0"/>
+                        <a:cs typeface="Calibri" charset="0"/>
+                      </a:endParaRPr>
+                    </a:p>
+                  </a:txBody>
+                  <a:tcPr marL="91440" marR="91440" marT="45720" marB="45720">
+                    <a:lnL w="6350" cap="flat" cmpd="sng" algn="ctr">
+                      <a:solidFill>
+                        <a:srgbClr val="D0D7D6"/>
+                      </a:solidFill>
+                      <a:prstDash val="solid"/>
+                      <a:round/>
+                      <a:headEnd type="none" w="med" len="med"/>
+                      <a:tailEnd type="none" w="med" len="med"/>
+                    </a:lnL>
+                    <a:lnR w="6350" cap="flat" cmpd="sng" algn="ctr">
+                      <a:solidFill>
+                        <a:srgbClr val="D0D7D6"/>
+                      </a:solidFill>
+                      <a:prstDash val="solid"/>
+                      <a:round/>
+                      <a:headEnd type="none" w="med" len="med"/>
+                      <a:tailEnd type="none" w="med" len="med"/>
+                    </a:lnR>
+                    <a:lnT w="6350" cap="flat" cmpd="sng" algn="ctr">
+                      <a:solidFill>
+                        <a:srgbClr val="D0D7D6"/>
+                      </a:solidFill>
+                      <a:prstDash val="solid"/>
+                      <a:round/>
+                      <a:headEnd type="none" w="med" len="med"/>
+                      <a:tailEnd type="none" w="med" len="med"/>
+                    </a:lnT>
+                    <a:lnB w="6350" cap="flat" cmpd="sng" algn="ctr">
+                      <a:solidFill>
+                        <a:srgbClr val="D0D7D6"/>
+                      </a:solidFill>
+                      <a:prstDash val="solid"/>
+                      <a:round/>
+                      <a:headEnd type="none" w="med" len="med"/>
+                      <a:tailEnd type="none" w="med" len="med"/>
+                    </a:lnB>
+                    <a:solidFill>
+                      <a:srgbClr val="FFFFFF"/>
+                    </a:solidFill>
+                  </a:tcPr>
+                </a:tc>
+                <a:tc>
+                  <a:txBody>
+                    <a:bodyPr/>
+                    <a:lstStyle/>
+                    <a:p>
+                      <a:pPr algn="ctr" indent="0" marL="0">
+                        <a:buNone/>
+                      </a:pPr>
+                      <a:r>
+                        <a:rPr lang="en-US" sz="1300" dirty="0">
+                          <a:solidFill>
+                            <a:srgbClr val="000000"/>
+                          </a:solidFill>
+                          <a:latin typeface="Calibri" pitchFamily="34" charset="0"/>
+                          <a:ea typeface="Calibri" pitchFamily="34" charset="-122"/>
+                          <a:cs typeface="Calibri" pitchFamily="34" charset="-120"/>
+                        </a:rPr>
+                        <a:t>0.690</a:t>
+                      </a:r>
+                      <a:endParaRPr lang="en-US" sz="1300" dirty="0">
+                        <a:latin typeface="Calibri" charset="0"/>
+                        <a:ea typeface="Calibri" charset="0"/>
+                        <a:cs typeface="Calibri" charset="0"/>
+                      </a:endParaRPr>
+                    </a:p>
+                  </a:txBody>
+                  <a:tcPr marL="91440" marR="91440" marT="45720" marB="45720">
+                    <a:lnL w="6350" cap="flat" cmpd="sng" algn="ctr">
+                      <a:solidFill>
+                        <a:srgbClr val="D0D7D6"/>
+                      </a:solidFill>
+                      <a:prstDash val="solid"/>
+                      <a:round/>
+                      <a:headEnd type="none" w="med" len="med"/>
+                      <a:tailEnd type="none" w="med" len="med"/>
+                    </a:lnL>
+                    <a:lnR w="6350" cap="flat" cmpd="sng" algn="ctr">
+                      <a:solidFill>
+                        <a:srgbClr val="D0D7D6"/>
+                      </a:solidFill>
+                      <a:prstDash val="solid"/>
+                      <a:round/>
+                      <a:headEnd type="none" w="med" len="med"/>
+                      <a:tailEnd type="none" w="med" len="med"/>
+                    </a:lnR>
+                    <a:lnT w="6350" cap="flat" cmpd="sng" algn="ctr">
+                      <a:solidFill>
+                        <a:srgbClr val="D0D7D6"/>
+                      </a:solidFill>
+                      <a:prstDash val="solid"/>
+                      <a:round/>
+                      <a:headEnd type="none" w="med" len="med"/>
+                      <a:tailEnd type="none" w="med" len="med"/>
+                    </a:lnT>
+                    <a:lnB w="6350" cap="flat" cmpd="sng" algn="ctr">
+                      <a:solidFill>
+                        <a:srgbClr val="D0D7D6"/>
+                      </a:solidFill>
+                      <a:prstDash val="solid"/>
+                      <a:round/>
+                      <a:headEnd type="none" w="med" len="med"/>
+                      <a:tailEnd type="none" w="med" len="med"/>
+                    </a:lnB>
+                    <a:solidFill>
+                      <a:srgbClr val="FFFFFF"/>
+                    </a:solidFill>
+                  </a:tcPr>
+                </a:tc>
+                <a:tc>
+                  <a:txBody>
+                    <a:bodyPr/>
+                    <a:lstStyle/>
+                    <a:p>
+                      <a:pPr algn="ctr" indent="0" marL="0">
+                        <a:buNone/>
+                      </a:pPr>
+                      <a:r>
+                        <a:rPr lang="en-US" sz="1300" dirty="0">
+                          <a:solidFill>
+                            <a:srgbClr val="000000"/>
+                          </a:solidFill>
+                          <a:latin typeface="Calibri" pitchFamily="34" charset="0"/>
+                          <a:ea typeface="Calibri" pitchFamily="34" charset="-122"/>
+                          <a:cs typeface="Calibri" pitchFamily="34" charset="-120"/>
+                        </a:rPr>
+                        <a:t>0.713</a:t>
+                      </a:r>
+                      <a:endParaRPr lang="en-US" sz="1300" dirty="0">
+                        <a:latin typeface="Calibri" charset="0"/>
+                        <a:ea typeface="Calibri" charset="0"/>
+                        <a:cs typeface="Calibri" charset="0"/>
+                      </a:endParaRPr>
+                    </a:p>
+                  </a:txBody>
+                  <a:tcPr marL="91440" marR="91440" marT="45720" marB="45720">
+                    <a:lnL w="6350" cap="flat" cmpd="sng" algn="ctr">
+                      <a:solidFill>
+                        <a:srgbClr val="D0D7D6"/>
+                      </a:solidFill>
+                      <a:prstDash val="solid"/>
+                      <a:round/>
+                      <a:headEnd type="none" w="med" len="med"/>
+                      <a:tailEnd type="none" w="med" len="med"/>
+                    </a:lnL>
+                    <a:lnR w="6350" cap="flat" cmpd="sng" algn="ctr">
+                      <a:solidFill>
+                        <a:srgbClr val="D0D7D6"/>
+                      </a:solidFill>
+                      <a:prstDash val="solid"/>
+                      <a:round/>
+                      <a:headEnd type="none" w="med" len="med"/>
+                      <a:tailEnd type="none" w="med" len="med"/>
+                    </a:lnR>
+                    <a:lnT w="6350" cap="flat" cmpd="sng" algn="ctr">
+                      <a:solidFill>
+                        <a:srgbClr val="D0D7D6"/>
+                      </a:solidFill>
+                      <a:prstDash val="solid"/>
+                      <a:round/>
+                      <a:headEnd type="none" w="med" len="med"/>
+                      <a:tailEnd type="none" w="med" len="med"/>
+                    </a:lnT>
+                    <a:lnB w="6350" cap="flat" cmpd="sng" algn="ctr">
+                      <a:solidFill>
+                        <a:srgbClr val="D0D7D6"/>
+                      </a:solidFill>
+                      <a:prstDash val="solid"/>
+                      <a:round/>
+                      <a:headEnd type="none" w="med" len="med"/>
+                      <a:tailEnd type="none" w="med" len="med"/>
+                    </a:lnB>
+                    <a:solidFill>
+                      <a:srgbClr val="FFFFFF"/>
+                    </a:solidFill>
+                  </a:tcPr>
+                </a:tc>
+              </a:tr>
+              <a:tr h="411480">
+                <a:tc>
+                  <a:txBody>
+                    <a:bodyPr/>
+                    <a:lstStyle/>
+                    <a:p>
+                      <a:pPr algn="l" indent="0" marL="0">
+                        <a:buNone/>
+                      </a:pPr>
+                      <a:r>
+                        <a:rPr lang="en-US" sz="1300" b="1" dirty="0">
+                          <a:solidFill>
+                            <a:srgbClr val="000000"/>
+                          </a:solidFill>
+                          <a:latin typeface="Calibri" pitchFamily="34" charset="0"/>
+                          <a:ea typeface="Calibri" pitchFamily="34" charset="-122"/>
+                          <a:cs typeface="Calibri" pitchFamily="34" charset="-120"/>
+                        </a:rPr>
+                        <a:t>Llama-2-13B</a:t>
+                      </a:r>
+                      <a:endParaRPr lang="en-US" sz="1300" dirty="0">
+                        <a:latin typeface="Calibri" charset="0"/>
+                        <a:ea typeface="Calibri" charset="0"/>
+                        <a:cs typeface="Calibri" charset="0"/>
+                      </a:endParaRPr>
+                    </a:p>
+                  </a:txBody>
+                  <a:tcPr marL="91440" marR="91440" marT="45720" marB="45720">
+                    <a:lnL w="6350" cap="flat" cmpd="sng" algn="ctr">
+                      <a:solidFill>
+                        <a:srgbClr val="D0D7D6"/>
+                      </a:solidFill>
+                      <a:prstDash val="solid"/>
+                      <a:round/>
+                      <a:headEnd type="none" w="med" len="med"/>
+                      <a:tailEnd type="none" w="med" len="med"/>
+                    </a:lnL>
+                    <a:lnR w="6350" cap="flat" cmpd="sng" algn="ctr">
+                      <a:solidFill>
+                        <a:srgbClr val="D0D7D6"/>
+                      </a:solidFill>
+                      <a:prstDash val="solid"/>
+                      <a:round/>
+                      <a:headEnd type="none" w="med" len="med"/>
+                      <a:tailEnd type="none" w="med" len="med"/>
+                    </a:lnR>
+                    <a:lnT w="6350" cap="flat" cmpd="sng" algn="ctr">
+                      <a:solidFill>
+                        <a:srgbClr val="D0D7D6"/>
+                      </a:solidFill>
+                      <a:prstDash val="solid"/>
+                      <a:round/>
+                      <a:headEnd type="none" w="med" len="med"/>
+                      <a:tailEnd type="none" w="med" len="med"/>
+                    </a:lnT>
+                    <a:lnB w="6350" cap="flat" cmpd="sng" algn="ctr">
+                      <a:solidFill>
+                        <a:srgbClr val="D0D7D6"/>
+                      </a:solidFill>
+                      <a:prstDash val="solid"/>
+                      <a:round/>
+                      <a:headEnd type="none" w="med" len="med"/>
+                      <a:tailEnd type="none" w="med" len="med"/>
+                    </a:lnB>
+                    <a:solidFill>
+                      <a:srgbClr val="FFFFFF"/>
+                    </a:solidFill>
+                  </a:tcPr>
+                </a:tc>
+                <a:tc>
+                  <a:txBody>
+                    <a:bodyPr/>
+                    <a:lstStyle/>
+                    <a:p>
+                      <a:pPr algn="ctr" indent="0" marL="0">
+                        <a:buNone/>
+                      </a:pPr>
+                      <a:r>
+                        <a:rPr lang="en-US" sz="1300" dirty="0">
+                          <a:solidFill>
+                            <a:srgbClr val="000000"/>
+                          </a:solidFill>
+                          <a:latin typeface="Calibri" pitchFamily="34" charset="0"/>
+                          <a:ea typeface="Calibri" pitchFamily="34" charset="-122"/>
+                          <a:cs typeface="Calibri" pitchFamily="34" charset="-120"/>
+                        </a:rPr>
+                        <a:t>0.801</a:t>
+                      </a:r>
+                      <a:endParaRPr lang="en-US" sz="1300" dirty="0">
+                        <a:latin typeface="Calibri" charset="0"/>
+                        <a:ea typeface="Calibri" charset="0"/>
+                        <a:cs typeface="Calibri" charset="0"/>
+                      </a:endParaRPr>
+                    </a:p>
+                  </a:txBody>
+                  <a:tcPr marL="91440" marR="91440" marT="45720" marB="45720">
+                    <a:lnL w="6350" cap="flat" cmpd="sng" algn="ctr">
+                      <a:solidFill>
+                        <a:srgbClr val="D0D7D6"/>
+                      </a:solidFill>
+                      <a:prstDash val="solid"/>
+                      <a:round/>
+                      <a:headEnd type="none" w="med" len="med"/>
+                      <a:tailEnd type="none" w="med" len="med"/>
+                    </a:lnL>
+                    <a:lnR w="6350" cap="flat" cmpd="sng" algn="ctr">
+                      <a:solidFill>
+                        <a:srgbClr val="D0D7D6"/>
+                      </a:solidFill>
+                      <a:prstDash val="solid"/>
+                      <a:round/>
+                      <a:headEnd type="none" w="med" len="med"/>
+                      <a:tailEnd type="none" w="med" len="med"/>
+                    </a:lnR>
+                    <a:lnT w="6350" cap="flat" cmpd="sng" algn="ctr">
+                      <a:solidFill>
+                        <a:srgbClr val="D0D7D6"/>
+                      </a:solidFill>
+                      <a:prstDash val="solid"/>
+                      <a:round/>
+                      <a:headEnd type="none" w="med" len="med"/>
+                      <a:tailEnd type="none" w="med" len="med"/>
+                    </a:lnT>
+                    <a:lnB w="6350" cap="flat" cmpd="sng" algn="ctr">
+                      <a:solidFill>
+                        <a:srgbClr val="D0D7D6"/>
+                      </a:solidFill>
+                      <a:prstDash val="solid"/>
+                      <a:round/>
+                      <a:headEnd type="none" w="med" len="med"/>
+                      <a:tailEnd type="none" w="med" len="med"/>
+                    </a:lnB>
+                    <a:solidFill>
+                      <a:srgbClr val="FFFFFF"/>
+                    </a:solidFill>
+                  </a:tcPr>
+                </a:tc>
+                <a:tc>
+                  <a:txBody>
+                    <a:bodyPr/>
+                    <a:lstStyle/>
+                    <a:p>
+                      <a:pPr algn="ctr" indent="0" marL="0">
+                        <a:buNone/>
+                      </a:pPr>
+                      <a:r>
+                        <a:rPr lang="en-US" sz="1300" dirty="0">
+                          <a:solidFill>
+                            <a:srgbClr val="000000"/>
+                          </a:solidFill>
+                          <a:latin typeface="Calibri" pitchFamily="34" charset="0"/>
+                          <a:ea typeface="Calibri" pitchFamily="34" charset="-122"/>
+                          <a:cs typeface="Calibri" pitchFamily="34" charset="-120"/>
+                        </a:rPr>
+                        <a:t>0.794</a:t>
+                      </a:r>
+                      <a:endParaRPr lang="en-US" sz="1300" dirty="0">
+                        <a:latin typeface="Calibri" charset="0"/>
+                        <a:ea typeface="Calibri" charset="0"/>
+                        <a:cs typeface="Calibri" charset="0"/>
+                      </a:endParaRPr>
+                    </a:p>
+                  </a:txBody>
+                  <a:tcPr marL="91440" marR="91440" marT="45720" marB="45720">
+                    <a:lnL w="6350" cap="flat" cmpd="sng" algn="ctr">
+                      <a:solidFill>
+                        <a:srgbClr val="D0D7D6"/>
+                      </a:solidFill>
+                      <a:prstDash val="solid"/>
+                      <a:round/>
+                      <a:headEnd type="none" w="med" len="med"/>
+                      <a:tailEnd type="none" w="med" len="med"/>
+                    </a:lnL>
+                    <a:lnR w="6350" cap="flat" cmpd="sng" algn="ctr">
+                      <a:solidFill>
+                        <a:srgbClr val="D0D7D6"/>
+                      </a:solidFill>
+                      <a:prstDash val="solid"/>
+                      <a:round/>
+                      <a:headEnd type="none" w="med" len="med"/>
+                      <a:tailEnd type="none" w="med" len="med"/>
+                    </a:lnR>
+                    <a:lnT w="6350" cap="flat" cmpd="sng" algn="ctr">
+                      <a:solidFill>
+                        <a:srgbClr val="D0D7D6"/>
+                      </a:solidFill>
+                      <a:prstDash val="solid"/>
+                      <a:round/>
+                      <a:headEnd type="none" w="med" len="med"/>
+                      <a:tailEnd type="none" w="med" len="med"/>
+                    </a:lnT>
+                    <a:lnB w="6350" cap="flat" cmpd="sng" algn="ctr">
+                      <a:solidFill>
+                        <a:srgbClr val="D0D7D6"/>
+                      </a:solidFill>
+                      <a:prstDash val="solid"/>
+                      <a:round/>
+                      <a:headEnd type="none" w="med" len="med"/>
+                      <a:tailEnd type="none" w="med" len="med"/>
+                    </a:lnB>
+                    <a:solidFill>
+                      <a:srgbClr val="FFFFFF"/>
+                    </a:solidFill>
+                  </a:tcPr>
+                </a:tc>
+                <a:tc>
+                  <a:txBody>
+                    <a:bodyPr/>
+                    <a:lstStyle/>
+                    <a:p>
+                      <a:pPr algn="ctr" indent="0" marL="0">
+                        <a:buNone/>
+                      </a:pPr>
+                      <a:r>
+                        <a:rPr lang="en-US" sz="1300" dirty="0">
+                          <a:solidFill>
+                            <a:srgbClr val="000000"/>
+                          </a:solidFill>
+                          <a:latin typeface="Calibri" pitchFamily="34" charset="0"/>
+                          <a:ea typeface="Calibri" pitchFamily="34" charset="-122"/>
+                          <a:cs typeface="Calibri" pitchFamily="34" charset="-120"/>
+                        </a:rPr>
+                        <a:t>0.646</a:t>
+                      </a:r>
+                      <a:endParaRPr lang="en-US" sz="1300" dirty="0">
+                        <a:latin typeface="Calibri" charset="0"/>
+                        <a:ea typeface="Calibri" charset="0"/>
+                        <a:cs typeface="Calibri" charset="0"/>
+                      </a:endParaRPr>
+                    </a:p>
+                  </a:txBody>
+                  <a:tcPr marL="91440" marR="91440" marT="45720" marB="45720">
+                    <a:lnL w="6350" cap="flat" cmpd="sng" algn="ctr">
+                      <a:solidFill>
+                        <a:srgbClr val="D0D7D6"/>
+                      </a:solidFill>
+                      <a:prstDash val="solid"/>
+                      <a:round/>
+                      <a:headEnd type="none" w="med" len="med"/>
+                      <a:tailEnd type="none" w="med" len="med"/>
+                    </a:lnL>
+                    <a:lnR w="6350" cap="flat" cmpd="sng" algn="ctr">
+                      <a:solidFill>
+                        <a:srgbClr val="D0D7D6"/>
+                      </a:solidFill>
+                      <a:prstDash val="solid"/>
+                      <a:round/>
+                      <a:headEnd type="none" w="med" len="med"/>
+                      <a:tailEnd type="none" w="med" len="med"/>
+                    </a:lnR>
+                    <a:lnT w="6350" cap="flat" cmpd="sng" algn="ctr">
+                      <a:solidFill>
+                        <a:srgbClr val="D0D7D6"/>
+                      </a:solidFill>
+                      <a:prstDash val="solid"/>
+                      <a:round/>
+                      <a:headEnd type="none" w="med" len="med"/>
+                      <a:tailEnd type="none" w="med" len="med"/>
+                    </a:lnT>
+                    <a:lnB w="6350" cap="flat" cmpd="sng" algn="ctr">
+                      <a:solidFill>
+                        <a:srgbClr val="D0D7D6"/>
+                      </a:solidFill>
+                      <a:prstDash val="solid"/>
+                      <a:round/>
+                      <a:headEnd type="none" w="med" len="med"/>
+                      <a:tailEnd type="none" w="med" len="med"/>
+                    </a:lnB>
+                    <a:solidFill>
+                      <a:srgbClr val="FFFFFF"/>
+                    </a:solidFill>
+                  </a:tcPr>
+                </a:tc>
+                <a:tc>
+                  <a:txBody>
+                    <a:bodyPr/>
+                    <a:lstStyle/>
+                    <a:p>
+                      <a:pPr algn="ctr" indent="0" marL="0">
+                        <a:buNone/>
+                      </a:pPr>
+                      <a:r>
+                        <a:rPr lang="en-US" sz="1300" dirty="0">
+                          <a:solidFill>
+                            <a:srgbClr val="000000"/>
+                          </a:solidFill>
+                          <a:latin typeface="Calibri" pitchFamily="34" charset="0"/>
+                          <a:ea typeface="Calibri" pitchFamily="34" charset="-122"/>
+                          <a:cs typeface="Calibri" pitchFamily="34" charset="-120"/>
+                        </a:rPr>
+                        <a:t>0.683</a:t>
+                      </a:r>
+                      <a:endParaRPr lang="en-US" sz="1300" dirty="0">
+                        <a:latin typeface="Calibri" charset="0"/>
+                        <a:ea typeface="Calibri" charset="0"/>
+                        <a:cs typeface="Calibri" charset="0"/>
+                      </a:endParaRPr>
+                    </a:p>
+                  </a:txBody>
+                  <a:tcPr marL="91440" marR="91440" marT="45720" marB="45720">
+                    <a:lnL w="6350" cap="flat" cmpd="sng" algn="ctr">
+                      <a:solidFill>
+                        <a:srgbClr val="D0D7D6"/>
+                      </a:solidFill>
+                      <a:prstDash val="solid"/>
+                      <a:round/>
+                      <a:headEnd type="none" w="med" len="med"/>
+                      <a:tailEnd type="none" w="med" len="med"/>
+                    </a:lnL>
+                    <a:lnR w="6350" cap="flat" cmpd="sng" algn="ctr">
+                      <a:solidFill>
+                        <a:srgbClr val="D0D7D6"/>
+                      </a:solidFill>
+                      <a:prstDash val="solid"/>
+                      <a:round/>
+                      <a:headEnd type="none" w="med" len="med"/>
+                      <a:tailEnd type="none" w="med" len="med"/>
+                    </a:lnR>
+                    <a:lnT w="6350" cap="flat" cmpd="sng" algn="ctr">
+                      <a:solidFill>
+                        <a:srgbClr val="D0D7D6"/>
+                      </a:solidFill>
+                      <a:prstDash val="solid"/>
+                      <a:round/>
+                      <a:headEnd type="none" w="med" len="med"/>
+                      <a:tailEnd type="none" w="med" len="med"/>
+                    </a:lnT>
+                    <a:lnB w="6350" cap="flat" cmpd="sng" algn="ctr">
+                      <a:solidFill>
+                        <a:srgbClr val="D0D7D6"/>
+                      </a:solidFill>
+                      <a:prstDash val="solid"/>
+                      <a:round/>
+                      <a:headEnd type="none" w="med" len="med"/>
+                      <a:tailEnd type="none" w="med" len="med"/>
+                    </a:lnB>
+                    <a:solidFill>
+                      <a:srgbClr val="FFFFFF"/>
+                    </a:solidFill>
+                  </a:tcPr>
+                </a:tc>
+              </a:tr>
+              <a:tr h="411480">
+                <a:tc>
+                  <a:txBody>
+                    <a:bodyPr/>
+                    <a:lstStyle/>
+                    <a:p>
+                      <a:pPr algn="l" indent="0" marL="0">
+                        <a:buNone/>
+                      </a:pPr>
+                      <a:r>
+                        <a:rPr lang="en-US" sz="1300" b="1" dirty="0">
+                          <a:solidFill>
+                            <a:srgbClr val="000000"/>
+                          </a:solidFill>
+                          <a:latin typeface="Calibri" pitchFamily="34" charset="0"/>
+                          <a:ea typeface="Calibri" pitchFamily="34" charset="-122"/>
+                          <a:cs typeface="Calibri" pitchFamily="34" charset="-120"/>
+                        </a:rPr>
+                        <a:t>Llama-3-8B</a:t>
+                      </a:r>
+                      <a:endParaRPr lang="en-US" sz="1300" dirty="0">
+                        <a:latin typeface="Calibri" charset="0"/>
+                        <a:ea typeface="Calibri" charset="0"/>
+                        <a:cs typeface="Calibri" charset="0"/>
+                      </a:endParaRPr>
+                    </a:p>
+                  </a:txBody>
+                  <a:tcPr marL="91440" marR="91440" marT="45720" marB="45720">
+                    <a:lnL w="6350" cap="flat" cmpd="sng" algn="ctr">
+                      <a:solidFill>
+                        <a:srgbClr val="D0D7D6"/>
+                      </a:solidFill>
+                      <a:prstDash val="solid"/>
+                      <a:round/>
+                      <a:headEnd type="none" w="med" len="med"/>
+                      <a:tailEnd type="none" w="med" len="med"/>
+                    </a:lnL>
+                    <a:lnR w="6350" cap="flat" cmpd="sng" algn="ctr">
+                      <a:solidFill>
+                        <a:srgbClr val="D0D7D6"/>
+                      </a:solidFill>
+                      <a:prstDash val="solid"/>
+                      <a:round/>
+                      <a:headEnd type="none" w="med" len="med"/>
+                      <a:tailEnd type="none" w="med" len="med"/>
+                    </a:lnR>
+                    <a:lnT w="6350" cap="flat" cmpd="sng" algn="ctr">
+                      <a:solidFill>
+                        <a:srgbClr val="D0D7D6"/>
+                      </a:solidFill>
+                      <a:prstDash val="solid"/>
+                      <a:round/>
+                      <a:headEnd type="none" w="med" len="med"/>
+                      <a:tailEnd type="none" w="med" len="med"/>
+                    </a:lnT>
+                    <a:lnB w="6350" cap="flat" cmpd="sng" algn="ctr">
+                      <a:solidFill>
+                        <a:srgbClr val="D0D7D6"/>
+                      </a:solidFill>
+                      <a:prstDash val="solid"/>
+                      <a:round/>
+                      <a:headEnd type="none" w="med" len="med"/>
+                      <a:tailEnd type="none" w="med" len="med"/>
+                    </a:lnB>
+                    <a:solidFill>
+                      <a:srgbClr val="FFFFFF"/>
+                    </a:solidFill>
+                  </a:tcPr>
+                </a:tc>
+                <a:tc>
+                  <a:txBody>
+                    <a:bodyPr/>
+                    <a:lstStyle/>
+                    <a:p>
+                      <a:pPr algn="ctr" indent="0" marL="0">
+                        <a:buNone/>
+                      </a:pPr>
+                      <a:r>
+                        <a:rPr lang="en-US" sz="1300" dirty="0">
+                          <a:solidFill>
+                            <a:srgbClr val="000000"/>
+                          </a:solidFill>
+                          <a:latin typeface="Calibri" pitchFamily="34" charset="0"/>
+                          <a:ea typeface="Calibri" pitchFamily="34" charset="-122"/>
+                          <a:cs typeface="Calibri" pitchFamily="34" charset="-120"/>
+                        </a:rPr>
+                        <a:t>0.730</a:t>
+                      </a:r>
+                      <a:endParaRPr lang="en-US" sz="1300" dirty="0">
+                        <a:latin typeface="Calibri" charset="0"/>
+                        <a:ea typeface="Calibri" charset="0"/>
+                        <a:cs typeface="Calibri" charset="0"/>
+                      </a:endParaRPr>
+                    </a:p>
+                  </a:txBody>
+                  <a:tcPr marL="91440" marR="91440" marT="45720" marB="45720">
+                    <a:lnL w="6350" cap="flat" cmpd="sng" algn="ctr">
+                      <a:solidFill>
+                        <a:srgbClr val="D0D7D6"/>
+                      </a:solidFill>
+                      <a:prstDash val="solid"/>
+                      <a:round/>
+                      <a:headEnd type="none" w="med" len="med"/>
+                      <a:tailEnd type="none" w="med" len="med"/>
+                    </a:lnL>
+                    <a:lnR w="6350" cap="flat" cmpd="sng" algn="ctr">
+                      <a:solidFill>
+                        <a:srgbClr val="D0D7D6"/>
+                      </a:solidFill>
+                      <a:prstDash val="solid"/>
+                      <a:round/>
+                      <a:headEnd type="none" w="med" len="med"/>
+                      <a:tailEnd type="none" w="med" len="med"/>
+                    </a:lnR>
+                    <a:lnT w="6350" cap="flat" cmpd="sng" algn="ctr">
+                      <a:solidFill>
+                        <a:srgbClr val="D0D7D6"/>
+                      </a:solidFill>
+                      <a:prstDash val="solid"/>
+                      <a:round/>
+                      <a:headEnd type="none" w="med" len="med"/>
+                      <a:tailEnd type="none" w="med" len="med"/>
+                    </a:lnT>
+                    <a:lnB w="6350" cap="flat" cmpd="sng" algn="ctr">
+                      <a:solidFill>
+                        <a:srgbClr val="D0D7D6"/>
+                      </a:solidFill>
+                      <a:prstDash val="solid"/>
+                      <a:round/>
+                      <a:headEnd type="none" w="med" len="med"/>
+                      <a:tailEnd type="none" w="med" len="med"/>
+                    </a:lnB>
+                    <a:solidFill>
+                      <a:srgbClr val="FFFFFF"/>
+                    </a:solidFill>
+                  </a:tcPr>
+                </a:tc>
+                <a:tc>
+                  <a:txBody>
+                    <a:bodyPr/>
+                    <a:lstStyle/>
+                    <a:p>
+                      <a:pPr algn="ctr" indent="0" marL="0">
+                        <a:buNone/>
+                      </a:pPr>
+                      <a:r>
+                        <a:rPr lang="en-US" sz="1300" dirty="0">
+                          <a:solidFill>
+                            <a:srgbClr val="000000"/>
+                          </a:solidFill>
+                          <a:latin typeface="Calibri" pitchFamily="34" charset="0"/>
+                          <a:ea typeface="Calibri" pitchFamily="34" charset="-122"/>
+                          <a:cs typeface="Calibri" pitchFamily="34" charset="-120"/>
+                        </a:rPr>
+                        <a:t>0.717</a:t>
+                      </a:r>
+                      <a:endParaRPr lang="en-US" sz="1300" dirty="0">
+                        <a:latin typeface="Calibri" charset="0"/>
+                        <a:ea typeface="Calibri" charset="0"/>
+                        <a:cs typeface="Calibri" charset="0"/>
+                      </a:endParaRPr>
+                    </a:p>
+                  </a:txBody>
+                  <a:tcPr marL="91440" marR="91440" marT="45720" marB="45720">
+                    <a:lnL w="6350" cap="flat" cmpd="sng" algn="ctr">
+                      <a:solidFill>
+                        <a:srgbClr val="D0D7D6"/>
+                      </a:solidFill>
+                      <a:prstDash val="solid"/>
+                      <a:round/>
+                      <a:headEnd type="none" w="med" len="med"/>
+                      <a:tailEnd type="none" w="med" len="med"/>
+                    </a:lnL>
+                    <a:lnR w="6350" cap="flat" cmpd="sng" algn="ctr">
+                      <a:solidFill>
+                        <a:srgbClr val="D0D7D6"/>
+                      </a:solidFill>
+                      <a:prstDash val="solid"/>
+                      <a:round/>
+                      <a:headEnd type="none" w="med" len="med"/>
+                      <a:tailEnd type="none" w="med" len="med"/>
+                    </a:lnR>
+                    <a:lnT w="6350" cap="flat" cmpd="sng" algn="ctr">
+                      <a:solidFill>
+                        <a:srgbClr val="D0D7D6"/>
+                      </a:solidFill>
+                      <a:prstDash val="solid"/>
+                      <a:round/>
+                      <a:headEnd type="none" w="med" len="med"/>
+                      <a:tailEnd type="none" w="med" len="med"/>
+                    </a:lnT>
+                    <a:lnB w="6350" cap="flat" cmpd="sng" algn="ctr">
+                      <a:solidFill>
+                        <a:srgbClr val="D0D7D6"/>
+                      </a:solidFill>
+                      <a:prstDash val="solid"/>
+                      <a:round/>
+                      <a:headEnd type="none" w="med" len="med"/>
+                      <a:tailEnd type="none" w="med" len="med"/>
+                    </a:lnB>
+                    <a:solidFill>
+                      <a:srgbClr val="FFFFFF"/>
+                    </a:solidFill>
+                  </a:tcPr>
+                </a:tc>
+                <a:tc>
+                  <a:txBody>
+                    <a:bodyPr/>
+                    <a:lstStyle/>
+                    <a:p>
+                      <a:pPr algn="ctr" indent="0" marL="0">
+                        <a:buNone/>
+                      </a:pPr>
+                      <a:r>
+                        <a:rPr lang="en-US" sz="1300" dirty="0">
+                          <a:solidFill>
+                            <a:srgbClr val="000000"/>
+                          </a:solidFill>
+                          <a:latin typeface="Calibri" pitchFamily="34" charset="0"/>
+                          <a:ea typeface="Calibri" pitchFamily="34" charset="-122"/>
+                          <a:cs typeface="Calibri" pitchFamily="34" charset="-120"/>
+                        </a:rPr>
+                        <a:t>0.538</a:t>
+                      </a:r>
+                      <a:endParaRPr lang="en-US" sz="1300" dirty="0">
+                        <a:latin typeface="Calibri" charset="0"/>
+                        <a:ea typeface="Calibri" charset="0"/>
+                        <a:cs typeface="Calibri" charset="0"/>
+                      </a:endParaRPr>
+                    </a:p>
+                  </a:txBody>
+                  <a:tcPr marL="91440" marR="91440" marT="45720" marB="45720">
+                    <a:lnL w="6350" cap="flat" cmpd="sng" algn="ctr">
+                      <a:solidFill>
+                        <a:srgbClr val="D0D7D6"/>
+                      </a:solidFill>
+                      <a:prstDash val="solid"/>
+                      <a:round/>
+                      <a:headEnd type="none" w="med" len="med"/>
+                      <a:tailEnd type="none" w="med" len="med"/>
+                    </a:lnL>
+                    <a:lnR w="6350" cap="flat" cmpd="sng" algn="ctr">
+                      <a:solidFill>
+                        <a:srgbClr val="D0D7D6"/>
+                      </a:solidFill>
+                      <a:prstDash val="solid"/>
+                      <a:round/>
+                      <a:headEnd type="none" w="med" len="med"/>
+                      <a:tailEnd type="none" w="med" len="med"/>
+                    </a:lnR>
+                    <a:lnT w="6350" cap="flat" cmpd="sng" algn="ctr">
+                      <a:solidFill>
+                        <a:srgbClr val="D0D7D6"/>
+                      </a:solidFill>
+                      <a:prstDash val="solid"/>
+                      <a:round/>
+                      <a:headEnd type="none" w="med" len="med"/>
+                      <a:tailEnd type="none" w="med" len="med"/>
+                    </a:lnT>
+                    <a:lnB w="6350" cap="flat" cmpd="sng" algn="ctr">
+                      <a:solidFill>
+                        <a:srgbClr val="D0D7D6"/>
+                      </a:solidFill>
+                      <a:prstDash val="solid"/>
+                      <a:round/>
+                      <a:headEnd type="none" w="med" len="med"/>
+                      <a:tailEnd type="none" w="med" len="med"/>
+                    </a:lnB>
+                    <a:solidFill>
+                      <a:srgbClr val="FFFFFF"/>
+                    </a:solidFill>
+                  </a:tcPr>
+                </a:tc>
+                <a:tc>
+                  <a:txBody>
+                    <a:bodyPr/>
+                    <a:lstStyle/>
+                    <a:p>
+                      <a:pPr algn="ctr" indent="0" marL="0">
+                        <a:buNone/>
+                      </a:pPr>
+                      <a:r>
+                        <a:rPr lang="en-US" sz="1300" dirty="0">
+                          <a:solidFill>
+                            <a:srgbClr val="000000"/>
+                          </a:solidFill>
+                          <a:latin typeface="Calibri" pitchFamily="34" charset="0"/>
+                          <a:ea typeface="Calibri" pitchFamily="34" charset="-122"/>
+                          <a:cs typeface="Calibri" pitchFamily="34" charset="-120"/>
+                        </a:rPr>
+                        <a:t>0.634</a:t>
+                      </a:r>
+                      <a:endParaRPr lang="en-US" sz="1300" dirty="0">
+                        <a:latin typeface="Calibri" charset="0"/>
+                        <a:ea typeface="Calibri" charset="0"/>
+                        <a:cs typeface="Calibri" charset="0"/>
+                      </a:endParaRPr>
+                    </a:p>
+                  </a:txBody>
+                  <a:tcPr marL="91440" marR="91440" marT="45720" marB="45720">
+                    <a:lnL w="6350" cap="flat" cmpd="sng" algn="ctr">
+                      <a:solidFill>
+                        <a:srgbClr val="D0D7D6"/>
+                      </a:solidFill>
+                      <a:prstDash val="solid"/>
+                      <a:round/>
+                      <a:headEnd type="none" w="med" len="med"/>
+                      <a:tailEnd type="none" w="med" len="med"/>
+                    </a:lnL>
+                    <a:lnR w="6350" cap="flat" cmpd="sng" algn="ctr">
+                      <a:solidFill>
+                        <a:srgbClr val="D0D7D6"/>
+                      </a:solidFill>
+                      <a:prstDash val="solid"/>
+                      <a:round/>
+                      <a:headEnd type="none" w="med" len="med"/>
+                      <a:tailEnd type="none" w="med" len="med"/>
+                    </a:lnR>
+                    <a:lnT w="6350" cap="flat" cmpd="sng" algn="ctr">
+                      <a:solidFill>
+                        <a:srgbClr val="D0D7D6"/>
+                      </a:solidFill>
+                      <a:prstDash val="solid"/>
+                      <a:round/>
+                      <a:headEnd type="none" w="med" len="med"/>
+                      <a:tailEnd type="none" w="med" len="med"/>
+                    </a:lnT>
+                    <a:lnB w="6350" cap="flat" cmpd="sng" algn="ctr">
+                      <a:solidFill>
+                        <a:srgbClr val="D0D7D6"/>
+                      </a:solidFill>
+                      <a:prstDash val="solid"/>
+                      <a:round/>
+                      <a:headEnd type="none" w="med" len="med"/>
+                      <a:tailEnd type="none" w="med" len="med"/>
+                    </a:lnB>
+                    <a:solidFill>
+                      <a:srgbClr val="FFFFFF"/>
+                    </a:solidFill>
+                  </a:tcPr>
+                </a:tc>
+              </a:tr>
+            </a:tbl>
+          </a:graphicData>
+        </a:graphic>
+      </p:graphicFrame>
+      <p:sp>
+        <p:nvSpPr>
+          <p:cNvPr id="4" name="Text 1"/>
+          <p:cNvSpPr txBox="1"/>
+          <p:nvPr/>
+        </p:nvSpPr>
+        <p:spPr>
+          <a:xfrm>
+            <a:off x="457200" y="3063240"/>
+            <a:ext cx="5669280" cy="548640"/>
+          </a:xfrm>
+          <a:prstGeom prst="rect">
+            <a:avLst/>
+          </a:prstGeom>
+          <a:noFill/>
+          <a:ln/>
+        </p:spPr>
+        <p:txBody>
+          <a:bodyPr wrap="square" lIns="0" tIns="0" rIns="0" bIns="0" rtlCol="0" anchor="t"/>
+          <a:lstStyle/>
+          <a:p>
+            <a:pPr indent="0" marL="0">
+              <a:buNone/>
+            </a:pPr>
+            <a:r>
+              <a:rPr lang="en-US" sz="1200" dirty="0">
+                <a:solidFill>
+                  <a:schemeClr val="accent3"/>
+                </a:solidFill>
+              </a:rPr>
+              <a:t>AUC, leakage-free 5-fold CV. 13B and 8B ran in 4-bit on a free Kaggle T4 GPU, each on its own responses.</a:t>
+            </a:r>
+            <a:endParaRPr lang="en-US" sz="1200" dirty="0"/>
+          </a:p>
+        </p:txBody>
+      </p:sp>
+      <p:sp>
+        <p:nvSpPr>
+          <p:cNvPr id="5" name="Shape 2"/>
           <p:cNvSpPr/>
           <p:nvPr/>
         </p:nvSpPr>
         <p:spPr>
           <a:xfrm>
-            <a:off x="457200" y="1188720"/>
-            <a:ext cx="4023360" cy="1463040"/>
+            <a:off x="6400800" y="1188720"/>
+            <a:ext cx="2286000" cy="3291840"/>
           </a:xfrm>
           <a:prstGeom prst="roundRect">
             <a:avLst>
-              <a:gd name="adj" fmla="val 5000"/>
+              <a:gd name="adj" fmla="val 3200"/>
             </a:avLst>
           </a:prstGeom>
           <a:solidFill>
@@ -3778,14 +5856,14 @@
       </p:sp>
       <p:sp>
         <p:nvSpPr>
-          <p:cNvPr id="4" name="Text 2"/>
+          <p:cNvPr id="6" name="Text 3"/>
           <p:cNvSpPr txBox="1"/>
           <p:nvPr/>
         </p:nvSpPr>
         <p:spPr>
           <a:xfrm>
-            <a:off x="640080" y="1325880"/>
-            <a:ext cx="3657600" cy="365760"/>
+            <a:off x="6583680" y="1371600"/>
+            <a:ext cx="1965960" cy="3017520"/>
           </a:xfrm>
           <a:prstGeom prst="rect">
             <a:avLst/>
@@ -3801,332 +5879,70 @@
               <a:buNone/>
             </a:pPr>
             <a:r>
-              <a:rPr lang="en-US" sz="1600" b="1" dirty="0">
-                <a:solidFill>
-                  <a:schemeClr val="tx2"/>
+              <a:rPr lang="en-US" sz="1300" b="1" dirty="0">
+                <a:solidFill>
+                  <a:schemeClr val="tx1"/>
                 </a:solidFill>
               </a:rPr>
-              <a:t>4-bit weights</a:t>
-            </a:r>
-            <a:endParaRPr lang="en-US" sz="1600" dirty="0"/>
-          </a:p>
-        </p:txBody>
-      </p:sp>
-      <p:sp>
-        <p:nvSpPr>
-          <p:cNvPr id="5" name="Text 3"/>
-          <p:cNvSpPr txBox="1"/>
-          <p:nvPr/>
-        </p:nvSpPr>
-        <p:spPr>
-          <a:xfrm>
-            <a:off x="640080" y="1737360"/>
-            <a:ext cx="3657600" cy="822960"/>
-          </a:xfrm>
-          <a:prstGeom prst="rect">
-            <a:avLst/>
-          </a:prstGeom>
-          <a:noFill/>
-          <a:ln/>
-        </p:spPr>
-        <p:txBody>
-          <a:bodyPr wrap="square" lIns="0" tIns="0" rIns="0" bIns="0" rtlCol="0" anchor="t"/>
-          <a:lstStyle/>
+              <a:t>Chunk level reproduced</a:t>
+            </a:r>
+            <a:endParaRPr lang="en-US" sz="1300" dirty="0"/>
+          </a:p>
           <a:p>
             <a:pPr indent="0" marL="0">
               <a:buNone/>
             </a:pPr>
             <a:r>
-              <a:rPr lang="en-US" sz="1400" dirty="0">
+              <a:rPr lang="en-US" sz="1300" dirty="0">
                 <a:solidFill>
                   <a:schemeClr val="tx1"/>
                 </a:solidFill>
               </a:rPr>
-              <a:t>3B and 7B ran quantised to fit 6 GB; 7B still matched the paper.</a:t>
-            </a:r>
-            <a:endParaRPr lang="en-US" sz="1400" dirty="0"/>
-          </a:p>
-        </p:txBody>
-      </p:sp>
-      <p:sp>
-        <p:nvSpPr>
-          <p:cNvPr id="6" name="Shape 4"/>
-          <p:cNvSpPr/>
-          <p:nvPr/>
-        </p:nvSpPr>
-        <p:spPr>
-          <a:xfrm>
-            <a:off x="4663440" y="1188720"/>
-            <a:ext cx="4023360" cy="1463040"/>
-          </a:xfrm>
-          <a:prstGeom prst="roundRect">
-            <a:avLst>
-              <a:gd name="adj" fmla="val 5000"/>
-            </a:avLst>
-          </a:prstGeom>
-          <a:solidFill>
-            <a:schemeClr val="bg2"/>
-          </a:solidFill>
-          <a:ln/>
-        </p:spPr>
-      </p:sp>
-      <p:sp>
-        <p:nvSpPr>
-          <p:cNvPr id="7" name="Text 5"/>
-          <p:cNvSpPr txBox="1"/>
-          <p:nvPr/>
-        </p:nvSpPr>
-        <p:spPr>
-          <a:xfrm>
-            <a:off x="4846320" y="1325880"/>
-            <a:ext cx="3657600" cy="365760"/>
-          </a:xfrm>
-          <a:prstGeom prst="rect">
-            <a:avLst/>
-          </a:prstGeom>
-          <a:noFill/>
-          <a:ln/>
-        </p:spPr>
-        <p:txBody>
-          <a:bodyPr wrap="square" lIns="0" tIns="0" rIns="0" bIns="0" rtlCol="0" anchor="t"/>
-          <a:lstStyle/>
+              <a:t>Ours 0.731 vs. authors' own scores 0.731</a:t>
+            </a:r>
+            <a:endParaRPr lang="en-US" sz="1300" dirty="0"/>
+          </a:p>
           <a:p>
             <a:pPr indent="0" marL="0">
               <a:buNone/>
             </a:pPr>
             <a:r>
-              <a:rPr lang="en-US" sz="1600" b="1" dirty="0">
-                <a:solidFill>
-                  <a:schemeClr val="tx2"/>
+              <a:rPr lang="en-US" sz="1300" dirty="0">
+                <a:solidFill>
+                  <a:schemeClr val="tx1"/>
                 </a:solidFill>
               </a:rPr>
-              <a:t>One generator</a:t>
-            </a:r>
-            <a:endParaRPr lang="en-US" sz="1600" dirty="0"/>
-          </a:p>
-        </p:txBody>
-      </p:sp>
-      <p:sp>
-        <p:nvSpPr>
-          <p:cNvPr id="8" name="Text 6"/>
-          <p:cNvSpPr txBox="1"/>
-          <p:nvPr/>
-        </p:nvSpPr>
-        <p:spPr>
-          <a:xfrm>
-            <a:off x="4846320" y="1737360"/>
-            <a:ext cx="3657600" cy="822960"/>
-          </a:xfrm>
-          <a:prstGeom prst="rect">
-            <a:avLst/>
-          </a:prstGeom>
-          <a:noFill/>
-          <a:ln/>
-        </p:spPr>
-        <p:txBody>
-          <a:bodyPr wrap="square" lIns="0" tIns="0" rIns="0" bIns="0" rtlCol="0" anchor="t"/>
-          <a:lstStyle/>
+              <a:t> </a:t>
+            </a:r>
+            <a:endParaRPr lang="en-US" sz="1300" dirty="0"/>
+          </a:p>
           <a:p>
             <a:pPr indent="0" marL="0">
               <a:buNone/>
             </a:pPr>
             <a:r>
-              <a:rPr lang="en-US" sz="1400" dirty="0">
+              <a:rPr lang="en-US" sz="1300" b="1" dirty="0">
                 <a:solidFill>
                   <a:schemeClr val="tx1"/>
                 </a:solidFill>
               </a:rPr>
-              <a:t>All responses come from llama-2-7b-chat, so other backbones score text they did not write.</a:t>
-            </a:r>
-            <a:endParaRPr lang="en-US" sz="1400" dirty="0"/>
-          </a:p>
-        </p:txBody>
-      </p:sp>
-      <p:sp>
-        <p:nvSpPr>
-          <p:cNvPr id="9" name="Shape 7"/>
-          <p:cNvSpPr/>
-          <p:nvPr/>
-        </p:nvSpPr>
-        <p:spPr>
-          <a:xfrm>
-            <a:off x="457200" y="2834640"/>
-            <a:ext cx="4023360" cy="1463040"/>
-          </a:xfrm>
-          <a:prstGeom prst="roundRect">
-            <a:avLst>
-              <a:gd name="adj" fmla="val 5000"/>
-            </a:avLst>
-          </a:prstGeom>
-          <a:solidFill>
-            <a:schemeClr val="bg2"/>
-          </a:solidFill>
-          <a:ln/>
-        </p:spPr>
-      </p:sp>
-      <p:sp>
-        <p:nvSpPr>
-          <p:cNvPr id="10" name="Text 8"/>
-          <p:cNvSpPr txBox="1"/>
-          <p:nvPr/>
-        </p:nvSpPr>
-        <p:spPr>
-          <a:xfrm>
-            <a:off x="640080" y="2971800"/>
-            <a:ext cx="3657600" cy="365760"/>
-          </a:xfrm>
-          <a:prstGeom prst="rect">
-            <a:avLst/>
-          </a:prstGeom>
-          <a:noFill/>
-          <a:ln/>
-        </p:spPr>
-        <p:txBody>
-          <a:bodyPr wrap="square" lIns="0" tIns="0" rIns="0" bIns="0" rtlCol="0" anchor="t"/>
-          <a:lstStyle/>
+              <a:t>Mixed on Llama-3-8B</a:t>
+            </a:r>
+            <a:endParaRPr lang="en-US" sz="1300" dirty="0"/>
+          </a:p>
           <a:p>
             <a:pPr indent="0" marL="0">
               <a:buNone/>
             </a:pPr>
             <a:r>
-              <a:rPr lang="en-US" sz="1600" b="1" dirty="0">
-                <a:solidFill>
-                  <a:schemeClr val="tx2"/>
+              <a:rPr lang="en-US" sz="1300" dirty="0">
+                <a:solidFill>
+                  <a:schemeClr val="tx1"/>
                 </a:solidFill>
               </a:rPr>
-              <a:t>Numbers only</a:t>
-            </a:r>
-            <a:endParaRPr lang="en-US" sz="1600" dirty="0"/>
-          </a:p>
-        </p:txBody>
-      </p:sp>
-      <p:sp>
-        <p:nvSpPr>
-          <p:cNvPr id="11" name="Text 9"/>
-          <p:cNvSpPr txBox="1"/>
-          <p:nvPr/>
-        </p:nvSpPr>
-        <p:spPr>
-          <a:xfrm>
-            <a:off x="640080" y="3383280"/>
-            <a:ext cx="3657600" cy="822960"/>
-          </a:xfrm>
-          <a:prstGeom prst="rect">
-            <a:avLst/>
-          </a:prstGeom>
-          <a:noFill/>
-          <a:ln/>
-        </p:spPr>
-        <p:txBody>
-          <a:bodyPr wrap="square" lIns="0" tIns="0" rIns="0" bIns="0" rtlCol="0" anchor="t"/>
-          <a:lstStyle/>
-          <a:p>
-            <a:pPr indent="0" marL="0">
-              <a:buNone/>
-            </a:pPr>
-            <a:r>
-              <a:rPr lang="en-US" sz="1400" dirty="0">
-                <a:solidFill>
-                  <a:schemeClr val="tx1"/>
-                </a:solidFill>
-              </a:rPr>
-              <a:t>The contradiction test corrupts numbers; entity swaps and negations are untested.</a:t>
-            </a:r>
-            <a:endParaRPr lang="en-US" sz="1400" dirty="0"/>
-          </a:p>
-        </p:txBody>
-      </p:sp>
-      <p:sp>
-        <p:nvSpPr>
-          <p:cNvPr id="12" name="Shape 10"/>
-          <p:cNvSpPr/>
-          <p:nvPr/>
-        </p:nvSpPr>
-        <p:spPr>
-          <a:xfrm>
-            <a:off x="4663440" y="2834640"/>
-            <a:ext cx="4023360" cy="1463040"/>
-          </a:xfrm>
-          <a:prstGeom prst="roundRect">
-            <a:avLst>
-              <a:gd name="adj" fmla="val 5000"/>
-            </a:avLst>
-          </a:prstGeom>
-          <a:solidFill>
-            <a:schemeClr val="bg2"/>
-          </a:solidFill>
-          <a:ln/>
-        </p:spPr>
-      </p:sp>
-      <p:sp>
-        <p:nvSpPr>
-          <p:cNvPr id="13" name="Text 11"/>
-          <p:cNvSpPr txBox="1"/>
-          <p:nvPr/>
-        </p:nvSpPr>
-        <p:spPr>
-          <a:xfrm>
-            <a:off x="4846320" y="2971800"/>
-            <a:ext cx="3657600" cy="365760"/>
-          </a:xfrm>
-          <a:prstGeom prst="rect">
-            <a:avLst/>
-          </a:prstGeom>
-          <a:noFill/>
-          <a:ln/>
-        </p:spPr>
-        <p:txBody>
-          <a:bodyPr wrap="square" lIns="0" tIns="0" rIns="0" bIns="0" rtlCol="0" anchor="t"/>
-          <a:lstStyle/>
-          <a:p>
-            <a:pPr indent="0" marL="0">
-              <a:buNone/>
-            </a:pPr>
-            <a:r>
-              <a:rPr lang="en-US" sz="1600" b="1" dirty="0">
-                <a:solidFill>
-                  <a:schemeClr val="tx2"/>
-                </a:solidFill>
-              </a:rPr>
-              <a:t>Free-tier judges</a:t>
-            </a:r>
-            <a:endParaRPr lang="en-US" sz="1600" dirty="0"/>
-          </a:p>
-        </p:txBody>
-      </p:sp>
-      <p:sp>
-        <p:nvSpPr>
-          <p:cNvPr id="14" name="Text 12"/>
-          <p:cNvSpPr txBox="1"/>
-          <p:nvPr/>
-        </p:nvSpPr>
-        <p:spPr>
-          <a:xfrm>
-            <a:off x="4846320" y="3383280"/>
-            <a:ext cx="3657600" cy="822960"/>
-          </a:xfrm>
-          <a:prstGeom prst="rect">
-            <a:avLst/>
-          </a:prstGeom>
-          <a:noFill/>
-          <a:ln/>
-        </p:spPr>
-        <p:txBody>
-          <a:bodyPr wrap="square" lIns="0" tIns="0" rIns="0" bIns="0" rtlCol="0" anchor="t"/>
-          <a:lstStyle/>
-          <a:p>
-            <a:pPr indent="0" marL="0">
-              <a:buNone/>
-            </a:pPr>
-            <a:r>
-              <a:rPr lang="en-US" sz="1400" dirty="0">
-                <a:solidFill>
-                  <a:schemeClr val="tx1"/>
-                </a:solidFill>
-              </a:rPr>
-              <a:t>GPT judge is open-weights gpt-oss-120b; Gemini is Flash-Lite. Scores are coarse.</a:t>
-            </a:r>
-            <a:endParaRPr lang="en-US" sz="1400" dirty="0"/>
+              <a:t>Small margin on RAGTruth; LN-Entropy wins on Dolly (AC).</a:t>
+            </a:r>
+            <a:endParaRPr lang="en-US" sz="1300" dirty="0"/>
           </a:p>
         </p:txBody>
       </p:sp>
@@ -4210,6 +6026,2387 @@
         </p:nvSpPr>
         <p:spPr>
           <a:xfrm>
+            <a:off x="457200" y="274320"/>
+            <a:ext cx="8229600" cy="685800"/>
+          </a:xfrm>
+          <a:prstGeom prst="rect">
+            <a:avLst/>
+          </a:prstGeom>
+          <a:noFill/>
+          <a:ln/>
+        </p:spPr>
+        <p:txBody>
+          <a:bodyPr wrap="square" lIns="0" tIns="0" rIns="0" bIns="0" rtlCol="0" anchor="ctr"/>
+          <a:lstStyle/>
+          <a:p>
+            <a:pPr algn="l" indent="0" marL="0">
+              <a:buNone/>
+            </a:pPr>
+            <a:r>
+              <a:rPr lang="en-US" sz="2400" b="1" dirty="0">
+                <a:solidFill>
+                  <a:schemeClr val="tx2"/>
+                </a:solidFill>
+              </a:rPr>
+              <a:t>The official evaluation picks features on the test set, inflating small-data results</a:t>
+            </a:r>
+            <a:endParaRPr lang="en-US" sz="2400" dirty="0"/>
+          </a:p>
+        </p:txBody>
+      </p:sp>
+      <p:graphicFrame>
+        <p:nvGraphicFramePr>
+          <p:cNvPr id="3" name="Chart 0" descr=""/>
+          <p:cNvGraphicFramePr/>
+          <p:nvPr/>
+        </p:nvGraphicFramePr>
+        <p:xfrm>
+          <a:off x="457200" y="1051560"/>
+          <a:ext cx="5669280" cy="3566160"/>
+        </p:xfrm>
+        <a:graphic xmlns:a="http://schemas.openxmlformats.org/drawingml/2006/main">
+          <a:graphicData uri="http://schemas.openxmlformats.org/drawingml/2006/chart">
+            <c:chart xmlns:c="http://schemas.openxmlformats.org/drawingml/2006/chart" r:id="rId1"/>
+          </a:graphicData>
+        </a:graphic>
+      </p:graphicFrame>
+      <p:sp>
+        <p:nvSpPr>
+          <p:cNvPr id="4" name="Shape 1"/>
+          <p:cNvSpPr/>
+          <p:nvPr/>
+        </p:nvSpPr>
+        <p:spPr>
+          <a:xfrm>
+            <a:off x="6400800" y="1188720"/>
+            <a:ext cx="2286000" cy="3291840"/>
+          </a:xfrm>
+          <a:prstGeom prst="roundRect">
+            <a:avLst>
+              <a:gd name="adj" fmla="val 3200"/>
+            </a:avLst>
+          </a:prstGeom>
+          <a:solidFill>
+            <a:schemeClr val="bg2"/>
+          </a:solidFill>
+          <a:ln/>
+        </p:spPr>
+      </p:sp>
+      <p:sp>
+        <p:nvSpPr>
+          <p:cNvPr id="5" name="Text 2"/>
+          <p:cNvSpPr txBox="1"/>
+          <p:nvPr/>
+        </p:nvSpPr>
+        <p:spPr>
+          <a:xfrm>
+            <a:off x="6583680" y="1371600"/>
+            <a:ext cx="1965960" cy="3017520"/>
+          </a:xfrm>
+          <a:prstGeom prst="rect">
+            <a:avLst/>
+          </a:prstGeom>
+          <a:noFill/>
+          <a:ln/>
+        </p:spPr>
+        <p:txBody>
+          <a:bodyPr wrap="square" lIns="0" tIns="0" rIns="0" bIns="0" rtlCol="0" anchor="t"/>
+          <a:lstStyle/>
+          <a:p>
+            <a:pPr indent="0" marL="0">
+              <a:buNone/>
+            </a:pPr>
+            <a:r>
+              <a:rPr lang="en-US" sz="1800" b="1" dirty="0">
+                <a:solidFill>
+                  <a:schemeClr val="accent2"/>
+                </a:solidFill>
+              </a:rPr>
+              <a:t>+0.016 on RAGTruth</a:t>
+            </a:r>
+            <a:endParaRPr lang="en-US" sz="1300" dirty="0"/>
+          </a:p>
+          <a:p>
+            <a:pPr indent="0" marL="0">
+              <a:buNone/>
+            </a:pPr>
+            <a:r>
+              <a:rPr lang="en-US" sz="1300" dirty="0">
+                <a:solidFill>
+                  <a:schemeClr val="tx1"/>
+                </a:solidFill>
+              </a:rPr>
+              <a:t>small: the paper's claims hold</a:t>
+            </a:r>
+            <a:endParaRPr lang="en-US" sz="1300" dirty="0"/>
+          </a:p>
+          <a:p>
+            <a:pPr indent="0" marL="0">
+              <a:buNone/>
+            </a:pPr>
+            <a:r>
+              <a:rPr lang="en-US" sz="1300" dirty="0">
+                <a:solidFill>
+                  <a:schemeClr val="tx1"/>
+                </a:solidFill>
+              </a:rPr>
+              <a:t> </a:t>
+            </a:r>
+            <a:endParaRPr lang="en-US" sz="1300" dirty="0"/>
+          </a:p>
+          <a:p>
+            <a:pPr indent="0" marL="0">
+              <a:buNone/>
+            </a:pPr>
+            <a:r>
+              <a:rPr lang="en-US" sz="1800" b="1" dirty="0">
+                <a:solidFill>
+                  <a:schemeClr val="accent4"/>
+                </a:solidFill>
+              </a:rPr>
+              <a:t>+0.08 on Dolly (AC)</a:t>
+            </a:r>
+            <a:endParaRPr lang="en-US" sz="1300" dirty="0"/>
+          </a:p>
+          <a:p>
+            <a:pPr indent="0" marL="0">
+              <a:buNone/>
+            </a:pPr>
+            <a:r>
+              <a:rPr lang="en-US" sz="1300" dirty="0">
+                <a:solidFill>
+                  <a:schemeClr val="tx1"/>
+                </a:solidFill>
+              </a:rPr>
+              <a:t>same on all 3 models; 99 responses, so picking the best of 32 heads on test data fits noise</a:t>
+            </a:r>
+            <a:endParaRPr lang="en-US" sz="1300" dirty="0"/>
+          </a:p>
+        </p:txBody>
+      </p:sp>
+      <p:sp>
+        <p:nvSpPr>
+          <p:cNvPr id="25" name="Slide Number Placeholder 0"/>
+          <p:cNvSpPr>
+            <a:spLocks noGrp="1"/>
+          </p:cNvSpPr>
+          <p:nvPr>
+            <p:ph type="sldNum" sz="quarter" idx="4294967295"/>
+          </p:nvPr>
+        </p:nvSpPr>
+        <p:spPr>
+          <a:xfrm>
+            <a:off x="8229600" y="4754880"/>
+            <a:ext cx="457200" cy="274320"/>
+          </a:xfrm>
+          <a:prstGeom prst="rect">
+            <a:avLst/>
+          </a:prstGeom>
+          <a:extLst>
+            <a:ext uri="{C572A759-6A51-4108-AA02-DFA0A04FC94B}">
+              <ma14:wrappingTextBoxFlag xmlns:ma14="http://schemas.microsoft.com/office/mac/drawingml/2011/main" val="0"/>
+            </a:ext>
+          </a:extLst>
+        </p:spPr>
+        <p:txBody>
+          <a:bodyPr/>
+          <a:lstStyle>
+            <a:lvl1pPr>
+              <a:defRPr sz="1000">
+                <a:solidFill>
+                  <a:schemeClr val="accent3"/>
+                </a:solidFill>
+              </a:defRPr>
+            </a:lvl1pPr>
+          </a:lstStyle>
+          <a:p>
+            <a:pPr algn="r"/>
+            <a:fld id="{F7021451-1387-4CA6-816F-3879F97B5CBC}" type="slidenum">
+              <a:rPr b="0" lang="en-US"/>
+              <a:t>12</a:t>
+            </a:fld>
+            <a:endParaRPr lang="en-US"/>
+          </a:p>
+        </p:txBody>
+      </p:sp>
+    </p:spTree>
+  </p:cSld>
+  <p:clrMapOvr>
+    <a:masterClrMapping/>
+  </p:clrMapOvr>
+</p:sld>
+</file>
+
+<file path=ppt/slides/slide13.xml><?xml version="1.0" encoding="utf-8"?>
+<p:sld xmlns:a="http://schemas.openxmlformats.org/drawingml/2006/main" xmlns:r="http://schemas.openxmlformats.org/officeDocument/2006/relationships" xmlns:p="http://schemas.openxmlformats.org/presentationml/2006/main">
+  <p:cSld name="Slide 13">
+    <p:spTree>
+      <p:nvGrpSpPr>
+        <p:cNvPr id="1" name=""/>
+        <p:cNvGrpSpPr/>
+        <p:nvPr/>
+      </p:nvGrpSpPr>
+      <p:grpSpPr>
+        <a:xfrm>
+          <a:off x="0" y="0"/>
+          <a:ext cx="0" cy="0"/>
+          <a:chOff x="0" y="0"/>
+          <a:chExt cx="0" cy="0"/>
+        </a:xfrm>
+      </p:grpSpPr>
+      <p:sp>
+        <p:nvSpPr>
+          <p:cNvPr id="2" name="Text 0"/>
+          <p:cNvSpPr/>
+          <p:nvPr>
+            <p:ph idx="100" type="title" hasCustomPrompt="1"/>
+          </p:nvPr>
+        </p:nvSpPr>
+        <p:spPr>
+          <a:xfrm>
+            <a:off x="457200" y="274320"/>
+            <a:ext cx="8229600" cy="685800"/>
+          </a:xfrm>
+          <a:prstGeom prst="rect">
+            <a:avLst/>
+          </a:prstGeom>
+          <a:noFill/>
+          <a:ln/>
+        </p:spPr>
+        <p:txBody>
+          <a:bodyPr wrap="square" lIns="0" tIns="0" rIns="0" bIns="0" rtlCol="0" anchor="ctr"/>
+          <a:lstStyle/>
+          <a:p>
+            <a:pPr algn="l" indent="0" marL="0">
+              <a:buNone/>
+            </a:pPr>
+            <a:r>
+              <a:rPr lang="en-US" sz="2400" b="1" dirty="0">
+                <a:solidFill>
+                  <a:schemeClr val="tx2"/>
+                </a:solidFill>
+              </a:rPr>
+              <a:t>AARF: the gate is always on or almost never on, and its win is mostly position bias</a:t>
+            </a:r>
+            <a:endParaRPr lang="en-US" sz="2400" dirty="0"/>
+          </a:p>
+        </p:txBody>
+      </p:sp>
+      <p:graphicFrame>
+        <p:nvGraphicFramePr>
+          <p:cNvPr id="14" name="Table 0"/>
+          <p:cNvGraphicFramePr>
+            <a:graphicFrameLocks noGrp="1"/>
+          </p:cNvGraphicFramePr>
+          <p:nvPr>
+            <p:extLst>
+              <p:ext uri="{D42A27DB-BD31-4B8C-83A1-F6EECF244321}">
+                <p14:modId xmlns:p14="http://schemas.microsoft.com/office/powerpoint/2010/main" val="1579011935"/>
+              </p:ext>
+            </p:extLst>
+          </p:nvPr>
+        </p:nvGraphicFramePr>
+        <p:xfrm>
+          <a:off x="457200" y="1188720"/>
+          <a:ext cx="5669280" cy="914400"/>
+        </p:xfrm>
+        <a:graphic>
+          <a:graphicData uri="http://schemas.openxmlformats.org/drawingml/2006/table">
+            <a:tbl>
+              <a:tblPr/>
+              <a:tblGrid>
+                <a:gridCol w="1371600"/>
+                <a:gridCol w="1051560"/>
+                <a:gridCol w="914400"/>
+                <a:gridCol w="1188720"/>
+                <a:gridCol w="1143000"/>
+              </a:tblGrid>
+              <a:tr h="457200">
+                <a:tc>
+                  <a:txBody>
+                    <a:bodyPr/>
+                    <a:lstStyle/>
+                    <a:p>
+                      <a:pPr algn="l" indent="0" marL="0">
+                        <a:buNone/>
+                      </a:pPr>
+                      <a:r>
+                        <a:rPr lang="en-US" sz="1300" b="1" dirty="0">
+                          <a:solidFill>
+                            <a:srgbClr val="FFFFFF"/>
+                          </a:solidFill>
+                          <a:latin typeface="Calibri" pitchFamily="34" charset="0"/>
+                          <a:ea typeface="Calibri" pitchFamily="34" charset="-122"/>
+                          <a:cs typeface="Calibri" pitchFamily="34" charset="-120"/>
+                        </a:rPr>
+                        <a:t>Backbone</a:t>
+                      </a:r>
+                      <a:endParaRPr lang="en-US" sz="1300" dirty="0">
+                        <a:latin typeface="Calibri" charset="0"/>
+                        <a:ea typeface="Calibri" charset="0"/>
+                        <a:cs typeface="Calibri" charset="0"/>
+                      </a:endParaRPr>
+                    </a:p>
+                  </a:txBody>
+                  <a:tcPr marL="91440" marR="91440" marT="45720" marB="45720">
+                    <a:lnL w="6350" cap="flat" cmpd="sng" algn="ctr">
+                      <a:solidFill>
+                        <a:srgbClr val="D0D7D6"/>
+                      </a:solidFill>
+                      <a:prstDash val="solid"/>
+                      <a:round/>
+                      <a:headEnd type="none" w="med" len="med"/>
+                      <a:tailEnd type="none" w="med" len="med"/>
+                    </a:lnL>
+                    <a:lnR w="6350" cap="flat" cmpd="sng" algn="ctr">
+                      <a:solidFill>
+                        <a:srgbClr val="D0D7D6"/>
+                      </a:solidFill>
+                      <a:prstDash val="solid"/>
+                      <a:round/>
+                      <a:headEnd type="none" w="med" len="med"/>
+                      <a:tailEnd type="none" w="med" len="med"/>
+                    </a:lnR>
+                    <a:lnT w="6350" cap="flat" cmpd="sng" algn="ctr">
+                      <a:solidFill>
+                        <a:srgbClr val="D0D7D6"/>
+                      </a:solidFill>
+                      <a:prstDash val="solid"/>
+                      <a:round/>
+                      <a:headEnd type="none" w="med" len="med"/>
+                      <a:tailEnd type="none" w="med" len="med"/>
+                    </a:lnT>
+                    <a:lnB w="6350" cap="flat" cmpd="sng" algn="ctr">
+                      <a:solidFill>
+                        <a:srgbClr val="D0D7D6"/>
+                      </a:solidFill>
+                      <a:prstDash val="solid"/>
+                      <a:round/>
+                      <a:headEnd type="none" w="med" len="med"/>
+                      <a:tailEnd type="none" w="med" len="med"/>
+                    </a:lnB>
+                    <a:solidFill>
+                      <a:srgbClr val="0F3D3E"/>
+                    </a:solidFill>
+                  </a:tcPr>
+                </a:tc>
+                <a:tc>
+                  <a:txBody>
+                    <a:bodyPr/>
+                    <a:lstStyle/>
+                    <a:p>
+                      <a:pPr algn="ctr" indent="0" marL="0">
+                        <a:buNone/>
+                      </a:pPr>
+                      <a:r>
+                        <a:rPr lang="en-US" sz="1300" b="1" dirty="0">
+                          <a:solidFill>
+                            <a:srgbClr val="FFFFFF"/>
+                          </a:solidFill>
+                          <a:latin typeface="Calibri" pitchFamily="34" charset="0"/>
+                          <a:ea typeface="Calibri" pitchFamily="34" charset="-122"/>
+                          <a:cs typeface="Calibri" pitchFamily="34" charset="-120"/>
+                        </a:rPr>
+                        <a:t>Answers changed</a:t>
+                      </a:r>
+                      <a:endParaRPr lang="en-US" sz="1300" dirty="0">
+                        <a:latin typeface="Calibri" charset="0"/>
+                        <a:ea typeface="Calibri" charset="0"/>
+                        <a:cs typeface="Calibri" charset="0"/>
+                      </a:endParaRPr>
+                    </a:p>
+                  </a:txBody>
+                  <a:tcPr marL="91440" marR="91440" marT="45720" marB="45720">
+                    <a:lnL w="6350" cap="flat" cmpd="sng" algn="ctr">
+                      <a:solidFill>
+                        <a:srgbClr val="D0D7D6"/>
+                      </a:solidFill>
+                      <a:prstDash val="solid"/>
+                      <a:round/>
+                      <a:headEnd type="none" w="med" len="med"/>
+                      <a:tailEnd type="none" w="med" len="med"/>
+                    </a:lnL>
+                    <a:lnR w="6350" cap="flat" cmpd="sng" algn="ctr">
+                      <a:solidFill>
+                        <a:srgbClr val="D0D7D6"/>
+                      </a:solidFill>
+                      <a:prstDash val="solid"/>
+                      <a:round/>
+                      <a:headEnd type="none" w="med" len="med"/>
+                      <a:tailEnd type="none" w="med" len="med"/>
+                    </a:lnR>
+                    <a:lnT w="6350" cap="flat" cmpd="sng" algn="ctr">
+                      <a:solidFill>
+                        <a:srgbClr val="D0D7D6"/>
+                      </a:solidFill>
+                      <a:prstDash val="solid"/>
+                      <a:round/>
+                      <a:headEnd type="none" w="med" len="med"/>
+                      <a:tailEnd type="none" w="med" len="med"/>
+                    </a:lnT>
+                    <a:lnB w="6350" cap="flat" cmpd="sng" algn="ctr">
+                      <a:solidFill>
+                        <a:srgbClr val="D0D7D6"/>
+                      </a:solidFill>
+                      <a:prstDash val="solid"/>
+                      <a:round/>
+                      <a:headEnd type="none" w="med" len="med"/>
+                      <a:tailEnd type="none" w="med" len="med"/>
+                    </a:lnB>
+                    <a:solidFill>
+                      <a:srgbClr val="0F3D3E"/>
+                    </a:solidFill>
+                  </a:tcPr>
+                </a:tc>
+                <a:tc>
+                  <a:txBody>
+                    <a:bodyPr/>
+                    <a:lstStyle/>
+                    <a:p>
+                      <a:pPr algn="ctr" indent="0" marL="0">
+                        <a:buNone/>
+                      </a:pPr>
+                      <a:r>
+                        <a:rPr lang="en-US" sz="1300" b="1" dirty="0">
+                          <a:solidFill>
+                            <a:srgbClr val="FFFFFF"/>
+                          </a:solidFill>
+                          <a:latin typeface="Calibri" pitchFamily="34" charset="0"/>
+                          <a:ea typeface="Calibri" pitchFamily="34" charset="-122"/>
+                          <a:cs typeface="Calibri" pitchFamily="34" charset="-120"/>
+                        </a:rPr>
+                        <a:t>Gate fires</a:t>
+                      </a:r>
+                      <a:endParaRPr lang="en-US" sz="1300" dirty="0">
+                        <a:latin typeface="Calibri" charset="0"/>
+                        <a:ea typeface="Calibri" charset="0"/>
+                        <a:cs typeface="Calibri" charset="0"/>
+                      </a:endParaRPr>
+                    </a:p>
+                  </a:txBody>
+                  <a:tcPr marL="91440" marR="91440" marT="45720" marB="45720">
+                    <a:lnL w="6350" cap="flat" cmpd="sng" algn="ctr">
+                      <a:solidFill>
+                        <a:srgbClr val="D0D7D6"/>
+                      </a:solidFill>
+                      <a:prstDash val="solid"/>
+                      <a:round/>
+                      <a:headEnd type="none" w="med" len="med"/>
+                      <a:tailEnd type="none" w="med" len="med"/>
+                    </a:lnL>
+                    <a:lnR w="6350" cap="flat" cmpd="sng" algn="ctr">
+                      <a:solidFill>
+                        <a:srgbClr val="D0D7D6"/>
+                      </a:solidFill>
+                      <a:prstDash val="solid"/>
+                      <a:round/>
+                      <a:headEnd type="none" w="med" len="med"/>
+                      <a:tailEnd type="none" w="med" len="med"/>
+                    </a:lnR>
+                    <a:lnT w="6350" cap="flat" cmpd="sng" algn="ctr">
+                      <a:solidFill>
+                        <a:srgbClr val="D0D7D6"/>
+                      </a:solidFill>
+                      <a:prstDash val="solid"/>
+                      <a:round/>
+                      <a:headEnd type="none" w="med" len="med"/>
+                      <a:tailEnd type="none" w="med" len="med"/>
+                    </a:lnT>
+                    <a:lnB w="6350" cap="flat" cmpd="sng" algn="ctr">
+                      <a:solidFill>
+                        <a:srgbClr val="D0D7D6"/>
+                      </a:solidFill>
+                      <a:prstDash val="solid"/>
+                      <a:round/>
+                      <a:headEnd type="none" w="med" len="med"/>
+                      <a:tailEnd type="none" w="med" len="med"/>
+                    </a:lnB>
+                    <a:solidFill>
+                      <a:srgbClr val="0F3D3E"/>
+                    </a:solidFill>
+                  </a:tcPr>
+                </a:tc>
+                <a:tc>
+                  <a:txBody>
+                    <a:bodyPr/>
+                    <a:lstStyle/>
+                    <a:p>
+                      <a:pPr algn="ctr" indent="0" marL="0">
+                        <a:buNone/>
+                      </a:pPr>
+                      <a:r>
+                        <a:rPr lang="en-US" sz="1300" b="1" dirty="0">
+                          <a:solidFill>
+                            <a:srgbClr val="FFFFFF"/>
+                          </a:solidFill>
+                          <a:latin typeface="Calibri" pitchFamily="34" charset="0"/>
+                          <a:ea typeface="Calibri" pitchFamily="34" charset="-122"/>
+                          <a:cs typeface="Calibri" pitchFamily="34" charset="-120"/>
+                        </a:rPr>
+                        <a:t>Judge, official order</a:t>
+                      </a:r>
+                      <a:endParaRPr lang="en-US" sz="1300" dirty="0">
+                        <a:latin typeface="Calibri" charset="0"/>
+                        <a:ea typeface="Calibri" charset="0"/>
+                        <a:cs typeface="Calibri" charset="0"/>
+                      </a:endParaRPr>
+                    </a:p>
+                  </a:txBody>
+                  <a:tcPr marL="91440" marR="91440" marT="45720" marB="45720">
+                    <a:lnL w="6350" cap="flat" cmpd="sng" algn="ctr">
+                      <a:solidFill>
+                        <a:srgbClr val="D0D7D6"/>
+                      </a:solidFill>
+                      <a:prstDash val="solid"/>
+                      <a:round/>
+                      <a:headEnd type="none" w="med" len="med"/>
+                      <a:tailEnd type="none" w="med" len="med"/>
+                    </a:lnL>
+                    <a:lnR w="6350" cap="flat" cmpd="sng" algn="ctr">
+                      <a:solidFill>
+                        <a:srgbClr val="D0D7D6"/>
+                      </a:solidFill>
+                      <a:prstDash val="solid"/>
+                      <a:round/>
+                      <a:headEnd type="none" w="med" len="med"/>
+                      <a:tailEnd type="none" w="med" len="med"/>
+                    </a:lnR>
+                    <a:lnT w="6350" cap="flat" cmpd="sng" algn="ctr">
+                      <a:solidFill>
+                        <a:srgbClr val="D0D7D6"/>
+                      </a:solidFill>
+                      <a:prstDash val="solid"/>
+                      <a:round/>
+                      <a:headEnd type="none" w="med" len="med"/>
+                      <a:tailEnd type="none" w="med" len="med"/>
+                    </a:lnT>
+                    <a:lnB w="6350" cap="flat" cmpd="sng" algn="ctr">
+                      <a:solidFill>
+                        <a:srgbClr val="D0D7D6"/>
+                      </a:solidFill>
+                      <a:prstDash val="solid"/>
+                      <a:round/>
+                      <a:headEnd type="none" w="med" len="med"/>
+                      <a:tailEnd type="none" w="med" len="med"/>
+                    </a:lnB>
+                    <a:solidFill>
+                      <a:srgbClr val="0F3D3E"/>
+                    </a:solidFill>
+                  </a:tcPr>
+                </a:tc>
+                <a:tc>
+                  <a:txBody>
+                    <a:bodyPr/>
+                    <a:lstStyle/>
+                    <a:p>
+                      <a:pPr algn="ctr" indent="0" marL="0">
+                        <a:buNone/>
+                      </a:pPr>
+                      <a:r>
+                        <a:rPr lang="en-US" sz="1300" b="1" dirty="0">
+                          <a:solidFill>
+                            <a:srgbClr val="FFFFFF"/>
+                          </a:solidFill>
+                          <a:latin typeface="Calibri" pitchFamily="34" charset="0"/>
+                          <a:ea typeface="Calibri" pitchFamily="34" charset="-122"/>
+                          <a:cs typeface="Calibri" pitchFamily="34" charset="-120"/>
+                        </a:rPr>
+                        <a:t>Judge, both orders</a:t>
+                      </a:r>
+                      <a:endParaRPr lang="en-US" sz="1300" dirty="0">
+                        <a:latin typeface="Calibri" charset="0"/>
+                        <a:ea typeface="Calibri" charset="0"/>
+                        <a:cs typeface="Calibri" charset="0"/>
+                      </a:endParaRPr>
+                    </a:p>
+                  </a:txBody>
+                  <a:tcPr marL="91440" marR="91440" marT="45720" marB="45720">
+                    <a:lnL w="6350" cap="flat" cmpd="sng" algn="ctr">
+                      <a:solidFill>
+                        <a:srgbClr val="D0D7D6"/>
+                      </a:solidFill>
+                      <a:prstDash val="solid"/>
+                      <a:round/>
+                      <a:headEnd type="none" w="med" len="med"/>
+                      <a:tailEnd type="none" w="med" len="med"/>
+                    </a:lnL>
+                    <a:lnR w="6350" cap="flat" cmpd="sng" algn="ctr">
+                      <a:solidFill>
+                        <a:srgbClr val="D0D7D6"/>
+                      </a:solidFill>
+                      <a:prstDash val="solid"/>
+                      <a:round/>
+                      <a:headEnd type="none" w="med" len="med"/>
+                      <a:tailEnd type="none" w="med" len="med"/>
+                    </a:lnR>
+                    <a:lnT w="6350" cap="flat" cmpd="sng" algn="ctr">
+                      <a:solidFill>
+                        <a:srgbClr val="D0D7D6"/>
+                      </a:solidFill>
+                      <a:prstDash val="solid"/>
+                      <a:round/>
+                      <a:headEnd type="none" w="med" len="med"/>
+                      <a:tailEnd type="none" w="med" len="med"/>
+                    </a:lnT>
+                    <a:lnB w="6350" cap="flat" cmpd="sng" algn="ctr">
+                      <a:solidFill>
+                        <a:srgbClr val="D0D7D6"/>
+                      </a:solidFill>
+                      <a:prstDash val="solid"/>
+                      <a:round/>
+                      <a:headEnd type="none" w="med" len="med"/>
+                      <a:tailEnd type="none" w="med" len="med"/>
+                    </a:lnB>
+                    <a:solidFill>
+                      <a:srgbClr val="0F3D3E"/>
+                    </a:solidFill>
+                  </a:tcPr>
+                </a:tc>
+              </a:tr>
+              <a:tr h="457200">
+                <a:tc>
+                  <a:txBody>
+                    <a:bodyPr/>
+                    <a:lstStyle/>
+                    <a:p>
+                      <a:pPr algn="l" indent="0" marL="0">
+                        <a:buNone/>
+                      </a:pPr>
+                      <a:r>
+                        <a:rPr lang="en-US" sz="1300" b="1" dirty="0">
+                          <a:solidFill>
+                            <a:srgbClr val="000000"/>
+                          </a:solidFill>
+                          <a:latin typeface="Calibri" pitchFamily="34" charset="0"/>
+                          <a:ea typeface="Calibri" pitchFamily="34" charset="-122"/>
+                          <a:cs typeface="Calibri" pitchFamily="34" charset="-120"/>
+                        </a:rPr>
+                        <a:t>Llama-2-7B</a:t>
+                      </a:r>
+                      <a:endParaRPr lang="en-US" sz="1300" dirty="0">
+                        <a:latin typeface="Calibri" charset="0"/>
+                        <a:ea typeface="Calibri" charset="0"/>
+                        <a:cs typeface="Calibri" charset="0"/>
+                      </a:endParaRPr>
+                    </a:p>
+                  </a:txBody>
+                  <a:tcPr marL="91440" marR="91440" marT="45720" marB="45720">
+                    <a:lnL w="6350" cap="flat" cmpd="sng" algn="ctr">
+                      <a:solidFill>
+                        <a:srgbClr val="D0D7D6"/>
+                      </a:solidFill>
+                      <a:prstDash val="solid"/>
+                      <a:round/>
+                      <a:headEnd type="none" w="med" len="med"/>
+                      <a:tailEnd type="none" w="med" len="med"/>
+                    </a:lnL>
+                    <a:lnR w="6350" cap="flat" cmpd="sng" algn="ctr">
+                      <a:solidFill>
+                        <a:srgbClr val="D0D7D6"/>
+                      </a:solidFill>
+                      <a:prstDash val="solid"/>
+                      <a:round/>
+                      <a:headEnd type="none" w="med" len="med"/>
+                      <a:tailEnd type="none" w="med" len="med"/>
+                    </a:lnR>
+                    <a:lnT w="6350" cap="flat" cmpd="sng" algn="ctr">
+                      <a:solidFill>
+                        <a:srgbClr val="D0D7D6"/>
+                      </a:solidFill>
+                      <a:prstDash val="solid"/>
+                      <a:round/>
+                      <a:headEnd type="none" w="med" len="med"/>
+                      <a:tailEnd type="none" w="med" len="med"/>
+                    </a:lnT>
+                    <a:lnB w="6350" cap="flat" cmpd="sng" algn="ctr">
+                      <a:solidFill>
+                        <a:srgbClr val="D0D7D6"/>
+                      </a:solidFill>
+                      <a:prstDash val="solid"/>
+                      <a:round/>
+                      <a:headEnd type="none" w="med" len="med"/>
+                      <a:tailEnd type="none" w="med" len="med"/>
+                    </a:lnB>
+                    <a:solidFill>
+                      <a:srgbClr val="FFFFFF"/>
+                    </a:solidFill>
+                  </a:tcPr>
+                </a:tc>
+                <a:tc>
+                  <a:txBody>
+                    <a:bodyPr/>
+                    <a:lstStyle/>
+                    <a:p>
+                      <a:pPr algn="ctr" indent="0" marL="0">
+                        <a:buNone/>
+                      </a:pPr>
+                      <a:r>
+                        <a:rPr lang="en-US" sz="1300" dirty="0">
+                          <a:solidFill>
+                            <a:srgbClr val="000000"/>
+                          </a:solidFill>
+                          <a:latin typeface="Calibri" pitchFamily="34" charset="0"/>
+                          <a:ea typeface="Calibri" pitchFamily="34" charset="-122"/>
+                          <a:cs typeface="Calibri" pitchFamily="34" charset="-120"/>
+                        </a:rPr>
+                        <a:t>63/99</a:t>
+                      </a:r>
+                      <a:endParaRPr lang="en-US" sz="1300" dirty="0">
+                        <a:latin typeface="Calibri" charset="0"/>
+                        <a:ea typeface="Calibri" charset="0"/>
+                        <a:cs typeface="Calibri" charset="0"/>
+                      </a:endParaRPr>
+                    </a:p>
+                  </a:txBody>
+                  <a:tcPr marL="91440" marR="91440" marT="45720" marB="45720">
+                    <a:lnL w="6350" cap="flat" cmpd="sng" algn="ctr">
+                      <a:solidFill>
+                        <a:srgbClr val="D0D7D6"/>
+                      </a:solidFill>
+                      <a:prstDash val="solid"/>
+                      <a:round/>
+                      <a:headEnd type="none" w="med" len="med"/>
+                      <a:tailEnd type="none" w="med" len="med"/>
+                    </a:lnL>
+                    <a:lnR w="6350" cap="flat" cmpd="sng" algn="ctr">
+                      <a:solidFill>
+                        <a:srgbClr val="D0D7D6"/>
+                      </a:solidFill>
+                      <a:prstDash val="solid"/>
+                      <a:round/>
+                      <a:headEnd type="none" w="med" len="med"/>
+                      <a:tailEnd type="none" w="med" len="med"/>
+                    </a:lnR>
+                    <a:lnT w="6350" cap="flat" cmpd="sng" algn="ctr">
+                      <a:solidFill>
+                        <a:srgbClr val="D0D7D6"/>
+                      </a:solidFill>
+                      <a:prstDash val="solid"/>
+                      <a:round/>
+                      <a:headEnd type="none" w="med" len="med"/>
+                      <a:tailEnd type="none" w="med" len="med"/>
+                    </a:lnT>
+                    <a:lnB w="6350" cap="flat" cmpd="sng" algn="ctr">
+                      <a:solidFill>
+                        <a:srgbClr val="D0D7D6"/>
+                      </a:solidFill>
+                      <a:prstDash val="solid"/>
+                      <a:round/>
+                      <a:headEnd type="none" w="med" len="med"/>
+                      <a:tailEnd type="none" w="med" len="med"/>
+                    </a:lnB>
+                    <a:solidFill>
+                      <a:srgbClr val="FFFFFF"/>
+                    </a:solidFill>
+                  </a:tcPr>
+                </a:tc>
+                <a:tc>
+                  <a:txBody>
+                    <a:bodyPr/>
+                    <a:lstStyle/>
+                    <a:p>
+                      <a:pPr algn="ctr" indent="0" marL="0">
+                        <a:buNone/>
+                      </a:pPr>
+                      <a:r>
+                        <a:rPr lang="en-US" sz="1300" dirty="0">
+                          <a:solidFill>
+                            <a:srgbClr val="000000"/>
+                          </a:solidFill>
+                          <a:latin typeface="Calibri" pitchFamily="34" charset="0"/>
+                          <a:ea typeface="Calibri" pitchFamily="34" charset="-122"/>
+                          <a:cs typeface="Calibri" pitchFamily="34" charset="-120"/>
+                        </a:rPr>
+                        <a:t>100%</a:t>
+                      </a:r>
+                      <a:endParaRPr lang="en-US" sz="1300" dirty="0">
+                        <a:latin typeface="Calibri" charset="0"/>
+                        <a:ea typeface="Calibri" charset="0"/>
+                        <a:cs typeface="Calibri" charset="0"/>
+                      </a:endParaRPr>
+                    </a:p>
+                  </a:txBody>
+                  <a:tcPr marL="91440" marR="91440" marT="45720" marB="45720">
+                    <a:lnL w="6350" cap="flat" cmpd="sng" algn="ctr">
+                      <a:solidFill>
+                        <a:srgbClr val="D0D7D6"/>
+                      </a:solidFill>
+                      <a:prstDash val="solid"/>
+                      <a:round/>
+                      <a:headEnd type="none" w="med" len="med"/>
+                      <a:tailEnd type="none" w="med" len="med"/>
+                    </a:lnL>
+                    <a:lnR w="6350" cap="flat" cmpd="sng" algn="ctr">
+                      <a:solidFill>
+                        <a:srgbClr val="D0D7D6"/>
+                      </a:solidFill>
+                      <a:prstDash val="solid"/>
+                      <a:round/>
+                      <a:headEnd type="none" w="med" len="med"/>
+                      <a:tailEnd type="none" w="med" len="med"/>
+                    </a:lnR>
+                    <a:lnT w="6350" cap="flat" cmpd="sng" algn="ctr">
+                      <a:solidFill>
+                        <a:srgbClr val="D0D7D6"/>
+                      </a:solidFill>
+                      <a:prstDash val="solid"/>
+                      <a:round/>
+                      <a:headEnd type="none" w="med" len="med"/>
+                      <a:tailEnd type="none" w="med" len="med"/>
+                    </a:lnT>
+                    <a:lnB w="6350" cap="flat" cmpd="sng" algn="ctr">
+                      <a:solidFill>
+                        <a:srgbClr val="D0D7D6"/>
+                      </a:solidFill>
+                      <a:prstDash val="solid"/>
+                      <a:round/>
+                      <a:headEnd type="none" w="med" len="med"/>
+                      <a:tailEnd type="none" w="med" len="med"/>
+                    </a:lnB>
+                    <a:solidFill>
+                      <a:srgbClr val="FFFFFF"/>
+                    </a:solidFill>
+                  </a:tcPr>
+                </a:tc>
+                <a:tc>
+                  <a:txBody>
+                    <a:bodyPr/>
+                    <a:lstStyle/>
+                    <a:p>
+                      <a:pPr algn="ctr" indent="0" marL="0">
+                        <a:buNone/>
+                      </a:pPr>
+                      <a:r>
+                        <a:rPr lang="en-US" sz="1300" dirty="0">
+                          <a:solidFill>
+                            <a:srgbClr val="000000"/>
+                          </a:solidFill>
+                          <a:latin typeface="Calibri" pitchFamily="34" charset="0"/>
+                          <a:ea typeface="Calibri" pitchFamily="34" charset="-122"/>
+                          <a:cs typeface="Calibri" pitchFamily="34" charset="-120"/>
+                        </a:rPr>
+                        <a:t>33 : 24</a:t>
+                      </a:r>
+                      <a:endParaRPr lang="en-US" sz="1300" dirty="0">
+                        <a:latin typeface="Calibri" charset="0"/>
+                        <a:ea typeface="Calibri" charset="0"/>
+                        <a:cs typeface="Calibri" charset="0"/>
+                      </a:endParaRPr>
+                    </a:p>
+                  </a:txBody>
+                  <a:tcPr marL="91440" marR="91440" marT="45720" marB="45720">
+                    <a:lnL w="6350" cap="flat" cmpd="sng" algn="ctr">
+                      <a:solidFill>
+                        <a:srgbClr val="D0D7D6"/>
+                      </a:solidFill>
+                      <a:prstDash val="solid"/>
+                      <a:round/>
+                      <a:headEnd type="none" w="med" len="med"/>
+                      <a:tailEnd type="none" w="med" len="med"/>
+                    </a:lnL>
+                    <a:lnR w="6350" cap="flat" cmpd="sng" algn="ctr">
+                      <a:solidFill>
+                        <a:srgbClr val="D0D7D6"/>
+                      </a:solidFill>
+                      <a:prstDash val="solid"/>
+                      <a:round/>
+                      <a:headEnd type="none" w="med" len="med"/>
+                      <a:tailEnd type="none" w="med" len="med"/>
+                    </a:lnR>
+                    <a:lnT w="6350" cap="flat" cmpd="sng" algn="ctr">
+                      <a:solidFill>
+                        <a:srgbClr val="D0D7D6"/>
+                      </a:solidFill>
+                      <a:prstDash val="solid"/>
+                      <a:round/>
+                      <a:headEnd type="none" w="med" len="med"/>
+                      <a:tailEnd type="none" w="med" len="med"/>
+                    </a:lnT>
+                    <a:lnB w="6350" cap="flat" cmpd="sng" algn="ctr">
+                      <a:solidFill>
+                        <a:srgbClr val="D0D7D6"/>
+                      </a:solidFill>
+                      <a:prstDash val="solid"/>
+                      <a:round/>
+                      <a:headEnd type="none" w="med" len="med"/>
+                      <a:tailEnd type="none" w="med" len="med"/>
+                    </a:lnB>
+                    <a:solidFill>
+                      <a:srgbClr val="FFFFFF"/>
+                    </a:solidFill>
+                  </a:tcPr>
+                </a:tc>
+                <a:tc>
+                  <a:txBody>
+                    <a:bodyPr/>
+                    <a:lstStyle/>
+                    <a:p>
+                      <a:pPr algn="ctr" indent="0" marL="0">
+                        <a:buNone/>
+                      </a:pPr>
+                      <a:r>
+                        <a:rPr lang="en-US" sz="1300" dirty="0">
+                          <a:solidFill>
+                            <a:srgbClr val="000000"/>
+                          </a:solidFill>
+                          <a:latin typeface="Calibri" pitchFamily="34" charset="0"/>
+                          <a:ea typeface="Calibri" pitchFamily="34" charset="-122"/>
+                          <a:cs typeface="Calibri" pitchFamily="34" charset="-120"/>
+                        </a:rPr>
+                        <a:t>19 : 15</a:t>
+                      </a:r>
+                      <a:endParaRPr lang="en-US" sz="1300" dirty="0">
+                        <a:latin typeface="Calibri" charset="0"/>
+                        <a:ea typeface="Calibri" charset="0"/>
+                        <a:cs typeface="Calibri" charset="0"/>
+                      </a:endParaRPr>
+                    </a:p>
+                  </a:txBody>
+                  <a:tcPr marL="91440" marR="91440" marT="45720" marB="45720">
+                    <a:lnL w="6350" cap="flat" cmpd="sng" algn="ctr">
+                      <a:solidFill>
+                        <a:srgbClr val="D0D7D6"/>
+                      </a:solidFill>
+                      <a:prstDash val="solid"/>
+                      <a:round/>
+                      <a:headEnd type="none" w="med" len="med"/>
+                      <a:tailEnd type="none" w="med" len="med"/>
+                    </a:lnL>
+                    <a:lnR w="6350" cap="flat" cmpd="sng" algn="ctr">
+                      <a:solidFill>
+                        <a:srgbClr val="D0D7D6"/>
+                      </a:solidFill>
+                      <a:prstDash val="solid"/>
+                      <a:round/>
+                      <a:headEnd type="none" w="med" len="med"/>
+                      <a:tailEnd type="none" w="med" len="med"/>
+                    </a:lnR>
+                    <a:lnT w="6350" cap="flat" cmpd="sng" algn="ctr">
+                      <a:solidFill>
+                        <a:srgbClr val="D0D7D6"/>
+                      </a:solidFill>
+                      <a:prstDash val="solid"/>
+                      <a:round/>
+                      <a:headEnd type="none" w="med" len="med"/>
+                      <a:tailEnd type="none" w="med" len="med"/>
+                    </a:lnT>
+                    <a:lnB w="6350" cap="flat" cmpd="sng" algn="ctr">
+                      <a:solidFill>
+                        <a:srgbClr val="D0D7D6"/>
+                      </a:solidFill>
+                      <a:prstDash val="solid"/>
+                      <a:round/>
+                      <a:headEnd type="none" w="med" len="med"/>
+                      <a:tailEnd type="none" w="med" len="med"/>
+                    </a:lnB>
+                    <a:solidFill>
+                      <a:srgbClr val="FFFFFF"/>
+                    </a:solidFill>
+                  </a:tcPr>
+                </a:tc>
+              </a:tr>
+              <a:tr h="457200">
+                <a:tc>
+                  <a:txBody>
+                    <a:bodyPr/>
+                    <a:lstStyle/>
+                    <a:p>
+                      <a:pPr algn="l" indent="0" marL="0">
+                        <a:buNone/>
+                      </a:pPr>
+                      <a:r>
+                        <a:rPr lang="en-US" sz="1300" b="1" dirty="0">
+                          <a:solidFill>
+                            <a:srgbClr val="000000"/>
+                          </a:solidFill>
+                          <a:latin typeface="Calibri" pitchFamily="34" charset="0"/>
+                          <a:ea typeface="Calibri" pitchFamily="34" charset="-122"/>
+                          <a:cs typeface="Calibri" pitchFamily="34" charset="-120"/>
+                        </a:rPr>
+                        <a:t>Llama-2-13B</a:t>
+                      </a:r>
+                      <a:endParaRPr lang="en-US" sz="1300" dirty="0">
+                        <a:latin typeface="Calibri" charset="0"/>
+                        <a:ea typeface="Calibri" charset="0"/>
+                        <a:cs typeface="Calibri" charset="0"/>
+                      </a:endParaRPr>
+                    </a:p>
+                  </a:txBody>
+                  <a:tcPr marL="91440" marR="91440" marT="45720" marB="45720">
+                    <a:lnL w="6350" cap="flat" cmpd="sng" algn="ctr">
+                      <a:solidFill>
+                        <a:srgbClr val="D0D7D6"/>
+                      </a:solidFill>
+                      <a:prstDash val="solid"/>
+                      <a:round/>
+                      <a:headEnd type="none" w="med" len="med"/>
+                      <a:tailEnd type="none" w="med" len="med"/>
+                    </a:lnL>
+                    <a:lnR w="6350" cap="flat" cmpd="sng" algn="ctr">
+                      <a:solidFill>
+                        <a:srgbClr val="D0D7D6"/>
+                      </a:solidFill>
+                      <a:prstDash val="solid"/>
+                      <a:round/>
+                      <a:headEnd type="none" w="med" len="med"/>
+                      <a:tailEnd type="none" w="med" len="med"/>
+                    </a:lnR>
+                    <a:lnT w="6350" cap="flat" cmpd="sng" algn="ctr">
+                      <a:solidFill>
+                        <a:srgbClr val="D0D7D6"/>
+                      </a:solidFill>
+                      <a:prstDash val="solid"/>
+                      <a:round/>
+                      <a:headEnd type="none" w="med" len="med"/>
+                      <a:tailEnd type="none" w="med" len="med"/>
+                    </a:lnT>
+                    <a:lnB w="6350" cap="flat" cmpd="sng" algn="ctr">
+                      <a:solidFill>
+                        <a:srgbClr val="D0D7D6"/>
+                      </a:solidFill>
+                      <a:prstDash val="solid"/>
+                      <a:round/>
+                      <a:headEnd type="none" w="med" len="med"/>
+                      <a:tailEnd type="none" w="med" len="med"/>
+                    </a:lnB>
+                    <a:solidFill>
+                      <a:srgbClr val="FFFFFF"/>
+                    </a:solidFill>
+                  </a:tcPr>
+                </a:tc>
+                <a:tc>
+                  <a:txBody>
+                    <a:bodyPr/>
+                    <a:lstStyle/>
+                    <a:p>
+                      <a:pPr algn="ctr" indent="0" marL="0">
+                        <a:buNone/>
+                      </a:pPr>
+                      <a:r>
+                        <a:rPr lang="en-US" sz="1300" dirty="0">
+                          <a:solidFill>
+                            <a:srgbClr val="000000"/>
+                          </a:solidFill>
+                          <a:latin typeface="Calibri" pitchFamily="34" charset="0"/>
+                          <a:ea typeface="Calibri" pitchFamily="34" charset="-122"/>
+                          <a:cs typeface="Calibri" pitchFamily="34" charset="-120"/>
+                        </a:rPr>
+                        <a:t>54/98</a:t>
+                      </a:r>
+                      <a:endParaRPr lang="en-US" sz="1300" dirty="0">
+                        <a:latin typeface="Calibri" charset="0"/>
+                        <a:ea typeface="Calibri" charset="0"/>
+                        <a:cs typeface="Calibri" charset="0"/>
+                      </a:endParaRPr>
+                    </a:p>
+                  </a:txBody>
+                  <a:tcPr marL="91440" marR="91440" marT="45720" marB="45720">
+                    <a:lnL w="6350" cap="flat" cmpd="sng" algn="ctr">
+                      <a:solidFill>
+                        <a:srgbClr val="D0D7D6"/>
+                      </a:solidFill>
+                      <a:prstDash val="solid"/>
+                      <a:round/>
+                      <a:headEnd type="none" w="med" len="med"/>
+                      <a:tailEnd type="none" w="med" len="med"/>
+                    </a:lnL>
+                    <a:lnR w="6350" cap="flat" cmpd="sng" algn="ctr">
+                      <a:solidFill>
+                        <a:srgbClr val="D0D7D6"/>
+                      </a:solidFill>
+                      <a:prstDash val="solid"/>
+                      <a:round/>
+                      <a:headEnd type="none" w="med" len="med"/>
+                      <a:tailEnd type="none" w="med" len="med"/>
+                    </a:lnR>
+                    <a:lnT w="6350" cap="flat" cmpd="sng" algn="ctr">
+                      <a:solidFill>
+                        <a:srgbClr val="D0D7D6"/>
+                      </a:solidFill>
+                      <a:prstDash val="solid"/>
+                      <a:round/>
+                      <a:headEnd type="none" w="med" len="med"/>
+                      <a:tailEnd type="none" w="med" len="med"/>
+                    </a:lnT>
+                    <a:lnB w="6350" cap="flat" cmpd="sng" algn="ctr">
+                      <a:solidFill>
+                        <a:srgbClr val="D0D7D6"/>
+                      </a:solidFill>
+                      <a:prstDash val="solid"/>
+                      <a:round/>
+                      <a:headEnd type="none" w="med" len="med"/>
+                      <a:tailEnd type="none" w="med" len="med"/>
+                    </a:lnB>
+                    <a:solidFill>
+                      <a:srgbClr val="FFFFFF"/>
+                    </a:solidFill>
+                  </a:tcPr>
+                </a:tc>
+                <a:tc>
+                  <a:txBody>
+                    <a:bodyPr/>
+                    <a:lstStyle/>
+                    <a:p>
+                      <a:pPr algn="ctr" indent="0" marL="0">
+                        <a:buNone/>
+                      </a:pPr>
+                      <a:r>
+                        <a:rPr lang="en-US" sz="1300" dirty="0">
+                          <a:solidFill>
+                            <a:srgbClr val="000000"/>
+                          </a:solidFill>
+                          <a:latin typeface="Calibri" pitchFamily="34" charset="0"/>
+                          <a:ea typeface="Calibri" pitchFamily="34" charset="-122"/>
+                          <a:cs typeface="Calibri" pitchFamily="34" charset="-120"/>
+                        </a:rPr>
+                        <a:t>100%</a:t>
+                      </a:r>
+                      <a:endParaRPr lang="en-US" sz="1300" dirty="0">
+                        <a:latin typeface="Calibri" charset="0"/>
+                        <a:ea typeface="Calibri" charset="0"/>
+                        <a:cs typeface="Calibri" charset="0"/>
+                      </a:endParaRPr>
+                    </a:p>
+                  </a:txBody>
+                  <a:tcPr marL="91440" marR="91440" marT="45720" marB="45720">
+                    <a:lnL w="6350" cap="flat" cmpd="sng" algn="ctr">
+                      <a:solidFill>
+                        <a:srgbClr val="D0D7D6"/>
+                      </a:solidFill>
+                      <a:prstDash val="solid"/>
+                      <a:round/>
+                      <a:headEnd type="none" w="med" len="med"/>
+                      <a:tailEnd type="none" w="med" len="med"/>
+                    </a:lnL>
+                    <a:lnR w="6350" cap="flat" cmpd="sng" algn="ctr">
+                      <a:solidFill>
+                        <a:srgbClr val="D0D7D6"/>
+                      </a:solidFill>
+                      <a:prstDash val="solid"/>
+                      <a:round/>
+                      <a:headEnd type="none" w="med" len="med"/>
+                      <a:tailEnd type="none" w="med" len="med"/>
+                    </a:lnR>
+                    <a:lnT w="6350" cap="flat" cmpd="sng" algn="ctr">
+                      <a:solidFill>
+                        <a:srgbClr val="D0D7D6"/>
+                      </a:solidFill>
+                      <a:prstDash val="solid"/>
+                      <a:round/>
+                      <a:headEnd type="none" w="med" len="med"/>
+                      <a:tailEnd type="none" w="med" len="med"/>
+                    </a:lnT>
+                    <a:lnB w="6350" cap="flat" cmpd="sng" algn="ctr">
+                      <a:solidFill>
+                        <a:srgbClr val="D0D7D6"/>
+                      </a:solidFill>
+                      <a:prstDash val="solid"/>
+                      <a:round/>
+                      <a:headEnd type="none" w="med" len="med"/>
+                      <a:tailEnd type="none" w="med" len="med"/>
+                    </a:lnB>
+                    <a:solidFill>
+                      <a:srgbClr val="FFFFFF"/>
+                    </a:solidFill>
+                  </a:tcPr>
+                </a:tc>
+                <a:tc>
+                  <a:txBody>
+                    <a:bodyPr/>
+                    <a:lstStyle/>
+                    <a:p>
+                      <a:pPr algn="ctr" indent="0" marL="0">
+                        <a:buNone/>
+                      </a:pPr>
+                      <a:r>
+                        <a:rPr lang="en-US" sz="1300" dirty="0">
+                          <a:solidFill>
+                            <a:srgbClr val="000000"/>
+                          </a:solidFill>
+                          <a:latin typeface="Calibri" pitchFamily="34" charset="0"/>
+                          <a:ea typeface="Calibri" pitchFamily="34" charset="-122"/>
+                          <a:cs typeface="Calibri" pitchFamily="34" charset="-120"/>
+                        </a:rPr>
+                        <a:t>30 : 20</a:t>
+                      </a:r>
+                      <a:endParaRPr lang="en-US" sz="1300" dirty="0">
+                        <a:latin typeface="Calibri" charset="0"/>
+                        <a:ea typeface="Calibri" charset="0"/>
+                        <a:cs typeface="Calibri" charset="0"/>
+                      </a:endParaRPr>
+                    </a:p>
+                  </a:txBody>
+                  <a:tcPr marL="91440" marR="91440" marT="45720" marB="45720">
+                    <a:lnL w="6350" cap="flat" cmpd="sng" algn="ctr">
+                      <a:solidFill>
+                        <a:srgbClr val="D0D7D6"/>
+                      </a:solidFill>
+                      <a:prstDash val="solid"/>
+                      <a:round/>
+                      <a:headEnd type="none" w="med" len="med"/>
+                      <a:tailEnd type="none" w="med" len="med"/>
+                    </a:lnL>
+                    <a:lnR w="6350" cap="flat" cmpd="sng" algn="ctr">
+                      <a:solidFill>
+                        <a:srgbClr val="D0D7D6"/>
+                      </a:solidFill>
+                      <a:prstDash val="solid"/>
+                      <a:round/>
+                      <a:headEnd type="none" w="med" len="med"/>
+                      <a:tailEnd type="none" w="med" len="med"/>
+                    </a:lnR>
+                    <a:lnT w="6350" cap="flat" cmpd="sng" algn="ctr">
+                      <a:solidFill>
+                        <a:srgbClr val="D0D7D6"/>
+                      </a:solidFill>
+                      <a:prstDash val="solid"/>
+                      <a:round/>
+                      <a:headEnd type="none" w="med" len="med"/>
+                      <a:tailEnd type="none" w="med" len="med"/>
+                    </a:lnT>
+                    <a:lnB w="6350" cap="flat" cmpd="sng" algn="ctr">
+                      <a:solidFill>
+                        <a:srgbClr val="D0D7D6"/>
+                      </a:solidFill>
+                      <a:prstDash val="solid"/>
+                      <a:round/>
+                      <a:headEnd type="none" w="med" len="med"/>
+                      <a:tailEnd type="none" w="med" len="med"/>
+                    </a:lnB>
+                    <a:solidFill>
+                      <a:srgbClr val="FFFFFF"/>
+                    </a:solidFill>
+                  </a:tcPr>
+                </a:tc>
+                <a:tc>
+                  <a:txBody>
+                    <a:bodyPr/>
+                    <a:lstStyle/>
+                    <a:p>
+                      <a:pPr algn="ctr" indent="0" marL="0">
+                        <a:buNone/>
+                      </a:pPr>
+                      <a:r>
+                        <a:rPr lang="en-US" sz="1300" dirty="0">
+                          <a:solidFill>
+                            <a:srgbClr val="000000"/>
+                          </a:solidFill>
+                          <a:latin typeface="Calibri" pitchFamily="34" charset="0"/>
+                          <a:ea typeface="Calibri" pitchFamily="34" charset="-122"/>
+                          <a:cs typeface="Calibri" pitchFamily="34" charset="-120"/>
+                        </a:rPr>
+                        <a:t>14 : 12</a:t>
+                      </a:r>
+                      <a:endParaRPr lang="en-US" sz="1300" dirty="0">
+                        <a:latin typeface="Calibri" charset="0"/>
+                        <a:ea typeface="Calibri" charset="0"/>
+                        <a:cs typeface="Calibri" charset="0"/>
+                      </a:endParaRPr>
+                    </a:p>
+                  </a:txBody>
+                  <a:tcPr marL="91440" marR="91440" marT="45720" marB="45720">
+                    <a:lnL w="6350" cap="flat" cmpd="sng" algn="ctr">
+                      <a:solidFill>
+                        <a:srgbClr val="D0D7D6"/>
+                      </a:solidFill>
+                      <a:prstDash val="solid"/>
+                      <a:round/>
+                      <a:headEnd type="none" w="med" len="med"/>
+                      <a:tailEnd type="none" w="med" len="med"/>
+                    </a:lnL>
+                    <a:lnR w="6350" cap="flat" cmpd="sng" algn="ctr">
+                      <a:solidFill>
+                        <a:srgbClr val="D0D7D6"/>
+                      </a:solidFill>
+                      <a:prstDash val="solid"/>
+                      <a:round/>
+                      <a:headEnd type="none" w="med" len="med"/>
+                      <a:tailEnd type="none" w="med" len="med"/>
+                    </a:lnR>
+                    <a:lnT w="6350" cap="flat" cmpd="sng" algn="ctr">
+                      <a:solidFill>
+                        <a:srgbClr val="D0D7D6"/>
+                      </a:solidFill>
+                      <a:prstDash val="solid"/>
+                      <a:round/>
+                      <a:headEnd type="none" w="med" len="med"/>
+                      <a:tailEnd type="none" w="med" len="med"/>
+                    </a:lnT>
+                    <a:lnB w="6350" cap="flat" cmpd="sng" algn="ctr">
+                      <a:solidFill>
+                        <a:srgbClr val="D0D7D6"/>
+                      </a:solidFill>
+                      <a:prstDash val="solid"/>
+                      <a:round/>
+                      <a:headEnd type="none" w="med" len="med"/>
+                      <a:tailEnd type="none" w="med" len="med"/>
+                    </a:lnB>
+                    <a:solidFill>
+                      <a:srgbClr val="FFFFFF"/>
+                    </a:solidFill>
+                  </a:tcPr>
+                </a:tc>
+              </a:tr>
+              <a:tr h="457200">
+                <a:tc>
+                  <a:txBody>
+                    <a:bodyPr/>
+                    <a:lstStyle/>
+                    <a:p>
+                      <a:pPr algn="l" indent="0" marL="0">
+                        <a:buNone/>
+                      </a:pPr>
+                      <a:r>
+                        <a:rPr lang="en-US" sz="1300" b="1" dirty="0">
+                          <a:solidFill>
+                            <a:srgbClr val="000000"/>
+                          </a:solidFill>
+                          <a:latin typeface="Calibri" pitchFamily="34" charset="0"/>
+                          <a:ea typeface="Calibri" pitchFamily="34" charset="-122"/>
+                          <a:cs typeface="Calibri" pitchFamily="34" charset="-120"/>
+                        </a:rPr>
+                        <a:t>Llama-3-8B</a:t>
+                      </a:r>
+                      <a:endParaRPr lang="en-US" sz="1300" dirty="0">
+                        <a:latin typeface="Calibri" charset="0"/>
+                        <a:ea typeface="Calibri" charset="0"/>
+                        <a:cs typeface="Calibri" charset="0"/>
+                      </a:endParaRPr>
+                    </a:p>
+                  </a:txBody>
+                  <a:tcPr marL="91440" marR="91440" marT="45720" marB="45720">
+                    <a:lnL w="6350" cap="flat" cmpd="sng" algn="ctr">
+                      <a:solidFill>
+                        <a:srgbClr val="D0D7D6"/>
+                      </a:solidFill>
+                      <a:prstDash val="solid"/>
+                      <a:round/>
+                      <a:headEnd type="none" w="med" len="med"/>
+                      <a:tailEnd type="none" w="med" len="med"/>
+                    </a:lnL>
+                    <a:lnR w="6350" cap="flat" cmpd="sng" algn="ctr">
+                      <a:solidFill>
+                        <a:srgbClr val="D0D7D6"/>
+                      </a:solidFill>
+                      <a:prstDash val="solid"/>
+                      <a:round/>
+                      <a:headEnd type="none" w="med" len="med"/>
+                      <a:tailEnd type="none" w="med" len="med"/>
+                    </a:lnR>
+                    <a:lnT w="6350" cap="flat" cmpd="sng" algn="ctr">
+                      <a:solidFill>
+                        <a:srgbClr val="D0D7D6"/>
+                      </a:solidFill>
+                      <a:prstDash val="solid"/>
+                      <a:round/>
+                      <a:headEnd type="none" w="med" len="med"/>
+                      <a:tailEnd type="none" w="med" len="med"/>
+                    </a:lnT>
+                    <a:lnB w="6350" cap="flat" cmpd="sng" algn="ctr">
+                      <a:solidFill>
+                        <a:srgbClr val="D0D7D6"/>
+                      </a:solidFill>
+                      <a:prstDash val="solid"/>
+                      <a:round/>
+                      <a:headEnd type="none" w="med" len="med"/>
+                      <a:tailEnd type="none" w="med" len="med"/>
+                    </a:lnB>
+                    <a:solidFill>
+                      <a:srgbClr val="FFFFFF"/>
+                    </a:solidFill>
+                  </a:tcPr>
+                </a:tc>
+                <a:tc>
+                  <a:txBody>
+                    <a:bodyPr/>
+                    <a:lstStyle/>
+                    <a:p>
+                      <a:pPr algn="ctr" indent="0" marL="0">
+                        <a:buNone/>
+                      </a:pPr>
+                      <a:r>
+                        <a:rPr lang="en-US" sz="1300" dirty="0">
+                          <a:solidFill>
+                            <a:srgbClr val="000000"/>
+                          </a:solidFill>
+                          <a:latin typeface="Calibri" pitchFamily="34" charset="0"/>
+                          <a:ea typeface="Calibri" pitchFamily="34" charset="-122"/>
+                          <a:cs typeface="Calibri" pitchFamily="34" charset="-120"/>
+                        </a:rPr>
+                        <a:t>2/99</a:t>
+                      </a:r>
+                      <a:endParaRPr lang="en-US" sz="1300" dirty="0">
+                        <a:latin typeface="Calibri" charset="0"/>
+                        <a:ea typeface="Calibri" charset="0"/>
+                        <a:cs typeface="Calibri" charset="0"/>
+                      </a:endParaRPr>
+                    </a:p>
+                  </a:txBody>
+                  <a:tcPr marL="91440" marR="91440" marT="45720" marB="45720">
+                    <a:lnL w="6350" cap="flat" cmpd="sng" algn="ctr">
+                      <a:solidFill>
+                        <a:srgbClr val="D0D7D6"/>
+                      </a:solidFill>
+                      <a:prstDash val="solid"/>
+                      <a:round/>
+                      <a:headEnd type="none" w="med" len="med"/>
+                      <a:tailEnd type="none" w="med" len="med"/>
+                    </a:lnL>
+                    <a:lnR w="6350" cap="flat" cmpd="sng" algn="ctr">
+                      <a:solidFill>
+                        <a:srgbClr val="D0D7D6"/>
+                      </a:solidFill>
+                      <a:prstDash val="solid"/>
+                      <a:round/>
+                      <a:headEnd type="none" w="med" len="med"/>
+                      <a:tailEnd type="none" w="med" len="med"/>
+                    </a:lnR>
+                    <a:lnT w="6350" cap="flat" cmpd="sng" algn="ctr">
+                      <a:solidFill>
+                        <a:srgbClr val="D0D7D6"/>
+                      </a:solidFill>
+                      <a:prstDash val="solid"/>
+                      <a:round/>
+                      <a:headEnd type="none" w="med" len="med"/>
+                      <a:tailEnd type="none" w="med" len="med"/>
+                    </a:lnT>
+                    <a:lnB w="6350" cap="flat" cmpd="sng" algn="ctr">
+                      <a:solidFill>
+                        <a:srgbClr val="D0D7D6"/>
+                      </a:solidFill>
+                      <a:prstDash val="solid"/>
+                      <a:round/>
+                      <a:headEnd type="none" w="med" len="med"/>
+                      <a:tailEnd type="none" w="med" len="med"/>
+                    </a:lnB>
+                    <a:solidFill>
+                      <a:srgbClr val="FFFFFF"/>
+                    </a:solidFill>
+                  </a:tcPr>
+                </a:tc>
+                <a:tc>
+                  <a:txBody>
+                    <a:bodyPr/>
+                    <a:lstStyle/>
+                    <a:p>
+                      <a:pPr algn="ctr" indent="0" marL="0">
+                        <a:buNone/>
+                      </a:pPr>
+                      <a:r>
+                        <a:rPr lang="en-US" sz="1300" dirty="0">
+                          <a:solidFill>
+                            <a:srgbClr val="000000"/>
+                          </a:solidFill>
+                          <a:latin typeface="Calibri" pitchFamily="34" charset="0"/>
+                          <a:ea typeface="Calibri" pitchFamily="34" charset="-122"/>
+                          <a:cs typeface="Calibri" pitchFamily="34" charset="-120"/>
+                        </a:rPr>
+                        <a:t>8%</a:t>
+                      </a:r>
+                      <a:endParaRPr lang="en-US" sz="1300" dirty="0">
+                        <a:latin typeface="Calibri" charset="0"/>
+                        <a:ea typeface="Calibri" charset="0"/>
+                        <a:cs typeface="Calibri" charset="0"/>
+                      </a:endParaRPr>
+                    </a:p>
+                  </a:txBody>
+                  <a:tcPr marL="91440" marR="91440" marT="45720" marB="45720">
+                    <a:lnL w="6350" cap="flat" cmpd="sng" algn="ctr">
+                      <a:solidFill>
+                        <a:srgbClr val="D0D7D6"/>
+                      </a:solidFill>
+                      <a:prstDash val="solid"/>
+                      <a:round/>
+                      <a:headEnd type="none" w="med" len="med"/>
+                      <a:tailEnd type="none" w="med" len="med"/>
+                    </a:lnL>
+                    <a:lnR w="6350" cap="flat" cmpd="sng" algn="ctr">
+                      <a:solidFill>
+                        <a:srgbClr val="D0D7D6"/>
+                      </a:solidFill>
+                      <a:prstDash val="solid"/>
+                      <a:round/>
+                      <a:headEnd type="none" w="med" len="med"/>
+                      <a:tailEnd type="none" w="med" len="med"/>
+                    </a:lnR>
+                    <a:lnT w="6350" cap="flat" cmpd="sng" algn="ctr">
+                      <a:solidFill>
+                        <a:srgbClr val="D0D7D6"/>
+                      </a:solidFill>
+                      <a:prstDash val="solid"/>
+                      <a:round/>
+                      <a:headEnd type="none" w="med" len="med"/>
+                      <a:tailEnd type="none" w="med" len="med"/>
+                    </a:lnT>
+                    <a:lnB w="6350" cap="flat" cmpd="sng" algn="ctr">
+                      <a:solidFill>
+                        <a:srgbClr val="D0D7D6"/>
+                      </a:solidFill>
+                      <a:prstDash val="solid"/>
+                      <a:round/>
+                      <a:headEnd type="none" w="med" len="med"/>
+                      <a:tailEnd type="none" w="med" len="med"/>
+                    </a:lnB>
+                    <a:solidFill>
+                      <a:srgbClr val="FFFFFF"/>
+                    </a:solidFill>
+                  </a:tcPr>
+                </a:tc>
+                <a:tc>
+                  <a:txBody>
+                    <a:bodyPr/>
+                    <a:lstStyle/>
+                    <a:p>
+                      <a:pPr algn="ctr" indent="0" marL="0">
+                        <a:buNone/>
+                      </a:pPr>
+                      <a:r>
+                        <a:rPr lang="en-US" sz="1300" dirty="0">
+                          <a:solidFill>
+                            <a:srgbClr val="000000"/>
+                          </a:solidFill>
+                          <a:latin typeface="Calibri" pitchFamily="34" charset="0"/>
+                          <a:ea typeface="Calibri" pitchFamily="34" charset="-122"/>
+                          <a:cs typeface="Calibri" pitchFamily="34" charset="-120"/>
+                        </a:rPr>
+                        <a:t>2 : 0</a:t>
+                      </a:r>
+                      <a:endParaRPr lang="en-US" sz="1300" dirty="0">
+                        <a:latin typeface="Calibri" charset="0"/>
+                        <a:ea typeface="Calibri" charset="0"/>
+                        <a:cs typeface="Calibri" charset="0"/>
+                      </a:endParaRPr>
+                    </a:p>
+                  </a:txBody>
+                  <a:tcPr marL="91440" marR="91440" marT="45720" marB="45720">
+                    <a:lnL w="6350" cap="flat" cmpd="sng" algn="ctr">
+                      <a:solidFill>
+                        <a:srgbClr val="D0D7D6"/>
+                      </a:solidFill>
+                      <a:prstDash val="solid"/>
+                      <a:round/>
+                      <a:headEnd type="none" w="med" len="med"/>
+                      <a:tailEnd type="none" w="med" len="med"/>
+                    </a:lnL>
+                    <a:lnR w="6350" cap="flat" cmpd="sng" algn="ctr">
+                      <a:solidFill>
+                        <a:srgbClr val="D0D7D6"/>
+                      </a:solidFill>
+                      <a:prstDash val="solid"/>
+                      <a:round/>
+                      <a:headEnd type="none" w="med" len="med"/>
+                      <a:tailEnd type="none" w="med" len="med"/>
+                    </a:lnR>
+                    <a:lnT w="6350" cap="flat" cmpd="sng" algn="ctr">
+                      <a:solidFill>
+                        <a:srgbClr val="D0D7D6"/>
+                      </a:solidFill>
+                      <a:prstDash val="solid"/>
+                      <a:round/>
+                      <a:headEnd type="none" w="med" len="med"/>
+                      <a:tailEnd type="none" w="med" len="med"/>
+                    </a:lnT>
+                    <a:lnB w="6350" cap="flat" cmpd="sng" algn="ctr">
+                      <a:solidFill>
+                        <a:srgbClr val="D0D7D6"/>
+                      </a:solidFill>
+                      <a:prstDash val="solid"/>
+                      <a:round/>
+                      <a:headEnd type="none" w="med" len="med"/>
+                      <a:tailEnd type="none" w="med" len="med"/>
+                    </a:lnB>
+                    <a:solidFill>
+                      <a:srgbClr val="FFFFFF"/>
+                    </a:solidFill>
+                  </a:tcPr>
+                </a:tc>
+                <a:tc>
+                  <a:txBody>
+                    <a:bodyPr/>
+                    <a:lstStyle/>
+                    <a:p>
+                      <a:pPr algn="ctr" indent="0" marL="0">
+                        <a:buNone/>
+                      </a:pPr>
+                      <a:r>
+                        <a:rPr lang="en-US" sz="1300" dirty="0">
+                          <a:solidFill>
+                            <a:srgbClr val="000000"/>
+                          </a:solidFill>
+                          <a:latin typeface="Calibri" pitchFamily="34" charset="0"/>
+                          <a:ea typeface="Calibri" pitchFamily="34" charset="-122"/>
+                          <a:cs typeface="Calibri" pitchFamily="34" charset="-120"/>
+                        </a:rPr>
+                        <a:t>0 : 0</a:t>
+                      </a:r>
+                      <a:endParaRPr lang="en-US" sz="1300" dirty="0">
+                        <a:latin typeface="Calibri" charset="0"/>
+                        <a:ea typeface="Calibri" charset="0"/>
+                        <a:cs typeface="Calibri" charset="0"/>
+                      </a:endParaRPr>
+                    </a:p>
+                  </a:txBody>
+                  <a:tcPr marL="91440" marR="91440" marT="45720" marB="45720">
+                    <a:lnL w="6350" cap="flat" cmpd="sng" algn="ctr">
+                      <a:solidFill>
+                        <a:srgbClr val="D0D7D6"/>
+                      </a:solidFill>
+                      <a:prstDash val="solid"/>
+                      <a:round/>
+                      <a:headEnd type="none" w="med" len="med"/>
+                      <a:tailEnd type="none" w="med" len="med"/>
+                    </a:lnL>
+                    <a:lnR w="6350" cap="flat" cmpd="sng" algn="ctr">
+                      <a:solidFill>
+                        <a:srgbClr val="D0D7D6"/>
+                      </a:solidFill>
+                      <a:prstDash val="solid"/>
+                      <a:round/>
+                      <a:headEnd type="none" w="med" len="med"/>
+                      <a:tailEnd type="none" w="med" len="med"/>
+                    </a:lnR>
+                    <a:lnT w="6350" cap="flat" cmpd="sng" algn="ctr">
+                      <a:solidFill>
+                        <a:srgbClr val="D0D7D6"/>
+                      </a:solidFill>
+                      <a:prstDash val="solid"/>
+                      <a:round/>
+                      <a:headEnd type="none" w="med" len="med"/>
+                      <a:tailEnd type="none" w="med" len="med"/>
+                    </a:lnT>
+                    <a:lnB w="6350" cap="flat" cmpd="sng" algn="ctr">
+                      <a:solidFill>
+                        <a:srgbClr val="D0D7D6"/>
+                      </a:solidFill>
+                      <a:prstDash val="solid"/>
+                      <a:round/>
+                      <a:headEnd type="none" w="med" len="med"/>
+                      <a:tailEnd type="none" w="med" len="med"/>
+                    </a:lnB>
+                    <a:solidFill>
+                      <a:srgbClr val="FFFFFF"/>
+                    </a:solidFill>
+                  </a:tcPr>
+                </a:tc>
+              </a:tr>
+            </a:tbl>
+          </a:graphicData>
+        </a:graphic>
+      </p:graphicFrame>
+      <p:sp>
+        <p:nvSpPr>
+          <p:cNvPr id="4" name="Text 1"/>
+          <p:cNvSpPr txBox="1"/>
+          <p:nvPr/>
+        </p:nvSpPr>
+        <p:spPr>
+          <a:xfrm>
+            <a:off x="457200" y="3200400"/>
+            <a:ext cx="5669280" cy="640080"/>
+          </a:xfrm>
+          <a:prstGeom prst="rect">
+            <a:avLst/>
+          </a:prstGeom>
+          <a:noFill/>
+          <a:ln/>
+        </p:spPr>
+        <p:txBody>
+          <a:bodyPr wrap="square" lIns="0" tIns="0" rIns="0" bIns="0" rtlCol="0" anchor="t"/>
+          <a:lstStyle/>
+          <a:p>
+            <a:pPr indent="0" marL="0">
+              <a:buNone/>
+            </a:pPr>
+            <a:r>
+              <a:rPr lang="en-US" sz="1200" dirty="0">
+                <a:solidFill>
+                  <a:schemeClr val="accent3"/>
+                </a:solidFill>
+              </a:rPr>
+              <a:t>Judge columns: AARF wins : baseline wins (Gemini 3.5 Flash-Lite). Both orders = verdict must survive swapping the two answers.</a:t>
+            </a:r>
+            <a:endParaRPr lang="en-US" sz="1200" dirty="0"/>
+          </a:p>
+        </p:txBody>
+      </p:sp>
+      <p:sp>
+        <p:nvSpPr>
+          <p:cNvPr id="5" name="Shape 2"/>
+          <p:cNvSpPr/>
+          <p:nvPr/>
+        </p:nvSpPr>
+        <p:spPr>
+          <a:xfrm>
+            <a:off x="6400800" y="1188720"/>
+            <a:ext cx="2286000" cy="3291840"/>
+          </a:xfrm>
+          <a:prstGeom prst="roundRect">
+            <a:avLst>
+              <a:gd name="adj" fmla="val 3200"/>
+            </a:avLst>
+          </a:prstGeom>
+          <a:solidFill>
+            <a:schemeClr val="bg2"/>
+          </a:solidFill>
+          <a:ln/>
+        </p:spPr>
+      </p:sp>
+      <p:sp>
+        <p:nvSpPr>
+          <p:cNvPr id="6" name="Text 3"/>
+          <p:cNvSpPr txBox="1"/>
+          <p:nvPr/>
+        </p:nvSpPr>
+        <p:spPr>
+          <a:xfrm>
+            <a:off x="6583680" y="1371600"/>
+            <a:ext cx="1965960" cy="3017520"/>
+          </a:xfrm>
+          <a:prstGeom prst="rect">
+            <a:avLst/>
+          </a:prstGeom>
+          <a:noFill/>
+          <a:ln/>
+        </p:spPr>
+        <p:txBody>
+          <a:bodyPr wrap="square" lIns="0" tIns="0" rIns="0" bIns="0" rtlCol="0" anchor="t"/>
+          <a:lstStyle/>
+          <a:p>
+            <a:pPr indent="0" marL="0">
+              <a:buNone/>
+            </a:pPr>
+            <a:r>
+              <a:rPr lang="en-US" sz="1300" b="1" dirty="0">
+                <a:solidFill>
+                  <a:schemeClr val="tx1"/>
+                </a:solidFill>
+              </a:rPr>
+              <a:t>Gate miscalibrated</a:t>
+            </a:r>
+            <a:endParaRPr lang="en-US" sz="1300" dirty="0"/>
+          </a:p>
+          <a:p>
+            <a:pPr indent="0" marL="0">
+              <a:buNone/>
+            </a:pPr>
+            <a:r>
+              <a:rPr lang="en-US" sz="1300" dirty="0">
+                <a:solidFill>
+                  <a:schemeClr val="tx1"/>
+                </a:solidFill>
+              </a:rPr>
+              <a:t>Released ranges make the 0.6 threshold always or never crossed.</a:t>
+            </a:r>
+            <a:endParaRPr lang="en-US" sz="1300" dirty="0"/>
+          </a:p>
+          <a:p>
+            <a:pPr indent="0" marL="0">
+              <a:buNone/>
+            </a:pPr>
+            <a:r>
+              <a:rPr lang="en-US" sz="1300" dirty="0">
+                <a:solidFill>
+                  <a:schemeClr val="tx1"/>
+                </a:solidFill>
+              </a:rPr>
+              <a:t> </a:t>
+            </a:r>
+            <a:endParaRPr lang="en-US" sz="1300" dirty="0"/>
+          </a:p>
+          <a:p>
+            <a:pPr indent="0" marL="0">
+              <a:buNone/>
+            </a:pPr>
+            <a:r>
+              <a:rPr lang="en-US" sz="1300" b="1" dirty="0">
+                <a:solidFill>
+                  <a:schemeClr val="tx1"/>
+                </a:solidFill>
+              </a:rPr>
+              <a:t>Position bias</a:t>
+            </a:r>
+            <a:endParaRPr lang="en-US" sz="1300" dirty="0"/>
+          </a:p>
+          <a:p>
+            <a:pPr indent="0" marL="0">
+              <a:buNone/>
+            </a:pPr>
+            <a:r>
+              <a:rPr lang="en-US" sz="1300" dirty="0">
+                <a:solidFill>
+                  <a:schemeClr val="tx1"/>
+                </a:solidFill>
+              </a:rPr>
+              <a:t>Swapping the two answers flipped the judge's verdict in 39% (7B) and 47% (13B) of pairs.</a:t>
+            </a:r>
+            <a:endParaRPr lang="en-US" sz="1300" dirty="0"/>
+          </a:p>
+        </p:txBody>
+      </p:sp>
+      <p:sp>
+        <p:nvSpPr>
+          <p:cNvPr id="25" name="Slide Number Placeholder 0"/>
+          <p:cNvSpPr>
+            <a:spLocks noGrp="1"/>
+          </p:cNvSpPr>
+          <p:nvPr>
+            <p:ph type="sldNum" sz="quarter" idx="4294967295"/>
+          </p:nvPr>
+        </p:nvSpPr>
+        <p:spPr>
+          <a:xfrm>
+            <a:off x="8229600" y="4754880"/>
+            <a:ext cx="457200" cy="274320"/>
+          </a:xfrm>
+          <a:prstGeom prst="rect">
+            <a:avLst/>
+          </a:prstGeom>
+          <a:extLst>
+            <a:ext uri="{C572A759-6A51-4108-AA02-DFA0A04FC94B}">
+              <ma14:wrappingTextBoxFlag xmlns:ma14="http://schemas.microsoft.com/office/mac/drawingml/2011/main" val="0"/>
+            </a:ext>
+          </a:extLst>
+        </p:spPr>
+        <p:txBody>
+          <a:bodyPr/>
+          <a:lstStyle>
+            <a:lvl1pPr>
+              <a:defRPr sz="1000">
+                <a:solidFill>
+                  <a:schemeClr val="accent3"/>
+                </a:solidFill>
+              </a:defRPr>
+            </a:lvl1pPr>
+          </a:lstStyle>
+          <a:p>
+            <a:pPr algn="r"/>
+            <a:fld id="{F7021451-1387-4CA6-816F-3879F97B5CBC}" type="slidenum">
+              <a:rPr b="0" lang="en-US"/>
+              <a:t>13</a:t>
+            </a:fld>
+            <a:endParaRPr lang="en-US"/>
+          </a:p>
+        </p:txBody>
+      </p:sp>
+    </p:spTree>
+  </p:cSld>
+  <p:clrMapOvr>
+    <a:masterClrMapping/>
+  </p:clrMapOvr>
+</p:sld>
+</file>
+
+<file path=ppt/slides/slide14.xml><?xml version="1.0" encoding="utf-8"?>
+<p:sld xmlns:a="http://schemas.openxmlformats.org/drawingml/2006/main" xmlns:r="http://schemas.openxmlformats.org/officeDocument/2006/relationships" xmlns:p="http://schemas.openxmlformats.org/presentationml/2006/main">
+  <p:cSld name="Slide 14">
+    <p:spTree>
+      <p:nvGrpSpPr>
+        <p:cNvPr id="1" name=""/>
+        <p:cNvGrpSpPr/>
+        <p:nvPr/>
+      </p:nvGrpSpPr>
+      <p:grpSpPr>
+        <a:xfrm>
+          <a:off x="0" y="0"/>
+          <a:ext cx="0" cy="0"/>
+          <a:chOff x="0" y="0"/>
+          <a:chExt cx="0" cy="0"/>
+        </a:xfrm>
+      </p:grpSpPr>
+      <p:sp>
+        <p:nvSpPr>
+          <p:cNvPr id="2" name="Text 0"/>
+          <p:cNvSpPr/>
+          <p:nvPr>
+            <p:ph idx="100" type="title" hasCustomPrompt="1"/>
+          </p:nvPr>
+        </p:nvSpPr>
+        <p:spPr>
+          <a:xfrm>
+            <a:off x="457200" y="274320"/>
+            <a:ext cx="8229600" cy="685800"/>
+          </a:xfrm>
+          <a:prstGeom prst="rect">
+            <a:avLst/>
+          </a:prstGeom>
+          <a:noFill/>
+          <a:ln/>
+        </p:spPr>
+        <p:txBody>
+          <a:bodyPr wrap="square" lIns="0" tIns="0" rIns="0" bIns="0" rtlCol="0" anchor="ctr"/>
+          <a:lstStyle/>
+          <a:p>
+            <a:pPr algn="l" indent="0" marL="0">
+              <a:buNone/>
+            </a:pPr>
+            <a:r>
+              <a:rPr lang="en-US" sz="2400" b="1" dirty="0">
+                <a:solidFill>
+                  <a:schemeClr val="tx2"/>
+                </a:solidFill>
+              </a:rPr>
+              <a:t>Limitations to keep in mind</a:t>
+            </a:r>
+            <a:endParaRPr lang="en-US" sz="2400" dirty="0"/>
+          </a:p>
+        </p:txBody>
+      </p:sp>
+      <p:sp>
+        <p:nvSpPr>
+          <p:cNvPr id="3" name="Shape 1"/>
+          <p:cNvSpPr/>
+          <p:nvPr/>
+        </p:nvSpPr>
+        <p:spPr>
+          <a:xfrm>
+            <a:off x="457200" y="1188720"/>
+            <a:ext cx="4023360" cy="1463040"/>
+          </a:xfrm>
+          <a:prstGeom prst="roundRect">
+            <a:avLst>
+              <a:gd name="adj" fmla="val 5000"/>
+            </a:avLst>
+          </a:prstGeom>
+          <a:solidFill>
+            <a:schemeClr val="bg2"/>
+          </a:solidFill>
+          <a:ln/>
+        </p:spPr>
+      </p:sp>
+      <p:sp>
+        <p:nvSpPr>
+          <p:cNvPr id="4" name="Text 2"/>
+          <p:cNvSpPr txBox="1"/>
+          <p:nvPr/>
+        </p:nvSpPr>
+        <p:spPr>
+          <a:xfrm>
+            <a:off x="640080" y="1325880"/>
+            <a:ext cx="3657600" cy="365760"/>
+          </a:xfrm>
+          <a:prstGeom prst="rect">
+            <a:avLst/>
+          </a:prstGeom>
+          <a:noFill/>
+          <a:ln/>
+        </p:spPr>
+        <p:txBody>
+          <a:bodyPr wrap="square" lIns="0" tIns="0" rIns="0" bIns="0" rtlCol="0" anchor="t"/>
+          <a:lstStyle/>
+          <a:p>
+            <a:pPr indent="0" marL="0">
+              <a:buNone/>
+            </a:pPr>
+            <a:r>
+              <a:rPr lang="en-US" sz="1600" b="1" dirty="0">
+                <a:solidFill>
+                  <a:schemeClr val="tx2"/>
+                </a:solidFill>
+              </a:rPr>
+              <a:t>4-bit weights</a:t>
+            </a:r>
+            <a:endParaRPr lang="en-US" sz="1600" dirty="0"/>
+          </a:p>
+        </p:txBody>
+      </p:sp>
+      <p:sp>
+        <p:nvSpPr>
+          <p:cNvPr id="5" name="Text 3"/>
+          <p:cNvSpPr txBox="1"/>
+          <p:nvPr/>
+        </p:nvSpPr>
+        <p:spPr>
+          <a:xfrm>
+            <a:off x="640080" y="1737360"/>
+            <a:ext cx="3657600" cy="822960"/>
+          </a:xfrm>
+          <a:prstGeom prst="rect">
+            <a:avLst/>
+          </a:prstGeom>
+          <a:noFill/>
+          <a:ln/>
+        </p:spPr>
+        <p:txBody>
+          <a:bodyPr wrap="square" lIns="0" tIns="0" rIns="0" bIns="0" rtlCol="0" anchor="t"/>
+          <a:lstStyle/>
+          <a:p>
+            <a:pPr indent="0" marL="0">
+              <a:buNone/>
+            </a:pPr>
+            <a:r>
+              <a:rPr lang="en-US" sz="1400" dirty="0">
+                <a:solidFill>
+                  <a:schemeClr val="tx1"/>
+                </a:solidFill>
+              </a:rPr>
+              <a:t>3B, 7B, 8B and 13B ran quantised (laptop or free Kaggle GPU); 7B still matched the paper.</a:t>
+            </a:r>
+            <a:endParaRPr lang="en-US" sz="1400" dirty="0"/>
+          </a:p>
+        </p:txBody>
+      </p:sp>
+      <p:sp>
+        <p:nvSpPr>
+          <p:cNvPr id="6" name="Shape 4"/>
+          <p:cNvSpPr/>
+          <p:nvPr/>
+        </p:nvSpPr>
+        <p:spPr>
+          <a:xfrm>
+            <a:off x="4663440" y="1188720"/>
+            <a:ext cx="4023360" cy="1463040"/>
+          </a:xfrm>
+          <a:prstGeom prst="roundRect">
+            <a:avLst>
+              <a:gd name="adj" fmla="val 5000"/>
+            </a:avLst>
+          </a:prstGeom>
+          <a:solidFill>
+            <a:schemeClr val="bg2"/>
+          </a:solidFill>
+          <a:ln/>
+        </p:spPr>
+      </p:sp>
+      <p:sp>
+        <p:nvSpPr>
+          <p:cNvPr id="7" name="Text 5"/>
+          <p:cNvSpPr txBox="1"/>
+          <p:nvPr/>
+        </p:nvSpPr>
+        <p:spPr>
+          <a:xfrm>
+            <a:off x="4846320" y="1325880"/>
+            <a:ext cx="3657600" cy="365760"/>
+          </a:xfrm>
+          <a:prstGeom prst="rect">
+            <a:avLst/>
+          </a:prstGeom>
+          <a:noFill/>
+          <a:ln/>
+        </p:spPr>
+        <p:txBody>
+          <a:bodyPr wrap="square" lIns="0" tIns="0" rIns="0" bIns="0" rtlCol="0" anchor="t"/>
+          <a:lstStyle/>
+          <a:p>
+            <a:pPr indent="0" marL="0">
+              <a:buNone/>
+            </a:pPr>
+            <a:r>
+              <a:rPr lang="en-US" sz="1600" b="1" dirty="0">
+                <a:solidFill>
+                  <a:schemeClr val="tx2"/>
+                </a:solidFill>
+              </a:rPr>
+              <a:t>Small Dolly (AC)</a:t>
+            </a:r>
+            <a:endParaRPr lang="en-US" sz="1600" dirty="0"/>
+          </a:p>
+        </p:txBody>
+      </p:sp>
+      <p:sp>
+        <p:nvSpPr>
+          <p:cNvPr id="8" name="Text 6"/>
+          <p:cNvSpPr txBox="1"/>
+          <p:nvPr/>
+        </p:nvSpPr>
+        <p:spPr>
+          <a:xfrm>
+            <a:off x="4846320" y="1737360"/>
+            <a:ext cx="3657600" cy="822960"/>
+          </a:xfrm>
+          <a:prstGeom prst="rect">
+            <a:avLst/>
+          </a:prstGeom>
+          <a:noFill/>
+          <a:ln/>
+        </p:spPr>
+        <p:txBody>
+          <a:bodyPr wrap="square" lIns="0" tIns="0" rIns="0" bIns="0" rtlCol="0" anchor="t"/>
+          <a:lstStyle/>
+          <a:p>
+            <a:pPr indent="0" marL="0">
+              <a:buNone/>
+            </a:pPr>
+            <a:r>
+              <a:rPr lang="en-US" sz="1400" dirty="0">
+                <a:solidFill>
+                  <a:schemeClr val="tx1"/>
+                </a:solidFill>
+              </a:rPr>
+              <a:t>99 responses per model: fold-to-fold spread near 0.08-0.10 AUC.</a:t>
+            </a:r>
+            <a:endParaRPr lang="en-US" sz="1400" dirty="0"/>
+          </a:p>
+        </p:txBody>
+      </p:sp>
+      <p:sp>
+        <p:nvSpPr>
+          <p:cNvPr id="9" name="Shape 7"/>
+          <p:cNvSpPr/>
+          <p:nvPr/>
+        </p:nvSpPr>
+        <p:spPr>
+          <a:xfrm>
+            <a:off x="457200" y="2834640"/>
+            <a:ext cx="4023360" cy="1463040"/>
+          </a:xfrm>
+          <a:prstGeom prst="roundRect">
+            <a:avLst>
+              <a:gd name="adj" fmla="val 5000"/>
+            </a:avLst>
+          </a:prstGeom>
+          <a:solidFill>
+            <a:schemeClr val="bg2"/>
+          </a:solidFill>
+          <a:ln/>
+        </p:spPr>
+      </p:sp>
+      <p:sp>
+        <p:nvSpPr>
+          <p:cNvPr id="10" name="Text 8"/>
+          <p:cNvSpPr txBox="1"/>
+          <p:nvPr/>
+        </p:nvSpPr>
+        <p:spPr>
+          <a:xfrm>
+            <a:off x="640080" y="2971800"/>
+            <a:ext cx="3657600" cy="365760"/>
+          </a:xfrm>
+          <a:prstGeom prst="rect">
+            <a:avLst/>
+          </a:prstGeom>
+          <a:noFill/>
+          <a:ln/>
+        </p:spPr>
+        <p:txBody>
+          <a:bodyPr wrap="square" lIns="0" tIns="0" rIns="0" bIns="0" rtlCol="0" anchor="t"/>
+          <a:lstStyle/>
+          <a:p>
+            <a:pPr indent="0" marL="0">
+              <a:buNone/>
+            </a:pPr>
+            <a:r>
+              <a:rPr lang="en-US" sz="1600" b="1" dirty="0">
+                <a:solidFill>
+                  <a:schemeClr val="tx2"/>
+                </a:solidFill>
+              </a:rPr>
+              <a:t>Numbers only</a:t>
+            </a:r>
+            <a:endParaRPr lang="en-US" sz="1600" dirty="0"/>
+          </a:p>
+        </p:txBody>
+      </p:sp>
+      <p:sp>
+        <p:nvSpPr>
+          <p:cNvPr id="11" name="Text 9"/>
+          <p:cNvSpPr txBox="1"/>
+          <p:nvPr/>
+        </p:nvSpPr>
+        <p:spPr>
+          <a:xfrm>
+            <a:off x="640080" y="3383280"/>
+            <a:ext cx="3657600" cy="822960"/>
+          </a:xfrm>
+          <a:prstGeom prst="rect">
+            <a:avLst/>
+          </a:prstGeom>
+          <a:noFill/>
+          <a:ln/>
+        </p:spPr>
+        <p:txBody>
+          <a:bodyPr wrap="square" lIns="0" tIns="0" rIns="0" bIns="0" rtlCol="0" anchor="t"/>
+          <a:lstStyle/>
+          <a:p>
+            <a:pPr indent="0" marL="0">
+              <a:buNone/>
+            </a:pPr>
+            <a:r>
+              <a:rPr lang="en-US" sz="1400" dirty="0">
+                <a:solidFill>
+                  <a:schemeClr val="tx1"/>
+                </a:solidFill>
+              </a:rPr>
+              <a:t>The contradiction test corrupts numbers; entity swaps and negations are untested.</a:t>
+            </a:r>
+            <a:endParaRPr lang="en-US" sz="1400" dirty="0"/>
+          </a:p>
+        </p:txBody>
+      </p:sp>
+      <p:sp>
+        <p:nvSpPr>
+          <p:cNvPr id="12" name="Shape 10"/>
+          <p:cNvSpPr/>
+          <p:nvPr/>
+        </p:nvSpPr>
+        <p:spPr>
+          <a:xfrm>
+            <a:off x="4663440" y="2834640"/>
+            <a:ext cx="4023360" cy="1463040"/>
+          </a:xfrm>
+          <a:prstGeom prst="roundRect">
+            <a:avLst>
+              <a:gd name="adj" fmla="val 5000"/>
+            </a:avLst>
+          </a:prstGeom>
+          <a:solidFill>
+            <a:schemeClr val="bg2"/>
+          </a:solidFill>
+          <a:ln/>
+        </p:spPr>
+      </p:sp>
+      <p:sp>
+        <p:nvSpPr>
+          <p:cNvPr id="13" name="Text 11"/>
+          <p:cNvSpPr txBox="1"/>
+          <p:nvPr/>
+        </p:nvSpPr>
+        <p:spPr>
+          <a:xfrm>
+            <a:off x="4846320" y="2971800"/>
+            <a:ext cx="3657600" cy="365760"/>
+          </a:xfrm>
+          <a:prstGeom prst="rect">
+            <a:avLst/>
+          </a:prstGeom>
+          <a:noFill/>
+          <a:ln/>
+        </p:spPr>
+        <p:txBody>
+          <a:bodyPr wrap="square" lIns="0" tIns="0" rIns="0" bIns="0" rtlCol="0" anchor="t"/>
+          <a:lstStyle/>
+          <a:p>
+            <a:pPr indent="0" marL="0">
+              <a:buNone/>
+            </a:pPr>
+            <a:r>
+              <a:rPr lang="en-US" sz="1600" b="1" dirty="0">
+                <a:solidFill>
+                  <a:schemeClr val="tx2"/>
+                </a:solidFill>
+              </a:rPr>
+              <a:t>Free-tier judges</a:t>
+            </a:r>
+            <a:endParaRPr lang="en-US" sz="1600" dirty="0"/>
+          </a:p>
+        </p:txBody>
+      </p:sp>
+      <p:sp>
+        <p:nvSpPr>
+          <p:cNvPr id="14" name="Text 12"/>
+          <p:cNvSpPr txBox="1"/>
+          <p:nvPr/>
+        </p:nvSpPr>
+        <p:spPr>
+          <a:xfrm>
+            <a:off x="4846320" y="3383280"/>
+            <a:ext cx="3657600" cy="822960"/>
+          </a:xfrm>
+          <a:prstGeom prst="rect">
+            <a:avLst/>
+          </a:prstGeom>
+          <a:noFill/>
+          <a:ln/>
+        </p:spPr>
+        <p:txBody>
+          <a:bodyPr wrap="square" lIns="0" tIns="0" rIns="0" bIns="0" rtlCol="0" anchor="t"/>
+          <a:lstStyle/>
+          <a:p>
+            <a:pPr indent="0" marL="0">
+              <a:buNone/>
+            </a:pPr>
+            <a:r>
+              <a:rPr lang="en-US" sz="1400" dirty="0">
+                <a:solidFill>
+                  <a:schemeClr val="tx1"/>
+                </a:solidFill>
+              </a:rPr>
+              <a:t>GPT judge is open-weights gpt-oss-120b; Gemini is Flash-Lite instead of GPT-4o.</a:t>
+            </a:r>
+            <a:endParaRPr lang="en-US" sz="1400" dirty="0"/>
+          </a:p>
+        </p:txBody>
+      </p:sp>
+      <p:sp>
+        <p:nvSpPr>
+          <p:cNvPr id="25" name="Slide Number Placeholder 0"/>
+          <p:cNvSpPr>
+            <a:spLocks noGrp="1"/>
+          </p:cNvSpPr>
+          <p:nvPr>
+            <p:ph type="sldNum" sz="quarter" idx="4294967295"/>
+          </p:nvPr>
+        </p:nvSpPr>
+        <p:spPr>
+          <a:xfrm>
+            <a:off x="8229600" y="4754880"/>
+            <a:ext cx="457200" cy="274320"/>
+          </a:xfrm>
+          <a:prstGeom prst="rect">
+            <a:avLst/>
+          </a:prstGeom>
+          <a:extLst>
+            <a:ext uri="{C572A759-6A51-4108-AA02-DFA0A04FC94B}">
+              <ma14:wrappingTextBoxFlag xmlns:ma14="http://schemas.microsoft.com/office/mac/drawingml/2011/main" val="0"/>
+            </a:ext>
+          </a:extLst>
+        </p:spPr>
+        <p:txBody>
+          <a:bodyPr/>
+          <a:lstStyle>
+            <a:lvl1pPr>
+              <a:defRPr sz="1000">
+                <a:solidFill>
+                  <a:schemeClr val="accent3"/>
+                </a:solidFill>
+              </a:defRPr>
+            </a:lvl1pPr>
+          </a:lstStyle>
+          <a:p>
+            <a:pPr algn="r"/>
+            <a:fld id="{F7021451-1387-4CA6-816F-3879F97B5CBC}" type="slidenum">
+              <a:rPr b="0" lang="en-US"/>
+              <a:t>14</a:t>
+            </a:fld>
+            <a:endParaRPr lang="en-US"/>
+          </a:p>
+        </p:txBody>
+      </p:sp>
+    </p:spTree>
+  </p:cSld>
+  <p:clrMapOvr>
+    <a:masterClrMapping/>
+  </p:clrMapOvr>
+</p:sld>
+</file>
+
+<file path=ppt/slides/slide15.xml><?xml version="1.0" encoding="utf-8"?>
+<p:sld xmlns:a="http://schemas.openxmlformats.org/drawingml/2006/main" xmlns:r="http://schemas.openxmlformats.org/officeDocument/2006/relationships" xmlns:p="http://schemas.openxmlformats.org/presentationml/2006/main">
+  <p:cSld name="Slide 15">
+    <p:spTree>
+      <p:nvGrpSpPr>
+        <p:cNvPr id="1" name=""/>
+        <p:cNvGrpSpPr/>
+        <p:nvPr/>
+      </p:nvGrpSpPr>
+      <p:grpSpPr>
+        <a:xfrm>
+          <a:off x="0" y="0"/>
+          <a:ext cx="0" cy="0"/>
+          <a:chOff x="0" y="0"/>
+          <a:chExt cx="0" cy="0"/>
+        </a:xfrm>
+      </p:grpSpPr>
+      <p:sp>
+        <p:nvSpPr>
+          <p:cNvPr id="2" name="Text 0"/>
+          <p:cNvSpPr/>
+          <p:nvPr>
+            <p:ph idx="100" type="title" hasCustomPrompt="1"/>
+          </p:nvPr>
+        </p:nvSpPr>
+        <p:spPr>
+          <a:xfrm>
             <a:off x="548640" y="1325880"/>
             <a:ext cx="8046720" cy="1371600"/>
           </a:xfrm>
@@ -4270,7 +8467,7 @@
                   <a:schemeClr val="bg2"/>
                 </a:solidFill>
               </a:rPr>
-              <a:t>Reproduced on a laptop: AUC 0.739 vs. 0.7325 in the paper</a:t>
+              <a:t>Reproduced: AUC 0.739 vs. 0.7325; chunk level matches the authors exactly</a:t>
             </a:r>
             <a:endParaRPr lang="en-US" sz="1800" dirty="0"/>
           </a:p>
@@ -4284,7 +8481,7 @@
                   <a:schemeClr val="bg2"/>
                 </a:solidFill>
               </a:rPr>
-              <a:t>Beats perplexity and entropy on all four LLaMA models</a:t>
+              <a:t>Strongest on Llama-2-13B; mixed on Llama-3-8B</a:t>
             </a:r>
             <a:endParaRPr lang="en-US" sz="1800" dirty="0"/>
           </a:p>
@@ -4298,7 +8495,7 @@
                   <a:schemeClr val="bg2"/>
                 </a:solidFill>
               </a:rPr>
-              <a:t>Blind to contradicted numbers: pair it with a fact-level check</a:t>
+              <a:t>Official evaluation leaks test labels: small on RAGTruth, large on Dolly (AC)</a:t>
             </a:r>
             <a:endParaRPr lang="en-US" sz="1800" dirty="0"/>
           </a:p>
@@ -4312,7 +8509,7 @@
                   <a:schemeClr val="bg2"/>
                 </a:solidFill>
               </a:rPr>
-              <a:t>Large API judges are more accurate; ReDeEP is free, local and private</a:t>
+              <a:t>Blind to contradicted numbers; AARF's gain does not survive a fair judge</a:t>
             </a:r>
             <a:endParaRPr lang="en-US" sz="1800" dirty="0"/>
           </a:p>

--- a/presentation/ReDeEP_presentation.pptx
+++ b/presentation/ReDeEP_presentation.pptx
@@ -20,9 +20,10 @@
     <p:sldId id="268" r:id="rId14"/>
     <p:sldId id="269" r:id="rId15"/>
     <p:sldId id="270" r:id="rId16"/>
+    <p:sldId id="271" r:id="rId17"/>
   </p:sldIdLst>
   <p:notesMasterIdLst>
-    <p:notesMasterId r:id="rId17"/>
+    <p:notesMasterId r:id="rId18"/>
   </p:notesMasterIdLst>
   <p:sldSz cx="9144000" cy="5143500"/>
   <p:notesSz cx="5143500" cy="9144000"/>
@@ -121,43 +122,44 @@
   <p:extLst>
     <p:ext uri="{521415D9-36F7-43E2-AB2F-B90AF26B5E84}">
       <p14:sectionLst xmlns:p14="http://schemas.microsoft.com/office/powerpoint/2010/main">
-        <p14:section name="Introduction" id="{0a33fdc9-dac5-1572-fb9e-fea19f53a309}">
+        <p14:section name="Introduction" id="{c79bd64c-27bc-bdbc-8c75-f0362f29d03c}">
           <p14:sldIdLst>
             <p14:sldId id="256"/>
             <p14:sldId id="257"/>
           </p14:sldIdLst>
         </p14:section>
-        <p14:section name="Method" id="{6db351fe-7566-5cce-f51b-25dd765461e2}">
+        <p14:section name="Method" id="{4b7ecf74-ee43-f4b6-c00b-6c7edf53cc22}">
           <p14:sldIdLst>
             <p14:sldId id="258"/>
             <p14:sldId id="259"/>
           </p14:sldIdLst>
         </p14:section>
-        <p14:section name="Results" id="{04ab5fb2-a2e3-2818-3a86-ab56e3d56f33}">
+        <p14:section name="Results" id="{1b0669f4-7fe3-da5d-0f58-6ed7f3e6dff0}">
           <p14:sldIdLst>
             <p14:sldId id="260"/>
             <p14:sldId id="261"/>
           </p14:sldIdLst>
         </p14:section>
-        <p14:section name="Extension" id="{bbacbfdd-3eba-d925-77a0-3f52065c93d7}">
+        <p14:section name="Extension" id="{cd230caa-5303-2574-444e-a5b611f00677}">
           <p14:sldIdLst>
             <p14:sldId id="262"/>
             <p14:sldId id="263"/>
             <p14:sldId id="264"/>
           </p14:sldIdLst>
         </p14:section>
-        <p14:section name="Comparison" id="{1a724dab-8b2f-1d31-0ef6-55374084e332}">
+        <p14:section name="Comparison" id="{4a901f6e-55d6-a085-9cf9-f6fa91386f80}">
           <p14:sldIdLst>
             <p14:sldId id="265"/>
           </p14:sldIdLst>
         </p14:section>
-        <p14:section name="Official code" id="{acfb7b87-3d5c-002e-9b83-541114361f04}">
+        <p14:section name="Official code" id="{3fcfa81b-3977-4cef-18da-8f1239ac8867}">
           <p14:sldIdLst>
             <p14:sldId id="266"/>
             <p14:sldId id="267"/>
             <p14:sldId id="268"/>
             <p14:sldId id="269"/>
             <p14:sldId id="270"/>
+            <p14:sldId id="271"/>
           </p14:sldIdLst>
         </p14:section>
       </p14:sectionLst>
@@ -2673,6 +2675,94 @@
 </p:notes>
 </file>
 
+<file path=ppt/notesSlides/notesSlide16.xml><?xml version="1.0" encoding="utf-8"?>
+<p:notes xmlns:a="http://schemas.openxmlformats.org/drawingml/2006/main" xmlns:r="http://schemas.openxmlformats.org/officeDocument/2006/relationships" xmlns:p="http://schemas.openxmlformats.org/presentationml/2006/main">
+  <p:cSld>
+    <p:spTree>
+      <p:nvGrpSpPr>
+        <p:cNvPr id="1" name=""/>
+        <p:cNvGrpSpPr/>
+        <p:nvPr/>
+      </p:nvGrpSpPr>
+      <p:grpSpPr>
+        <a:xfrm>
+          <a:off x="0" y="0"/>
+          <a:ext cx="0" cy="0"/>
+          <a:chOff x="0" y="0"/>
+          <a:chExt cx="0" cy="0"/>
+        </a:xfrm>
+      </p:grpSpPr>
+      <p:sp>
+        <p:nvSpPr>
+          <p:cNvPr id="2" name="Slide Image Placeholder 1"/>
+          <p:cNvSpPr>
+            <a:spLocks noGrp="1" noRot="1" noChangeAspect="1"/>
+          </p:cNvSpPr>
+          <p:nvPr>
+            <p:ph type="sldImg"/>
+          </p:nvPr>
+        </p:nvSpPr>
+        <p:spPr/>
+      </p:sp>
+      <p:sp>
+        <p:nvSpPr>
+          <p:cNvPr id="3" name="Notes Placeholder 2"/>
+          <p:cNvSpPr>
+            <a:spLocks noGrp="1"/>
+          </p:cNvSpPr>
+          <p:nvPr>
+            <p:ph type="body" idx="1"/>
+          </p:nvPr>
+        </p:nvSpPr>
+        <p:spPr/>
+        <p:txBody>
+          <a:bodyPr/>
+          <a:lstStyle/>
+          <a:p>
+            <a:r>
+              <a:rPr lang="en-US" dirty="0"/>
+              <a:t>Questions. All numbers in the report and slides are generated from the result files in the repository.</a:t>
+            </a:r>
+            <a:endParaRPr lang="en-US" dirty="0"/>
+          </a:p>
+        </p:txBody>
+      </p:sp>
+      <p:sp>
+        <p:nvSpPr>
+          <p:cNvPr id="4" name="Slide Number Placeholder 3"/>
+          <p:cNvSpPr>
+            <a:spLocks noGrp="1"/>
+          </p:cNvSpPr>
+          <p:nvPr>
+            <p:ph type="sldNum" sz="quarter" idx="10"/>
+          </p:nvPr>
+        </p:nvSpPr>
+        <p:spPr/>
+        <p:txBody>
+          <a:bodyPr/>
+          <a:lstStyle/>
+          <a:p>
+            <a:fld id="{F7021451-1387-4CA6-816F-3879F97B5CBC}" type="slidenum">
+              <a:rPr lang="en-US"/>
+              <a:t>16</a:t>
+            </a:fld>
+            <a:endParaRPr lang="en-US"/>
+          </a:p>
+        </p:txBody>
+      </p:sp>
+    </p:spTree>
+    <p:extLst>
+      <p:ext uri="{BB962C8B-B14F-4D97-AF65-F5344CB8AC3E}">
+        <p14:creationId xmlns:p14="http://schemas.microsoft.com/office/powerpoint/2010/main" val="1024086991"/>
+      </p:ext>
+    </p:extLst>
+  </p:cSld>
+  <p:clrMapOvr>
+    <a:masterClrMapping/>
+  </p:clrMapOvr>
+</p:notes>
+</file>
+
 <file path=ppt/notesSlides/notesSlide2.xml><?xml version="1.0" encoding="utf-8"?>
 <p:notes xmlns:a="http://schemas.openxmlformats.org/drawingml/2006/main" xmlns:r="http://schemas.openxmlformats.org/officeDocument/2006/relationships" xmlns:p="http://schemas.openxmlformats.org/presentationml/2006/main">
   <p:cSld>
@@ -4080,7 +4170,7 @@
                   <a:schemeClr val="bg2"/>
                 </a:solidFill>
               </a:rPr>
-              <a:t>A reproduction and robustness study on a 6 GB laptop GPU</a:t>
+              <a:t>A reproduction and robustness study  |  IOE-414 Deep Learning, IIIT Kottayam</a:t>
             </a:r>
             <a:endParaRPr lang="en-US" sz="1800" dirty="0"/>
           </a:p>
@@ -4094,7 +4184,21 @@
                   <a:schemeClr val="bg2"/>
                 </a:solidFill>
               </a:rPr>
-              <a:t>Gourilakshmi S (23BCS21) &amp; Adithya K (23BCS51)</a:t>
+              <a:t>Gourilakshmi S (2023BCS0021) &amp; Adithya K (2023BCS0051)</a:t>
+            </a:r>
+            <a:endParaRPr lang="en-US" sz="1800" dirty="0"/>
+          </a:p>
+          <a:p>
+            <a:pPr indent="0" marL="0">
+              <a:buNone/>
+            </a:pPr>
+            <a:r>
+              <a:rPr lang="en-US" sz="1800" dirty="0">
+                <a:solidFill>
+                  <a:schemeClr val="bg2"/>
+                </a:solidFill>
+              </a:rPr>
+              <a:t>github.com/ad1thyaaa/ReDeEP-Reproduction-Robustness</a:t>
             </a:r>
             <a:endParaRPr lang="en-US" sz="1800" dirty="0"/>
           </a:p>
@@ -8510,6 +8614,135 @@
                 </a:solidFill>
               </a:rPr>
               <a:t>Blind to contradicted numbers; AARF's gain does not survive a fair judge</a:t>
+            </a:r>
+            <a:endParaRPr lang="en-US" sz="1800" dirty="0"/>
+          </a:p>
+        </p:txBody>
+      </p:sp>
+    </p:spTree>
+  </p:cSld>
+  <p:clrMapOvr>
+    <a:masterClrMapping/>
+  </p:clrMapOvr>
+</p:sld>
+</file>
+
+<file path=ppt/slides/slide16.xml><?xml version="1.0" encoding="utf-8"?>
+<p:sld xmlns:a="http://schemas.openxmlformats.org/drawingml/2006/main" xmlns:r="http://schemas.openxmlformats.org/officeDocument/2006/relationships" xmlns:p="http://schemas.openxmlformats.org/presentationml/2006/main">
+  <p:cSld name="Slide 16">
+    <p:spTree>
+      <p:nvGrpSpPr>
+        <p:cNvPr id="1" name=""/>
+        <p:cNvGrpSpPr/>
+        <p:nvPr/>
+      </p:nvGrpSpPr>
+      <p:grpSpPr>
+        <a:xfrm>
+          <a:off x="0" y="0"/>
+          <a:ext cx="0" cy="0"/>
+          <a:chOff x="0" y="0"/>
+          <a:chExt cx="0" cy="0"/>
+        </a:xfrm>
+      </p:grpSpPr>
+      <p:sp>
+        <p:nvSpPr>
+          <p:cNvPr id="2" name="Text 0"/>
+          <p:cNvSpPr/>
+          <p:nvPr>
+            <p:ph idx="100" type="title" hasCustomPrompt="1"/>
+          </p:nvPr>
+        </p:nvSpPr>
+        <p:spPr>
+          <a:xfrm>
+            <a:off x="548640" y="1325880"/>
+            <a:ext cx="8046720" cy="1371600"/>
+          </a:xfrm>
+          <a:prstGeom prst="rect">
+            <a:avLst/>
+          </a:prstGeom>
+          <a:noFill/>
+          <a:ln/>
+        </p:spPr>
+        <p:txBody>
+          <a:bodyPr wrap="square" lIns="0" tIns="0" rIns="0" bIns="0" rtlCol="0" anchor="b"/>
+          <a:lstStyle/>
+          <a:p>
+            <a:pPr algn="l" indent="0" marL="0">
+              <a:buNone/>
+            </a:pPr>
+            <a:r>
+              <a:rPr lang="en-US" sz="3800" b="1" dirty="0">
+                <a:solidFill>
+                  <a:schemeClr val="bg1"/>
+                </a:solidFill>
+              </a:rPr>
+              <a:t>Thank you</a:t>
+            </a:r>
+            <a:endParaRPr lang="en-US" sz="3800" dirty="0"/>
+          </a:p>
+        </p:txBody>
+      </p:sp>
+      <p:sp>
+        <p:nvSpPr>
+          <p:cNvPr id="3" name="Text 0"/>
+          <p:cNvSpPr/>
+          <p:nvPr>
+            <p:ph idx="101" type="body" hasCustomPrompt="1"/>
+          </p:nvPr>
+        </p:nvSpPr>
+        <p:spPr>
+          <a:xfrm>
+            <a:off x="548640" y="2880360"/>
+            <a:ext cx="8046720" cy="1097280"/>
+          </a:xfrm>
+          <a:prstGeom prst="rect">
+            <a:avLst/>
+          </a:prstGeom>
+          <a:noFill/>
+          <a:ln/>
+        </p:spPr>
+        <p:txBody>
+          <a:bodyPr wrap="square" lIns="0" tIns="0" rIns="0" bIns="0" rtlCol="0" anchor="t"/>
+          <a:lstStyle/>
+          <a:p>
+            <a:pPr indent="0" marL="0">
+              <a:buNone/>
+            </a:pPr>
+            <a:r>
+              <a:rPr lang="en-US" sz="1800" dirty="0">
+                <a:solidFill>
+                  <a:schemeClr val="bg2"/>
+                </a:solidFill>
+              </a:rPr>
+              <a:t>Code, results and report: github.com/ad1thyaaa/ReDeEP-Reproduction-Robustness</a:t>
+            </a:r>
+            <a:endParaRPr lang="en-US" sz="1800" dirty="0"/>
+          </a:p>
+          <a:p>
+            <a:pPr indent="0" marL="0">
+              <a:buNone/>
+            </a:pPr>
+            <a:r>
+              <a:rPr lang="en-US" sz="1800" dirty="0">
+                <a:solidFill>
+                  <a:schemeClr val="bg2"/>
+                </a:solidFill>
+              </a:rPr>
+              <a:t>Base paper: Sun et al., ReDeEP, ICLR 2025 (doi.org/10.48550/arXiv.2410.11414)</a:t>
+            </a:r>
+            <a:endParaRPr lang="en-US" sz="1800" dirty="0"/>
+          </a:p>
+          <a:p>
+            <a:pPr indent="0" marL="0">
+              <a:buNone/>
+            </a:pPr>
+            <a:r>
+              <a:rPr lang="en-US" sz="1800" dirty="0">
+                <a:solidFill>
+                  <a:schemeClr val="bg2"/>
+                </a:solidFill>
+              </a:rPr>
+              <a:t>Official code and data: github.com/Jeryi-Sun/ReDEeP-ICLR  |  RAGTruth: github.com/ParticleMedia/RAGTruth</a:t>
             </a:r>
             <a:endParaRPr lang="en-US" sz="1800" dirty="0"/>
           </a:p>

--- a/presentation/ReDeEP_presentation.pptx
+++ b/presentation/ReDeEP_presentation.pptx
@@ -21,9 +21,11 @@
     <p:sldId id="269" r:id="rId15"/>
     <p:sldId id="270" r:id="rId16"/>
     <p:sldId id="271" r:id="rId17"/>
+    <p:sldId id="272" r:id="rId18"/>
+    <p:sldId id="273" r:id="rId19"/>
   </p:sldIdLst>
   <p:notesMasterIdLst>
-    <p:notesMasterId r:id="rId18"/>
+    <p:notesMasterId r:id="rId20"/>
   </p:notesMasterIdLst>
   <p:sldSz cx="9144000" cy="5143500"/>
   <p:notesSz cx="5143500" cy="9144000"/>
@@ -122,44 +124,46 @@
   <p:extLst>
     <p:ext uri="{521415D9-36F7-43E2-AB2F-B90AF26B5E84}">
       <p14:sectionLst xmlns:p14="http://schemas.microsoft.com/office/powerpoint/2010/main">
-        <p14:section name="Introduction" id="{c79bd64c-27bc-bdbc-8c75-f0362f29d03c}">
+        <p14:section name="Introduction" id="{c7e54a4d-bf2b-ca4b-c16c-978dfaad3edd}">
           <p14:sldIdLst>
             <p14:sldId id="256"/>
             <p14:sldId id="257"/>
           </p14:sldIdLst>
         </p14:section>
-        <p14:section name="Method" id="{4b7ecf74-ee43-f4b6-c00b-6c7edf53cc22}">
+        <p14:section name="Method" id="{605549fb-f07f-f14a-6020-4decec0d3d70}">
           <p14:sldIdLst>
             <p14:sldId id="258"/>
             <p14:sldId id="259"/>
-          </p14:sldIdLst>
-        </p14:section>
-        <p14:section name="Results" id="{1b0669f4-7fe3-da5d-0f58-6ed7f3e6dff0}">
-          <p14:sldIdLst>
             <p14:sldId id="260"/>
             <p14:sldId id="261"/>
           </p14:sldIdLst>
         </p14:section>
-        <p14:section name="Extension" id="{cd230caa-5303-2574-444e-a5b611f00677}">
+        <p14:section name="Results" id="{c8ac37eb-f596-a9c8-da54-b78100bcd3cc}">
           <p14:sldIdLst>
             <p14:sldId id="262"/>
             <p14:sldId id="263"/>
-            <p14:sldId id="264"/>
           </p14:sldIdLst>
         </p14:section>
-        <p14:section name="Comparison" id="{4a901f6e-55d6-a085-9cf9-f6fa91386f80}">
+        <p14:section name="Extension" id="{36cba2bc-492f-f5a3-0233-8ab32dc1e1a4}">
           <p14:sldIdLst>
+            <p14:sldId id="264"/>
             <p14:sldId id="265"/>
+            <p14:sldId id="266"/>
           </p14:sldIdLst>
         </p14:section>
-        <p14:section name="Official code" id="{3fcfa81b-3977-4cef-18da-8f1239ac8867}">
+        <p14:section name="Comparison" id="{c76eefab-8370-7957-1140-6b7367d77cff}">
           <p14:sldIdLst>
-            <p14:sldId id="266"/>
             <p14:sldId id="267"/>
+          </p14:sldIdLst>
+        </p14:section>
+        <p14:section name="Official code" id="{d9234937-53f1-5384-6436-5645a880f79a}">
+          <p14:sldIdLst>
             <p14:sldId id="268"/>
             <p14:sldId id="269"/>
             <p14:sldId id="270"/>
             <p14:sldId id="271"/>
+            <p14:sldId id="272"/>
+            <p14:sldId id="273"/>
           </p14:sldIdLst>
         </p14:section>
       </p14:sectionLst>
@@ -2193,7 +2197,7 @@
           <a:p>
             <a:r>
               <a:rPr lang="en-US" dirty="0"/>
-              <a:t>GPT-family judge: OpenAI's open-weights gpt-oss-120b via Groq's free tier. Gemini: 3.5 Flash-Lite via the free tier. All judges and ReDeEP are scored on the same held-out split.</a:t>
+              <a:t>Llama-2-7B: score -0.010 (p=5.7e-6), ECS rises 0.282 to 0.310. TinyLlama: +0.005, p=0.40.</a:t>
             </a:r>
             <a:endParaRPr lang="en-US" dirty="0"/>
           </a:p>
@@ -2281,7 +2285,7 @@
           <a:p>
             <a:r>
               <a:rPr lang="en-US" dirty="0"/>
-              <a:t>Chunk-level ECS uses BGE embeddings of the most-attended prompt chunk, as in the official code; our features agree with the authors' logged values head by head in 148/160 spot checks.</a:t>
+              <a:t>The paper scopes ReDeEP to RAG hallucination with accurate context; this test shows what happens just outside that scope.</a:t>
             </a:r>
             <a:endParaRPr lang="en-US" dirty="0"/>
           </a:p>
@@ -2369,7 +2373,7 @@
           <a:p>
             <a:r>
               <a:rPr lang="en-US" dirty="0"/>
-              <a:t>We first reproduced the authors' exact stored result (AUC 0.7473) from their own logs, then moved feature and hyperparameter selection into training folds.</a:t>
+              <a:t>GPT-family judge: OpenAI's open-weights gpt-oss-120b via Groq's free tier. Gemini: 3.5 Flash-Lite via the free tier. All judges and ReDeEP are scored on the same held-out split.</a:t>
             </a:r>
             <a:endParaRPr lang="en-US" dirty="0"/>
           </a:p>
@@ -2457,7 +2461,7 @@
           <a:p>
             <a:r>
               <a:rPr lang="en-US" dirty="0"/>
-              <a:t>AARF: amplify copying heads x1.2 and damp knowledge FFNs x0.8 when the token hallucination score exceeds 0.6. Authors judged with GPT-4o in a fixed order (AARF first).</a:t>
+              <a:t>Chunk-level ECS uses BGE embeddings of the most-attended prompt chunk, as in the official code; our features agree with the authors' logged values head by head in 148/160 spot checks.</a:t>
             </a:r>
             <a:endParaRPr lang="en-US" dirty="0"/>
           </a:p>
@@ -2545,7 +2549,7 @@
           <a:p>
             <a:r>
               <a:rPr lang="en-US" dirty="0"/>
-              <a:t>Also: copying heads scored on 500 sampled vocabulary tokens; 415 responses give fold std of 0.03-0.05 AUC.</a:t>
+              <a:t>We first reproduced the authors' exact stored result (AUC 0.7473) from their own logs, then moved feature and hyperparameter selection into training folds.</a:t>
             </a:r>
             <a:endParaRPr lang="en-US" dirty="0"/>
           </a:p>
@@ -2633,7 +2637,7 @@
           <a:p>
             <a:r>
               <a:rPr lang="en-US" dirty="0"/>
-              <a:t>Future work: entity and negation corruptions; combine ECS with a numeric consistency check; run at full precision on a larger GPU; score responses generated by each backbone.</a:t>
+              <a:t>AARF: amplify copying heads x1.2 and damp knowledge FFNs x0.8 when the token hallucination score exceeds 0.6. Authors judged with GPT-4o in a fixed order (AARF first).</a:t>
             </a:r>
             <a:endParaRPr lang="en-US" dirty="0"/>
           </a:p>
@@ -2721,7 +2725,7 @@
           <a:p>
             <a:r>
               <a:rPr lang="en-US" dirty="0"/>
-              <a:t>Questions. All numbers in the report and slides are generated from the result files in the repository.</a:t>
+              <a:t>Also: copying heads scored on 500 sampled vocabulary tokens; 415 responses give fold std of 0.03-0.05 AUC.</a:t>
             </a:r>
             <a:endParaRPr lang="en-US" dirty="0"/>
           </a:p>
@@ -2745,6 +2749,182 @@
             <a:fld id="{F7021451-1387-4CA6-816F-3879F97B5CBC}" type="slidenum">
               <a:rPr lang="en-US"/>
               <a:t>16</a:t>
+            </a:fld>
+            <a:endParaRPr lang="en-US"/>
+          </a:p>
+        </p:txBody>
+      </p:sp>
+    </p:spTree>
+    <p:extLst>
+      <p:ext uri="{BB962C8B-B14F-4D97-AF65-F5344CB8AC3E}">
+        <p14:creationId xmlns:p14="http://schemas.microsoft.com/office/powerpoint/2010/main" val="1024086991"/>
+      </p:ext>
+    </p:extLst>
+  </p:cSld>
+  <p:clrMapOvr>
+    <a:masterClrMapping/>
+  </p:clrMapOvr>
+</p:notes>
+</file>
+
+<file path=ppt/notesSlides/notesSlide17.xml><?xml version="1.0" encoding="utf-8"?>
+<p:notes xmlns:a="http://schemas.openxmlformats.org/drawingml/2006/main" xmlns:r="http://schemas.openxmlformats.org/officeDocument/2006/relationships" xmlns:p="http://schemas.openxmlformats.org/presentationml/2006/main">
+  <p:cSld>
+    <p:spTree>
+      <p:nvGrpSpPr>
+        <p:cNvPr id="1" name=""/>
+        <p:cNvGrpSpPr/>
+        <p:nvPr/>
+      </p:nvGrpSpPr>
+      <p:grpSpPr>
+        <a:xfrm>
+          <a:off x="0" y="0"/>
+          <a:ext cx="0" cy="0"/>
+          <a:chOff x="0" y="0"/>
+          <a:chExt cx="0" cy="0"/>
+        </a:xfrm>
+      </p:grpSpPr>
+      <p:sp>
+        <p:nvSpPr>
+          <p:cNvPr id="2" name="Slide Image Placeholder 1"/>
+          <p:cNvSpPr>
+            <a:spLocks noGrp="1" noRot="1" noChangeAspect="1"/>
+          </p:cNvSpPr>
+          <p:nvPr>
+            <p:ph type="sldImg"/>
+          </p:nvPr>
+        </p:nvSpPr>
+        <p:spPr/>
+      </p:sp>
+      <p:sp>
+        <p:nvSpPr>
+          <p:cNvPr id="3" name="Notes Placeholder 2"/>
+          <p:cNvSpPr>
+            <a:spLocks noGrp="1"/>
+          </p:cNvSpPr>
+          <p:nvPr>
+            <p:ph type="body" idx="1"/>
+          </p:nvPr>
+        </p:nvSpPr>
+        <p:spPr/>
+        <p:txBody>
+          <a:bodyPr/>
+          <a:lstStyle/>
+          <a:p>
+            <a:r>
+              <a:rPr lang="en-US" dirty="0"/>
+              <a:t>Future work: entity and negation corruptions; combine ECS with a numeric consistency check; run at full precision on a larger GPU; score responses generated by each backbone.</a:t>
+            </a:r>
+            <a:endParaRPr lang="en-US" dirty="0"/>
+          </a:p>
+        </p:txBody>
+      </p:sp>
+      <p:sp>
+        <p:nvSpPr>
+          <p:cNvPr id="4" name="Slide Number Placeholder 3"/>
+          <p:cNvSpPr>
+            <a:spLocks noGrp="1"/>
+          </p:cNvSpPr>
+          <p:nvPr>
+            <p:ph type="sldNum" sz="quarter" idx="10"/>
+          </p:nvPr>
+        </p:nvSpPr>
+        <p:spPr/>
+        <p:txBody>
+          <a:bodyPr/>
+          <a:lstStyle/>
+          <a:p>
+            <a:fld id="{F7021451-1387-4CA6-816F-3879F97B5CBC}" type="slidenum">
+              <a:rPr lang="en-US"/>
+              <a:t>17</a:t>
+            </a:fld>
+            <a:endParaRPr lang="en-US"/>
+          </a:p>
+        </p:txBody>
+      </p:sp>
+    </p:spTree>
+    <p:extLst>
+      <p:ext uri="{BB962C8B-B14F-4D97-AF65-F5344CB8AC3E}">
+        <p14:creationId xmlns:p14="http://schemas.microsoft.com/office/powerpoint/2010/main" val="1024086991"/>
+      </p:ext>
+    </p:extLst>
+  </p:cSld>
+  <p:clrMapOvr>
+    <a:masterClrMapping/>
+  </p:clrMapOvr>
+</p:notes>
+</file>
+
+<file path=ppt/notesSlides/notesSlide18.xml><?xml version="1.0" encoding="utf-8"?>
+<p:notes xmlns:a="http://schemas.openxmlformats.org/drawingml/2006/main" xmlns:r="http://schemas.openxmlformats.org/officeDocument/2006/relationships" xmlns:p="http://schemas.openxmlformats.org/presentationml/2006/main">
+  <p:cSld>
+    <p:spTree>
+      <p:nvGrpSpPr>
+        <p:cNvPr id="1" name=""/>
+        <p:cNvGrpSpPr/>
+        <p:nvPr/>
+      </p:nvGrpSpPr>
+      <p:grpSpPr>
+        <a:xfrm>
+          <a:off x="0" y="0"/>
+          <a:ext cx="0" cy="0"/>
+          <a:chOff x="0" y="0"/>
+          <a:chExt cx="0" cy="0"/>
+        </a:xfrm>
+      </p:grpSpPr>
+      <p:sp>
+        <p:nvSpPr>
+          <p:cNvPr id="2" name="Slide Image Placeholder 1"/>
+          <p:cNvSpPr>
+            <a:spLocks noGrp="1" noRot="1" noChangeAspect="1"/>
+          </p:cNvSpPr>
+          <p:nvPr>
+            <p:ph type="sldImg"/>
+          </p:nvPr>
+        </p:nvSpPr>
+        <p:spPr/>
+      </p:sp>
+      <p:sp>
+        <p:nvSpPr>
+          <p:cNvPr id="3" name="Notes Placeholder 2"/>
+          <p:cNvSpPr>
+            <a:spLocks noGrp="1"/>
+          </p:cNvSpPr>
+          <p:nvPr>
+            <p:ph type="body" idx="1"/>
+          </p:nvPr>
+        </p:nvSpPr>
+        <p:spPr/>
+        <p:txBody>
+          <a:bodyPr/>
+          <a:lstStyle/>
+          <a:p>
+            <a:r>
+              <a:rPr lang="en-US" dirty="0"/>
+              <a:t>Questions. All numbers in the report and slides are generated from the result files in the repository.</a:t>
+            </a:r>
+            <a:endParaRPr lang="en-US" dirty="0"/>
+          </a:p>
+        </p:txBody>
+      </p:sp>
+      <p:sp>
+        <p:nvSpPr>
+          <p:cNvPr id="4" name="Slide Number Placeholder 3"/>
+          <p:cNvSpPr>
+            <a:spLocks noGrp="1"/>
+          </p:cNvSpPr>
+          <p:nvPr>
+            <p:ph type="sldNum" sz="quarter" idx="10"/>
+          </p:nvPr>
+        </p:nvSpPr>
+        <p:spPr/>
+        <p:txBody>
+          <a:bodyPr/>
+          <a:lstStyle/>
+          <a:p>
+            <a:fld id="{F7021451-1387-4CA6-816F-3879F97B5CBC}" type="slidenum">
+              <a:rPr lang="en-US"/>
+              <a:t>18</a:t>
             </a:fld>
             <a:endParaRPr lang="en-US"/>
           </a:p>
@@ -2985,7 +3165,7 @@
           <a:p>
             <a:r>
               <a:rPr lang="en-US" dirty="0"/>
-              <a:t>Engineering: forward hooks keep only top-k attention positions per layer instead of full attention maps, which lets 7B fit in 6 GB. Verified identical to the original implementation to within 6e-8.</a:t>
+              <a:t>Averages and examples use heads/layers fitted on all 415 answers, for illustration; the AUC column for the final score is out-of-fold (5-fold CV). ECS is a cosine similarity (range about 0.1-0.5 here); PKS is a Jensen-Shannon divergence averaged over the 5 knowledge FFN layers.</a:t>
             </a:r>
             <a:endParaRPr lang="en-US" dirty="0"/>
           </a:p>
@@ -3073,7 +3253,7 @@
           <a:p>
             <a:r>
               <a:rPr lang="en-US" dirty="0"/>
-              <a:t>PCC 0.427 vs paper 0.3979. Achieved on a laptop GPU with 4-bit weights.</a:t>
+              <a:t>The ROC curve plots the share of hallucinations caught against the share of truthful answers wrongly flagged as the threshold slides from 1 to 0; AUC is the area under it. We report mean AUC over 5-fold cross-validation.</a:t>
             </a:r>
             <a:endParaRPr lang="en-US" dirty="0"/>
           </a:p>
@@ -3161,7 +3341,7 @@
           <a:p>
             <a:r>
               <a:rPr lang="en-US" dirty="0"/>
-              <a:t>Fold standard deviations: ReDeEP 0.03-0.05, baselines 0.06-0.08. Differences between backbones under ~0.05 are within noise.</a:t>
+              <a:t>Engineering: forward hooks keep only top-k attention positions per layer instead of full attention maps, which lets 7B fit in 6 GB. Verified identical to the original implementation to within 6e-8.</a:t>
             </a:r>
             <a:endParaRPr lang="en-US" dirty="0"/>
           </a:p>
@@ -3249,7 +3429,7 @@
           <a:p>
             <a:r>
               <a:rPr lang="en-US" dirty="0"/>
-              <a:t>Tested on TinyLlama-1.1B and Llama-2-7B. Paired Wilcoxon signed-rank test on the per-response score change.</a:t>
+              <a:t>PCC 0.427 vs paper 0.3979. Achieved on a laptop GPU with 4-bit weights.</a:t>
             </a:r>
             <a:endParaRPr lang="en-US" dirty="0"/>
           </a:p>
@@ -3337,7 +3517,7 @@
           <a:p>
             <a:r>
               <a:rPr lang="en-US" dirty="0"/>
-              <a:t>Llama-2-7B: score -0.010 (p=5.7e-6), ECS rises 0.282 to 0.310. TinyLlama: +0.005, p=0.40.</a:t>
+              <a:t>Fold standard deviations: ReDeEP 0.03-0.05, baselines 0.06-0.08. Differences between backbones under ~0.05 are within noise.</a:t>
             </a:r>
             <a:endParaRPr lang="en-US" dirty="0"/>
           </a:p>
@@ -3425,7 +3605,7 @@
           <a:p>
             <a:r>
               <a:rPr lang="en-US" dirty="0"/>
-              <a:t>The paper scopes ReDeEP to RAG hallucination with accurate context; this test shows what happens just outside that scope.</a:t>
+              <a:t>Tested on TinyLlama-1.1B and Llama-2-7B. Paired Wilcoxon signed-rank test on the per-response score change.</a:t>
             </a:r>
             <a:endParaRPr lang="en-US" dirty="0"/>
           </a:p>
@@ -4261,7 +4441,7 @@
                   <a:schemeClr val="tx2"/>
                 </a:solidFill>
               </a:rPr>
-              <a:t>Large API judges beat ReDeEP on accuracy; ReDeEP wins on cost</a:t>
+              <a:t>It flags off-topic passages but misses contradicted numbers</a:t>
             </a:r>
             <a:endParaRPr lang="en-US" sz="2400" dirty="0"/>
           </a:p>
@@ -4275,7 +4455,7 @@
         </p:nvGraphicFramePr>
         <p:xfrm>
           <a:off x="457200" y="1051560"/>
-          <a:ext cx="5577840" cy="3566160"/>
+          <a:ext cx="4572000" cy="3566160"/>
         </p:xfrm>
         <a:graphic xmlns:a="http://schemas.openxmlformats.org/drawingml/2006/main">
           <a:graphicData uri="http://schemas.openxmlformats.org/drawingml/2006/chart">
@@ -4291,12 +4471,12 @@
         </p:nvSpPr>
         <p:spPr>
           <a:xfrm>
-            <a:off x="6309360" y="1188720"/>
-            <a:ext cx="2377440" cy="3291840"/>
+            <a:off x="5212080" y="1188720"/>
+            <a:ext cx="3474720" cy="3291840"/>
           </a:xfrm>
           <a:prstGeom prst="roundRect">
             <a:avLst>
-              <a:gd name="adj" fmla="val 3077"/>
+              <a:gd name="adj" fmla="val 2222"/>
             </a:avLst>
           </a:prstGeom>
           <a:solidFill>
@@ -4313,8 +4493,8 @@
         </p:nvSpPr>
         <p:spPr>
           <a:xfrm>
-            <a:off x="6492240" y="1371600"/>
-            <a:ext cx="2057400" cy="3017520"/>
+            <a:off x="5349240" y="1298448"/>
+            <a:ext cx="3200400" cy="274320"/>
           </a:xfrm>
           <a:prstGeom prst="rect">
             <a:avLst/>
@@ -4332,62 +4512,1212 @@
             <a:r>
               <a:rPr lang="en-US" sz="1300" b="1" dirty="0">
                 <a:solidFill>
-                  <a:schemeClr val="tx1"/>
+                  <a:schemeClr val="tx2"/>
                 </a:solidFill>
               </a:rPr>
-              <a:t>Black-box judges </a:t>
-            </a:r>
+              <a:t>Llama-2-7B, average signals</a:t>
+            </a:r>
+            <a:endParaRPr lang="en-US" sz="1300" dirty="0"/>
+          </a:p>
+        </p:txBody>
+      </p:sp>
+      <p:graphicFrame>
+        <p:nvGraphicFramePr>
+          <p:cNvPr id="11" name="Table 0"/>
+          <p:cNvGraphicFramePr>
+            <a:graphicFrameLocks noGrp="1"/>
+          </p:cNvGraphicFramePr>
+          <p:nvPr>
+            <p:extLst>
+              <p:ext uri="{D42A27DB-BD31-4B8C-83A1-F6EECF244321}">
+                <p14:modId xmlns:p14="http://schemas.microsoft.com/office/powerpoint/2010/main" val="1579011935"/>
+              </p:ext>
+            </p:extLst>
+          </p:nvPr>
+        </p:nvGraphicFramePr>
+        <p:xfrm>
+          <a:off x="5349240" y="1645920"/>
+          <a:ext cx="3200400" cy="914400"/>
+        </p:xfrm>
+        <a:graphic>
+          <a:graphicData uri="http://schemas.openxmlformats.org/drawingml/2006/table">
+            <a:tbl>
+              <a:tblPr/>
+              <a:tblGrid>
+                <a:gridCol w="1417320"/>
+                <a:gridCol w="594360"/>
+                <a:gridCol w="594360"/>
+                <a:gridCol w="594360"/>
+              </a:tblGrid>
+              <a:tr h="274320">
+                <a:tc>
+                  <a:txBody>
+                    <a:bodyPr/>
+                    <a:lstStyle/>
+                    <a:p>
+                      <a:pPr algn="l" indent="0" marL="0">
+                        <a:buNone/>
+                      </a:pPr>
+                      <a:r>
+                        <a:rPr lang="en-US" sz="1100" b="1" dirty="0">
+                          <a:solidFill>
+                            <a:srgbClr val="FFFFFF"/>
+                          </a:solidFill>
+                          <a:latin typeface="Calibri" pitchFamily="34" charset="0"/>
+                          <a:ea typeface="Calibri" pitchFamily="34" charset="-122"/>
+                          <a:cs typeface="Calibri" pitchFamily="34" charset="-120"/>
+                        </a:rPr>
+                        <a:t>Passage</a:t>
+                      </a:r>
+                      <a:endParaRPr lang="en-US" sz="1100" dirty="0">
+                        <a:latin typeface="Calibri" charset="0"/>
+                        <a:ea typeface="Calibri" charset="0"/>
+                        <a:cs typeface="Calibri" charset="0"/>
+                      </a:endParaRPr>
+                    </a:p>
+                  </a:txBody>
+                  <a:tcPr marL="91440" marR="91440" marT="45720" marB="45720">
+                    <a:lnL w="6350" cap="flat" cmpd="sng" algn="ctr">
+                      <a:solidFill>
+                        <a:srgbClr val="C9D1D0"/>
+                      </a:solidFill>
+                      <a:prstDash val="solid"/>
+                      <a:round/>
+                      <a:headEnd type="none" w="med" len="med"/>
+                      <a:tailEnd type="none" w="med" len="med"/>
+                    </a:lnL>
+                    <a:lnR w="6350" cap="flat" cmpd="sng" algn="ctr">
+                      <a:solidFill>
+                        <a:srgbClr val="C9D1D0"/>
+                      </a:solidFill>
+                      <a:prstDash val="solid"/>
+                      <a:round/>
+                      <a:headEnd type="none" w="med" len="med"/>
+                      <a:tailEnd type="none" w="med" len="med"/>
+                    </a:lnR>
+                    <a:lnT w="6350" cap="flat" cmpd="sng" algn="ctr">
+                      <a:solidFill>
+                        <a:srgbClr val="C9D1D0"/>
+                      </a:solidFill>
+                      <a:prstDash val="solid"/>
+                      <a:round/>
+                      <a:headEnd type="none" w="med" len="med"/>
+                      <a:tailEnd type="none" w="med" len="med"/>
+                    </a:lnT>
+                    <a:lnB w="6350" cap="flat" cmpd="sng" algn="ctr">
+                      <a:solidFill>
+                        <a:srgbClr val="C9D1D0"/>
+                      </a:solidFill>
+                      <a:prstDash val="solid"/>
+                      <a:round/>
+                      <a:headEnd type="none" w="med" len="med"/>
+                      <a:tailEnd type="none" w="med" len="med"/>
+                    </a:lnB>
+                    <a:solidFill>
+                      <a:srgbClr val="0F3D3E"/>
+                    </a:solidFill>
+                  </a:tcPr>
+                </a:tc>
+                <a:tc>
+                  <a:txBody>
+                    <a:bodyPr/>
+                    <a:lstStyle/>
+                    <a:p>
+                      <a:pPr algn="ctr" indent="0" marL="0">
+                        <a:buNone/>
+                      </a:pPr>
+                      <a:r>
+                        <a:rPr lang="en-US" sz="1100" b="1" dirty="0">
+                          <a:solidFill>
+                            <a:srgbClr val="FFFFFF"/>
+                          </a:solidFill>
+                          <a:latin typeface="Calibri" pitchFamily="34" charset="0"/>
+                          <a:ea typeface="Calibri" pitchFamily="34" charset="-122"/>
+                          <a:cs typeface="Calibri" pitchFamily="34" charset="-120"/>
+                        </a:rPr>
+                        <a:t>ECS</a:t>
+                      </a:r>
+                      <a:endParaRPr lang="en-US" sz="1100" dirty="0">
+                        <a:latin typeface="Calibri" charset="0"/>
+                        <a:ea typeface="Calibri" charset="0"/>
+                        <a:cs typeface="Calibri" charset="0"/>
+                      </a:endParaRPr>
+                    </a:p>
+                  </a:txBody>
+                  <a:tcPr marL="91440" marR="91440" marT="45720" marB="45720">
+                    <a:lnL w="6350" cap="flat" cmpd="sng" algn="ctr">
+                      <a:solidFill>
+                        <a:srgbClr val="C9D1D0"/>
+                      </a:solidFill>
+                      <a:prstDash val="solid"/>
+                      <a:round/>
+                      <a:headEnd type="none" w="med" len="med"/>
+                      <a:tailEnd type="none" w="med" len="med"/>
+                    </a:lnL>
+                    <a:lnR w="6350" cap="flat" cmpd="sng" algn="ctr">
+                      <a:solidFill>
+                        <a:srgbClr val="C9D1D0"/>
+                      </a:solidFill>
+                      <a:prstDash val="solid"/>
+                      <a:round/>
+                      <a:headEnd type="none" w="med" len="med"/>
+                      <a:tailEnd type="none" w="med" len="med"/>
+                    </a:lnR>
+                    <a:lnT w="6350" cap="flat" cmpd="sng" algn="ctr">
+                      <a:solidFill>
+                        <a:srgbClr val="C9D1D0"/>
+                      </a:solidFill>
+                      <a:prstDash val="solid"/>
+                      <a:round/>
+                      <a:headEnd type="none" w="med" len="med"/>
+                      <a:tailEnd type="none" w="med" len="med"/>
+                    </a:lnT>
+                    <a:lnB w="6350" cap="flat" cmpd="sng" algn="ctr">
+                      <a:solidFill>
+                        <a:srgbClr val="C9D1D0"/>
+                      </a:solidFill>
+                      <a:prstDash val="solid"/>
+                      <a:round/>
+                      <a:headEnd type="none" w="med" len="med"/>
+                      <a:tailEnd type="none" w="med" len="med"/>
+                    </a:lnB>
+                    <a:solidFill>
+                      <a:srgbClr val="0F3D3E"/>
+                    </a:solidFill>
+                  </a:tcPr>
+                </a:tc>
+                <a:tc>
+                  <a:txBody>
+                    <a:bodyPr/>
+                    <a:lstStyle/>
+                    <a:p>
+                      <a:pPr algn="ctr" indent="0" marL="0">
+                        <a:buNone/>
+                      </a:pPr>
+                      <a:r>
+                        <a:rPr lang="en-US" sz="1100" b="1" dirty="0">
+                          <a:solidFill>
+                            <a:srgbClr val="FFFFFF"/>
+                          </a:solidFill>
+                          <a:latin typeface="Calibri" pitchFamily="34" charset="0"/>
+                          <a:ea typeface="Calibri" pitchFamily="34" charset="-122"/>
+                          <a:cs typeface="Calibri" pitchFamily="34" charset="-120"/>
+                        </a:rPr>
+                        <a:t>PKS</a:t>
+                      </a:r>
+                      <a:endParaRPr lang="en-US" sz="1100" dirty="0">
+                        <a:latin typeface="Calibri" charset="0"/>
+                        <a:ea typeface="Calibri" charset="0"/>
+                        <a:cs typeface="Calibri" charset="0"/>
+                      </a:endParaRPr>
+                    </a:p>
+                  </a:txBody>
+                  <a:tcPr marL="91440" marR="91440" marT="45720" marB="45720">
+                    <a:lnL w="6350" cap="flat" cmpd="sng" algn="ctr">
+                      <a:solidFill>
+                        <a:srgbClr val="C9D1D0"/>
+                      </a:solidFill>
+                      <a:prstDash val="solid"/>
+                      <a:round/>
+                      <a:headEnd type="none" w="med" len="med"/>
+                      <a:tailEnd type="none" w="med" len="med"/>
+                    </a:lnL>
+                    <a:lnR w="6350" cap="flat" cmpd="sng" algn="ctr">
+                      <a:solidFill>
+                        <a:srgbClr val="C9D1D0"/>
+                      </a:solidFill>
+                      <a:prstDash val="solid"/>
+                      <a:round/>
+                      <a:headEnd type="none" w="med" len="med"/>
+                      <a:tailEnd type="none" w="med" len="med"/>
+                    </a:lnR>
+                    <a:lnT w="6350" cap="flat" cmpd="sng" algn="ctr">
+                      <a:solidFill>
+                        <a:srgbClr val="C9D1D0"/>
+                      </a:solidFill>
+                      <a:prstDash val="solid"/>
+                      <a:round/>
+                      <a:headEnd type="none" w="med" len="med"/>
+                      <a:tailEnd type="none" w="med" len="med"/>
+                    </a:lnT>
+                    <a:lnB w="6350" cap="flat" cmpd="sng" algn="ctr">
+                      <a:solidFill>
+                        <a:srgbClr val="C9D1D0"/>
+                      </a:solidFill>
+                      <a:prstDash val="solid"/>
+                      <a:round/>
+                      <a:headEnd type="none" w="med" len="med"/>
+                      <a:tailEnd type="none" w="med" len="med"/>
+                    </a:lnB>
+                    <a:solidFill>
+                      <a:srgbClr val="0F3D3E"/>
+                    </a:solidFill>
+                  </a:tcPr>
+                </a:tc>
+                <a:tc>
+                  <a:txBody>
+                    <a:bodyPr/>
+                    <a:lstStyle/>
+                    <a:p>
+                      <a:pPr algn="ctr" indent="0" marL="0">
+                        <a:buNone/>
+                      </a:pPr>
+                      <a:r>
+                        <a:rPr lang="en-US" sz="1100" b="1" dirty="0">
+                          <a:solidFill>
+                            <a:srgbClr val="FFFFFF"/>
+                          </a:solidFill>
+                          <a:latin typeface="Calibri" pitchFamily="34" charset="0"/>
+                          <a:ea typeface="Calibri" pitchFamily="34" charset="-122"/>
+                          <a:cs typeface="Calibri" pitchFamily="34" charset="-120"/>
+                        </a:rPr>
+                        <a:t>Score</a:t>
+                      </a:r>
+                      <a:endParaRPr lang="en-US" sz="1100" dirty="0">
+                        <a:latin typeface="Calibri" charset="0"/>
+                        <a:ea typeface="Calibri" charset="0"/>
+                        <a:cs typeface="Calibri" charset="0"/>
+                      </a:endParaRPr>
+                    </a:p>
+                  </a:txBody>
+                  <a:tcPr marL="91440" marR="91440" marT="45720" marB="45720">
+                    <a:lnL w="6350" cap="flat" cmpd="sng" algn="ctr">
+                      <a:solidFill>
+                        <a:srgbClr val="C9D1D0"/>
+                      </a:solidFill>
+                      <a:prstDash val="solid"/>
+                      <a:round/>
+                      <a:headEnd type="none" w="med" len="med"/>
+                      <a:tailEnd type="none" w="med" len="med"/>
+                    </a:lnL>
+                    <a:lnR w="6350" cap="flat" cmpd="sng" algn="ctr">
+                      <a:solidFill>
+                        <a:srgbClr val="C9D1D0"/>
+                      </a:solidFill>
+                      <a:prstDash val="solid"/>
+                      <a:round/>
+                      <a:headEnd type="none" w="med" len="med"/>
+                      <a:tailEnd type="none" w="med" len="med"/>
+                    </a:lnR>
+                    <a:lnT w="6350" cap="flat" cmpd="sng" algn="ctr">
+                      <a:solidFill>
+                        <a:srgbClr val="C9D1D0"/>
+                      </a:solidFill>
+                      <a:prstDash val="solid"/>
+                      <a:round/>
+                      <a:headEnd type="none" w="med" len="med"/>
+                      <a:tailEnd type="none" w="med" len="med"/>
+                    </a:lnT>
+                    <a:lnB w="6350" cap="flat" cmpd="sng" algn="ctr">
+                      <a:solidFill>
+                        <a:srgbClr val="C9D1D0"/>
+                      </a:solidFill>
+                      <a:prstDash val="solid"/>
+                      <a:round/>
+                      <a:headEnd type="none" w="med" len="med"/>
+                      <a:tailEnd type="none" w="med" len="med"/>
+                    </a:lnB>
+                    <a:solidFill>
+                      <a:srgbClr val="0F3D3E"/>
+                    </a:solidFill>
+                  </a:tcPr>
+                </a:tc>
+              </a:tr>
+              <a:tr h="274320">
+                <a:tc>
+                  <a:txBody>
+                    <a:bodyPr/>
+                    <a:lstStyle/>
+                    <a:p>
+                      <a:pPr algn="l" indent="0" marL="0">
+                        <a:buNone/>
+                      </a:pPr>
+                      <a:r>
+                        <a:rPr lang="en-US" sz="1100" dirty="0">
+                          <a:solidFill>
+                            <a:srgbClr val="000000"/>
+                          </a:solidFill>
+                          <a:latin typeface="Calibri" pitchFamily="34" charset="0"/>
+                          <a:ea typeface="Calibri" pitchFamily="34" charset="-122"/>
+                          <a:cs typeface="Calibri" pitchFamily="34" charset="-120"/>
+                        </a:rPr>
+                        <a:t>Accurate</a:t>
+                      </a:r>
+                      <a:endParaRPr lang="en-US" sz="1100" dirty="0">
+                        <a:latin typeface="Calibri" charset="0"/>
+                        <a:ea typeface="Calibri" charset="0"/>
+                        <a:cs typeface="Calibri" charset="0"/>
+                      </a:endParaRPr>
+                    </a:p>
+                  </a:txBody>
+                  <a:tcPr marL="91440" marR="91440" marT="45720" marB="45720">
+                    <a:lnL w="6350" cap="flat" cmpd="sng" algn="ctr">
+                      <a:solidFill>
+                        <a:srgbClr val="C9D1D0"/>
+                      </a:solidFill>
+                      <a:prstDash val="solid"/>
+                      <a:round/>
+                      <a:headEnd type="none" w="med" len="med"/>
+                      <a:tailEnd type="none" w="med" len="med"/>
+                    </a:lnL>
+                    <a:lnR w="6350" cap="flat" cmpd="sng" algn="ctr">
+                      <a:solidFill>
+                        <a:srgbClr val="C9D1D0"/>
+                      </a:solidFill>
+                      <a:prstDash val="solid"/>
+                      <a:round/>
+                      <a:headEnd type="none" w="med" len="med"/>
+                      <a:tailEnd type="none" w="med" len="med"/>
+                    </a:lnR>
+                    <a:lnT w="6350" cap="flat" cmpd="sng" algn="ctr">
+                      <a:solidFill>
+                        <a:srgbClr val="C9D1D0"/>
+                      </a:solidFill>
+                      <a:prstDash val="solid"/>
+                      <a:round/>
+                      <a:headEnd type="none" w="med" len="med"/>
+                      <a:tailEnd type="none" w="med" len="med"/>
+                    </a:lnT>
+                    <a:lnB w="6350" cap="flat" cmpd="sng" algn="ctr">
+                      <a:solidFill>
+                        <a:srgbClr val="C9D1D0"/>
+                      </a:solidFill>
+                      <a:prstDash val="solid"/>
+                      <a:round/>
+                      <a:headEnd type="none" w="med" len="med"/>
+                      <a:tailEnd type="none" w="med" len="med"/>
+                    </a:lnB>
+                    <a:solidFill>
+                      <a:srgbClr val="FFFFFF"/>
+                    </a:solidFill>
+                  </a:tcPr>
+                </a:tc>
+                <a:tc>
+                  <a:txBody>
+                    <a:bodyPr/>
+                    <a:lstStyle/>
+                    <a:p>
+                      <a:pPr algn="ctr" indent="0" marL="0">
+                        <a:buNone/>
+                      </a:pPr>
+                      <a:r>
+                        <a:rPr lang="en-US" sz="1100" dirty="0">
+                          <a:solidFill>
+                            <a:srgbClr val="000000"/>
+                          </a:solidFill>
+                          <a:latin typeface="Calibri" pitchFamily="34" charset="0"/>
+                          <a:ea typeface="Calibri" pitchFamily="34" charset="-122"/>
+                          <a:cs typeface="Calibri" pitchFamily="34" charset="-120"/>
+                        </a:rPr>
+                        <a:t>0.282</a:t>
+                      </a:r>
+                      <a:endParaRPr lang="en-US" sz="1100" dirty="0">
+                        <a:latin typeface="Calibri" charset="0"/>
+                        <a:ea typeface="Calibri" charset="0"/>
+                        <a:cs typeface="Calibri" charset="0"/>
+                      </a:endParaRPr>
+                    </a:p>
+                  </a:txBody>
+                  <a:tcPr marL="91440" marR="91440" marT="45720" marB="45720">
+                    <a:lnL w="6350" cap="flat" cmpd="sng" algn="ctr">
+                      <a:solidFill>
+                        <a:srgbClr val="C9D1D0"/>
+                      </a:solidFill>
+                      <a:prstDash val="solid"/>
+                      <a:round/>
+                      <a:headEnd type="none" w="med" len="med"/>
+                      <a:tailEnd type="none" w="med" len="med"/>
+                    </a:lnL>
+                    <a:lnR w="6350" cap="flat" cmpd="sng" algn="ctr">
+                      <a:solidFill>
+                        <a:srgbClr val="C9D1D0"/>
+                      </a:solidFill>
+                      <a:prstDash val="solid"/>
+                      <a:round/>
+                      <a:headEnd type="none" w="med" len="med"/>
+                      <a:tailEnd type="none" w="med" len="med"/>
+                    </a:lnR>
+                    <a:lnT w="6350" cap="flat" cmpd="sng" algn="ctr">
+                      <a:solidFill>
+                        <a:srgbClr val="C9D1D0"/>
+                      </a:solidFill>
+                      <a:prstDash val="solid"/>
+                      <a:round/>
+                      <a:headEnd type="none" w="med" len="med"/>
+                      <a:tailEnd type="none" w="med" len="med"/>
+                    </a:lnT>
+                    <a:lnB w="6350" cap="flat" cmpd="sng" algn="ctr">
+                      <a:solidFill>
+                        <a:srgbClr val="C9D1D0"/>
+                      </a:solidFill>
+                      <a:prstDash val="solid"/>
+                      <a:round/>
+                      <a:headEnd type="none" w="med" len="med"/>
+                      <a:tailEnd type="none" w="med" len="med"/>
+                    </a:lnB>
+                    <a:solidFill>
+                      <a:srgbClr val="FFFFFF"/>
+                    </a:solidFill>
+                  </a:tcPr>
+                </a:tc>
+                <a:tc>
+                  <a:txBody>
+                    <a:bodyPr/>
+                    <a:lstStyle/>
+                    <a:p>
+                      <a:pPr algn="ctr" indent="0" marL="0">
+                        <a:buNone/>
+                      </a:pPr>
+                      <a:r>
+                        <a:rPr lang="en-US" sz="1100" dirty="0">
+                          <a:solidFill>
+                            <a:srgbClr val="000000"/>
+                          </a:solidFill>
+                          <a:latin typeface="Calibri" pitchFamily="34" charset="0"/>
+                          <a:ea typeface="Calibri" pitchFamily="34" charset="-122"/>
+                          <a:cs typeface="Calibri" pitchFamily="34" charset="-120"/>
+                        </a:rPr>
+                        <a:t>0.091</a:t>
+                      </a:r>
+                      <a:endParaRPr lang="en-US" sz="1100" dirty="0">
+                        <a:latin typeface="Calibri" charset="0"/>
+                        <a:ea typeface="Calibri" charset="0"/>
+                        <a:cs typeface="Calibri" charset="0"/>
+                      </a:endParaRPr>
+                    </a:p>
+                  </a:txBody>
+                  <a:tcPr marL="91440" marR="91440" marT="45720" marB="45720">
+                    <a:lnL w="6350" cap="flat" cmpd="sng" algn="ctr">
+                      <a:solidFill>
+                        <a:srgbClr val="C9D1D0"/>
+                      </a:solidFill>
+                      <a:prstDash val="solid"/>
+                      <a:round/>
+                      <a:headEnd type="none" w="med" len="med"/>
+                      <a:tailEnd type="none" w="med" len="med"/>
+                    </a:lnL>
+                    <a:lnR w="6350" cap="flat" cmpd="sng" algn="ctr">
+                      <a:solidFill>
+                        <a:srgbClr val="C9D1D0"/>
+                      </a:solidFill>
+                      <a:prstDash val="solid"/>
+                      <a:round/>
+                      <a:headEnd type="none" w="med" len="med"/>
+                      <a:tailEnd type="none" w="med" len="med"/>
+                    </a:lnR>
+                    <a:lnT w="6350" cap="flat" cmpd="sng" algn="ctr">
+                      <a:solidFill>
+                        <a:srgbClr val="C9D1D0"/>
+                      </a:solidFill>
+                      <a:prstDash val="solid"/>
+                      <a:round/>
+                      <a:headEnd type="none" w="med" len="med"/>
+                      <a:tailEnd type="none" w="med" len="med"/>
+                    </a:lnT>
+                    <a:lnB w="6350" cap="flat" cmpd="sng" algn="ctr">
+                      <a:solidFill>
+                        <a:srgbClr val="C9D1D0"/>
+                      </a:solidFill>
+                      <a:prstDash val="solid"/>
+                      <a:round/>
+                      <a:headEnd type="none" w="med" len="med"/>
+                      <a:tailEnd type="none" w="med" len="med"/>
+                    </a:lnB>
+                    <a:solidFill>
+                      <a:srgbClr val="FFFFFF"/>
+                    </a:solidFill>
+                  </a:tcPr>
+                </a:tc>
+                <a:tc>
+                  <a:txBody>
+                    <a:bodyPr/>
+                    <a:lstStyle/>
+                    <a:p>
+                      <a:pPr algn="ctr" indent="0" marL="0">
+                        <a:buNone/>
+                      </a:pPr>
+                      <a:r>
+                        <a:rPr lang="en-US" sz="1100" dirty="0">
+                          <a:solidFill>
+                            <a:srgbClr val="000000"/>
+                          </a:solidFill>
+                          <a:latin typeface="Calibri" pitchFamily="34" charset="0"/>
+                          <a:ea typeface="Calibri" pitchFamily="34" charset="-122"/>
+                          <a:cs typeface="Calibri" pitchFamily="34" charset="-120"/>
+                        </a:rPr>
+                        <a:t>0.52</a:t>
+                      </a:r>
+                      <a:endParaRPr lang="en-US" sz="1100" dirty="0">
+                        <a:latin typeface="Calibri" charset="0"/>
+                        <a:ea typeface="Calibri" charset="0"/>
+                        <a:cs typeface="Calibri" charset="0"/>
+                      </a:endParaRPr>
+                    </a:p>
+                  </a:txBody>
+                  <a:tcPr marL="91440" marR="91440" marT="45720" marB="45720">
+                    <a:lnL w="6350" cap="flat" cmpd="sng" algn="ctr">
+                      <a:solidFill>
+                        <a:srgbClr val="C9D1D0"/>
+                      </a:solidFill>
+                      <a:prstDash val="solid"/>
+                      <a:round/>
+                      <a:headEnd type="none" w="med" len="med"/>
+                      <a:tailEnd type="none" w="med" len="med"/>
+                    </a:lnL>
+                    <a:lnR w="6350" cap="flat" cmpd="sng" algn="ctr">
+                      <a:solidFill>
+                        <a:srgbClr val="C9D1D0"/>
+                      </a:solidFill>
+                      <a:prstDash val="solid"/>
+                      <a:round/>
+                      <a:headEnd type="none" w="med" len="med"/>
+                      <a:tailEnd type="none" w="med" len="med"/>
+                    </a:lnR>
+                    <a:lnT w="6350" cap="flat" cmpd="sng" algn="ctr">
+                      <a:solidFill>
+                        <a:srgbClr val="C9D1D0"/>
+                      </a:solidFill>
+                      <a:prstDash val="solid"/>
+                      <a:round/>
+                      <a:headEnd type="none" w="med" len="med"/>
+                      <a:tailEnd type="none" w="med" len="med"/>
+                    </a:lnT>
+                    <a:lnB w="6350" cap="flat" cmpd="sng" algn="ctr">
+                      <a:solidFill>
+                        <a:srgbClr val="C9D1D0"/>
+                      </a:solidFill>
+                      <a:prstDash val="solid"/>
+                      <a:round/>
+                      <a:headEnd type="none" w="med" len="med"/>
+                      <a:tailEnd type="none" w="med" len="med"/>
+                    </a:lnB>
+                    <a:solidFill>
+                      <a:srgbClr val="FFFFFF"/>
+                    </a:solidFill>
+                  </a:tcPr>
+                </a:tc>
+              </a:tr>
+              <a:tr h="274320">
+                <a:tc>
+                  <a:txBody>
+                    <a:bodyPr/>
+                    <a:lstStyle/>
+                    <a:p>
+                      <a:pPr algn="l" indent="0" marL="0">
+                        <a:buNone/>
+                      </a:pPr>
+                      <a:r>
+                        <a:rPr lang="en-US" sz="1100" dirty="0">
+                          <a:solidFill>
+                            <a:srgbClr val="000000"/>
+                          </a:solidFill>
+                          <a:latin typeface="Calibri" pitchFamily="34" charset="0"/>
+                          <a:ea typeface="Calibri" pitchFamily="34" charset="-122"/>
+                          <a:cs typeface="Calibri" pitchFamily="34" charset="-120"/>
+                        </a:rPr>
+                        <a:t>Irrelevant</a:t>
+                      </a:r>
+                      <a:endParaRPr lang="en-US" sz="1100" dirty="0">
+                        <a:latin typeface="Calibri" charset="0"/>
+                        <a:ea typeface="Calibri" charset="0"/>
+                        <a:cs typeface="Calibri" charset="0"/>
+                      </a:endParaRPr>
+                    </a:p>
+                  </a:txBody>
+                  <a:tcPr marL="91440" marR="91440" marT="45720" marB="45720">
+                    <a:lnL w="6350" cap="flat" cmpd="sng" algn="ctr">
+                      <a:solidFill>
+                        <a:srgbClr val="C9D1D0"/>
+                      </a:solidFill>
+                      <a:prstDash val="solid"/>
+                      <a:round/>
+                      <a:headEnd type="none" w="med" len="med"/>
+                      <a:tailEnd type="none" w="med" len="med"/>
+                    </a:lnL>
+                    <a:lnR w="6350" cap="flat" cmpd="sng" algn="ctr">
+                      <a:solidFill>
+                        <a:srgbClr val="C9D1D0"/>
+                      </a:solidFill>
+                      <a:prstDash val="solid"/>
+                      <a:round/>
+                      <a:headEnd type="none" w="med" len="med"/>
+                      <a:tailEnd type="none" w="med" len="med"/>
+                    </a:lnR>
+                    <a:lnT w="6350" cap="flat" cmpd="sng" algn="ctr">
+                      <a:solidFill>
+                        <a:srgbClr val="C9D1D0"/>
+                      </a:solidFill>
+                      <a:prstDash val="solid"/>
+                      <a:round/>
+                      <a:headEnd type="none" w="med" len="med"/>
+                      <a:tailEnd type="none" w="med" len="med"/>
+                    </a:lnT>
+                    <a:lnB w="6350" cap="flat" cmpd="sng" algn="ctr">
+                      <a:solidFill>
+                        <a:srgbClr val="C9D1D0"/>
+                      </a:solidFill>
+                      <a:prstDash val="solid"/>
+                      <a:round/>
+                      <a:headEnd type="none" w="med" len="med"/>
+                      <a:tailEnd type="none" w="med" len="med"/>
+                    </a:lnB>
+                    <a:solidFill>
+                      <a:srgbClr val="FFFFFF"/>
+                    </a:solidFill>
+                  </a:tcPr>
+                </a:tc>
+                <a:tc>
+                  <a:txBody>
+                    <a:bodyPr/>
+                    <a:lstStyle/>
+                    <a:p>
+                      <a:pPr algn="ctr" indent="0" marL="0">
+                        <a:buNone/>
+                      </a:pPr>
+                      <a:r>
+                        <a:rPr lang="en-US" sz="1100" dirty="0">
+                          <a:solidFill>
+                            <a:srgbClr val="000000"/>
+                          </a:solidFill>
+                          <a:latin typeface="Calibri" pitchFamily="34" charset="0"/>
+                          <a:ea typeface="Calibri" pitchFamily="34" charset="-122"/>
+                          <a:cs typeface="Calibri" pitchFamily="34" charset="-120"/>
+                        </a:rPr>
+                        <a:t>0.288</a:t>
+                      </a:r>
+                      <a:endParaRPr lang="en-US" sz="1100" dirty="0">
+                        <a:latin typeface="Calibri" charset="0"/>
+                        <a:ea typeface="Calibri" charset="0"/>
+                        <a:cs typeface="Calibri" charset="0"/>
+                      </a:endParaRPr>
+                    </a:p>
+                  </a:txBody>
+                  <a:tcPr marL="91440" marR="91440" marT="45720" marB="45720">
+                    <a:lnL w="6350" cap="flat" cmpd="sng" algn="ctr">
+                      <a:solidFill>
+                        <a:srgbClr val="C9D1D0"/>
+                      </a:solidFill>
+                      <a:prstDash val="solid"/>
+                      <a:round/>
+                      <a:headEnd type="none" w="med" len="med"/>
+                      <a:tailEnd type="none" w="med" len="med"/>
+                    </a:lnL>
+                    <a:lnR w="6350" cap="flat" cmpd="sng" algn="ctr">
+                      <a:solidFill>
+                        <a:srgbClr val="C9D1D0"/>
+                      </a:solidFill>
+                      <a:prstDash val="solid"/>
+                      <a:round/>
+                      <a:headEnd type="none" w="med" len="med"/>
+                      <a:tailEnd type="none" w="med" len="med"/>
+                    </a:lnR>
+                    <a:lnT w="6350" cap="flat" cmpd="sng" algn="ctr">
+                      <a:solidFill>
+                        <a:srgbClr val="C9D1D0"/>
+                      </a:solidFill>
+                      <a:prstDash val="solid"/>
+                      <a:round/>
+                      <a:headEnd type="none" w="med" len="med"/>
+                      <a:tailEnd type="none" w="med" len="med"/>
+                    </a:lnT>
+                    <a:lnB w="6350" cap="flat" cmpd="sng" algn="ctr">
+                      <a:solidFill>
+                        <a:srgbClr val="C9D1D0"/>
+                      </a:solidFill>
+                      <a:prstDash val="solid"/>
+                      <a:round/>
+                      <a:headEnd type="none" w="med" len="med"/>
+                      <a:tailEnd type="none" w="med" len="med"/>
+                    </a:lnB>
+                    <a:solidFill>
+                      <a:srgbClr val="FFFFFF"/>
+                    </a:solidFill>
+                  </a:tcPr>
+                </a:tc>
+                <a:tc>
+                  <a:txBody>
+                    <a:bodyPr/>
+                    <a:lstStyle/>
+                    <a:p>
+                      <a:pPr algn="ctr" indent="0" marL="0">
+                        <a:buNone/>
+                      </a:pPr>
+                      <a:r>
+                        <a:rPr lang="en-US" sz="1100" b="1" dirty="0">
+                          <a:solidFill>
+                            <a:schemeClr val="accent4"/>
+                          </a:solidFill>
+                          <a:latin typeface="Calibri" pitchFamily="34" charset="0"/>
+                          <a:ea typeface="Calibri" pitchFamily="34" charset="-122"/>
+                          <a:cs typeface="Calibri" pitchFamily="34" charset="-120"/>
+                        </a:rPr>
+                        <a:t>0.114</a:t>
+                      </a:r>
+                      <a:endParaRPr lang="en-US" sz="1100" dirty="0">
+                        <a:latin typeface="Calibri" charset="0"/>
+                        <a:ea typeface="Calibri" charset="0"/>
+                        <a:cs typeface="Calibri" charset="0"/>
+                      </a:endParaRPr>
+                    </a:p>
+                  </a:txBody>
+                  <a:tcPr marL="91440" marR="91440" marT="45720" marB="45720">
+                    <a:lnL w="6350" cap="flat" cmpd="sng" algn="ctr">
+                      <a:solidFill>
+                        <a:srgbClr val="C9D1D0"/>
+                      </a:solidFill>
+                      <a:prstDash val="solid"/>
+                      <a:round/>
+                      <a:headEnd type="none" w="med" len="med"/>
+                      <a:tailEnd type="none" w="med" len="med"/>
+                    </a:lnL>
+                    <a:lnR w="6350" cap="flat" cmpd="sng" algn="ctr">
+                      <a:solidFill>
+                        <a:srgbClr val="C9D1D0"/>
+                      </a:solidFill>
+                      <a:prstDash val="solid"/>
+                      <a:round/>
+                      <a:headEnd type="none" w="med" len="med"/>
+                      <a:tailEnd type="none" w="med" len="med"/>
+                    </a:lnR>
+                    <a:lnT w="6350" cap="flat" cmpd="sng" algn="ctr">
+                      <a:solidFill>
+                        <a:srgbClr val="C9D1D0"/>
+                      </a:solidFill>
+                      <a:prstDash val="solid"/>
+                      <a:round/>
+                      <a:headEnd type="none" w="med" len="med"/>
+                      <a:tailEnd type="none" w="med" len="med"/>
+                    </a:lnT>
+                    <a:lnB w="6350" cap="flat" cmpd="sng" algn="ctr">
+                      <a:solidFill>
+                        <a:srgbClr val="C9D1D0"/>
+                      </a:solidFill>
+                      <a:prstDash val="solid"/>
+                      <a:round/>
+                      <a:headEnd type="none" w="med" len="med"/>
+                      <a:tailEnd type="none" w="med" len="med"/>
+                    </a:lnB>
+                    <a:solidFill>
+                      <a:srgbClr val="FFFFFF"/>
+                    </a:solidFill>
+                  </a:tcPr>
+                </a:tc>
+                <a:tc>
+                  <a:txBody>
+                    <a:bodyPr/>
+                    <a:lstStyle/>
+                    <a:p>
+                      <a:pPr algn="ctr" indent="0" marL="0">
+                        <a:buNone/>
+                      </a:pPr>
+                      <a:r>
+                        <a:rPr lang="en-US" sz="1100" b="1" dirty="0">
+                          <a:solidFill>
+                            <a:schemeClr val="accent4"/>
+                          </a:solidFill>
+                          <a:latin typeface="Calibri" pitchFamily="34" charset="0"/>
+                          <a:ea typeface="Calibri" pitchFamily="34" charset="-122"/>
+                          <a:cs typeface="Calibri" pitchFamily="34" charset="-120"/>
+                        </a:rPr>
+                        <a:t>0.77</a:t>
+                      </a:r>
+                      <a:endParaRPr lang="en-US" sz="1100" dirty="0">
+                        <a:latin typeface="Calibri" charset="0"/>
+                        <a:ea typeface="Calibri" charset="0"/>
+                        <a:cs typeface="Calibri" charset="0"/>
+                      </a:endParaRPr>
+                    </a:p>
+                  </a:txBody>
+                  <a:tcPr marL="91440" marR="91440" marT="45720" marB="45720">
+                    <a:lnL w="6350" cap="flat" cmpd="sng" algn="ctr">
+                      <a:solidFill>
+                        <a:srgbClr val="C9D1D0"/>
+                      </a:solidFill>
+                      <a:prstDash val="solid"/>
+                      <a:round/>
+                      <a:headEnd type="none" w="med" len="med"/>
+                      <a:tailEnd type="none" w="med" len="med"/>
+                    </a:lnL>
+                    <a:lnR w="6350" cap="flat" cmpd="sng" algn="ctr">
+                      <a:solidFill>
+                        <a:srgbClr val="C9D1D0"/>
+                      </a:solidFill>
+                      <a:prstDash val="solid"/>
+                      <a:round/>
+                      <a:headEnd type="none" w="med" len="med"/>
+                      <a:tailEnd type="none" w="med" len="med"/>
+                    </a:lnR>
+                    <a:lnT w="6350" cap="flat" cmpd="sng" algn="ctr">
+                      <a:solidFill>
+                        <a:srgbClr val="C9D1D0"/>
+                      </a:solidFill>
+                      <a:prstDash val="solid"/>
+                      <a:round/>
+                      <a:headEnd type="none" w="med" len="med"/>
+                      <a:tailEnd type="none" w="med" len="med"/>
+                    </a:lnT>
+                    <a:lnB w="6350" cap="flat" cmpd="sng" algn="ctr">
+                      <a:solidFill>
+                        <a:srgbClr val="C9D1D0"/>
+                      </a:solidFill>
+                      <a:prstDash val="solid"/>
+                      <a:round/>
+                      <a:headEnd type="none" w="med" len="med"/>
+                      <a:tailEnd type="none" w="med" len="med"/>
+                    </a:lnB>
+                    <a:solidFill>
+                      <a:srgbClr val="FFFFFF"/>
+                    </a:solidFill>
+                  </a:tcPr>
+                </a:tc>
+              </a:tr>
+              <a:tr h="274320">
+                <a:tc>
+                  <a:txBody>
+                    <a:bodyPr/>
+                    <a:lstStyle/>
+                    <a:p>
+                      <a:pPr algn="l" indent="0" marL="0">
+                        <a:buNone/>
+                      </a:pPr>
+                      <a:r>
+                        <a:rPr lang="en-US" sz="1100" dirty="0">
+                          <a:solidFill>
+                            <a:srgbClr val="000000"/>
+                          </a:solidFill>
+                          <a:latin typeface="Calibri" pitchFamily="34" charset="0"/>
+                          <a:ea typeface="Calibri" pitchFamily="34" charset="-122"/>
+                          <a:cs typeface="Calibri" pitchFamily="34" charset="-120"/>
+                        </a:rPr>
+                        <a:t>Numbers changed</a:t>
+                      </a:r>
+                      <a:endParaRPr lang="en-US" sz="1100" dirty="0">
+                        <a:latin typeface="Calibri" charset="0"/>
+                        <a:ea typeface="Calibri" charset="0"/>
+                        <a:cs typeface="Calibri" charset="0"/>
+                      </a:endParaRPr>
+                    </a:p>
+                  </a:txBody>
+                  <a:tcPr marL="91440" marR="91440" marT="45720" marB="45720">
+                    <a:lnL w="6350" cap="flat" cmpd="sng" algn="ctr">
+                      <a:solidFill>
+                        <a:srgbClr val="C9D1D0"/>
+                      </a:solidFill>
+                      <a:prstDash val="solid"/>
+                      <a:round/>
+                      <a:headEnd type="none" w="med" len="med"/>
+                      <a:tailEnd type="none" w="med" len="med"/>
+                    </a:lnL>
+                    <a:lnR w="6350" cap="flat" cmpd="sng" algn="ctr">
+                      <a:solidFill>
+                        <a:srgbClr val="C9D1D0"/>
+                      </a:solidFill>
+                      <a:prstDash val="solid"/>
+                      <a:round/>
+                      <a:headEnd type="none" w="med" len="med"/>
+                      <a:tailEnd type="none" w="med" len="med"/>
+                    </a:lnR>
+                    <a:lnT w="6350" cap="flat" cmpd="sng" algn="ctr">
+                      <a:solidFill>
+                        <a:srgbClr val="C9D1D0"/>
+                      </a:solidFill>
+                      <a:prstDash val="solid"/>
+                      <a:round/>
+                      <a:headEnd type="none" w="med" len="med"/>
+                      <a:tailEnd type="none" w="med" len="med"/>
+                    </a:lnT>
+                    <a:lnB w="6350" cap="flat" cmpd="sng" algn="ctr">
+                      <a:solidFill>
+                        <a:srgbClr val="C9D1D0"/>
+                      </a:solidFill>
+                      <a:prstDash val="solid"/>
+                      <a:round/>
+                      <a:headEnd type="none" w="med" len="med"/>
+                      <a:tailEnd type="none" w="med" len="med"/>
+                    </a:lnB>
+                    <a:solidFill>
+                      <a:srgbClr val="FFFFFF"/>
+                    </a:solidFill>
+                  </a:tcPr>
+                </a:tc>
+                <a:tc>
+                  <a:txBody>
+                    <a:bodyPr/>
+                    <a:lstStyle/>
+                    <a:p>
+                      <a:pPr algn="ctr" indent="0" marL="0">
+                        <a:buNone/>
+                      </a:pPr>
+                      <a:r>
+                        <a:rPr lang="en-US" sz="1100" b="1" dirty="0">
+                          <a:solidFill>
+                            <a:schemeClr val="accent2"/>
+                          </a:solidFill>
+                          <a:latin typeface="Calibri" pitchFamily="34" charset="0"/>
+                          <a:ea typeface="Calibri" pitchFamily="34" charset="-122"/>
+                          <a:cs typeface="Calibri" pitchFamily="34" charset="-120"/>
+                        </a:rPr>
+                        <a:t>0.310</a:t>
+                      </a:r>
+                      <a:endParaRPr lang="en-US" sz="1100" dirty="0">
+                        <a:latin typeface="Calibri" charset="0"/>
+                        <a:ea typeface="Calibri" charset="0"/>
+                        <a:cs typeface="Calibri" charset="0"/>
+                      </a:endParaRPr>
+                    </a:p>
+                  </a:txBody>
+                  <a:tcPr marL="91440" marR="91440" marT="45720" marB="45720">
+                    <a:lnL w="6350" cap="flat" cmpd="sng" algn="ctr">
+                      <a:solidFill>
+                        <a:srgbClr val="C9D1D0"/>
+                      </a:solidFill>
+                      <a:prstDash val="solid"/>
+                      <a:round/>
+                      <a:headEnd type="none" w="med" len="med"/>
+                      <a:tailEnd type="none" w="med" len="med"/>
+                    </a:lnL>
+                    <a:lnR w="6350" cap="flat" cmpd="sng" algn="ctr">
+                      <a:solidFill>
+                        <a:srgbClr val="C9D1D0"/>
+                      </a:solidFill>
+                      <a:prstDash val="solid"/>
+                      <a:round/>
+                      <a:headEnd type="none" w="med" len="med"/>
+                      <a:tailEnd type="none" w="med" len="med"/>
+                    </a:lnR>
+                    <a:lnT w="6350" cap="flat" cmpd="sng" algn="ctr">
+                      <a:solidFill>
+                        <a:srgbClr val="C9D1D0"/>
+                      </a:solidFill>
+                      <a:prstDash val="solid"/>
+                      <a:round/>
+                      <a:headEnd type="none" w="med" len="med"/>
+                      <a:tailEnd type="none" w="med" len="med"/>
+                    </a:lnT>
+                    <a:lnB w="6350" cap="flat" cmpd="sng" algn="ctr">
+                      <a:solidFill>
+                        <a:srgbClr val="C9D1D0"/>
+                      </a:solidFill>
+                      <a:prstDash val="solid"/>
+                      <a:round/>
+                      <a:headEnd type="none" w="med" len="med"/>
+                      <a:tailEnd type="none" w="med" len="med"/>
+                    </a:lnB>
+                    <a:solidFill>
+                      <a:srgbClr val="FFFFFF"/>
+                    </a:solidFill>
+                  </a:tcPr>
+                </a:tc>
+                <a:tc>
+                  <a:txBody>
+                    <a:bodyPr/>
+                    <a:lstStyle/>
+                    <a:p>
+                      <a:pPr algn="ctr" indent="0" marL="0">
+                        <a:buNone/>
+                      </a:pPr>
+                      <a:r>
+                        <a:rPr lang="en-US" sz="1100" dirty="0">
+                          <a:solidFill>
+                            <a:srgbClr val="000000"/>
+                          </a:solidFill>
+                          <a:latin typeface="Calibri" pitchFamily="34" charset="0"/>
+                          <a:ea typeface="Calibri" pitchFamily="34" charset="-122"/>
+                          <a:cs typeface="Calibri" pitchFamily="34" charset="-120"/>
+                        </a:rPr>
+                        <a:t>0.092</a:t>
+                      </a:r>
+                      <a:endParaRPr lang="en-US" sz="1100" dirty="0">
+                        <a:latin typeface="Calibri" charset="0"/>
+                        <a:ea typeface="Calibri" charset="0"/>
+                        <a:cs typeface="Calibri" charset="0"/>
+                      </a:endParaRPr>
+                    </a:p>
+                  </a:txBody>
+                  <a:tcPr marL="91440" marR="91440" marT="45720" marB="45720">
+                    <a:lnL w="6350" cap="flat" cmpd="sng" algn="ctr">
+                      <a:solidFill>
+                        <a:srgbClr val="C9D1D0"/>
+                      </a:solidFill>
+                      <a:prstDash val="solid"/>
+                      <a:round/>
+                      <a:headEnd type="none" w="med" len="med"/>
+                      <a:tailEnd type="none" w="med" len="med"/>
+                    </a:lnL>
+                    <a:lnR w="6350" cap="flat" cmpd="sng" algn="ctr">
+                      <a:solidFill>
+                        <a:srgbClr val="C9D1D0"/>
+                      </a:solidFill>
+                      <a:prstDash val="solid"/>
+                      <a:round/>
+                      <a:headEnd type="none" w="med" len="med"/>
+                      <a:tailEnd type="none" w="med" len="med"/>
+                    </a:lnR>
+                    <a:lnT w="6350" cap="flat" cmpd="sng" algn="ctr">
+                      <a:solidFill>
+                        <a:srgbClr val="C9D1D0"/>
+                      </a:solidFill>
+                      <a:prstDash val="solid"/>
+                      <a:round/>
+                      <a:headEnd type="none" w="med" len="med"/>
+                      <a:tailEnd type="none" w="med" len="med"/>
+                    </a:lnT>
+                    <a:lnB w="6350" cap="flat" cmpd="sng" algn="ctr">
+                      <a:solidFill>
+                        <a:srgbClr val="C9D1D0"/>
+                      </a:solidFill>
+                      <a:prstDash val="solid"/>
+                      <a:round/>
+                      <a:headEnd type="none" w="med" len="med"/>
+                      <a:tailEnd type="none" w="med" len="med"/>
+                    </a:lnB>
+                    <a:solidFill>
+                      <a:srgbClr val="FFFFFF"/>
+                    </a:solidFill>
+                  </a:tcPr>
+                </a:tc>
+                <a:tc>
+                  <a:txBody>
+                    <a:bodyPr/>
+                    <a:lstStyle/>
+                    <a:p>
+                      <a:pPr algn="ctr" indent="0" marL="0">
+                        <a:buNone/>
+                      </a:pPr>
+                      <a:r>
+                        <a:rPr lang="en-US" sz="1100" dirty="0">
+                          <a:solidFill>
+                            <a:srgbClr val="000000"/>
+                          </a:solidFill>
+                          <a:latin typeface="Calibri" pitchFamily="34" charset="0"/>
+                          <a:ea typeface="Calibri" pitchFamily="34" charset="-122"/>
+                          <a:cs typeface="Calibri" pitchFamily="34" charset="-120"/>
+                        </a:rPr>
+                        <a:t>0.51</a:t>
+                      </a:r>
+                      <a:endParaRPr lang="en-US" sz="1100" dirty="0">
+                        <a:latin typeface="Calibri" charset="0"/>
+                        <a:ea typeface="Calibri" charset="0"/>
+                        <a:cs typeface="Calibri" charset="0"/>
+                      </a:endParaRPr>
+                    </a:p>
+                  </a:txBody>
+                  <a:tcPr marL="91440" marR="91440" marT="45720" marB="45720">
+                    <a:lnL w="6350" cap="flat" cmpd="sng" algn="ctr">
+                      <a:solidFill>
+                        <a:srgbClr val="C9D1D0"/>
+                      </a:solidFill>
+                      <a:prstDash val="solid"/>
+                      <a:round/>
+                      <a:headEnd type="none" w="med" len="med"/>
+                      <a:tailEnd type="none" w="med" len="med"/>
+                    </a:lnL>
+                    <a:lnR w="6350" cap="flat" cmpd="sng" algn="ctr">
+                      <a:solidFill>
+                        <a:srgbClr val="C9D1D0"/>
+                      </a:solidFill>
+                      <a:prstDash val="solid"/>
+                      <a:round/>
+                      <a:headEnd type="none" w="med" len="med"/>
+                      <a:tailEnd type="none" w="med" len="med"/>
+                    </a:lnR>
+                    <a:lnT w="6350" cap="flat" cmpd="sng" algn="ctr">
+                      <a:solidFill>
+                        <a:srgbClr val="C9D1D0"/>
+                      </a:solidFill>
+                      <a:prstDash val="solid"/>
+                      <a:round/>
+                      <a:headEnd type="none" w="med" len="med"/>
+                      <a:tailEnd type="none" w="med" len="med"/>
+                    </a:lnT>
+                    <a:lnB w="6350" cap="flat" cmpd="sng" algn="ctr">
+                      <a:solidFill>
+                        <a:srgbClr val="C9D1D0"/>
+                      </a:solidFill>
+                      <a:prstDash val="solid"/>
+                      <a:round/>
+                      <a:headEnd type="none" w="med" len="med"/>
+                      <a:tailEnd type="none" w="med" len="med"/>
+                    </a:lnB>
+                    <a:solidFill>
+                      <a:srgbClr val="FFFFFF"/>
+                    </a:solidFill>
+                  </a:tcPr>
+                </a:tc>
+              </a:tr>
+            </a:tbl>
+          </a:graphicData>
+        </a:graphic>
+      </p:graphicFrame>
+      <p:sp>
+        <p:nvSpPr>
+          <p:cNvPr id="7" name="Text 3"/>
+          <p:cNvSpPr txBox="1"/>
+          <p:nvPr/>
+        </p:nvSpPr>
+        <p:spPr>
+          <a:xfrm>
+            <a:off x="5349240" y="2971800"/>
+            <a:ext cx="3200400" cy="1463040"/>
+          </a:xfrm>
+          <a:prstGeom prst="rect">
+            <a:avLst/>
+          </a:prstGeom>
+          <a:noFill/>
+          <a:ln/>
+        </p:spPr>
+        <p:txBody>
+          <a:bodyPr wrap="square" lIns="0" tIns="0" rIns="0" bIns="0" rtlCol="0" anchor="t"/>
+          <a:lstStyle/>
+          <a:p>
             <a:pPr indent="0" marL="0">
               <a:buNone/>
             </a:pPr>
             <a:r>
-              <a:rPr lang="en-US" sz="1300" dirty="0">
+              <a:rPr lang="en-US" sz="1200" b="1" dirty="0">
                 <a:solidFill>
                   <a:schemeClr val="tx1"/>
                 </a:solidFill>
               </a:rPr>
-              <a:t>read the passage and answer, and state a hallucination probability (0–100).</a:t>
-            </a:r>
-            <a:endParaRPr lang="en-US" sz="1300" dirty="0"/>
-          </a:p>
-          <a:p>
+              <a:t>Irrelevant: </a:t>
+            </a:r>
             <a:pPr indent="0" marL="0">
               <a:buNone/>
             </a:pPr>
             <a:r>
-              <a:rPr lang="en-US" sz="1300" dirty="0">
+              <a:rPr lang="en-US" sz="1200" dirty="0">
                 <a:solidFill>
                   <a:schemeClr val="tx1"/>
                 </a:solidFill>
               </a:rPr>
-              <a:t> </a:t>
-            </a:r>
-            <a:endParaRPr lang="en-US" sz="1300" dirty="0"/>
+              <a:t>PKS rises (memory takes over), so the score jumps. Correct.</a:t>
+            </a:r>
+            <a:endParaRPr lang="en-US" sz="1200" dirty="0"/>
           </a:p>
           <a:p>
             <a:pPr indent="0" marL="0">
               <a:buNone/>
             </a:pPr>
             <a:r>
-              <a:rPr lang="en-US" sz="1300" b="1" dirty="0">
+              <a:rPr lang="en-US" sz="1200" b="1" dirty="0">
                 <a:solidFill>
                   <a:schemeClr val="tx1"/>
                 </a:solidFill>
               </a:rPr>
-              <a:t>ReDeEP </a:t>
+              <a:t>Numbers changed: </a:t>
             </a:r>
             <a:pPr indent="0" marL="0">
               <a:buNone/>
             </a:pPr>
             <a:r>
-              <a:rPr lang="en-US" sz="1300" dirty="0">
+              <a:rPr lang="en-US" sz="1200" dirty="0">
                 <a:solidFill>
                   <a:schemeClr val="tx1"/>
                 </a:solidFill>
               </a:rPr>
-              <a:t>needs no prompt and no API, only one forward pass of an open model.</a:t>
-            </a:r>
-            <a:endParaRPr lang="en-US" sz="1300" dirty="0"/>
+              <a:t>ECS even rises and the score stays flat: it rose in only 31% of the 122 contradicted answers.</a:t>
+            </a:r>
+            <a:endParaRPr lang="en-US" sz="1200" dirty="0"/>
           </a:p>
         </p:txBody>
       </p:sp>
@@ -4493,7 +5823,361 @@
                   <a:schemeClr val="tx2"/>
                 </a:solidFill>
               </a:rPr>
-              <a:t>With the authors' code and data, chunk level matches and 13B is strongest</a:t>
+              <a:t>ReDeEP checks whether an answer is about the passage, not whether it agrees</a:t>
+            </a:r>
+            <a:endParaRPr lang="en-US" sz="2400" dirty="0"/>
+          </a:p>
+        </p:txBody>
+      </p:sp>
+      <p:sp>
+        <p:nvSpPr>
+          <p:cNvPr id="3" name="Shape 1"/>
+          <p:cNvSpPr/>
+          <p:nvPr/>
+        </p:nvSpPr>
+        <p:spPr>
+          <a:xfrm>
+            <a:off x="457200" y="1188720"/>
+            <a:ext cx="3931920" cy="1828800"/>
+          </a:xfrm>
+          <a:prstGeom prst="roundRect">
+            <a:avLst>
+              <a:gd name="adj" fmla="val 4000"/>
+            </a:avLst>
+          </a:prstGeom>
+          <a:solidFill>
+            <a:schemeClr val="bg2"/>
+          </a:solidFill>
+          <a:ln/>
+        </p:spPr>
+      </p:sp>
+      <p:sp>
+        <p:nvSpPr>
+          <p:cNvPr id="4" name="Text 2"/>
+          <p:cNvSpPr txBox="1"/>
+          <p:nvPr/>
+        </p:nvSpPr>
+        <p:spPr>
+          <a:xfrm>
+            <a:off x="685800" y="1325880"/>
+            <a:ext cx="3474720" cy="365760"/>
+          </a:xfrm>
+          <a:prstGeom prst="rect">
+            <a:avLst/>
+          </a:prstGeom>
+          <a:noFill/>
+          <a:ln/>
+        </p:spPr>
+        <p:txBody>
+          <a:bodyPr wrap="square" lIns="0" tIns="0" rIns="0" bIns="0" rtlCol="0" anchor="t"/>
+          <a:lstStyle/>
+          <a:p>
+            <a:pPr indent="0" marL="0">
+              <a:buNone/>
+            </a:pPr>
+            <a:r>
+              <a:rPr lang="en-US" sz="1600" b="1" dirty="0">
+                <a:solidFill>
+                  <a:schemeClr val="tx2"/>
+                </a:solidFill>
+              </a:rPr>
+              <a:t>What ECS measures</a:t>
+            </a:r>
+            <a:endParaRPr lang="en-US" sz="1600" dirty="0"/>
+          </a:p>
+        </p:txBody>
+      </p:sp>
+      <p:sp>
+        <p:nvSpPr>
+          <p:cNvPr id="5" name="Text 3"/>
+          <p:cNvSpPr txBox="1"/>
+          <p:nvPr/>
+        </p:nvSpPr>
+        <p:spPr>
+          <a:xfrm>
+            <a:off x="685800" y="1737360"/>
+            <a:ext cx="3474720" cy="1463040"/>
+          </a:xfrm>
+          <a:prstGeom prst="rect">
+            <a:avLst/>
+          </a:prstGeom>
+          <a:noFill/>
+          <a:ln/>
+        </p:spPr>
+        <p:txBody>
+          <a:bodyPr wrap="square" lIns="0" tIns="0" rIns="0" bIns="0" rtlCol="0" anchor="t"/>
+          <a:lstStyle/>
+          <a:p>
+            <a:pPr indent="0" marL="0">
+              <a:buNone/>
+            </a:pPr>
+            <a:r>
+              <a:rPr lang="en-US" sz="1400" dirty="0">
+                <a:solidFill>
+                  <a:schemeClr val="tx1"/>
+                </a:solidFill>
+              </a:rPr>
+              <a:t>Cosine similarity between hidden states: is the answer built from the same content the copying heads read?</a:t>
+            </a:r>
+            <a:endParaRPr lang="en-US" sz="1400" dirty="0"/>
+          </a:p>
+        </p:txBody>
+      </p:sp>
+      <p:sp>
+        <p:nvSpPr>
+          <p:cNvPr id="6" name="Shape 4"/>
+          <p:cNvSpPr/>
+          <p:nvPr/>
+        </p:nvSpPr>
+        <p:spPr>
+          <a:xfrm>
+            <a:off x="4754880" y="1188720"/>
+            <a:ext cx="3931920" cy="1828800"/>
+          </a:xfrm>
+          <a:prstGeom prst="roundRect">
+            <a:avLst>
+              <a:gd name="adj" fmla="val 4000"/>
+            </a:avLst>
+          </a:prstGeom>
+          <a:solidFill>
+            <a:schemeClr val="bg2"/>
+          </a:solidFill>
+          <a:ln/>
+        </p:spPr>
+      </p:sp>
+      <p:sp>
+        <p:nvSpPr>
+          <p:cNvPr id="7" name="Text 5"/>
+          <p:cNvSpPr txBox="1"/>
+          <p:nvPr/>
+        </p:nvSpPr>
+        <p:spPr>
+          <a:xfrm>
+            <a:off x="4983480" y="1325880"/>
+            <a:ext cx="3474720" cy="365760"/>
+          </a:xfrm>
+          <a:prstGeom prst="rect">
+            <a:avLst/>
+          </a:prstGeom>
+          <a:noFill/>
+          <a:ln/>
+        </p:spPr>
+        <p:txBody>
+          <a:bodyPr wrap="square" lIns="0" tIns="0" rIns="0" bIns="0" rtlCol="0" anchor="t"/>
+          <a:lstStyle/>
+          <a:p>
+            <a:pPr indent="0" marL="0">
+              <a:buNone/>
+            </a:pPr>
+            <a:r>
+              <a:rPr lang="en-US" sz="1600" b="1" dirty="0">
+                <a:solidFill>
+                  <a:schemeClr val="tx2"/>
+                </a:solidFill>
+              </a:rPr>
+              <a:t>What it cannot see</a:t>
+            </a:r>
+            <a:endParaRPr lang="en-US" sz="1600" dirty="0"/>
+          </a:p>
+        </p:txBody>
+      </p:sp>
+      <p:sp>
+        <p:nvSpPr>
+          <p:cNvPr id="8" name="Text 6"/>
+          <p:cNvSpPr txBox="1"/>
+          <p:nvPr/>
+        </p:nvSpPr>
+        <p:spPr>
+          <a:xfrm>
+            <a:off x="4983480" y="1737360"/>
+            <a:ext cx="3474720" cy="1463040"/>
+          </a:xfrm>
+          <a:prstGeom prst="rect">
+            <a:avLst/>
+          </a:prstGeom>
+          <a:noFill/>
+          <a:ln/>
+        </p:spPr>
+        <p:txBody>
+          <a:bodyPr wrap="square" lIns="0" tIns="0" rIns="0" bIns="0" rtlCol="0" anchor="t"/>
+          <a:lstStyle/>
+          <a:p>
+            <a:pPr indent="0" marL="0">
+              <a:buNone/>
+            </a:pPr>
+            <a:r>
+              <a:rPr lang="en-US" sz="1400" dirty="0">
+                <a:solidFill>
+                  <a:schemeClr val="tx1"/>
+                </a:solidFill>
+              </a:rPr>
+              <a:t>A changed number likely barely moves the hidden state, so a contradicted fact still looks “grounded”. In Llama-2-7B, ECS even rose.</a:t>
+            </a:r>
+            <a:endParaRPr lang="en-US" sz="1400" dirty="0"/>
+          </a:p>
+        </p:txBody>
+      </p:sp>
+      <p:sp>
+        <p:nvSpPr>
+          <p:cNvPr id="9" name="Shape 7"/>
+          <p:cNvSpPr/>
+          <p:nvPr/>
+        </p:nvSpPr>
+        <p:spPr>
+          <a:xfrm>
+            <a:off x="457200" y="3337560"/>
+            <a:ext cx="8229600" cy="914400"/>
+          </a:xfrm>
+          <a:prstGeom prst="roundRect">
+            <a:avLst>
+              <a:gd name="adj" fmla="val 8000"/>
+            </a:avLst>
+          </a:prstGeom>
+          <a:solidFill>
+            <a:schemeClr val="tx2"/>
+          </a:solidFill>
+          <a:ln/>
+        </p:spPr>
+      </p:sp>
+      <p:sp>
+        <p:nvSpPr>
+          <p:cNvPr id="10" name="Text 8"/>
+          <p:cNvSpPr txBox="1"/>
+          <p:nvPr/>
+        </p:nvSpPr>
+        <p:spPr>
+          <a:xfrm>
+            <a:off x="685800" y="3447288"/>
+            <a:ext cx="7772400" cy="685800"/>
+          </a:xfrm>
+          <a:prstGeom prst="rect">
+            <a:avLst/>
+          </a:prstGeom>
+          <a:noFill/>
+          <a:ln/>
+        </p:spPr>
+        <p:txBody>
+          <a:bodyPr wrap="square" lIns="0" tIns="0" rIns="0" bIns="0" rtlCol="0" anchor="ctr"/>
+          <a:lstStyle/>
+          <a:p>
+            <a:pPr indent="0" marL="0">
+              <a:buNone/>
+            </a:pPr>
+            <a:r>
+              <a:rPr lang="en-US" sz="1500" b="1" dirty="0">
+                <a:solidFill>
+                  <a:schemeClr val="bg1"/>
+                </a:solidFill>
+              </a:rPr>
+              <a:t>Implication: pair ReDeEP with a fact-level check (numbers, entities) before trusting it on knowledge conflicts.</a:t>
+            </a:r>
+            <a:endParaRPr lang="en-US" sz="1500" dirty="0"/>
+          </a:p>
+        </p:txBody>
+      </p:sp>
+      <p:sp>
+        <p:nvSpPr>
+          <p:cNvPr id="25" name="Slide Number Placeholder 0"/>
+          <p:cNvSpPr>
+            <a:spLocks noGrp="1"/>
+          </p:cNvSpPr>
+          <p:nvPr>
+            <p:ph type="sldNum" sz="quarter" idx="4294967295"/>
+          </p:nvPr>
+        </p:nvSpPr>
+        <p:spPr>
+          <a:xfrm>
+            <a:off x="8229600" y="4754880"/>
+            <a:ext cx="457200" cy="274320"/>
+          </a:xfrm>
+          <a:prstGeom prst="rect">
+            <a:avLst/>
+          </a:prstGeom>
+          <a:extLst>
+            <a:ext uri="{C572A759-6A51-4108-AA02-DFA0A04FC94B}">
+              <ma14:wrappingTextBoxFlag xmlns:ma14="http://schemas.microsoft.com/office/mac/drawingml/2011/main" val="0"/>
+            </a:ext>
+          </a:extLst>
+        </p:spPr>
+        <p:txBody>
+          <a:bodyPr/>
+          <a:lstStyle>
+            <a:lvl1pPr>
+              <a:defRPr sz="1000">
+                <a:solidFill>
+                  <a:schemeClr val="accent3"/>
+                </a:solidFill>
+              </a:defRPr>
+            </a:lvl1pPr>
+          </a:lstStyle>
+          <a:p>
+            <a:pPr algn="r"/>
+            <a:fld id="{F7021451-1387-4CA6-816F-3879F97B5CBC}" type="slidenum">
+              <a:rPr b="0" lang="en-US"/>
+              <a:t>11</a:t>
+            </a:fld>
+            <a:endParaRPr lang="en-US"/>
+          </a:p>
+        </p:txBody>
+      </p:sp>
+    </p:spTree>
+  </p:cSld>
+  <p:clrMapOvr>
+    <a:masterClrMapping/>
+  </p:clrMapOvr>
+</p:sld>
+</file>
+
+<file path=ppt/slides/slide12.xml><?xml version="1.0" encoding="utf-8"?>
+<p:sld xmlns:a="http://schemas.openxmlformats.org/drawingml/2006/main" xmlns:r="http://schemas.openxmlformats.org/officeDocument/2006/relationships" xmlns:p="http://schemas.openxmlformats.org/presentationml/2006/main">
+  <p:cSld name="Slide 12">
+    <p:spTree>
+      <p:nvGrpSpPr>
+        <p:cNvPr id="1" name=""/>
+        <p:cNvGrpSpPr/>
+        <p:nvPr/>
+      </p:nvGrpSpPr>
+      <p:grpSpPr>
+        <a:xfrm>
+          <a:off x="0" y="0"/>
+          <a:ext cx="0" cy="0"/>
+          <a:chOff x="0" y="0"/>
+          <a:chExt cx="0" cy="0"/>
+        </a:xfrm>
+      </p:grpSpPr>
+      <p:sp>
+        <p:nvSpPr>
+          <p:cNvPr id="2" name="Text 0"/>
+          <p:cNvSpPr/>
+          <p:nvPr>
+            <p:ph idx="100" type="title" hasCustomPrompt="1"/>
+          </p:nvPr>
+        </p:nvSpPr>
+        <p:spPr>
+          <a:xfrm>
+            <a:off x="457200" y="274320"/>
+            <a:ext cx="8229600" cy="685800"/>
+          </a:xfrm>
+          <a:prstGeom prst="rect">
+            <a:avLst/>
+          </a:prstGeom>
+          <a:noFill/>
+          <a:ln/>
+        </p:spPr>
+        <p:txBody>
+          <a:bodyPr wrap="square" lIns="0" tIns="0" rIns="0" bIns="0" rtlCol="0" anchor="ctr"/>
+          <a:lstStyle/>
+          <a:p>
+            <a:pPr algn="l" indent="0" marL="0">
+              <a:buNone/>
+            </a:pPr>
+            <a:r>
+              <a:rPr lang="en-US" sz="2400" b="1" dirty="0">
+                <a:solidFill>
+                  <a:schemeClr val="tx2"/>
+                </a:solidFill>
+              </a:rPr>
+              <a:t>Large API judges beat ReDeEP on accuracy; ReDeEP wins on cost</a:t>
             </a:r>
             <a:endParaRPr lang="en-US" sz="2400" dirty="0"/>
           </a:p>
@@ -4501,7 +6185,239 @@
       </p:sp>
       <p:graphicFrame>
         <p:nvGraphicFramePr>
-          <p:cNvPr id="12" name="Table 0"/>
+          <p:cNvPr id="3" name="Chart 0" descr=""/>
+          <p:cNvGraphicFramePr/>
+          <p:nvPr/>
+        </p:nvGraphicFramePr>
+        <p:xfrm>
+          <a:off x="457200" y="1051560"/>
+          <a:ext cx="5577840" cy="3566160"/>
+        </p:xfrm>
+        <a:graphic xmlns:a="http://schemas.openxmlformats.org/drawingml/2006/main">
+          <a:graphicData uri="http://schemas.openxmlformats.org/drawingml/2006/chart">
+            <c:chart xmlns:c="http://schemas.openxmlformats.org/drawingml/2006/chart" r:id="rId1"/>
+          </a:graphicData>
+        </a:graphic>
+      </p:graphicFrame>
+      <p:sp>
+        <p:nvSpPr>
+          <p:cNvPr id="4" name="Shape 1"/>
+          <p:cNvSpPr/>
+          <p:nvPr/>
+        </p:nvSpPr>
+        <p:spPr>
+          <a:xfrm>
+            <a:off x="6309360" y="1188720"/>
+            <a:ext cx="2377440" cy="3291840"/>
+          </a:xfrm>
+          <a:prstGeom prst="roundRect">
+            <a:avLst>
+              <a:gd name="adj" fmla="val 3077"/>
+            </a:avLst>
+          </a:prstGeom>
+          <a:solidFill>
+            <a:schemeClr val="bg2"/>
+          </a:solidFill>
+          <a:ln/>
+        </p:spPr>
+      </p:sp>
+      <p:sp>
+        <p:nvSpPr>
+          <p:cNvPr id="5" name="Text 2"/>
+          <p:cNvSpPr txBox="1"/>
+          <p:nvPr/>
+        </p:nvSpPr>
+        <p:spPr>
+          <a:xfrm>
+            <a:off x="6492240" y="1371600"/>
+            <a:ext cx="2057400" cy="3017520"/>
+          </a:xfrm>
+          <a:prstGeom prst="rect">
+            <a:avLst/>
+          </a:prstGeom>
+          <a:noFill/>
+          <a:ln/>
+        </p:spPr>
+        <p:txBody>
+          <a:bodyPr wrap="square" lIns="0" tIns="0" rIns="0" bIns="0" rtlCol="0" anchor="t"/>
+          <a:lstStyle/>
+          <a:p>
+            <a:pPr indent="0" marL="0">
+              <a:buNone/>
+            </a:pPr>
+            <a:r>
+              <a:rPr lang="en-US" sz="1300" b="1" dirty="0">
+                <a:solidFill>
+                  <a:schemeClr val="tx1"/>
+                </a:solidFill>
+              </a:rPr>
+              <a:t>Black-box judges </a:t>
+            </a:r>
+            <a:pPr indent="0" marL="0">
+              <a:buNone/>
+            </a:pPr>
+            <a:r>
+              <a:rPr lang="en-US" sz="1300" dirty="0">
+                <a:solidFill>
+                  <a:schemeClr val="tx1"/>
+                </a:solidFill>
+              </a:rPr>
+              <a:t>read the passage and answer, and state a hallucination probability (0–100).</a:t>
+            </a:r>
+            <a:endParaRPr lang="en-US" sz="1300" dirty="0"/>
+          </a:p>
+          <a:p>
+            <a:pPr indent="0" marL="0">
+              <a:buNone/>
+            </a:pPr>
+            <a:r>
+              <a:rPr lang="en-US" sz="1300" dirty="0">
+                <a:solidFill>
+                  <a:schemeClr val="tx1"/>
+                </a:solidFill>
+              </a:rPr>
+              <a:t> </a:t>
+            </a:r>
+            <a:endParaRPr lang="en-US" sz="1300" dirty="0"/>
+          </a:p>
+          <a:p>
+            <a:pPr indent="0" marL="0">
+              <a:buNone/>
+            </a:pPr>
+            <a:r>
+              <a:rPr lang="en-US" sz="1300" b="1" dirty="0">
+                <a:solidFill>
+                  <a:schemeClr val="tx1"/>
+                </a:solidFill>
+              </a:rPr>
+              <a:t>ReDeEP </a:t>
+            </a:r>
+            <a:pPr indent="0" marL="0">
+              <a:buNone/>
+            </a:pPr>
+            <a:r>
+              <a:rPr lang="en-US" sz="1300" dirty="0">
+                <a:solidFill>
+                  <a:schemeClr val="tx1"/>
+                </a:solidFill>
+              </a:rPr>
+              <a:t>needs no prompt and no API, only one forward pass of an open model.</a:t>
+            </a:r>
+            <a:endParaRPr lang="en-US" sz="1300" dirty="0"/>
+          </a:p>
+        </p:txBody>
+      </p:sp>
+      <p:sp>
+        <p:nvSpPr>
+          <p:cNvPr id="25" name="Slide Number Placeholder 0"/>
+          <p:cNvSpPr>
+            <a:spLocks noGrp="1"/>
+          </p:cNvSpPr>
+          <p:nvPr>
+            <p:ph type="sldNum" sz="quarter" idx="4294967295"/>
+          </p:nvPr>
+        </p:nvSpPr>
+        <p:spPr>
+          <a:xfrm>
+            <a:off x="8229600" y="4754880"/>
+            <a:ext cx="457200" cy="274320"/>
+          </a:xfrm>
+          <a:prstGeom prst="rect">
+            <a:avLst/>
+          </a:prstGeom>
+          <a:extLst>
+            <a:ext uri="{C572A759-6A51-4108-AA02-DFA0A04FC94B}">
+              <ma14:wrappingTextBoxFlag xmlns:ma14="http://schemas.microsoft.com/office/mac/drawingml/2011/main" val="0"/>
+            </a:ext>
+          </a:extLst>
+        </p:spPr>
+        <p:txBody>
+          <a:bodyPr/>
+          <a:lstStyle>
+            <a:lvl1pPr>
+              <a:defRPr sz="1000">
+                <a:solidFill>
+                  <a:schemeClr val="accent3"/>
+                </a:solidFill>
+              </a:defRPr>
+            </a:lvl1pPr>
+          </a:lstStyle>
+          <a:p>
+            <a:pPr algn="r"/>
+            <a:fld id="{F7021451-1387-4CA6-816F-3879F97B5CBC}" type="slidenum">
+              <a:rPr b="0" lang="en-US"/>
+              <a:t>12</a:t>
+            </a:fld>
+            <a:endParaRPr lang="en-US"/>
+          </a:p>
+        </p:txBody>
+      </p:sp>
+    </p:spTree>
+  </p:cSld>
+  <p:clrMapOvr>
+    <a:masterClrMapping/>
+  </p:clrMapOvr>
+</p:sld>
+</file>
+
+<file path=ppt/slides/slide13.xml><?xml version="1.0" encoding="utf-8"?>
+<p:sld xmlns:a="http://schemas.openxmlformats.org/drawingml/2006/main" xmlns:r="http://schemas.openxmlformats.org/officeDocument/2006/relationships" xmlns:p="http://schemas.openxmlformats.org/presentationml/2006/main">
+  <p:cSld name="Slide 13">
+    <p:spTree>
+      <p:nvGrpSpPr>
+        <p:cNvPr id="1" name=""/>
+        <p:cNvGrpSpPr/>
+        <p:nvPr/>
+      </p:nvGrpSpPr>
+      <p:grpSpPr>
+        <a:xfrm>
+          <a:off x="0" y="0"/>
+          <a:ext cx="0" cy="0"/>
+          <a:chOff x="0" y="0"/>
+          <a:chExt cx="0" cy="0"/>
+        </a:xfrm>
+      </p:grpSpPr>
+      <p:sp>
+        <p:nvSpPr>
+          <p:cNvPr id="2" name="Text 0"/>
+          <p:cNvSpPr/>
+          <p:nvPr>
+            <p:ph idx="100" type="title" hasCustomPrompt="1"/>
+          </p:nvPr>
+        </p:nvSpPr>
+        <p:spPr>
+          <a:xfrm>
+            <a:off x="457200" y="274320"/>
+            <a:ext cx="8229600" cy="685800"/>
+          </a:xfrm>
+          <a:prstGeom prst="rect">
+            <a:avLst/>
+          </a:prstGeom>
+          <a:noFill/>
+          <a:ln/>
+        </p:spPr>
+        <p:txBody>
+          <a:bodyPr wrap="square" lIns="0" tIns="0" rIns="0" bIns="0" rtlCol="0" anchor="ctr"/>
+          <a:lstStyle/>
+          <a:p>
+            <a:pPr algn="l" indent="0" marL="0">
+              <a:buNone/>
+            </a:pPr>
+            <a:r>
+              <a:rPr lang="en-US" sz="2400" b="1" dirty="0">
+                <a:solidFill>
+                  <a:schemeClr val="tx2"/>
+                </a:solidFill>
+              </a:rPr>
+              <a:t>With the authors' code and data, chunk level matches and 13B is strongest</a:t>
+            </a:r>
+            <a:endParaRPr lang="en-US" sz="2400" dirty="0"/>
+          </a:p>
+        </p:txBody>
+      </p:sp>
+      <p:graphicFrame>
+        <p:nvGraphicFramePr>
+          <p:cNvPr id="14" name="Table 0"/>
           <p:cNvGraphicFramePr>
             <a:graphicFrameLocks noGrp="1"/>
           </p:cNvGraphicFramePr>
@@ -6089,7 +8005,7 @@
             <a:pPr algn="r"/>
             <a:fld id="{F7021451-1387-4CA6-816F-3879F97B5CBC}" type="slidenum">
               <a:rPr b="0" lang="en-US"/>
-              <a:t>11</a:t>
+              <a:t>13</a:t>
             </a:fld>
             <a:endParaRPr lang="en-US"/>
           </a:p>
@@ -6103,9 +8019,9 @@
 </p:sld>
 </file>
 
-<file path=ppt/slides/slide12.xml><?xml version="1.0" encoding="utf-8"?>
+<file path=ppt/slides/slide14.xml><?xml version="1.0" encoding="utf-8"?>
 <p:sld xmlns:a="http://schemas.openxmlformats.org/drawingml/2006/main" xmlns:r="http://schemas.openxmlformats.org/officeDocument/2006/relationships" xmlns:p="http://schemas.openxmlformats.org/presentationml/2006/main">
-  <p:cSld name="Slide 12">
+  <p:cSld name="Slide 14">
     <p:spTree>
       <p:nvGrpSpPr>
         <p:cNvPr id="1" name=""/>
@@ -6327,7 +8243,7 @@
             <a:pPr algn="r"/>
             <a:fld id="{F7021451-1387-4CA6-816F-3879F97B5CBC}" type="slidenum">
               <a:rPr b="0" lang="en-US"/>
-              <a:t>12</a:t>
+              <a:t>14</a:t>
             </a:fld>
             <a:endParaRPr lang="en-US"/>
           </a:p>
@@ -6341,9 +8257,9 @@
 </p:sld>
 </file>
 
-<file path=ppt/slides/slide13.xml><?xml version="1.0" encoding="utf-8"?>
+<file path=ppt/slides/slide15.xml><?xml version="1.0" encoding="utf-8"?>
 <p:sld xmlns:a="http://schemas.openxmlformats.org/drawingml/2006/main" xmlns:r="http://schemas.openxmlformats.org/officeDocument/2006/relationships" xmlns:p="http://schemas.openxmlformats.org/presentationml/2006/main">
-  <p:cSld name="Slide 13">
+  <p:cSld name="Slide 15">
     <p:spTree>
       <p:nvGrpSpPr>
         <p:cNvPr id="1" name=""/>
@@ -6398,7 +8314,7 @@
       </p:sp>
       <p:graphicFrame>
         <p:nvGraphicFramePr>
-          <p:cNvPr id="14" name="Table 0"/>
+          <p:cNvPr id="16" name="Table 0"/>
           <p:cNvGraphicFramePr>
             <a:graphicFrameLocks noGrp="1"/>
           </p:cNvGraphicFramePr>
@@ -7986,636 +9902,9 @@
             <a:pPr algn="r"/>
             <a:fld id="{F7021451-1387-4CA6-816F-3879F97B5CBC}" type="slidenum">
               <a:rPr b="0" lang="en-US"/>
-              <a:t>13</a:t>
+              <a:t>15</a:t>
             </a:fld>
             <a:endParaRPr lang="en-US"/>
-          </a:p>
-        </p:txBody>
-      </p:sp>
-    </p:spTree>
-  </p:cSld>
-  <p:clrMapOvr>
-    <a:masterClrMapping/>
-  </p:clrMapOvr>
-</p:sld>
-</file>
-
-<file path=ppt/slides/slide14.xml><?xml version="1.0" encoding="utf-8"?>
-<p:sld xmlns:a="http://schemas.openxmlformats.org/drawingml/2006/main" xmlns:r="http://schemas.openxmlformats.org/officeDocument/2006/relationships" xmlns:p="http://schemas.openxmlformats.org/presentationml/2006/main">
-  <p:cSld name="Slide 14">
-    <p:spTree>
-      <p:nvGrpSpPr>
-        <p:cNvPr id="1" name=""/>
-        <p:cNvGrpSpPr/>
-        <p:nvPr/>
-      </p:nvGrpSpPr>
-      <p:grpSpPr>
-        <a:xfrm>
-          <a:off x="0" y="0"/>
-          <a:ext cx="0" cy="0"/>
-          <a:chOff x="0" y="0"/>
-          <a:chExt cx="0" cy="0"/>
-        </a:xfrm>
-      </p:grpSpPr>
-      <p:sp>
-        <p:nvSpPr>
-          <p:cNvPr id="2" name="Text 0"/>
-          <p:cNvSpPr/>
-          <p:nvPr>
-            <p:ph idx="100" type="title" hasCustomPrompt="1"/>
-          </p:nvPr>
-        </p:nvSpPr>
-        <p:spPr>
-          <a:xfrm>
-            <a:off x="457200" y="274320"/>
-            <a:ext cx="8229600" cy="685800"/>
-          </a:xfrm>
-          <a:prstGeom prst="rect">
-            <a:avLst/>
-          </a:prstGeom>
-          <a:noFill/>
-          <a:ln/>
-        </p:spPr>
-        <p:txBody>
-          <a:bodyPr wrap="square" lIns="0" tIns="0" rIns="0" bIns="0" rtlCol="0" anchor="ctr"/>
-          <a:lstStyle/>
-          <a:p>
-            <a:pPr algn="l" indent="0" marL="0">
-              <a:buNone/>
-            </a:pPr>
-            <a:r>
-              <a:rPr lang="en-US" sz="2400" b="1" dirty="0">
-                <a:solidFill>
-                  <a:schemeClr val="tx2"/>
-                </a:solidFill>
-              </a:rPr>
-              <a:t>Limitations to keep in mind</a:t>
-            </a:r>
-            <a:endParaRPr lang="en-US" sz="2400" dirty="0"/>
-          </a:p>
-        </p:txBody>
-      </p:sp>
-      <p:sp>
-        <p:nvSpPr>
-          <p:cNvPr id="3" name="Shape 1"/>
-          <p:cNvSpPr/>
-          <p:nvPr/>
-        </p:nvSpPr>
-        <p:spPr>
-          <a:xfrm>
-            <a:off x="457200" y="1188720"/>
-            <a:ext cx="4023360" cy="1463040"/>
-          </a:xfrm>
-          <a:prstGeom prst="roundRect">
-            <a:avLst>
-              <a:gd name="adj" fmla="val 5000"/>
-            </a:avLst>
-          </a:prstGeom>
-          <a:solidFill>
-            <a:schemeClr val="bg2"/>
-          </a:solidFill>
-          <a:ln/>
-        </p:spPr>
-      </p:sp>
-      <p:sp>
-        <p:nvSpPr>
-          <p:cNvPr id="4" name="Text 2"/>
-          <p:cNvSpPr txBox="1"/>
-          <p:nvPr/>
-        </p:nvSpPr>
-        <p:spPr>
-          <a:xfrm>
-            <a:off x="640080" y="1325880"/>
-            <a:ext cx="3657600" cy="365760"/>
-          </a:xfrm>
-          <a:prstGeom prst="rect">
-            <a:avLst/>
-          </a:prstGeom>
-          <a:noFill/>
-          <a:ln/>
-        </p:spPr>
-        <p:txBody>
-          <a:bodyPr wrap="square" lIns="0" tIns="0" rIns="0" bIns="0" rtlCol="0" anchor="t"/>
-          <a:lstStyle/>
-          <a:p>
-            <a:pPr indent="0" marL="0">
-              <a:buNone/>
-            </a:pPr>
-            <a:r>
-              <a:rPr lang="en-US" sz="1600" b="1" dirty="0">
-                <a:solidFill>
-                  <a:schemeClr val="tx2"/>
-                </a:solidFill>
-              </a:rPr>
-              <a:t>4-bit weights</a:t>
-            </a:r>
-            <a:endParaRPr lang="en-US" sz="1600" dirty="0"/>
-          </a:p>
-        </p:txBody>
-      </p:sp>
-      <p:sp>
-        <p:nvSpPr>
-          <p:cNvPr id="5" name="Text 3"/>
-          <p:cNvSpPr txBox="1"/>
-          <p:nvPr/>
-        </p:nvSpPr>
-        <p:spPr>
-          <a:xfrm>
-            <a:off x="640080" y="1737360"/>
-            <a:ext cx="3657600" cy="822960"/>
-          </a:xfrm>
-          <a:prstGeom prst="rect">
-            <a:avLst/>
-          </a:prstGeom>
-          <a:noFill/>
-          <a:ln/>
-        </p:spPr>
-        <p:txBody>
-          <a:bodyPr wrap="square" lIns="0" tIns="0" rIns="0" bIns="0" rtlCol="0" anchor="t"/>
-          <a:lstStyle/>
-          <a:p>
-            <a:pPr indent="0" marL="0">
-              <a:buNone/>
-            </a:pPr>
-            <a:r>
-              <a:rPr lang="en-US" sz="1400" dirty="0">
-                <a:solidFill>
-                  <a:schemeClr val="tx1"/>
-                </a:solidFill>
-              </a:rPr>
-              <a:t>3B, 7B, 8B and 13B ran quantised (laptop or free Kaggle GPU); 7B still matched the paper.</a:t>
-            </a:r>
-            <a:endParaRPr lang="en-US" sz="1400" dirty="0"/>
-          </a:p>
-        </p:txBody>
-      </p:sp>
-      <p:sp>
-        <p:nvSpPr>
-          <p:cNvPr id="6" name="Shape 4"/>
-          <p:cNvSpPr/>
-          <p:nvPr/>
-        </p:nvSpPr>
-        <p:spPr>
-          <a:xfrm>
-            <a:off x="4663440" y="1188720"/>
-            <a:ext cx="4023360" cy="1463040"/>
-          </a:xfrm>
-          <a:prstGeom prst="roundRect">
-            <a:avLst>
-              <a:gd name="adj" fmla="val 5000"/>
-            </a:avLst>
-          </a:prstGeom>
-          <a:solidFill>
-            <a:schemeClr val="bg2"/>
-          </a:solidFill>
-          <a:ln/>
-        </p:spPr>
-      </p:sp>
-      <p:sp>
-        <p:nvSpPr>
-          <p:cNvPr id="7" name="Text 5"/>
-          <p:cNvSpPr txBox="1"/>
-          <p:nvPr/>
-        </p:nvSpPr>
-        <p:spPr>
-          <a:xfrm>
-            <a:off x="4846320" y="1325880"/>
-            <a:ext cx="3657600" cy="365760"/>
-          </a:xfrm>
-          <a:prstGeom prst="rect">
-            <a:avLst/>
-          </a:prstGeom>
-          <a:noFill/>
-          <a:ln/>
-        </p:spPr>
-        <p:txBody>
-          <a:bodyPr wrap="square" lIns="0" tIns="0" rIns="0" bIns="0" rtlCol="0" anchor="t"/>
-          <a:lstStyle/>
-          <a:p>
-            <a:pPr indent="0" marL="0">
-              <a:buNone/>
-            </a:pPr>
-            <a:r>
-              <a:rPr lang="en-US" sz="1600" b="1" dirty="0">
-                <a:solidFill>
-                  <a:schemeClr val="tx2"/>
-                </a:solidFill>
-              </a:rPr>
-              <a:t>Small Dolly (AC)</a:t>
-            </a:r>
-            <a:endParaRPr lang="en-US" sz="1600" dirty="0"/>
-          </a:p>
-        </p:txBody>
-      </p:sp>
-      <p:sp>
-        <p:nvSpPr>
-          <p:cNvPr id="8" name="Text 6"/>
-          <p:cNvSpPr txBox="1"/>
-          <p:nvPr/>
-        </p:nvSpPr>
-        <p:spPr>
-          <a:xfrm>
-            <a:off x="4846320" y="1737360"/>
-            <a:ext cx="3657600" cy="822960"/>
-          </a:xfrm>
-          <a:prstGeom prst="rect">
-            <a:avLst/>
-          </a:prstGeom>
-          <a:noFill/>
-          <a:ln/>
-        </p:spPr>
-        <p:txBody>
-          <a:bodyPr wrap="square" lIns="0" tIns="0" rIns="0" bIns="0" rtlCol="0" anchor="t"/>
-          <a:lstStyle/>
-          <a:p>
-            <a:pPr indent="0" marL="0">
-              <a:buNone/>
-            </a:pPr>
-            <a:r>
-              <a:rPr lang="en-US" sz="1400" dirty="0">
-                <a:solidFill>
-                  <a:schemeClr val="tx1"/>
-                </a:solidFill>
-              </a:rPr>
-              <a:t>99 responses per model: fold-to-fold spread near 0.08-0.10 AUC.</a:t>
-            </a:r>
-            <a:endParaRPr lang="en-US" sz="1400" dirty="0"/>
-          </a:p>
-        </p:txBody>
-      </p:sp>
-      <p:sp>
-        <p:nvSpPr>
-          <p:cNvPr id="9" name="Shape 7"/>
-          <p:cNvSpPr/>
-          <p:nvPr/>
-        </p:nvSpPr>
-        <p:spPr>
-          <a:xfrm>
-            <a:off x="457200" y="2834640"/>
-            <a:ext cx="4023360" cy="1463040"/>
-          </a:xfrm>
-          <a:prstGeom prst="roundRect">
-            <a:avLst>
-              <a:gd name="adj" fmla="val 5000"/>
-            </a:avLst>
-          </a:prstGeom>
-          <a:solidFill>
-            <a:schemeClr val="bg2"/>
-          </a:solidFill>
-          <a:ln/>
-        </p:spPr>
-      </p:sp>
-      <p:sp>
-        <p:nvSpPr>
-          <p:cNvPr id="10" name="Text 8"/>
-          <p:cNvSpPr txBox="1"/>
-          <p:nvPr/>
-        </p:nvSpPr>
-        <p:spPr>
-          <a:xfrm>
-            <a:off x="640080" y="2971800"/>
-            <a:ext cx="3657600" cy="365760"/>
-          </a:xfrm>
-          <a:prstGeom prst="rect">
-            <a:avLst/>
-          </a:prstGeom>
-          <a:noFill/>
-          <a:ln/>
-        </p:spPr>
-        <p:txBody>
-          <a:bodyPr wrap="square" lIns="0" tIns="0" rIns="0" bIns="0" rtlCol="0" anchor="t"/>
-          <a:lstStyle/>
-          <a:p>
-            <a:pPr indent="0" marL="0">
-              <a:buNone/>
-            </a:pPr>
-            <a:r>
-              <a:rPr lang="en-US" sz="1600" b="1" dirty="0">
-                <a:solidFill>
-                  <a:schemeClr val="tx2"/>
-                </a:solidFill>
-              </a:rPr>
-              <a:t>Numbers only</a:t>
-            </a:r>
-            <a:endParaRPr lang="en-US" sz="1600" dirty="0"/>
-          </a:p>
-        </p:txBody>
-      </p:sp>
-      <p:sp>
-        <p:nvSpPr>
-          <p:cNvPr id="11" name="Text 9"/>
-          <p:cNvSpPr txBox="1"/>
-          <p:nvPr/>
-        </p:nvSpPr>
-        <p:spPr>
-          <a:xfrm>
-            <a:off x="640080" y="3383280"/>
-            <a:ext cx="3657600" cy="822960"/>
-          </a:xfrm>
-          <a:prstGeom prst="rect">
-            <a:avLst/>
-          </a:prstGeom>
-          <a:noFill/>
-          <a:ln/>
-        </p:spPr>
-        <p:txBody>
-          <a:bodyPr wrap="square" lIns="0" tIns="0" rIns="0" bIns="0" rtlCol="0" anchor="t"/>
-          <a:lstStyle/>
-          <a:p>
-            <a:pPr indent="0" marL="0">
-              <a:buNone/>
-            </a:pPr>
-            <a:r>
-              <a:rPr lang="en-US" sz="1400" dirty="0">
-                <a:solidFill>
-                  <a:schemeClr val="tx1"/>
-                </a:solidFill>
-              </a:rPr>
-              <a:t>The contradiction test corrupts numbers; entity swaps and negations are untested.</a:t>
-            </a:r>
-            <a:endParaRPr lang="en-US" sz="1400" dirty="0"/>
-          </a:p>
-        </p:txBody>
-      </p:sp>
-      <p:sp>
-        <p:nvSpPr>
-          <p:cNvPr id="12" name="Shape 10"/>
-          <p:cNvSpPr/>
-          <p:nvPr/>
-        </p:nvSpPr>
-        <p:spPr>
-          <a:xfrm>
-            <a:off x="4663440" y="2834640"/>
-            <a:ext cx="4023360" cy="1463040"/>
-          </a:xfrm>
-          <a:prstGeom prst="roundRect">
-            <a:avLst>
-              <a:gd name="adj" fmla="val 5000"/>
-            </a:avLst>
-          </a:prstGeom>
-          <a:solidFill>
-            <a:schemeClr val="bg2"/>
-          </a:solidFill>
-          <a:ln/>
-        </p:spPr>
-      </p:sp>
-      <p:sp>
-        <p:nvSpPr>
-          <p:cNvPr id="13" name="Text 11"/>
-          <p:cNvSpPr txBox="1"/>
-          <p:nvPr/>
-        </p:nvSpPr>
-        <p:spPr>
-          <a:xfrm>
-            <a:off x="4846320" y="2971800"/>
-            <a:ext cx="3657600" cy="365760"/>
-          </a:xfrm>
-          <a:prstGeom prst="rect">
-            <a:avLst/>
-          </a:prstGeom>
-          <a:noFill/>
-          <a:ln/>
-        </p:spPr>
-        <p:txBody>
-          <a:bodyPr wrap="square" lIns="0" tIns="0" rIns="0" bIns="0" rtlCol="0" anchor="t"/>
-          <a:lstStyle/>
-          <a:p>
-            <a:pPr indent="0" marL="0">
-              <a:buNone/>
-            </a:pPr>
-            <a:r>
-              <a:rPr lang="en-US" sz="1600" b="1" dirty="0">
-                <a:solidFill>
-                  <a:schemeClr val="tx2"/>
-                </a:solidFill>
-              </a:rPr>
-              <a:t>Free-tier judges</a:t>
-            </a:r>
-            <a:endParaRPr lang="en-US" sz="1600" dirty="0"/>
-          </a:p>
-        </p:txBody>
-      </p:sp>
-      <p:sp>
-        <p:nvSpPr>
-          <p:cNvPr id="14" name="Text 12"/>
-          <p:cNvSpPr txBox="1"/>
-          <p:nvPr/>
-        </p:nvSpPr>
-        <p:spPr>
-          <a:xfrm>
-            <a:off x="4846320" y="3383280"/>
-            <a:ext cx="3657600" cy="822960"/>
-          </a:xfrm>
-          <a:prstGeom prst="rect">
-            <a:avLst/>
-          </a:prstGeom>
-          <a:noFill/>
-          <a:ln/>
-        </p:spPr>
-        <p:txBody>
-          <a:bodyPr wrap="square" lIns="0" tIns="0" rIns="0" bIns="0" rtlCol="0" anchor="t"/>
-          <a:lstStyle/>
-          <a:p>
-            <a:pPr indent="0" marL="0">
-              <a:buNone/>
-            </a:pPr>
-            <a:r>
-              <a:rPr lang="en-US" sz="1400" dirty="0">
-                <a:solidFill>
-                  <a:schemeClr val="tx1"/>
-                </a:solidFill>
-              </a:rPr>
-              <a:t>GPT judge is open-weights gpt-oss-120b; Gemini is Flash-Lite instead of GPT-4o.</a:t>
-            </a:r>
-            <a:endParaRPr lang="en-US" sz="1400" dirty="0"/>
-          </a:p>
-        </p:txBody>
-      </p:sp>
-      <p:sp>
-        <p:nvSpPr>
-          <p:cNvPr id="25" name="Slide Number Placeholder 0"/>
-          <p:cNvSpPr>
-            <a:spLocks noGrp="1"/>
-          </p:cNvSpPr>
-          <p:nvPr>
-            <p:ph type="sldNum" sz="quarter" idx="4294967295"/>
-          </p:nvPr>
-        </p:nvSpPr>
-        <p:spPr>
-          <a:xfrm>
-            <a:off x="8229600" y="4754880"/>
-            <a:ext cx="457200" cy="274320"/>
-          </a:xfrm>
-          <a:prstGeom prst="rect">
-            <a:avLst/>
-          </a:prstGeom>
-          <a:extLst>
-            <a:ext uri="{C572A759-6A51-4108-AA02-DFA0A04FC94B}">
-              <ma14:wrappingTextBoxFlag xmlns:ma14="http://schemas.microsoft.com/office/mac/drawingml/2011/main" val="0"/>
-            </a:ext>
-          </a:extLst>
-        </p:spPr>
-        <p:txBody>
-          <a:bodyPr/>
-          <a:lstStyle>
-            <a:lvl1pPr>
-              <a:defRPr sz="1000">
-                <a:solidFill>
-                  <a:schemeClr val="accent3"/>
-                </a:solidFill>
-              </a:defRPr>
-            </a:lvl1pPr>
-          </a:lstStyle>
-          <a:p>
-            <a:pPr algn="r"/>
-            <a:fld id="{F7021451-1387-4CA6-816F-3879F97B5CBC}" type="slidenum">
-              <a:rPr b="0" lang="en-US"/>
-              <a:t>14</a:t>
-            </a:fld>
-            <a:endParaRPr lang="en-US"/>
-          </a:p>
-        </p:txBody>
-      </p:sp>
-    </p:spTree>
-  </p:cSld>
-  <p:clrMapOvr>
-    <a:masterClrMapping/>
-  </p:clrMapOvr>
-</p:sld>
-</file>
-
-<file path=ppt/slides/slide15.xml><?xml version="1.0" encoding="utf-8"?>
-<p:sld xmlns:a="http://schemas.openxmlformats.org/drawingml/2006/main" xmlns:r="http://schemas.openxmlformats.org/officeDocument/2006/relationships" xmlns:p="http://schemas.openxmlformats.org/presentationml/2006/main">
-  <p:cSld name="Slide 15">
-    <p:spTree>
-      <p:nvGrpSpPr>
-        <p:cNvPr id="1" name=""/>
-        <p:cNvGrpSpPr/>
-        <p:nvPr/>
-      </p:nvGrpSpPr>
-      <p:grpSpPr>
-        <a:xfrm>
-          <a:off x="0" y="0"/>
-          <a:ext cx="0" cy="0"/>
-          <a:chOff x="0" y="0"/>
-          <a:chExt cx="0" cy="0"/>
-        </a:xfrm>
-      </p:grpSpPr>
-      <p:sp>
-        <p:nvSpPr>
-          <p:cNvPr id="2" name="Text 0"/>
-          <p:cNvSpPr/>
-          <p:nvPr>
-            <p:ph idx="100" type="title" hasCustomPrompt="1"/>
-          </p:nvPr>
-        </p:nvSpPr>
-        <p:spPr>
-          <a:xfrm>
-            <a:off x="548640" y="1325880"/>
-            <a:ext cx="8046720" cy="1371600"/>
-          </a:xfrm>
-          <a:prstGeom prst="rect">
-            <a:avLst/>
-          </a:prstGeom>
-          <a:noFill/>
-          <a:ln/>
-        </p:spPr>
-        <p:txBody>
-          <a:bodyPr wrap="square" lIns="0" tIns="0" rIns="0" bIns="0" rtlCol="0" anchor="b"/>
-          <a:lstStyle/>
-          <a:p>
-            <a:pPr algn="l" indent="0" marL="0">
-              <a:buNone/>
-            </a:pPr>
-            <a:r>
-              <a:rPr lang="en-US" sz="3800" b="1" dirty="0">
-                <a:solidFill>
-                  <a:schemeClr val="bg1"/>
-                </a:solidFill>
-              </a:rPr>
-              <a:t>ReDeEP works, and now we know where it stops working</a:t>
-            </a:r>
-            <a:endParaRPr lang="en-US" sz="3800" dirty="0"/>
-          </a:p>
-        </p:txBody>
-      </p:sp>
-      <p:sp>
-        <p:nvSpPr>
-          <p:cNvPr id="3" name="Text 0"/>
-          <p:cNvSpPr/>
-          <p:nvPr>
-            <p:ph idx="101" type="body" hasCustomPrompt="1"/>
-          </p:nvPr>
-        </p:nvSpPr>
-        <p:spPr>
-          <a:xfrm>
-            <a:off x="548640" y="2880360"/>
-            <a:ext cx="8046720" cy="1097280"/>
-          </a:xfrm>
-          <a:prstGeom prst="rect">
-            <a:avLst/>
-          </a:prstGeom>
-          <a:noFill/>
-          <a:ln/>
-        </p:spPr>
-        <p:txBody>
-          <a:bodyPr wrap="square" lIns="0" tIns="0" rIns="0" bIns="0" rtlCol="0" anchor="t"/>
-          <a:lstStyle/>
-          <a:p>
-            <a:pPr indent="0" marL="0">
-              <a:buNone/>
-            </a:pPr>
-            <a:r>
-              <a:rPr lang="en-US" sz="1800" dirty="0">
-                <a:solidFill>
-                  <a:schemeClr val="bg2"/>
-                </a:solidFill>
-              </a:rPr>
-              <a:t>Reproduced: AUC 0.739 vs. 0.7325; chunk level matches the authors exactly</a:t>
-            </a:r>
-            <a:endParaRPr lang="en-US" sz="1800" dirty="0"/>
-          </a:p>
-          <a:p>
-            <a:pPr indent="0" marL="0">
-              <a:buNone/>
-            </a:pPr>
-            <a:r>
-              <a:rPr lang="en-US" sz="1800" dirty="0">
-                <a:solidFill>
-                  <a:schemeClr val="bg2"/>
-                </a:solidFill>
-              </a:rPr>
-              <a:t>Strongest on Llama-2-13B; mixed on Llama-3-8B</a:t>
-            </a:r>
-            <a:endParaRPr lang="en-US" sz="1800" dirty="0"/>
-          </a:p>
-          <a:p>
-            <a:pPr indent="0" marL="0">
-              <a:buNone/>
-            </a:pPr>
-            <a:r>
-              <a:rPr lang="en-US" sz="1800" dirty="0">
-                <a:solidFill>
-                  <a:schemeClr val="bg2"/>
-                </a:solidFill>
-              </a:rPr>
-              <a:t>Official evaluation leaks test labels: small on RAGTruth, large on Dolly (AC)</a:t>
-            </a:r>
-            <a:endParaRPr lang="en-US" sz="1800" dirty="0"/>
-          </a:p>
-          <a:p>
-            <a:pPr indent="0" marL="0">
-              <a:buNone/>
-            </a:pPr>
-            <a:r>
-              <a:rPr lang="en-US" sz="1800" dirty="0">
-                <a:solidFill>
-                  <a:schemeClr val="bg2"/>
-                </a:solidFill>
-              </a:rPr>
-              <a:t>Blind to contradicted numbers; AARF's gain does not survive a fair judge</a:t>
-            </a:r>
-            <a:endParaRPr lang="en-US" sz="1800" dirty="0"/>
           </a:p>
         </p:txBody>
       </p:sp>
@@ -8654,6 +9943,633 @@
         </p:nvSpPr>
         <p:spPr>
           <a:xfrm>
+            <a:off x="457200" y="274320"/>
+            <a:ext cx="8229600" cy="685800"/>
+          </a:xfrm>
+          <a:prstGeom prst="rect">
+            <a:avLst/>
+          </a:prstGeom>
+          <a:noFill/>
+          <a:ln/>
+        </p:spPr>
+        <p:txBody>
+          <a:bodyPr wrap="square" lIns="0" tIns="0" rIns="0" bIns="0" rtlCol="0" anchor="ctr"/>
+          <a:lstStyle/>
+          <a:p>
+            <a:pPr algn="l" indent="0" marL="0">
+              <a:buNone/>
+            </a:pPr>
+            <a:r>
+              <a:rPr lang="en-US" sz="2400" b="1" dirty="0">
+                <a:solidFill>
+                  <a:schemeClr val="tx2"/>
+                </a:solidFill>
+              </a:rPr>
+              <a:t>Limitations to keep in mind</a:t>
+            </a:r>
+            <a:endParaRPr lang="en-US" sz="2400" dirty="0"/>
+          </a:p>
+        </p:txBody>
+      </p:sp>
+      <p:sp>
+        <p:nvSpPr>
+          <p:cNvPr id="3" name="Shape 1"/>
+          <p:cNvSpPr/>
+          <p:nvPr/>
+        </p:nvSpPr>
+        <p:spPr>
+          <a:xfrm>
+            <a:off x="457200" y="1188720"/>
+            <a:ext cx="4023360" cy="1463040"/>
+          </a:xfrm>
+          <a:prstGeom prst="roundRect">
+            <a:avLst>
+              <a:gd name="adj" fmla="val 5000"/>
+            </a:avLst>
+          </a:prstGeom>
+          <a:solidFill>
+            <a:schemeClr val="bg2"/>
+          </a:solidFill>
+          <a:ln/>
+        </p:spPr>
+      </p:sp>
+      <p:sp>
+        <p:nvSpPr>
+          <p:cNvPr id="4" name="Text 2"/>
+          <p:cNvSpPr txBox="1"/>
+          <p:nvPr/>
+        </p:nvSpPr>
+        <p:spPr>
+          <a:xfrm>
+            <a:off x="640080" y="1325880"/>
+            <a:ext cx="3657600" cy="365760"/>
+          </a:xfrm>
+          <a:prstGeom prst="rect">
+            <a:avLst/>
+          </a:prstGeom>
+          <a:noFill/>
+          <a:ln/>
+        </p:spPr>
+        <p:txBody>
+          <a:bodyPr wrap="square" lIns="0" tIns="0" rIns="0" bIns="0" rtlCol="0" anchor="t"/>
+          <a:lstStyle/>
+          <a:p>
+            <a:pPr indent="0" marL="0">
+              <a:buNone/>
+            </a:pPr>
+            <a:r>
+              <a:rPr lang="en-US" sz="1600" b="1" dirty="0">
+                <a:solidFill>
+                  <a:schemeClr val="tx2"/>
+                </a:solidFill>
+              </a:rPr>
+              <a:t>4-bit weights</a:t>
+            </a:r>
+            <a:endParaRPr lang="en-US" sz="1600" dirty="0"/>
+          </a:p>
+        </p:txBody>
+      </p:sp>
+      <p:sp>
+        <p:nvSpPr>
+          <p:cNvPr id="5" name="Text 3"/>
+          <p:cNvSpPr txBox="1"/>
+          <p:nvPr/>
+        </p:nvSpPr>
+        <p:spPr>
+          <a:xfrm>
+            <a:off x="640080" y="1737360"/>
+            <a:ext cx="3657600" cy="822960"/>
+          </a:xfrm>
+          <a:prstGeom prst="rect">
+            <a:avLst/>
+          </a:prstGeom>
+          <a:noFill/>
+          <a:ln/>
+        </p:spPr>
+        <p:txBody>
+          <a:bodyPr wrap="square" lIns="0" tIns="0" rIns="0" bIns="0" rtlCol="0" anchor="t"/>
+          <a:lstStyle/>
+          <a:p>
+            <a:pPr indent="0" marL="0">
+              <a:buNone/>
+            </a:pPr>
+            <a:r>
+              <a:rPr lang="en-US" sz="1400" dirty="0">
+                <a:solidFill>
+                  <a:schemeClr val="tx1"/>
+                </a:solidFill>
+              </a:rPr>
+              <a:t>3B, 7B, 8B and 13B ran quantised (laptop or free Kaggle GPU); 7B still matched the paper.</a:t>
+            </a:r>
+            <a:endParaRPr lang="en-US" sz="1400" dirty="0"/>
+          </a:p>
+        </p:txBody>
+      </p:sp>
+      <p:sp>
+        <p:nvSpPr>
+          <p:cNvPr id="6" name="Shape 4"/>
+          <p:cNvSpPr/>
+          <p:nvPr/>
+        </p:nvSpPr>
+        <p:spPr>
+          <a:xfrm>
+            <a:off x="4663440" y="1188720"/>
+            <a:ext cx="4023360" cy="1463040"/>
+          </a:xfrm>
+          <a:prstGeom prst="roundRect">
+            <a:avLst>
+              <a:gd name="adj" fmla="val 5000"/>
+            </a:avLst>
+          </a:prstGeom>
+          <a:solidFill>
+            <a:schemeClr val="bg2"/>
+          </a:solidFill>
+          <a:ln/>
+        </p:spPr>
+      </p:sp>
+      <p:sp>
+        <p:nvSpPr>
+          <p:cNvPr id="7" name="Text 5"/>
+          <p:cNvSpPr txBox="1"/>
+          <p:nvPr/>
+        </p:nvSpPr>
+        <p:spPr>
+          <a:xfrm>
+            <a:off x="4846320" y="1325880"/>
+            <a:ext cx="3657600" cy="365760"/>
+          </a:xfrm>
+          <a:prstGeom prst="rect">
+            <a:avLst/>
+          </a:prstGeom>
+          <a:noFill/>
+          <a:ln/>
+        </p:spPr>
+        <p:txBody>
+          <a:bodyPr wrap="square" lIns="0" tIns="0" rIns="0" bIns="0" rtlCol="0" anchor="t"/>
+          <a:lstStyle/>
+          <a:p>
+            <a:pPr indent="0" marL="0">
+              <a:buNone/>
+            </a:pPr>
+            <a:r>
+              <a:rPr lang="en-US" sz="1600" b="1" dirty="0">
+                <a:solidFill>
+                  <a:schemeClr val="tx2"/>
+                </a:solidFill>
+              </a:rPr>
+              <a:t>Small Dolly (AC)</a:t>
+            </a:r>
+            <a:endParaRPr lang="en-US" sz="1600" dirty="0"/>
+          </a:p>
+        </p:txBody>
+      </p:sp>
+      <p:sp>
+        <p:nvSpPr>
+          <p:cNvPr id="8" name="Text 6"/>
+          <p:cNvSpPr txBox="1"/>
+          <p:nvPr/>
+        </p:nvSpPr>
+        <p:spPr>
+          <a:xfrm>
+            <a:off x="4846320" y="1737360"/>
+            <a:ext cx="3657600" cy="822960"/>
+          </a:xfrm>
+          <a:prstGeom prst="rect">
+            <a:avLst/>
+          </a:prstGeom>
+          <a:noFill/>
+          <a:ln/>
+        </p:spPr>
+        <p:txBody>
+          <a:bodyPr wrap="square" lIns="0" tIns="0" rIns="0" bIns="0" rtlCol="0" anchor="t"/>
+          <a:lstStyle/>
+          <a:p>
+            <a:pPr indent="0" marL="0">
+              <a:buNone/>
+            </a:pPr>
+            <a:r>
+              <a:rPr lang="en-US" sz="1400" dirty="0">
+                <a:solidFill>
+                  <a:schemeClr val="tx1"/>
+                </a:solidFill>
+              </a:rPr>
+              <a:t>99 responses per model: fold-to-fold spread near 0.08-0.10 AUC.</a:t>
+            </a:r>
+            <a:endParaRPr lang="en-US" sz="1400" dirty="0"/>
+          </a:p>
+        </p:txBody>
+      </p:sp>
+      <p:sp>
+        <p:nvSpPr>
+          <p:cNvPr id="9" name="Shape 7"/>
+          <p:cNvSpPr/>
+          <p:nvPr/>
+        </p:nvSpPr>
+        <p:spPr>
+          <a:xfrm>
+            <a:off x="457200" y="2834640"/>
+            <a:ext cx="4023360" cy="1463040"/>
+          </a:xfrm>
+          <a:prstGeom prst="roundRect">
+            <a:avLst>
+              <a:gd name="adj" fmla="val 5000"/>
+            </a:avLst>
+          </a:prstGeom>
+          <a:solidFill>
+            <a:schemeClr val="bg2"/>
+          </a:solidFill>
+          <a:ln/>
+        </p:spPr>
+      </p:sp>
+      <p:sp>
+        <p:nvSpPr>
+          <p:cNvPr id="10" name="Text 8"/>
+          <p:cNvSpPr txBox="1"/>
+          <p:nvPr/>
+        </p:nvSpPr>
+        <p:spPr>
+          <a:xfrm>
+            <a:off x="640080" y="2971800"/>
+            <a:ext cx="3657600" cy="365760"/>
+          </a:xfrm>
+          <a:prstGeom prst="rect">
+            <a:avLst/>
+          </a:prstGeom>
+          <a:noFill/>
+          <a:ln/>
+        </p:spPr>
+        <p:txBody>
+          <a:bodyPr wrap="square" lIns="0" tIns="0" rIns="0" bIns="0" rtlCol="0" anchor="t"/>
+          <a:lstStyle/>
+          <a:p>
+            <a:pPr indent="0" marL="0">
+              <a:buNone/>
+            </a:pPr>
+            <a:r>
+              <a:rPr lang="en-US" sz="1600" b="1" dirty="0">
+                <a:solidFill>
+                  <a:schemeClr val="tx2"/>
+                </a:solidFill>
+              </a:rPr>
+              <a:t>Numbers only</a:t>
+            </a:r>
+            <a:endParaRPr lang="en-US" sz="1600" dirty="0"/>
+          </a:p>
+        </p:txBody>
+      </p:sp>
+      <p:sp>
+        <p:nvSpPr>
+          <p:cNvPr id="11" name="Text 9"/>
+          <p:cNvSpPr txBox="1"/>
+          <p:nvPr/>
+        </p:nvSpPr>
+        <p:spPr>
+          <a:xfrm>
+            <a:off x="640080" y="3383280"/>
+            <a:ext cx="3657600" cy="822960"/>
+          </a:xfrm>
+          <a:prstGeom prst="rect">
+            <a:avLst/>
+          </a:prstGeom>
+          <a:noFill/>
+          <a:ln/>
+        </p:spPr>
+        <p:txBody>
+          <a:bodyPr wrap="square" lIns="0" tIns="0" rIns="0" bIns="0" rtlCol="0" anchor="t"/>
+          <a:lstStyle/>
+          <a:p>
+            <a:pPr indent="0" marL="0">
+              <a:buNone/>
+            </a:pPr>
+            <a:r>
+              <a:rPr lang="en-US" sz="1400" dirty="0">
+                <a:solidFill>
+                  <a:schemeClr val="tx1"/>
+                </a:solidFill>
+              </a:rPr>
+              <a:t>The contradiction test corrupts numbers; entity swaps and negations are untested.</a:t>
+            </a:r>
+            <a:endParaRPr lang="en-US" sz="1400" dirty="0"/>
+          </a:p>
+        </p:txBody>
+      </p:sp>
+      <p:sp>
+        <p:nvSpPr>
+          <p:cNvPr id="12" name="Shape 10"/>
+          <p:cNvSpPr/>
+          <p:nvPr/>
+        </p:nvSpPr>
+        <p:spPr>
+          <a:xfrm>
+            <a:off x="4663440" y="2834640"/>
+            <a:ext cx="4023360" cy="1463040"/>
+          </a:xfrm>
+          <a:prstGeom prst="roundRect">
+            <a:avLst>
+              <a:gd name="adj" fmla="val 5000"/>
+            </a:avLst>
+          </a:prstGeom>
+          <a:solidFill>
+            <a:schemeClr val="bg2"/>
+          </a:solidFill>
+          <a:ln/>
+        </p:spPr>
+      </p:sp>
+      <p:sp>
+        <p:nvSpPr>
+          <p:cNvPr id="13" name="Text 11"/>
+          <p:cNvSpPr txBox="1"/>
+          <p:nvPr/>
+        </p:nvSpPr>
+        <p:spPr>
+          <a:xfrm>
+            <a:off x="4846320" y="2971800"/>
+            <a:ext cx="3657600" cy="365760"/>
+          </a:xfrm>
+          <a:prstGeom prst="rect">
+            <a:avLst/>
+          </a:prstGeom>
+          <a:noFill/>
+          <a:ln/>
+        </p:spPr>
+        <p:txBody>
+          <a:bodyPr wrap="square" lIns="0" tIns="0" rIns="0" bIns="0" rtlCol="0" anchor="t"/>
+          <a:lstStyle/>
+          <a:p>
+            <a:pPr indent="0" marL="0">
+              <a:buNone/>
+            </a:pPr>
+            <a:r>
+              <a:rPr lang="en-US" sz="1600" b="1" dirty="0">
+                <a:solidFill>
+                  <a:schemeClr val="tx2"/>
+                </a:solidFill>
+              </a:rPr>
+              <a:t>Free-tier judges</a:t>
+            </a:r>
+            <a:endParaRPr lang="en-US" sz="1600" dirty="0"/>
+          </a:p>
+        </p:txBody>
+      </p:sp>
+      <p:sp>
+        <p:nvSpPr>
+          <p:cNvPr id="14" name="Text 12"/>
+          <p:cNvSpPr txBox="1"/>
+          <p:nvPr/>
+        </p:nvSpPr>
+        <p:spPr>
+          <a:xfrm>
+            <a:off x="4846320" y="3383280"/>
+            <a:ext cx="3657600" cy="822960"/>
+          </a:xfrm>
+          <a:prstGeom prst="rect">
+            <a:avLst/>
+          </a:prstGeom>
+          <a:noFill/>
+          <a:ln/>
+        </p:spPr>
+        <p:txBody>
+          <a:bodyPr wrap="square" lIns="0" tIns="0" rIns="0" bIns="0" rtlCol="0" anchor="t"/>
+          <a:lstStyle/>
+          <a:p>
+            <a:pPr indent="0" marL="0">
+              <a:buNone/>
+            </a:pPr>
+            <a:r>
+              <a:rPr lang="en-US" sz="1400" dirty="0">
+                <a:solidFill>
+                  <a:schemeClr val="tx1"/>
+                </a:solidFill>
+              </a:rPr>
+              <a:t>GPT judge is open-weights gpt-oss-120b; Gemini is Flash-Lite instead of GPT-4o.</a:t>
+            </a:r>
+            <a:endParaRPr lang="en-US" sz="1400" dirty="0"/>
+          </a:p>
+        </p:txBody>
+      </p:sp>
+      <p:sp>
+        <p:nvSpPr>
+          <p:cNvPr id="25" name="Slide Number Placeholder 0"/>
+          <p:cNvSpPr>
+            <a:spLocks noGrp="1"/>
+          </p:cNvSpPr>
+          <p:nvPr>
+            <p:ph type="sldNum" sz="quarter" idx="4294967295"/>
+          </p:nvPr>
+        </p:nvSpPr>
+        <p:spPr>
+          <a:xfrm>
+            <a:off x="8229600" y="4754880"/>
+            <a:ext cx="457200" cy="274320"/>
+          </a:xfrm>
+          <a:prstGeom prst="rect">
+            <a:avLst/>
+          </a:prstGeom>
+          <a:extLst>
+            <a:ext uri="{C572A759-6A51-4108-AA02-DFA0A04FC94B}">
+              <ma14:wrappingTextBoxFlag xmlns:ma14="http://schemas.microsoft.com/office/mac/drawingml/2011/main" val="0"/>
+            </a:ext>
+          </a:extLst>
+        </p:spPr>
+        <p:txBody>
+          <a:bodyPr/>
+          <a:lstStyle>
+            <a:lvl1pPr>
+              <a:defRPr sz="1000">
+                <a:solidFill>
+                  <a:schemeClr val="accent3"/>
+                </a:solidFill>
+              </a:defRPr>
+            </a:lvl1pPr>
+          </a:lstStyle>
+          <a:p>
+            <a:pPr algn="r"/>
+            <a:fld id="{F7021451-1387-4CA6-816F-3879F97B5CBC}" type="slidenum">
+              <a:rPr b="0" lang="en-US"/>
+              <a:t>16</a:t>
+            </a:fld>
+            <a:endParaRPr lang="en-US"/>
+          </a:p>
+        </p:txBody>
+      </p:sp>
+    </p:spTree>
+  </p:cSld>
+  <p:clrMapOvr>
+    <a:masterClrMapping/>
+  </p:clrMapOvr>
+</p:sld>
+</file>
+
+<file path=ppt/slides/slide17.xml><?xml version="1.0" encoding="utf-8"?>
+<p:sld xmlns:a="http://schemas.openxmlformats.org/drawingml/2006/main" xmlns:r="http://schemas.openxmlformats.org/officeDocument/2006/relationships" xmlns:p="http://schemas.openxmlformats.org/presentationml/2006/main">
+  <p:cSld name="Slide 17">
+    <p:spTree>
+      <p:nvGrpSpPr>
+        <p:cNvPr id="1" name=""/>
+        <p:cNvGrpSpPr/>
+        <p:nvPr/>
+      </p:nvGrpSpPr>
+      <p:grpSpPr>
+        <a:xfrm>
+          <a:off x="0" y="0"/>
+          <a:ext cx="0" cy="0"/>
+          <a:chOff x="0" y="0"/>
+          <a:chExt cx="0" cy="0"/>
+        </a:xfrm>
+      </p:grpSpPr>
+      <p:sp>
+        <p:nvSpPr>
+          <p:cNvPr id="2" name="Text 0"/>
+          <p:cNvSpPr/>
+          <p:nvPr>
+            <p:ph idx="100" type="title" hasCustomPrompt="1"/>
+          </p:nvPr>
+        </p:nvSpPr>
+        <p:spPr>
+          <a:xfrm>
+            <a:off x="548640" y="1325880"/>
+            <a:ext cx="8046720" cy="1371600"/>
+          </a:xfrm>
+          <a:prstGeom prst="rect">
+            <a:avLst/>
+          </a:prstGeom>
+          <a:noFill/>
+          <a:ln/>
+        </p:spPr>
+        <p:txBody>
+          <a:bodyPr wrap="square" lIns="0" tIns="0" rIns="0" bIns="0" rtlCol="0" anchor="b"/>
+          <a:lstStyle/>
+          <a:p>
+            <a:pPr algn="l" indent="0" marL="0">
+              <a:buNone/>
+            </a:pPr>
+            <a:r>
+              <a:rPr lang="en-US" sz="3800" b="1" dirty="0">
+                <a:solidFill>
+                  <a:schemeClr val="bg1"/>
+                </a:solidFill>
+              </a:rPr>
+              <a:t>ReDeEP works, and now we know where it stops working</a:t>
+            </a:r>
+            <a:endParaRPr lang="en-US" sz="3800" dirty="0"/>
+          </a:p>
+        </p:txBody>
+      </p:sp>
+      <p:sp>
+        <p:nvSpPr>
+          <p:cNvPr id="3" name="Text 0"/>
+          <p:cNvSpPr/>
+          <p:nvPr>
+            <p:ph idx="101" type="body" hasCustomPrompt="1"/>
+          </p:nvPr>
+        </p:nvSpPr>
+        <p:spPr>
+          <a:xfrm>
+            <a:off x="548640" y="2880360"/>
+            <a:ext cx="8046720" cy="1097280"/>
+          </a:xfrm>
+          <a:prstGeom prst="rect">
+            <a:avLst/>
+          </a:prstGeom>
+          <a:noFill/>
+          <a:ln/>
+        </p:spPr>
+        <p:txBody>
+          <a:bodyPr wrap="square" lIns="0" tIns="0" rIns="0" bIns="0" rtlCol="0" anchor="t"/>
+          <a:lstStyle/>
+          <a:p>
+            <a:pPr indent="0" marL="0">
+              <a:buNone/>
+            </a:pPr>
+            <a:r>
+              <a:rPr lang="en-US" sz="1800" dirty="0">
+                <a:solidFill>
+                  <a:schemeClr val="bg2"/>
+                </a:solidFill>
+              </a:rPr>
+              <a:t>Reproduced: AUC 0.739 vs. 0.7325; chunk level matches the authors exactly</a:t>
+            </a:r>
+            <a:endParaRPr lang="en-US" sz="1800" dirty="0"/>
+          </a:p>
+          <a:p>
+            <a:pPr indent="0" marL="0">
+              <a:buNone/>
+            </a:pPr>
+            <a:r>
+              <a:rPr lang="en-US" sz="1800" dirty="0">
+                <a:solidFill>
+                  <a:schemeClr val="bg2"/>
+                </a:solidFill>
+              </a:rPr>
+              <a:t>Strongest on Llama-2-13B; mixed on Llama-3-8B</a:t>
+            </a:r>
+            <a:endParaRPr lang="en-US" sz="1800" dirty="0"/>
+          </a:p>
+          <a:p>
+            <a:pPr indent="0" marL="0">
+              <a:buNone/>
+            </a:pPr>
+            <a:r>
+              <a:rPr lang="en-US" sz="1800" dirty="0">
+                <a:solidFill>
+                  <a:schemeClr val="bg2"/>
+                </a:solidFill>
+              </a:rPr>
+              <a:t>Official evaluation leaks test labels: small on RAGTruth, large on Dolly (AC)</a:t>
+            </a:r>
+            <a:endParaRPr lang="en-US" sz="1800" dirty="0"/>
+          </a:p>
+          <a:p>
+            <a:pPr indent="0" marL="0">
+              <a:buNone/>
+            </a:pPr>
+            <a:r>
+              <a:rPr lang="en-US" sz="1800" dirty="0">
+                <a:solidFill>
+                  <a:schemeClr val="bg2"/>
+                </a:solidFill>
+              </a:rPr>
+              <a:t>Blind to contradicted numbers; AARF's gain does not survive a fair judge</a:t>
+            </a:r>
+            <a:endParaRPr lang="en-US" sz="1800" dirty="0"/>
+          </a:p>
+        </p:txBody>
+      </p:sp>
+    </p:spTree>
+  </p:cSld>
+  <p:clrMapOvr>
+    <a:masterClrMapping/>
+  </p:clrMapOvr>
+</p:sld>
+</file>
+
+<file path=ppt/slides/slide18.xml><?xml version="1.0" encoding="utf-8"?>
+<p:sld xmlns:a="http://schemas.openxmlformats.org/drawingml/2006/main" xmlns:r="http://schemas.openxmlformats.org/officeDocument/2006/relationships" xmlns:p="http://schemas.openxmlformats.org/presentationml/2006/main">
+  <p:cSld name="Slide 18">
+    <p:spTree>
+      <p:nvGrpSpPr>
+        <p:cNvPr id="1" name=""/>
+        <p:cNvGrpSpPr/>
+        <p:nvPr/>
+      </p:nvGrpSpPr>
+      <p:grpSpPr>
+        <a:xfrm>
+          <a:off x="0" y="0"/>
+          <a:ext cx="0" cy="0"/>
+          <a:chOff x="0" y="0"/>
+          <a:chExt cx="0" cy="0"/>
+        </a:xfrm>
+      </p:grpSpPr>
+      <p:sp>
+        <p:nvSpPr>
+          <p:cNvPr id="2" name="Text 0"/>
+          <p:cNvSpPr/>
+          <p:nvPr>
+            <p:ph idx="100" type="title" hasCustomPrompt="1"/>
+          </p:nvPr>
+        </p:nvSpPr>
+        <p:spPr>
+          <a:xfrm>
             <a:off x="548640" y="1325880"/>
             <a:ext cx="8046720" cy="1371600"/>
           </a:xfrm>
@@ -9823,26 +11739,1154 @@
                   <a:schemeClr val="tx2"/>
                 </a:solidFill>
               </a:rPr>
-              <a:t>Four LLaMA models, one 6 GB laptop GPU, the paper's test set</a:t>
+              <a:t>What ECS, PKS and the final score look like on real answers</a:t>
             </a:r>
             <a:endParaRPr lang="en-US" sz="2400" dirty="0"/>
           </a:p>
         </p:txBody>
       </p:sp>
-      <p:sp>
-        <p:nvSpPr>
-          <p:cNvPr id="3" name="Shape 1"/>
+      <p:graphicFrame>
+        <p:nvGraphicFramePr>
+          <p:cNvPr id="5" name="Table 0"/>
+          <p:cNvGraphicFramePr>
+            <a:graphicFrameLocks noGrp="1"/>
+          </p:cNvGraphicFramePr>
+          <p:nvPr>
+            <p:extLst>
+              <p:ext uri="{D42A27DB-BD31-4B8C-83A1-F6EECF244321}">
+                <p14:modId xmlns:p14="http://schemas.microsoft.com/office/powerpoint/2010/main" val="1579011935"/>
+              </p:ext>
+            </p:extLst>
+          </p:nvPr>
+        </p:nvGraphicFramePr>
+        <p:xfrm>
+          <a:off x="457200" y="1143000"/>
+          <a:ext cx="8229600" cy="914400"/>
+        </p:xfrm>
+        <a:graphic>
+          <a:graphicData uri="http://schemas.openxmlformats.org/drawingml/2006/table">
+            <a:tbl>
+              <a:tblPr/>
+              <a:tblGrid>
+                <a:gridCol w="3566160"/>
+                <a:gridCol w="1463040"/>
+                <a:gridCol w="1645920"/>
+                <a:gridCol w="1554480"/>
+              </a:tblGrid>
+              <a:tr h="384048">
+                <a:tc>
+                  <a:txBody>
+                    <a:bodyPr/>
+                    <a:lstStyle/>
+                    <a:p>
+                      <a:pPr algn="l" indent="0" marL="0">
+                        <a:buNone/>
+                      </a:pPr>
+                      <a:r>
+                        <a:rPr lang="en-US" sz="1300" b="1" dirty="0">
+                          <a:solidFill>
+                            <a:srgbClr val="FFFFFF"/>
+                          </a:solidFill>
+                          <a:latin typeface="Calibri" pitchFamily="34" charset="0"/>
+                          <a:ea typeface="Calibri" pitchFamily="34" charset="-122"/>
+                          <a:cs typeface="Calibri" pitchFamily="34" charset="-120"/>
+                        </a:rPr>
+                        <a:t>Llama-2-7B, 415 answers</a:t>
+                      </a:r>
+                      <a:endParaRPr lang="en-US" sz="1300" dirty="0">
+                        <a:latin typeface="Calibri" charset="0"/>
+                        <a:ea typeface="Calibri" charset="0"/>
+                        <a:cs typeface="Calibri" charset="0"/>
+                      </a:endParaRPr>
+                    </a:p>
+                  </a:txBody>
+                  <a:tcPr marL="91440" marR="91440" marT="45720" marB="45720">
+                    <a:lnL w="6350" cap="flat" cmpd="sng" algn="ctr">
+                      <a:solidFill>
+                        <a:srgbClr val="D0D7D6"/>
+                      </a:solidFill>
+                      <a:prstDash val="solid"/>
+                      <a:round/>
+                      <a:headEnd type="none" w="med" len="med"/>
+                      <a:tailEnd type="none" w="med" len="med"/>
+                    </a:lnL>
+                    <a:lnR w="6350" cap="flat" cmpd="sng" algn="ctr">
+                      <a:solidFill>
+                        <a:srgbClr val="D0D7D6"/>
+                      </a:solidFill>
+                      <a:prstDash val="solid"/>
+                      <a:round/>
+                      <a:headEnd type="none" w="med" len="med"/>
+                      <a:tailEnd type="none" w="med" len="med"/>
+                    </a:lnR>
+                    <a:lnT w="6350" cap="flat" cmpd="sng" algn="ctr">
+                      <a:solidFill>
+                        <a:srgbClr val="D0D7D6"/>
+                      </a:solidFill>
+                      <a:prstDash val="solid"/>
+                      <a:round/>
+                      <a:headEnd type="none" w="med" len="med"/>
+                      <a:tailEnd type="none" w="med" len="med"/>
+                    </a:lnT>
+                    <a:lnB w="6350" cap="flat" cmpd="sng" algn="ctr">
+                      <a:solidFill>
+                        <a:srgbClr val="D0D7D6"/>
+                      </a:solidFill>
+                      <a:prstDash val="solid"/>
+                      <a:round/>
+                      <a:headEnd type="none" w="med" len="med"/>
+                      <a:tailEnd type="none" w="med" len="med"/>
+                    </a:lnB>
+                    <a:solidFill>
+                      <a:srgbClr val="0F3D3E"/>
+                    </a:solidFill>
+                  </a:tcPr>
+                </a:tc>
+                <a:tc>
+                  <a:txBody>
+                    <a:bodyPr/>
+                    <a:lstStyle/>
+                    <a:p>
+                      <a:pPr algn="ctr" indent="0" marL="0">
+                        <a:buNone/>
+                      </a:pPr>
+                      <a:r>
+                        <a:rPr lang="en-US" sz="1300" b="1" dirty="0">
+                          <a:solidFill>
+                            <a:srgbClr val="FFFFFF"/>
+                          </a:solidFill>
+                          <a:latin typeface="Calibri" pitchFamily="34" charset="0"/>
+                          <a:ea typeface="Calibri" pitchFamily="34" charset="-122"/>
+                          <a:cs typeface="Calibri" pitchFamily="34" charset="-120"/>
+                        </a:rPr>
+                        <a:t>Truthful (avg)</a:t>
+                      </a:r>
+                      <a:endParaRPr lang="en-US" sz="1300" dirty="0">
+                        <a:latin typeface="Calibri" charset="0"/>
+                        <a:ea typeface="Calibri" charset="0"/>
+                        <a:cs typeface="Calibri" charset="0"/>
+                      </a:endParaRPr>
+                    </a:p>
+                  </a:txBody>
+                  <a:tcPr marL="91440" marR="91440" marT="45720" marB="45720">
+                    <a:lnL w="6350" cap="flat" cmpd="sng" algn="ctr">
+                      <a:solidFill>
+                        <a:srgbClr val="D0D7D6"/>
+                      </a:solidFill>
+                      <a:prstDash val="solid"/>
+                      <a:round/>
+                      <a:headEnd type="none" w="med" len="med"/>
+                      <a:tailEnd type="none" w="med" len="med"/>
+                    </a:lnL>
+                    <a:lnR w="6350" cap="flat" cmpd="sng" algn="ctr">
+                      <a:solidFill>
+                        <a:srgbClr val="D0D7D6"/>
+                      </a:solidFill>
+                      <a:prstDash val="solid"/>
+                      <a:round/>
+                      <a:headEnd type="none" w="med" len="med"/>
+                      <a:tailEnd type="none" w="med" len="med"/>
+                    </a:lnR>
+                    <a:lnT w="6350" cap="flat" cmpd="sng" algn="ctr">
+                      <a:solidFill>
+                        <a:srgbClr val="D0D7D6"/>
+                      </a:solidFill>
+                      <a:prstDash val="solid"/>
+                      <a:round/>
+                      <a:headEnd type="none" w="med" len="med"/>
+                      <a:tailEnd type="none" w="med" len="med"/>
+                    </a:lnT>
+                    <a:lnB w="6350" cap="flat" cmpd="sng" algn="ctr">
+                      <a:solidFill>
+                        <a:srgbClr val="D0D7D6"/>
+                      </a:solidFill>
+                      <a:prstDash val="solid"/>
+                      <a:round/>
+                      <a:headEnd type="none" w="med" len="med"/>
+                      <a:tailEnd type="none" w="med" len="med"/>
+                    </a:lnB>
+                    <a:solidFill>
+                      <a:srgbClr val="0F3D3E"/>
+                    </a:solidFill>
+                  </a:tcPr>
+                </a:tc>
+                <a:tc>
+                  <a:txBody>
+                    <a:bodyPr/>
+                    <a:lstStyle/>
+                    <a:p>
+                      <a:pPr algn="ctr" indent="0" marL="0">
+                        <a:buNone/>
+                      </a:pPr>
+                      <a:r>
+                        <a:rPr lang="en-US" sz="1300" b="1" dirty="0">
+                          <a:solidFill>
+                            <a:srgbClr val="FFFFFF"/>
+                          </a:solidFill>
+                          <a:latin typeface="Calibri" pitchFamily="34" charset="0"/>
+                          <a:ea typeface="Calibri" pitchFamily="34" charset="-122"/>
+                          <a:cs typeface="Calibri" pitchFamily="34" charset="-120"/>
+                        </a:rPr>
+                        <a:t>Hallucinated (avg)</a:t>
+                      </a:r>
+                      <a:endParaRPr lang="en-US" sz="1300" dirty="0">
+                        <a:latin typeface="Calibri" charset="0"/>
+                        <a:ea typeface="Calibri" charset="0"/>
+                        <a:cs typeface="Calibri" charset="0"/>
+                      </a:endParaRPr>
+                    </a:p>
+                  </a:txBody>
+                  <a:tcPr marL="91440" marR="91440" marT="45720" marB="45720">
+                    <a:lnL w="6350" cap="flat" cmpd="sng" algn="ctr">
+                      <a:solidFill>
+                        <a:srgbClr val="D0D7D6"/>
+                      </a:solidFill>
+                      <a:prstDash val="solid"/>
+                      <a:round/>
+                      <a:headEnd type="none" w="med" len="med"/>
+                      <a:tailEnd type="none" w="med" len="med"/>
+                    </a:lnL>
+                    <a:lnR w="6350" cap="flat" cmpd="sng" algn="ctr">
+                      <a:solidFill>
+                        <a:srgbClr val="D0D7D6"/>
+                      </a:solidFill>
+                      <a:prstDash val="solid"/>
+                      <a:round/>
+                      <a:headEnd type="none" w="med" len="med"/>
+                      <a:tailEnd type="none" w="med" len="med"/>
+                    </a:lnR>
+                    <a:lnT w="6350" cap="flat" cmpd="sng" algn="ctr">
+                      <a:solidFill>
+                        <a:srgbClr val="D0D7D6"/>
+                      </a:solidFill>
+                      <a:prstDash val="solid"/>
+                      <a:round/>
+                      <a:headEnd type="none" w="med" len="med"/>
+                      <a:tailEnd type="none" w="med" len="med"/>
+                    </a:lnT>
+                    <a:lnB w="6350" cap="flat" cmpd="sng" algn="ctr">
+                      <a:solidFill>
+                        <a:srgbClr val="D0D7D6"/>
+                      </a:solidFill>
+                      <a:prstDash val="solid"/>
+                      <a:round/>
+                      <a:headEnd type="none" w="med" len="med"/>
+                      <a:tailEnd type="none" w="med" len="med"/>
+                    </a:lnB>
+                    <a:solidFill>
+                      <a:srgbClr val="0F3D3E"/>
+                    </a:solidFill>
+                  </a:tcPr>
+                </a:tc>
+                <a:tc>
+                  <a:txBody>
+                    <a:bodyPr/>
+                    <a:lstStyle/>
+                    <a:p>
+                      <a:pPr algn="ctr" indent="0" marL="0">
+                        <a:buNone/>
+                      </a:pPr>
+                      <a:r>
+                        <a:rPr lang="en-US" sz="1300" b="1" dirty="0">
+                          <a:solidFill>
+                            <a:srgbClr val="FFFFFF"/>
+                          </a:solidFill>
+                          <a:latin typeface="Calibri" pitchFamily="34" charset="0"/>
+                          <a:ea typeface="Calibri" pitchFamily="34" charset="-122"/>
+                          <a:cs typeface="Calibri" pitchFamily="34" charset="-120"/>
+                        </a:rPr>
+                        <a:t>AUC alone</a:t>
+                      </a:r>
+                      <a:endParaRPr lang="en-US" sz="1300" dirty="0">
+                        <a:latin typeface="Calibri" charset="0"/>
+                        <a:ea typeface="Calibri" charset="0"/>
+                        <a:cs typeface="Calibri" charset="0"/>
+                      </a:endParaRPr>
+                    </a:p>
+                  </a:txBody>
+                  <a:tcPr marL="91440" marR="91440" marT="45720" marB="45720">
+                    <a:lnL w="6350" cap="flat" cmpd="sng" algn="ctr">
+                      <a:solidFill>
+                        <a:srgbClr val="D0D7D6"/>
+                      </a:solidFill>
+                      <a:prstDash val="solid"/>
+                      <a:round/>
+                      <a:headEnd type="none" w="med" len="med"/>
+                      <a:tailEnd type="none" w="med" len="med"/>
+                    </a:lnL>
+                    <a:lnR w="6350" cap="flat" cmpd="sng" algn="ctr">
+                      <a:solidFill>
+                        <a:srgbClr val="D0D7D6"/>
+                      </a:solidFill>
+                      <a:prstDash val="solid"/>
+                      <a:round/>
+                      <a:headEnd type="none" w="med" len="med"/>
+                      <a:tailEnd type="none" w="med" len="med"/>
+                    </a:lnR>
+                    <a:lnT w="6350" cap="flat" cmpd="sng" algn="ctr">
+                      <a:solidFill>
+                        <a:srgbClr val="D0D7D6"/>
+                      </a:solidFill>
+                      <a:prstDash val="solid"/>
+                      <a:round/>
+                      <a:headEnd type="none" w="med" len="med"/>
+                      <a:tailEnd type="none" w="med" len="med"/>
+                    </a:lnT>
+                    <a:lnB w="6350" cap="flat" cmpd="sng" algn="ctr">
+                      <a:solidFill>
+                        <a:srgbClr val="D0D7D6"/>
+                      </a:solidFill>
+                      <a:prstDash val="solid"/>
+                      <a:round/>
+                      <a:headEnd type="none" w="med" len="med"/>
+                      <a:tailEnd type="none" w="med" len="med"/>
+                    </a:lnB>
+                    <a:solidFill>
+                      <a:srgbClr val="0F3D3E"/>
+                    </a:solidFill>
+                  </a:tcPr>
+                </a:tc>
+              </a:tr>
+              <a:tr h="384048">
+                <a:tc>
+                  <a:txBody>
+                    <a:bodyPr/>
+                    <a:lstStyle/>
+                    <a:p>
+                      <a:pPr algn="l" indent="0" marL="0">
+                        <a:buNone/>
+                      </a:pPr>
+                      <a:r>
+                        <a:rPr lang="en-US" sz="1300" b="1" dirty="0">
+                          <a:solidFill>
+                            <a:srgbClr val="000000"/>
+                          </a:solidFill>
+                          <a:latin typeface="Calibri" pitchFamily="34" charset="0"/>
+                          <a:ea typeface="Calibri" pitchFamily="34" charset="-122"/>
+                          <a:cs typeface="Calibri" pitchFamily="34" charset="-120"/>
+                        </a:rPr>
+                        <a:t>ECS  (uses passage, higher = good)</a:t>
+                      </a:r>
+                      <a:endParaRPr lang="en-US" sz="1300" dirty="0">
+                        <a:latin typeface="Calibri" charset="0"/>
+                        <a:ea typeface="Calibri" charset="0"/>
+                        <a:cs typeface="Calibri" charset="0"/>
+                      </a:endParaRPr>
+                    </a:p>
+                  </a:txBody>
+                  <a:tcPr marL="91440" marR="91440" marT="45720" marB="45720">
+                    <a:lnL w="6350" cap="flat" cmpd="sng" algn="ctr">
+                      <a:solidFill>
+                        <a:srgbClr val="D0D7D6"/>
+                      </a:solidFill>
+                      <a:prstDash val="solid"/>
+                      <a:round/>
+                      <a:headEnd type="none" w="med" len="med"/>
+                      <a:tailEnd type="none" w="med" len="med"/>
+                    </a:lnL>
+                    <a:lnR w="6350" cap="flat" cmpd="sng" algn="ctr">
+                      <a:solidFill>
+                        <a:srgbClr val="D0D7D6"/>
+                      </a:solidFill>
+                      <a:prstDash val="solid"/>
+                      <a:round/>
+                      <a:headEnd type="none" w="med" len="med"/>
+                      <a:tailEnd type="none" w="med" len="med"/>
+                    </a:lnR>
+                    <a:lnT w="6350" cap="flat" cmpd="sng" algn="ctr">
+                      <a:solidFill>
+                        <a:srgbClr val="D0D7D6"/>
+                      </a:solidFill>
+                      <a:prstDash val="solid"/>
+                      <a:round/>
+                      <a:headEnd type="none" w="med" len="med"/>
+                      <a:tailEnd type="none" w="med" len="med"/>
+                    </a:lnT>
+                    <a:lnB w="6350" cap="flat" cmpd="sng" algn="ctr">
+                      <a:solidFill>
+                        <a:srgbClr val="D0D7D6"/>
+                      </a:solidFill>
+                      <a:prstDash val="solid"/>
+                      <a:round/>
+                      <a:headEnd type="none" w="med" len="med"/>
+                      <a:tailEnd type="none" w="med" len="med"/>
+                    </a:lnB>
+                    <a:solidFill>
+                      <a:srgbClr val="FFFFFF"/>
+                    </a:solidFill>
+                  </a:tcPr>
+                </a:tc>
+                <a:tc>
+                  <a:txBody>
+                    <a:bodyPr/>
+                    <a:lstStyle/>
+                    <a:p>
+                      <a:pPr algn="ctr" indent="0" marL="0">
+                        <a:buNone/>
+                      </a:pPr>
+                      <a:r>
+                        <a:rPr lang="en-US" sz="1300" dirty="0">
+                          <a:solidFill>
+                            <a:srgbClr val="000000"/>
+                          </a:solidFill>
+                          <a:latin typeface="Calibri" pitchFamily="34" charset="0"/>
+                          <a:ea typeface="Calibri" pitchFamily="34" charset="-122"/>
+                          <a:cs typeface="Calibri" pitchFamily="34" charset="-120"/>
+                        </a:rPr>
+                        <a:t>0.301</a:t>
+                      </a:r>
+                      <a:endParaRPr lang="en-US" sz="1300" dirty="0">
+                        <a:latin typeface="Calibri" charset="0"/>
+                        <a:ea typeface="Calibri" charset="0"/>
+                        <a:cs typeface="Calibri" charset="0"/>
+                      </a:endParaRPr>
+                    </a:p>
+                  </a:txBody>
+                  <a:tcPr marL="91440" marR="91440" marT="45720" marB="45720">
+                    <a:lnL w="6350" cap="flat" cmpd="sng" algn="ctr">
+                      <a:solidFill>
+                        <a:srgbClr val="D0D7D6"/>
+                      </a:solidFill>
+                      <a:prstDash val="solid"/>
+                      <a:round/>
+                      <a:headEnd type="none" w="med" len="med"/>
+                      <a:tailEnd type="none" w="med" len="med"/>
+                    </a:lnL>
+                    <a:lnR w="6350" cap="flat" cmpd="sng" algn="ctr">
+                      <a:solidFill>
+                        <a:srgbClr val="D0D7D6"/>
+                      </a:solidFill>
+                      <a:prstDash val="solid"/>
+                      <a:round/>
+                      <a:headEnd type="none" w="med" len="med"/>
+                      <a:tailEnd type="none" w="med" len="med"/>
+                    </a:lnR>
+                    <a:lnT w="6350" cap="flat" cmpd="sng" algn="ctr">
+                      <a:solidFill>
+                        <a:srgbClr val="D0D7D6"/>
+                      </a:solidFill>
+                      <a:prstDash val="solid"/>
+                      <a:round/>
+                      <a:headEnd type="none" w="med" len="med"/>
+                      <a:tailEnd type="none" w="med" len="med"/>
+                    </a:lnT>
+                    <a:lnB w="6350" cap="flat" cmpd="sng" algn="ctr">
+                      <a:solidFill>
+                        <a:srgbClr val="D0D7D6"/>
+                      </a:solidFill>
+                      <a:prstDash val="solid"/>
+                      <a:round/>
+                      <a:headEnd type="none" w="med" len="med"/>
+                      <a:tailEnd type="none" w="med" len="med"/>
+                    </a:lnB>
+                    <a:solidFill>
+                      <a:srgbClr val="FFFFFF"/>
+                    </a:solidFill>
+                  </a:tcPr>
+                </a:tc>
+                <a:tc>
+                  <a:txBody>
+                    <a:bodyPr/>
+                    <a:lstStyle/>
+                    <a:p>
+                      <a:pPr algn="ctr" indent="0" marL="0">
+                        <a:buNone/>
+                      </a:pPr>
+                      <a:r>
+                        <a:rPr lang="en-US" sz="1300" b="1" dirty="0">
+                          <a:solidFill>
+                            <a:schemeClr val="accent4"/>
+                          </a:solidFill>
+                          <a:latin typeface="Calibri" pitchFamily="34" charset="0"/>
+                          <a:ea typeface="Calibri" pitchFamily="34" charset="-122"/>
+                          <a:cs typeface="Calibri" pitchFamily="34" charset="-120"/>
+                        </a:rPr>
+                        <a:t>0.260</a:t>
+                      </a:r>
+                      <a:endParaRPr lang="en-US" sz="1300" dirty="0">
+                        <a:latin typeface="Calibri" charset="0"/>
+                        <a:ea typeface="Calibri" charset="0"/>
+                        <a:cs typeface="Calibri" charset="0"/>
+                      </a:endParaRPr>
+                    </a:p>
+                  </a:txBody>
+                  <a:tcPr marL="91440" marR="91440" marT="45720" marB="45720">
+                    <a:lnL w="6350" cap="flat" cmpd="sng" algn="ctr">
+                      <a:solidFill>
+                        <a:srgbClr val="D0D7D6"/>
+                      </a:solidFill>
+                      <a:prstDash val="solid"/>
+                      <a:round/>
+                      <a:headEnd type="none" w="med" len="med"/>
+                      <a:tailEnd type="none" w="med" len="med"/>
+                    </a:lnL>
+                    <a:lnR w="6350" cap="flat" cmpd="sng" algn="ctr">
+                      <a:solidFill>
+                        <a:srgbClr val="D0D7D6"/>
+                      </a:solidFill>
+                      <a:prstDash val="solid"/>
+                      <a:round/>
+                      <a:headEnd type="none" w="med" len="med"/>
+                      <a:tailEnd type="none" w="med" len="med"/>
+                    </a:lnR>
+                    <a:lnT w="6350" cap="flat" cmpd="sng" algn="ctr">
+                      <a:solidFill>
+                        <a:srgbClr val="D0D7D6"/>
+                      </a:solidFill>
+                      <a:prstDash val="solid"/>
+                      <a:round/>
+                      <a:headEnd type="none" w="med" len="med"/>
+                      <a:tailEnd type="none" w="med" len="med"/>
+                    </a:lnT>
+                    <a:lnB w="6350" cap="flat" cmpd="sng" algn="ctr">
+                      <a:solidFill>
+                        <a:srgbClr val="D0D7D6"/>
+                      </a:solidFill>
+                      <a:prstDash val="solid"/>
+                      <a:round/>
+                      <a:headEnd type="none" w="med" len="med"/>
+                      <a:tailEnd type="none" w="med" len="med"/>
+                    </a:lnB>
+                    <a:solidFill>
+                      <a:srgbClr val="FFFFFF"/>
+                    </a:solidFill>
+                  </a:tcPr>
+                </a:tc>
+                <a:tc>
+                  <a:txBody>
+                    <a:bodyPr/>
+                    <a:lstStyle/>
+                    <a:p>
+                      <a:pPr algn="ctr" indent="0" marL="0">
+                        <a:buNone/>
+                      </a:pPr>
+                      <a:r>
+                        <a:rPr lang="en-US" sz="1300" dirty="0">
+                          <a:solidFill>
+                            <a:srgbClr val="000000"/>
+                          </a:solidFill>
+                          <a:latin typeface="Calibri" pitchFamily="34" charset="0"/>
+                          <a:ea typeface="Calibri" pitchFamily="34" charset="-122"/>
+                          <a:cs typeface="Calibri" pitchFamily="34" charset="-120"/>
+                        </a:rPr>
+                        <a:t>0.712</a:t>
+                      </a:r>
+                      <a:endParaRPr lang="en-US" sz="1300" dirty="0">
+                        <a:latin typeface="Calibri" charset="0"/>
+                        <a:ea typeface="Calibri" charset="0"/>
+                        <a:cs typeface="Calibri" charset="0"/>
+                      </a:endParaRPr>
+                    </a:p>
+                  </a:txBody>
+                  <a:tcPr marL="91440" marR="91440" marT="45720" marB="45720">
+                    <a:lnL w="6350" cap="flat" cmpd="sng" algn="ctr">
+                      <a:solidFill>
+                        <a:srgbClr val="D0D7D6"/>
+                      </a:solidFill>
+                      <a:prstDash val="solid"/>
+                      <a:round/>
+                      <a:headEnd type="none" w="med" len="med"/>
+                      <a:tailEnd type="none" w="med" len="med"/>
+                    </a:lnL>
+                    <a:lnR w="6350" cap="flat" cmpd="sng" algn="ctr">
+                      <a:solidFill>
+                        <a:srgbClr val="D0D7D6"/>
+                      </a:solidFill>
+                      <a:prstDash val="solid"/>
+                      <a:round/>
+                      <a:headEnd type="none" w="med" len="med"/>
+                      <a:tailEnd type="none" w="med" len="med"/>
+                    </a:lnR>
+                    <a:lnT w="6350" cap="flat" cmpd="sng" algn="ctr">
+                      <a:solidFill>
+                        <a:srgbClr val="D0D7D6"/>
+                      </a:solidFill>
+                      <a:prstDash val="solid"/>
+                      <a:round/>
+                      <a:headEnd type="none" w="med" len="med"/>
+                      <a:tailEnd type="none" w="med" len="med"/>
+                    </a:lnT>
+                    <a:lnB w="6350" cap="flat" cmpd="sng" algn="ctr">
+                      <a:solidFill>
+                        <a:srgbClr val="D0D7D6"/>
+                      </a:solidFill>
+                      <a:prstDash val="solid"/>
+                      <a:round/>
+                      <a:headEnd type="none" w="med" len="med"/>
+                      <a:tailEnd type="none" w="med" len="med"/>
+                    </a:lnB>
+                    <a:solidFill>
+                      <a:srgbClr val="FFFFFF"/>
+                    </a:solidFill>
+                  </a:tcPr>
+                </a:tc>
+              </a:tr>
+              <a:tr h="384048">
+                <a:tc>
+                  <a:txBody>
+                    <a:bodyPr/>
+                    <a:lstStyle/>
+                    <a:p>
+                      <a:pPr algn="l" indent="0" marL="0">
+                        <a:buNone/>
+                      </a:pPr>
+                      <a:r>
+                        <a:rPr lang="en-US" sz="1300" b="1" dirty="0">
+                          <a:solidFill>
+                            <a:srgbClr val="000000"/>
+                          </a:solidFill>
+                          <a:latin typeface="Calibri" pitchFamily="34" charset="0"/>
+                          <a:ea typeface="Calibri" pitchFamily="34" charset="-122"/>
+                          <a:cs typeface="Calibri" pitchFamily="34" charset="-120"/>
+                        </a:rPr>
+                        <a:t>PKS  (memory injected, higher = bad)</a:t>
+                      </a:r>
+                      <a:endParaRPr lang="en-US" sz="1300" dirty="0">
+                        <a:latin typeface="Calibri" charset="0"/>
+                        <a:ea typeface="Calibri" charset="0"/>
+                        <a:cs typeface="Calibri" charset="0"/>
+                      </a:endParaRPr>
+                    </a:p>
+                  </a:txBody>
+                  <a:tcPr marL="91440" marR="91440" marT="45720" marB="45720">
+                    <a:lnL w="6350" cap="flat" cmpd="sng" algn="ctr">
+                      <a:solidFill>
+                        <a:srgbClr val="D0D7D6"/>
+                      </a:solidFill>
+                      <a:prstDash val="solid"/>
+                      <a:round/>
+                      <a:headEnd type="none" w="med" len="med"/>
+                      <a:tailEnd type="none" w="med" len="med"/>
+                    </a:lnL>
+                    <a:lnR w="6350" cap="flat" cmpd="sng" algn="ctr">
+                      <a:solidFill>
+                        <a:srgbClr val="D0D7D6"/>
+                      </a:solidFill>
+                      <a:prstDash val="solid"/>
+                      <a:round/>
+                      <a:headEnd type="none" w="med" len="med"/>
+                      <a:tailEnd type="none" w="med" len="med"/>
+                    </a:lnR>
+                    <a:lnT w="6350" cap="flat" cmpd="sng" algn="ctr">
+                      <a:solidFill>
+                        <a:srgbClr val="D0D7D6"/>
+                      </a:solidFill>
+                      <a:prstDash val="solid"/>
+                      <a:round/>
+                      <a:headEnd type="none" w="med" len="med"/>
+                      <a:tailEnd type="none" w="med" len="med"/>
+                    </a:lnT>
+                    <a:lnB w="6350" cap="flat" cmpd="sng" algn="ctr">
+                      <a:solidFill>
+                        <a:srgbClr val="D0D7D6"/>
+                      </a:solidFill>
+                      <a:prstDash val="solid"/>
+                      <a:round/>
+                      <a:headEnd type="none" w="med" len="med"/>
+                      <a:tailEnd type="none" w="med" len="med"/>
+                    </a:lnB>
+                    <a:solidFill>
+                      <a:srgbClr val="FFFFFF"/>
+                    </a:solidFill>
+                  </a:tcPr>
+                </a:tc>
+                <a:tc>
+                  <a:txBody>
+                    <a:bodyPr/>
+                    <a:lstStyle/>
+                    <a:p>
+                      <a:pPr algn="ctr" indent="0" marL="0">
+                        <a:buNone/>
+                      </a:pPr>
+                      <a:r>
+                        <a:rPr lang="en-US" sz="1300" dirty="0">
+                          <a:solidFill>
+                            <a:srgbClr val="000000"/>
+                          </a:solidFill>
+                          <a:latin typeface="Calibri" pitchFamily="34" charset="0"/>
+                          <a:ea typeface="Calibri" pitchFamily="34" charset="-122"/>
+                          <a:cs typeface="Calibri" pitchFamily="34" charset="-120"/>
+                        </a:rPr>
+                        <a:t>0.076</a:t>
+                      </a:r>
+                      <a:endParaRPr lang="en-US" sz="1300" dirty="0">
+                        <a:latin typeface="Calibri" charset="0"/>
+                        <a:ea typeface="Calibri" charset="0"/>
+                        <a:cs typeface="Calibri" charset="0"/>
+                      </a:endParaRPr>
+                    </a:p>
+                  </a:txBody>
+                  <a:tcPr marL="91440" marR="91440" marT="45720" marB="45720">
+                    <a:lnL w="6350" cap="flat" cmpd="sng" algn="ctr">
+                      <a:solidFill>
+                        <a:srgbClr val="D0D7D6"/>
+                      </a:solidFill>
+                      <a:prstDash val="solid"/>
+                      <a:round/>
+                      <a:headEnd type="none" w="med" len="med"/>
+                      <a:tailEnd type="none" w="med" len="med"/>
+                    </a:lnL>
+                    <a:lnR w="6350" cap="flat" cmpd="sng" algn="ctr">
+                      <a:solidFill>
+                        <a:srgbClr val="D0D7D6"/>
+                      </a:solidFill>
+                      <a:prstDash val="solid"/>
+                      <a:round/>
+                      <a:headEnd type="none" w="med" len="med"/>
+                      <a:tailEnd type="none" w="med" len="med"/>
+                    </a:lnR>
+                    <a:lnT w="6350" cap="flat" cmpd="sng" algn="ctr">
+                      <a:solidFill>
+                        <a:srgbClr val="D0D7D6"/>
+                      </a:solidFill>
+                      <a:prstDash val="solid"/>
+                      <a:round/>
+                      <a:headEnd type="none" w="med" len="med"/>
+                      <a:tailEnd type="none" w="med" len="med"/>
+                    </a:lnT>
+                    <a:lnB w="6350" cap="flat" cmpd="sng" algn="ctr">
+                      <a:solidFill>
+                        <a:srgbClr val="D0D7D6"/>
+                      </a:solidFill>
+                      <a:prstDash val="solid"/>
+                      <a:round/>
+                      <a:headEnd type="none" w="med" len="med"/>
+                      <a:tailEnd type="none" w="med" len="med"/>
+                    </a:lnB>
+                    <a:solidFill>
+                      <a:srgbClr val="FFFFFF"/>
+                    </a:solidFill>
+                  </a:tcPr>
+                </a:tc>
+                <a:tc>
+                  <a:txBody>
+                    <a:bodyPr/>
+                    <a:lstStyle/>
+                    <a:p>
+                      <a:pPr algn="ctr" indent="0" marL="0">
+                        <a:buNone/>
+                      </a:pPr>
+                      <a:r>
+                        <a:rPr lang="en-US" sz="1300" b="1" dirty="0">
+                          <a:solidFill>
+                            <a:schemeClr val="accent4"/>
+                          </a:solidFill>
+                          <a:latin typeface="Calibri" pitchFamily="34" charset="0"/>
+                          <a:ea typeface="Calibri" pitchFamily="34" charset="-122"/>
+                          <a:cs typeface="Calibri" pitchFamily="34" charset="-120"/>
+                        </a:rPr>
+                        <a:t>0.093</a:t>
+                      </a:r>
+                      <a:endParaRPr lang="en-US" sz="1300" dirty="0">
+                        <a:latin typeface="Calibri" charset="0"/>
+                        <a:ea typeface="Calibri" charset="0"/>
+                        <a:cs typeface="Calibri" charset="0"/>
+                      </a:endParaRPr>
+                    </a:p>
+                  </a:txBody>
+                  <a:tcPr marL="91440" marR="91440" marT="45720" marB="45720">
+                    <a:lnL w="6350" cap="flat" cmpd="sng" algn="ctr">
+                      <a:solidFill>
+                        <a:srgbClr val="D0D7D6"/>
+                      </a:solidFill>
+                      <a:prstDash val="solid"/>
+                      <a:round/>
+                      <a:headEnd type="none" w="med" len="med"/>
+                      <a:tailEnd type="none" w="med" len="med"/>
+                    </a:lnL>
+                    <a:lnR w="6350" cap="flat" cmpd="sng" algn="ctr">
+                      <a:solidFill>
+                        <a:srgbClr val="D0D7D6"/>
+                      </a:solidFill>
+                      <a:prstDash val="solid"/>
+                      <a:round/>
+                      <a:headEnd type="none" w="med" len="med"/>
+                      <a:tailEnd type="none" w="med" len="med"/>
+                    </a:lnR>
+                    <a:lnT w="6350" cap="flat" cmpd="sng" algn="ctr">
+                      <a:solidFill>
+                        <a:srgbClr val="D0D7D6"/>
+                      </a:solidFill>
+                      <a:prstDash val="solid"/>
+                      <a:round/>
+                      <a:headEnd type="none" w="med" len="med"/>
+                      <a:tailEnd type="none" w="med" len="med"/>
+                    </a:lnT>
+                    <a:lnB w="6350" cap="flat" cmpd="sng" algn="ctr">
+                      <a:solidFill>
+                        <a:srgbClr val="D0D7D6"/>
+                      </a:solidFill>
+                      <a:prstDash val="solid"/>
+                      <a:round/>
+                      <a:headEnd type="none" w="med" len="med"/>
+                      <a:tailEnd type="none" w="med" len="med"/>
+                    </a:lnB>
+                    <a:solidFill>
+                      <a:srgbClr val="FFFFFF"/>
+                    </a:solidFill>
+                  </a:tcPr>
+                </a:tc>
+                <a:tc>
+                  <a:txBody>
+                    <a:bodyPr/>
+                    <a:lstStyle/>
+                    <a:p>
+                      <a:pPr algn="ctr" indent="0" marL="0">
+                        <a:buNone/>
+                      </a:pPr>
+                      <a:r>
+                        <a:rPr lang="en-US" sz="1300" dirty="0">
+                          <a:solidFill>
+                            <a:srgbClr val="000000"/>
+                          </a:solidFill>
+                          <a:latin typeface="Calibri" pitchFamily="34" charset="0"/>
+                          <a:ea typeface="Calibri" pitchFamily="34" charset="-122"/>
+                          <a:cs typeface="Calibri" pitchFamily="34" charset="-120"/>
+                        </a:rPr>
+                        <a:t>0.737</a:t>
+                      </a:r>
+                      <a:endParaRPr lang="en-US" sz="1300" dirty="0">
+                        <a:latin typeface="Calibri" charset="0"/>
+                        <a:ea typeface="Calibri" charset="0"/>
+                        <a:cs typeface="Calibri" charset="0"/>
+                      </a:endParaRPr>
+                    </a:p>
+                  </a:txBody>
+                  <a:tcPr marL="91440" marR="91440" marT="45720" marB="45720">
+                    <a:lnL w="6350" cap="flat" cmpd="sng" algn="ctr">
+                      <a:solidFill>
+                        <a:srgbClr val="D0D7D6"/>
+                      </a:solidFill>
+                      <a:prstDash val="solid"/>
+                      <a:round/>
+                      <a:headEnd type="none" w="med" len="med"/>
+                      <a:tailEnd type="none" w="med" len="med"/>
+                    </a:lnL>
+                    <a:lnR w="6350" cap="flat" cmpd="sng" algn="ctr">
+                      <a:solidFill>
+                        <a:srgbClr val="D0D7D6"/>
+                      </a:solidFill>
+                      <a:prstDash val="solid"/>
+                      <a:round/>
+                      <a:headEnd type="none" w="med" len="med"/>
+                      <a:tailEnd type="none" w="med" len="med"/>
+                    </a:lnR>
+                    <a:lnT w="6350" cap="flat" cmpd="sng" algn="ctr">
+                      <a:solidFill>
+                        <a:srgbClr val="D0D7D6"/>
+                      </a:solidFill>
+                      <a:prstDash val="solid"/>
+                      <a:round/>
+                      <a:headEnd type="none" w="med" len="med"/>
+                      <a:tailEnd type="none" w="med" len="med"/>
+                    </a:lnT>
+                    <a:lnB w="6350" cap="flat" cmpd="sng" algn="ctr">
+                      <a:solidFill>
+                        <a:srgbClr val="D0D7D6"/>
+                      </a:solidFill>
+                      <a:prstDash val="solid"/>
+                      <a:round/>
+                      <a:headEnd type="none" w="med" len="med"/>
+                      <a:tailEnd type="none" w="med" len="med"/>
+                    </a:lnB>
+                    <a:solidFill>
+                      <a:srgbClr val="FFFFFF"/>
+                    </a:solidFill>
+                  </a:tcPr>
+                </a:tc>
+              </a:tr>
+              <a:tr h="384048">
+                <a:tc>
+                  <a:txBody>
+                    <a:bodyPr/>
+                    <a:lstStyle/>
+                    <a:p>
+                      <a:pPr algn="l" indent="0" marL="0">
+                        <a:buNone/>
+                      </a:pPr>
+                      <a:r>
+                        <a:rPr lang="en-US" sz="1300" b="1" dirty="0">
+                          <a:solidFill>
+                            <a:srgbClr val="000000"/>
+                          </a:solidFill>
+                          <a:latin typeface="Calibri" pitchFamily="34" charset="0"/>
+                          <a:ea typeface="Calibri" pitchFamily="34" charset="-122"/>
+                          <a:cs typeface="Calibri" pitchFamily="34" charset="-120"/>
+                        </a:rPr>
+                        <a:t>ReDeEP score  (0 = truthful, 1 = halluc.)</a:t>
+                      </a:r>
+                      <a:endParaRPr lang="en-US" sz="1300" dirty="0">
+                        <a:latin typeface="Calibri" charset="0"/>
+                        <a:ea typeface="Calibri" charset="0"/>
+                        <a:cs typeface="Calibri" charset="0"/>
+                      </a:endParaRPr>
+                    </a:p>
+                  </a:txBody>
+                  <a:tcPr marL="91440" marR="91440" marT="45720" marB="45720">
+                    <a:lnL w="6350" cap="flat" cmpd="sng" algn="ctr">
+                      <a:solidFill>
+                        <a:srgbClr val="D0D7D6"/>
+                      </a:solidFill>
+                      <a:prstDash val="solid"/>
+                      <a:round/>
+                      <a:headEnd type="none" w="med" len="med"/>
+                      <a:tailEnd type="none" w="med" len="med"/>
+                    </a:lnL>
+                    <a:lnR w="6350" cap="flat" cmpd="sng" algn="ctr">
+                      <a:solidFill>
+                        <a:srgbClr val="D0D7D6"/>
+                      </a:solidFill>
+                      <a:prstDash val="solid"/>
+                      <a:round/>
+                      <a:headEnd type="none" w="med" len="med"/>
+                      <a:tailEnd type="none" w="med" len="med"/>
+                    </a:lnR>
+                    <a:lnT w="6350" cap="flat" cmpd="sng" algn="ctr">
+                      <a:solidFill>
+                        <a:srgbClr val="D0D7D6"/>
+                      </a:solidFill>
+                      <a:prstDash val="solid"/>
+                      <a:round/>
+                      <a:headEnd type="none" w="med" len="med"/>
+                      <a:tailEnd type="none" w="med" len="med"/>
+                    </a:lnT>
+                    <a:lnB w="6350" cap="flat" cmpd="sng" algn="ctr">
+                      <a:solidFill>
+                        <a:srgbClr val="D0D7D6"/>
+                      </a:solidFill>
+                      <a:prstDash val="solid"/>
+                      <a:round/>
+                      <a:headEnd type="none" w="med" len="med"/>
+                      <a:tailEnd type="none" w="med" len="med"/>
+                    </a:lnB>
+                    <a:solidFill>
+                      <a:srgbClr val="FFFFFF"/>
+                    </a:solidFill>
+                  </a:tcPr>
+                </a:tc>
+                <a:tc>
+                  <a:txBody>
+                    <a:bodyPr/>
+                    <a:lstStyle/>
+                    <a:p>
+                      <a:pPr algn="ctr" indent="0" marL="0">
+                        <a:buNone/>
+                      </a:pPr>
+                      <a:r>
+                        <a:rPr lang="en-US" sz="1300" dirty="0">
+                          <a:solidFill>
+                            <a:srgbClr val="000000"/>
+                          </a:solidFill>
+                          <a:latin typeface="Calibri" pitchFamily="34" charset="0"/>
+                          <a:ea typeface="Calibri" pitchFamily="34" charset="-122"/>
+                          <a:cs typeface="Calibri" pitchFamily="34" charset="-120"/>
+                        </a:rPr>
+                        <a:t>0.42</a:t>
+                      </a:r>
+                      <a:endParaRPr lang="en-US" sz="1300" dirty="0">
+                        <a:latin typeface="Calibri" charset="0"/>
+                        <a:ea typeface="Calibri" charset="0"/>
+                        <a:cs typeface="Calibri" charset="0"/>
+                      </a:endParaRPr>
+                    </a:p>
+                  </a:txBody>
+                  <a:tcPr marL="91440" marR="91440" marT="45720" marB="45720">
+                    <a:lnL w="6350" cap="flat" cmpd="sng" algn="ctr">
+                      <a:solidFill>
+                        <a:srgbClr val="D0D7D6"/>
+                      </a:solidFill>
+                      <a:prstDash val="solid"/>
+                      <a:round/>
+                      <a:headEnd type="none" w="med" len="med"/>
+                      <a:tailEnd type="none" w="med" len="med"/>
+                    </a:lnL>
+                    <a:lnR w="6350" cap="flat" cmpd="sng" algn="ctr">
+                      <a:solidFill>
+                        <a:srgbClr val="D0D7D6"/>
+                      </a:solidFill>
+                      <a:prstDash val="solid"/>
+                      <a:round/>
+                      <a:headEnd type="none" w="med" len="med"/>
+                      <a:tailEnd type="none" w="med" len="med"/>
+                    </a:lnR>
+                    <a:lnT w="6350" cap="flat" cmpd="sng" algn="ctr">
+                      <a:solidFill>
+                        <a:srgbClr val="D0D7D6"/>
+                      </a:solidFill>
+                      <a:prstDash val="solid"/>
+                      <a:round/>
+                      <a:headEnd type="none" w="med" len="med"/>
+                      <a:tailEnd type="none" w="med" len="med"/>
+                    </a:lnT>
+                    <a:lnB w="6350" cap="flat" cmpd="sng" algn="ctr">
+                      <a:solidFill>
+                        <a:srgbClr val="D0D7D6"/>
+                      </a:solidFill>
+                      <a:prstDash val="solid"/>
+                      <a:round/>
+                      <a:headEnd type="none" w="med" len="med"/>
+                      <a:tailEnd type="none" w="med" len="med"/>
+                    </a:lnB>
+                    <a:solidFill>
+                      <a:srgbClr val="FFFFFF"/>
+                    </a:solidFill>
+                  </a:tcPr>
+                </a:tc>
+                <a:tc>
+                  <a:txBody>
+                    <a:bodyPr/>
+                    <a:lstStyle/>
+                    <a:p>
+                      <a:pPr algn="ctr" indent="0" marL="0">
+                        <a:buNone/>
+                      </a:pPr>
+                      <a:r>
+                        <a:rPr lang="en-US" sz="1300" b="1" dirty="0">
+                          <a:solidFill>
+                            <a:schemeClr val="accent4"/>
+                          </a:solidFill>
+                          <a:latin typeface="Calibri" pitchFamily="34" charset="0"/>
+                          <a:ea typeface="Calibri" pitchFamily="34" charset="-122"/>
+                          <a:cs typeface="Calibri" pitchFamily="34" charset="-120"/>
+                        </a:rPr>
+                        <a:t>0.60</a:t>
+                      </a:r>
+                      <a:endParaRPr lang="en-US" sz="1300" dirty="0">
+                        <a:latin typeface="Calibri" charset="0"/>
+                        <a:ea typeface="Calibri" charset="0"/>
+                        <a:cs typeface="Calibri" charset="0"/>
+                      </a:endParaRPr>
+                    </a:p>
+                  </a:txBody>
+                  <a:tcPr marL="91440" marR="91440" marT="45720" marB="45720">
+                    <a:lnL w="6350" cap="flat" cmpd="sng" algn="ctr">
+                      <a:solidFill>
+                        <a:srgbClr val="D0D7D6"/>
+                      </a:solidFill>
+                      <a:prstDash val="solid"/>
+                      <a:round/>
+                      <a:headEnd type="none" w="med" len="med"/>
+                      <a:tailEnd type="none" w="med" len="med"/>
+                    </a:lnL>
+                    <a:lnR w="6350" cap="flat" cmpd="sng" algn="ctr">
+                      <a:solidFill>
+                        <a:srgbClr val="D0D7D6"/>
+                      </a:solidFill>
+                      <a:prstDash val="solid"/>
+                      <a:round/>
+                      <a:headEnd type="none" w="med" len="med"/>
+                      <a:tailEnd type="none" w="med" len="med"/>
+                    </a:lnR>
+                    <a:lnT w="6350" cap="flat" cmpd="sng" algn="ctr">
+                      <a:solidFill>
+                        <a:srgbClr val="D0D7D6"/>
+                      </a:solidFill>
+                      <a:prstDash val="solid"/>
+                      <a:round/>
+                      <a:headEnd type="none" w="med" len="med"/>
+                      <a:tailEnd type="none" w="med" len="med"/>
+                    </a:lnT>
+                    <a:lnB w="6350" cap="flat" cmpd="sng" algn="ctr">
+                      <a:solidFill>
+                        <a:srgbClr val="D0D7D6"/>
+                      </a:solidFill>
+                      <a:prstDash val="solid"/>
+                      <a:round/>
+                      <a:headEnd type="none" w="med" len="med"/>
+                      <a:tailEnd type="none" w="med" len="med"/>
+                    </a:lnB>
+                    <a:solidFill>
+                      <a:srgbClr val="FFFFFF"/>
+                    </a:solidFill>
+                  </a:tcPr>
+                </a:tc>
+                <a:tc>
+                  <a:txBody>
+                    <a:bodyPr/>
+                    <a:lstStyle/>
+                    <a:p>
+                      <a:pPr algn="ctr" indent="0" marL="0">
+                        <a:buNone/>
+                      </a:pPr>
+                      <a:r>
+                        <a:rPr lang="en-US" sz="1300" b="1" dirty="0">
+                          <a:solidFill>
+                            <a:srgbClr val="000000"/>
+                          </a:solidFill>
+                          <a:latin typeface="Calibri" pitchFamily="34" charset="0"/>
+                          <a:ea typeface="Calibri" pitchFamily="34" charset="-122"/>
+                          <a:cs typeface="Calibri" pitchFamily="34" charset="-120"/>
+                        </a:rPr>
+                        <a:t>0.737</a:t>
+                      </a:r>
+                      <a:endParaRPr lang="en-US" sz="1300" dirty="0">
+                        <a:latin typeface="Calibri" charset="0"/>
+                        <a:ea typeface="Calibri" charset="0"/>
+                        <a:cs typeface="Calibri" charset="0"/>
+                      </a:endParaRPr>
+                    </a:p>
+                  </a:txBody>
+                  <a:tcPr marL="91440" marR="91440" marT="45720" marB="45720">
+                    <a:lnL w="6350" cap="flat" cmpd="sng" algn="ctr">
+                      <a:solidFill>
+                        <a:srgbClr val="D0D7D6"/>
+                      </a:solidFill>
+                      <a:prstDash val="solid"/>
+                      <a:round/>
+                      <a:headEnd type="none" w="med" len="med"/>
+                      <a:tailEnd type="none" w="med" len="med"/>
+                    </a:lnL>
+                    <a:lnR w="6350" cap="flat" cmpd="sng" algn="ctr">
+                      <a:solidFill>
+                        <a:srgbClr val="D0D7D6"/>
+                      </a:solidFill>
+                      <a:prstDash val="solid"/>
+                      <a:round/>
+                      <a:headEnd type="none" w="med" len="med"/>
+                      <a:tailEnd type="none" w="med" len="med"/>
+                    </a:lnR>
+                    <a:lnT w="6350" cap="flat" cmpd="sng" algn="ctr">
+                      <a:solidFill>
+                        <a:srgbClr val="D0D7D6"/>
+                      </a:solidFill>
+                      <a:prstDash val="solid"/>
+                      <a:round/>
+                      <a:headEnd type="none" w="med" len="med"/>
+                      <a:tailEnd type="none" w="med" len="med"/>
+                    </a:lnT>
+                    <a:lnB w="6350" cap="flat" cmpd="sng" algn="ctr">
+                      <a:solidFill>
+                        <a:srgbClr val="D0D7D6"/>
+                      </a:solidFill>
+                      <a:prstDash val="solid"/>
+                      <a:round/>
+                      <a:headEnd type="none" w="med" len="med"/>
+                      <a:tailEnd type="none" w="med" len="med"/>
+                    </a:lnB>
+                    <a:solidFill>
+                      <a:srgbClr val="FFFFFF"/>
+                    </a:solidFill>
+                  </a:tcPr>
+                </a:tc>
+              </a:tr>
+            </a:tbl>
+          </a:graphicData>
+        </a:graphic>
+      </p:graphicFrame>
+      <p:sp>
+        <p:nvSpPr>
+          <p:cNvPr id="4" name="Shape 1"/>
           <p:cNvSpPr/>
           <p:nvPr/>
         </p:nvSpPr>
         <p:spPr>
           <a:xfrm>
-            <a:off x="457200" y="1188720"/>
-            <a:ext cx="1874520" cy="1737360"/>
+            <a:off x="457200" y="2880360"/>
+            <a:ext cx="4023360" cy="1691640"/>
           </a:xfrm>
           <a:prstGeom prst="roundRect">
             <a:avLst>
-              <a:gd name="adj" fmla="val 4211"/>
+              <a:gd name="adj" fmla="val 4324"/>
             </a:avLst>
           </a:prstGeom>
           <a:solidFill>
@@ -9853,14 +12897,14 @@
       </p:sp>
       <p:sp>
         <p:nvSpPr>
-          <p:cNvPr id="4" name="Text 2"/>
+          <p:cNvPr id="5" name="Text 2"/>
           <p:cNvSpPr txBox="1"/>
           <p:nvPr/>
         </p:nvSpPr>
         <p:spPr>
           <a:xfrm>
-            <a:off x="594360" y="1325880"/>
-            <a:ext cx="1600200" cy="731520"/>
+            <a:off x="594360" y="2971800"/>
+            <a:ext cx="3749040" cy="274320"/>
           </a:xfrm>
           <a:prstGeom prst="rect">
             <a:avLst/>
@@ -9876,30 +12920,27 @@
               <a:buNone/>
             </a:pPr>
             <a:r>
-              <a:rPr lang="en-US" sz="3600" b="1" dirty="0">
-                <a:solidFill>
-                  <a:schemeClr val="accent2"/>
-                </a:solidFill>
-                <a:latin typeface="Cambria" pitchFamily="34" charset="0"/>
-                <a:ea typeface="Cambria" pitchFamily="34" charset="-122"/>
-                <a:cs typeface="Cambria" pitchFamily="34" charset="-120"/>
+              <a:rPr lang="en-US" sz="1300" b="1" dirty="0">
+                <a:solidFill>
+                  <a:schemeClr val="tx2"/>
+                </a:solidFill>
               </a:rPr>
-              <a:t>415</a:t>
-            </a:r>
-            <a:endParaRPr lang="en-US" sz="3600" dirty="0"/>
+              <a:t>Truthful answer (QA)</a:t>
+            </a:r>
+            <a:endParaRPr lang="en-US" sz="1300" dirty="0"/>
           </a:p>
         </p:txBody>
       </p:sp>
       <p:sp>
         <p:nvSpPr>
-          <p:cNvPr id="5" name="Text 3"/>
+          <p:cNvPr id="6" name="Text 3"/>
           <p:cNvSpPr txBox="1"/>
           <p:nvPr/>
         </p:nvSpPr>
         <p:spPr>
           <a:xfrm>
-            <a:off x="594360" y="2103120"/>
-            <a:ext cx="1600200" cy="731520"/>
+            <a:off x="594360" y="3264408"/>
+            <a:ext cx="3749040" cy="502920"/>
           </a:xfrm>
           <a:prstGeom prst="rect">
             <a:avLst/>
@@ -9915,63 +12956,27 @@
               <a:buNone/>
             </a:pPr>
             <a:r>
-              <a:rPr lang="en-US" sz="1300" dirty="0">
+              <a:rPr lang="en-US" sz="1150" i="1" dirty="0">
                 <a:solidFill>
                   <a:schemeClr val="tx1"/>
                 </a:solidFill>
               </a:rPr>
-              <a:t>RAGTruth test responses</a:t>
-            </a:r>
-            <a:endParaRPr lang="en-US" sz="1300" dirty="0"/>
-          </a:p>
-          <a:p>
-            <a:pPr indent="0" marL="0">
-              <a:buNone/>
-            </a:pPr>
-            <a:r>
-              <a:rPr lang="en-US" sz="1300" dirty="0">
-                <a:solidFill>
-                  <a:schemeClr val="tx1"/>
-                </a:solidFill>
-              </a:rPr>
-              <a:t>(212 hallucinated)</a:t>
-            </a:r>
-            <a:endParaRPr lang="en-US" sz="1300" dirty="0"/>
+              <a:t>“Meaning of the name Teresa”: lists the meanings given in the passages.</a:t>
+            </a:r>
+            <a:endParaRPr lang="en-US" sz="1150" dirty="0"/>
           </a:p>
         </p:txBody>
       </p:sp>
       <p:sp>
         <p:nvSpPr>
-          <p:cNvPr id="6" name="Shape 4"/>
-          <p:cNvSpPr/>
+          <p:cNvPr id="7" name="Text 4"/>
+          <p:cNvSpPr txBox="1"/>
           <p:nvPr/>
         </p:nvSpPr>
         <p:spPr>
           <a:xfrm>
-            <a:off x="2560320" y="1188720"/>
-            <a:ext cx="1874520" cy="1737360"/>
-          </a:xfrm>
-          <a:prstGeom prst="roundRect">
-            <a:avLst>
-              <a:gd name="adj" fmla="val 4211"/>
-            </a:avLst>
-          </a:prstGeom>
-          <a:solidFill>
-            <a:schemeClr val="bg2"/>
-          </a:solidFill>
-          <a:ln/>
-        </p:spPr>
-      </p:sp>
-      <p:sp>
-        <p:nvSpPr>
-          <p:cNvPr id="7" name="Text 5"/>
-          <p:cNvSpPr txBox="1"/>
-          <p:nvPr/>
-        </p:nvSpPr>
-        <p:spPr>
-          <a:xfrm>
-            <a:off x="2697480" y="1325880"/>
-            <a:ext cx="1600200" cy="731520"/>
+            <a:off x="594360" y="3767328"/>
+            <a:ext cx="3749040" cy="274320"/>
           </a:xfrm>
           <a:prstGeom prst="rect">
             <a:avLst/>
@@ -9987,30 +12992,27 @@
               <a:buNone/>
             </a:pPr>
             <a:r>
-              <a:rPr lang="en-US" sz="3600" b="1" dirty="0">
+              <a:rPr lang="en-US" sz="1300" b="1" dirty="0">
                 <a:solidFill>
                   <a:schemeClr val="accent2"/>
                 </a:solidFill>
-                <a:latin typeface="Cambria" pitchFamily="34" charset="0"/>
-                <a:ea typeface="Cambria" pitchFamily="34" charset="-122"/>
-                <a:cs typeface="Cambria" pitchFamily="34" charset="-120"/>
               </a:rPr>
-              <a:t>4</a:t>
-            </a:r>
-            <a:endParaRPr lang="en-US" sz="3600" dirty="0"/>
+              <a:t>ECS 0.371   PKS 0.059   → score 0.17</a:t>
+            </a:r>
+            <a:endParaRPr lang="en-US" sz="1300" dirty="0"/>
           </a:p>
         </p:txBody>
       </p:sp>
       <p:sp>
         <p:nvSpPr>
-          <p:cNvPr id="8" name="Text 6"/>
+          <p:cNvPr id="8" name="Text 5"/>
           <p:cNvSpPr txBox="1"/>
           <p:nvPr/>
         </p:nvSpPr>
         <p:spPr>
           <a:xfrm>
-            <a:off x="2697480" y="2103120"/>
-            <a:ext cx="1600200" cy="731520"/>
+            <a:off x="594360" y="4069080"/>
+            <a:ext cx="3749040" cy="457200"/>
           </a:xfrm>
           <a:prstGeom prst="rect">
             <a:avLst/>
@@ -10026,45 +13028,31 @@
               <a:buNone/>
             </a:pPr>
             <a:r>
-              <a:rPr lang="en-US" sz="1300" dirty="0">
+              <a:rPr lang="en-US" sz="1100" dirty="0">
                 <a:solidFill>
                   <a:schemeClr val="tx1"/>
                 </a:solidFill>
               </a:rPr>
-              <a:t>LLaMA backbones,</a:t>
-            </a:r>
-            <a:endParaRPr lang="en-US" sz="1300" dirty="0"/>
-          </a:p>
-          <a:p>
-            <a:pPr indent="0" marL="0">
-              <a:buNone/>
-            </a:pPr>
-            <a:r>
-              <a:rPr lang="en-US" sz="1300" dirty="0">
-                <a:solidFill>
-                  <a:schemeClr val="tx1"/>
-                </a:solidFill>
-              </a:rPr>
-              <a:t>1.1B to 7B</a:t>
-            </a:r>
-            <a:endParaRPr lang="en-US" sz="1300" dirty="0"/>
+              <a:t>High passage use, little memory injection: low score.</a:t>
+            </a:r>
+            <a:endParaRPr lang="en-US" sz="1100" dirty="0"/>
           </a:p>
         </p:txBody>
       </p:sp>
       <p:sp>
         <p:nvSpPr>
-          <p:cNvPr id="9" name="Shape 7"/>
+          <p:cNvPr id="9" name="Shape 6"/>
           <p:cNvSpPr/>
           <p:nvPr/>
         </p:nvSpPr>
         <p:spPr>
           <a:xfrm>
-            <a:off x="4663440" y="1188720"/>
-            <a:ext cx="1874520" cy="1737360"/>
+            <a:off x="4663440" y="2880360"/>
+            <a:ext cx="4023360" cy="1691640"/>
           </a:xfrm>
           <a:prstGeom prst="roundRect">
             <a:avLst>
-              <a:gd name="adj" fmla="val 4211"/>
+              <a:gd name="adj" fmla="val 4324"/>
             </a:avLst>
           </a:prstGeom>
           <a:solidFill>
@@ -10075,14 +13063,14 @@
       </p:sp>
       <p:sp>
         <p:nvSpPr>
-          <p:cNvPr id="10" name="Text 8"/>
+          <p:cNvPr id="10" name="Text 7"/>
           <p:cNvSpPr txBox="1"/>
           <p:nvPr/>
         </p:nvSpPr>
         <p:spPr>
           <a:xfrm>
-            <a:off x="4800600" y="1325880"/>
-            <a:ext cx="1600200" cy="731520"/>
+            <a:off x="4800600" y="2971800"/>
+            <a:ext cx="3749040" cy="274320"/>
           </a:xfrm>
           <a:prstGeom prst="rect">
             <a:avLst/>
@@ -10098,30 +13086,27 @@
               <a:buNone/>
             </a:pPr>
             <a:r>
-              <a:rPr lang="en-US" sz="3600" b="1" dirty="0">
-                <a:solidFill>
-                  <a:schemeClr val="accent2"/>
-                </a:solidFill>
-                <a:latin typeface="Cambria" pitchFamily="34" charset="0"/>
-                <a:ea typeface="Cambria" pitchFamily="34" charset="-122"/>
-                <a:cs typeface="Cambria" pitchFamily="34" charset="-120"/>
+              <a:rPr lang="en-US" sz="1300" b="1" dirty="0">
+                <a:solidFill>
+                  <a:schemeClr val="tx2"/>
+                </a:solidFill>
               </a:rPr>
-              <a:t>6 GB</a:t>
-            </a:r>
-            <a:endParaRPr lang="en-US" sz="3600" dirty="0"/>
+              <a:t>Hallucinated answer (QA)</a:t>
+            </a:r>
+            <a:endParaRPr lang="en-US" sz="1300" dirty="0"/>
           </a:p>
         </p:txBody>
       </p:sp>
       <p:sp>
         <p:nvSpPr>
-          <p:cNvPr id="11" name="Text 9"/>
+          <p:cNvPr id="11" name="Text 8"/>
           <p:cNvSpPr txBox="1"/>
           <p:nvPr/>
         </p:nvSpPr>
         <p:spPr>
           <a:xfrm>
-            <a:off x="4800600" y="2103120"/>
-            <a:ext cx="1600200" cy="731520"/>
+            <a:off x="4800600" y="3264408"/>
+            <a:ext cx="3749040" cy="502920"/>
           </a:xfrm>
           <a:prstGeom prst="rect">
             <a:avLst/>
@@ -10137,63 +13122,27 @@
               <a:buNone/>
             </a:pPr>
             <a:r>
-              <a:rPr lang="en-US" sz="1300" dirty="0">
+              <a:rPr lang="en-US" sz="1150" i="1" dirty="0">
                 <a:solidFill>
                   <a:schemeClr val="tx1"/>
                 </a:solidFill>
               </a:rPr>
-              <a:t>RTX 4050 VRAM;</a:t>
-            </a:r>
-            <a:endParaRPr lang="en-US" sz="1300" dirty="0"/>
-          </a:p>
-          <a:p>
-            <a:pPr indent="0" marL="0">
-              <a:buNone/>
-            </a:pPr>
-            <a:r>
-              <a:rPr lang="en-US" sz="1300" dirty="0">
-                <a:solidFill>
-                  <a:schemeClr val="tx1"/>
-                </a:solidFill>
-              </a:rPr>
-              <a:t>3B and 7B in 4-bit</a:t>
-            </a:r>
-            <a:endParaRPr lang="en-US" sz="1300" dirty="0"/>
+              <a:t>“Average temperature in Tallahassee”: invents a calculation “79°F – 56°F = 23°F” not in the passage.</a:t>
+            </a:r>
+            <a:endParaRPr lang="en-US" sz="1150" dirty="0"/>
           </a:p>
         </p:txBody>
       </p:sp>
       <p:sp>
         <p:nvSpPr>
-          <p:cNvPr id="12" name="Shape 10"/>
-          <p:cNvSpPr/>
+          <p:cNvPr id="12" name="Text 9"/>
+          <p:cNvSpPr txBox="1"/>
           <p:nvPr/>
         </p:nvSpPr>
         <p:spPr>
           <a:xfrm>
-            <a:off x="6766560" y="1188720"/>
-            <a:ext cx="1874520" cy="1737360"/>
-          </a:xfrm>
-          <a:prstGeom prst="roundRect">
-            <a:avLst>
-              <a:gd name="adj" fmla="val 4211"/>
-            </a:avLst>
-          </a:prstGeom>
-          <a:solidFill>
-            <a:schemeClr val="bg2"/>
-          </a:solidFill>
-          <a:ln/>
-        </p:spPr>
-      </p:sp>
-      <p:sp>
-        <p:nvSpPr>
-          <p:cNvPr id="13" name="Text 11"/>
-          <p:cNvSpPr txBox="1"/>
-          <p:nvPr/>
-        </p:nvSpPr>
-        <p:spPr>
-          <a:xfrm>
-            <a:off x="6903720" y="1325880"/>
-            <a:ext cx="1600200" cy="731520"/>
+            <a:off x="4800600" y="3767328"/>
+            <a:ext cx="3749040" cy="274320"/>
           </a:xfrm>
           <a:prstGeom prst="rect">
             <a:avLst/>
@@ -10209,30 +13158,27 @@
               <a:buNone/>
             </a:pPr>
             <a:r>
-              <a:rPr lang="en-US" sz="3600" b="1" dirty="0">
+              <a:rPr lang="en-US" sz="1300" b="1" dirty="0">
                 <a:solidFill>
                   <a:schemeClr val="accent2"/>
                 </a:solidFill>
-                <a:latin typeface="Cambria" pitchFamily="34" charset="0"/>
-                <a:ea typeface="Cambria" pitchFamily="34" charset="-122"/>
-                <a:cs typeface="Cambria" pitchFamily="34" charset="-120"/>
               </a:rPr>
-              <a:t>5-fold</a:t>
-            </a:r>
-            <a:endParaRPr lang="en-US" sz="3600" dirty="0"/>
+              <a:t>ECS 0.297   PKS 0.101   → score 0.65</a:t>
+            </a:r>
+            <a:endParaRPr lang="en-US" sz="1300" dirty="0"/>
           </a:p>
         </p:txBody>
       </p:sp>
       <p:sp>
         <p:nvSpPr>
-          <p:cNvPr id="14" name="Text 12"/>
+          <p:cNvPr id="13" name="Text 10"/>
           <p:cNvSpPr txBox="1"/>
           <p:nvPr/>
         </p:nvSpPr>
         <p:spPr>
           <a:xfrm>
-            <a:off x="6903720" y="2103120"/>
-            <a:ext cx="1600200" cy="731520"/>
+            <a:off x="4800600" y="4069080"/>
+            <a:ext cx="3749040" cy="457200"/>
           </a:xfrm>
           <a:prstGeom prst="rect">
             <a:avLst/>
@@ -10248,100 +13194,14 @@
               <a:buNone/>
             </a:pPr>
             <a:r>
-              <a:rPr lang="en-US" sz="1300" dirty="0">
+              <a:rPr lang="en-US" sz="1100" dirty="0">
                 <a:solidFill>
                   <a:schemeClr val="tx1"/>
                 </a:solidFill>
               </a:rPr>
-              <a:t>stratified</a:t>
-            </a:r>
-            <a:endParaRPr lang="en-US" sz="1300" dirty="0"/>
-          </a:p>
-          <a:p>
-            <a:pPr indent="0" marL="0">
-              <a:buNone/>
-            </a:pPr>
-            <a:r>
-              <a:rPr lang="en-US" sz="1300" dirty="0">
-                <a:solidFill>
-                  <a:schemeClr val="tx1"/>
-                </a:solidFill>
-              </a:rPr>
-              <a:t>cross-validation</a:t>
-            </a:r>
-            <a:endParaRPr lang="en-US" sz="1300" dirty="0"/>
-          </a:p>
-        </p:txBody>
-      </p:sp>
-      <p:sp>
-        <p:nvSpPr>
-          <p:cNvPr id="15" name="Text 13"/>
-          <p:cNvSpPr txBox="1"/>
-          <p:nvPr/>
-        </p:nvSpPr>
-        <p:spPr>
-          <a:xfrm>
-            <a:off x="457200" y="3200400"/>
-            <a:ext cx="8229600" cy="1280160"/>
-          </a:xfrm>
-          <a:prstGeom prst="rect">
-            <a:avLst/>
-          </a:prstGeom>
-          <a:noFill/>
-          <a:ln/>
-        </p:spPr>
-        <p:txBody>
-          <a:bodyPr wrap="square" lIns="0" tIns="0" rIns="0" bIns="0" rtlCol="0" anchor="t"/>
-          <a:lstStyle/>
-          <a:p>
-            <a:pPr indent="0" marL="0">
-              <a:buNone/>
-            </a:pPr>
-            <a:r>
-              <a:rPr lang="en-US" sz="1400" b="1" dirty="0">
-                <a:solidFill>
-                  <a:schemeClr val="tx1"/>
-                </a:solidFill>
-              </a:rPr>
-              <a:t>Backbones: </a:t>
-            </a:r>
-            <a:pPr indent="0" marL="0">
-              <a:buNone/>
-            </a:pPr>
-            <a:r>
-              <a:rPr lang="en-US" sz="1400" dirty="0">
-                <a:solidFill>
-                  <a:schemeClr val="tx1"/>
-                </a:solidFill>
-              </a:rPr>
-              <a:t>TinyLlama-1.1B-Chat, Llama-3.2-1B-Instruct, Llama-3.2-3B-Instruct, Llama-2-7B-chat (the paper's model).</a:t>
-            </a:r>
-            <a:endParaRPr lang="en-US" sz="1400" dirty="0"/>
-          </a:p>
-          <a:p>
-            <a:pPr indent="0" marL="0">
-              <a:buNone/>
-            </a:pPr>
-            <a:r>
-              <a:rPr lang="en-US" sz="1400" b="1" dirty="0">
-                <a:solidFill>
-                  <a:schemeClr val="tx1"/>
-                </a:solidFill>
-              </a:rPr>
-              <a:t>Responses: </a:t>
-            </a:r>
-            <a:pPr indent="0" marL="0">
-              <a:buNone/>
-            </a:pPr>
-            <a:r>
-              <a:rPr lang="en-US" sz="1400" dirty="0">
-                <a:solidFill>
-                  <a:schemeClr val="tx1"/>
-                </a:solidFill>
-              </a:rPr>
-              <a:t>all generated by llama-2-7b-chat, as in the paper. Copying heads and FFN layers are re-selected inside each training fold.</a:t>
-            </a:r>
-            <a:endParaRPr lang="en-US" sz="1400" dirty="0"/>
+              <a:t>Less passage use, more memory injection: high score.</a:t>
+            </a:r>
+            <a:endParaRPr lang="en-US" sz="1100" dirty="0"/>
           </a:p>
         </p:txBody>
       </p:sp>
@@ -10447,44 +13307,46 @@
                   <a:schemeClr val="tx2"/>
                 </a:solidFill>
               </a:rPr>
-              <a:t>The reproduction matches the paper on its own model</a:t>
+              <a:t>How we measure a detector: AUC (area under the ROC curve)</a:t>
             </a:r>
             <a:endParaRPr lang="en-US" sz="2400" dirty="0"/>
           </a:p>
         </p:txBody>
       </p:sp>
-      <p:sp>
-        <p:nvSpPr>
-          <p:cNvPr id="3" name="Shape 1"/>
-          <p:cNvSpPr/>
+      <p:pic>
+        <p:nvPicPr>
+          <p:cNvPr id="3" name="Image 0" descr="C:\Users\Adithya K\OneDrive\Documents\projects\Deep_Learning_for_LOQ\redeep\report_docx\figures\roc.png">    </p:cNvPr>
+          <p:cNvPicPr>
+            <a:picLocks noChangeAspect="1"/>
+          </p:cNvPicPr>
           <p:nvPr/>
-        </p:nvSpPr>
+        </p:nvPicPr>
+        <p:blipFill>
+          <a:blip r:embed="rId1"/>
+          <a:stretch>
+            <a:fillRect/>
+          </a:stretch>
+        </p:blipFill>
         <p:spPr>
           <a:xfrm>
-            <a:off x="457200" y="1188720"/>
-            <a:ext cx="3840480" cy="3108960"/>
+            <a:off x="457200" y="1097280"/>
+            <a:ext cx="3749040" cy="3044952"/>
           </a:xfrm>
-          <a:prstGeom prst="roundRect">
-            <a:avLst>
-              <a:gd name="adj" fmla="val 2353"/>
-            </a:avLst>
+          <a:prstGeom prst="rect">
+            <a:avLst/>
           </a:prstGeom>
-          <a:solidFill>
-            <a:schemeClr val="tx2"/>
-          </a:solidFill>
-          <a:ln/>
         </p:spPr>
-      </p:sp>
-      <p:sp>
-        <p:nvSpPr>
-          <p:cNvPr id="4" name="Text 2"/>
+      </p:pic>
+      <p:sp>
+        <p:nvSpPr>
+          <p:cNvPr id="4" name="Text 1"/>
           <p:cNvSpPr txBox="1"/>
           <p:nvPr/>
         </p:nvSpPr>
         <p:spPr>
           <a:xfrm>
-            <a:off x="731520" y="1463040"/>
-            <a:ext cx="3291840" cy="1188720"/>
+            <a:off x="457200" y="4206240"/>
+            <a:ext cx="3749040" cy="411480"/>
           </a:xfrm>
           <a:prstGeom prst="rect">
             <a:avLst/>
@@ -10500,30 +13362,49 @@
               <a:buNone/>
             </a:pPr>
             <a:r>
-              <a:rPr lang="en-US" sz="6600" b="1" dirty="0">
-                <a:solidFill>
-                  <a:schemeClr val="accent1"/>
-                </a:solidFill>
-                <a:latin typeface="Cambria" pitchFamily="34" charset="0"/>
-                <a:ea typeface="Cambria" pitchFamily="34" charset="-122"/>
-                <a:cs typeface="Cambria" pitchFamily="34" charset="-120"/>
+              <a:rPr lang="en-US" sz="1050" dirty="0">
+                <a:solidFill>
+                  <a:schemeClr val="accent3"/>
+                </a:solidFill>
               </a:rPr>
-              <a:t>0.739</a:t>
-            </a:r>
-            <a:endParaRPr lang="en-US" sz="6600" dirty="0"/>
+              <a:t>ROC curves, Llama-2-7B and smaller models: ReDeEP (colour) above perplexity / entropy (grey).</a:t>
+            </a:r>
+            <a:endParaRPr lang="en-US" sz="1050" dirty="0"/>
           </a:p>
         </p:txBody>
       </p:sp>
       <p:sp>
         <p:nvSpPr>
-          <p:cNvPr id="5" name="Text 3"/>
+          <p:cNvPr id="5" name="Shape 2"/>
+          <p:cNvSpPr/>
+          <p:nvPr/>
+        </p:nvSpPr>
+        <p:spPr>
+          <a:xfrm>
+            <a:off x="4480560" y="1143000"/>
+            <a:ext cx="4206240" cy="3429000"/>
+          </a:xfrm>
+          <a:prstGeom prst="roundRect">
+            <a:avLst>
+              <a:gd name="adj" fmla="val 2133"/>
+            </a:avLst>
+          </a:prstGeom>
+          <a:solidFill>
+            <a:schemeClr val="bg2"/>
+          </a:solidFill>
+          <a:ln/>
+        </p:spPr>
+      </p:sp>
+      <p:sp>
+        <p:nvSpPr>
+          <p:cNvPr id="6" name="Text 3"/>
           <p:cNvSpPr txBox="1"/>
           <p:nvPr/>
         </p:nvSpPr>
         <p:spPr>
           <a:xfrm>
-            <a:off x="731520" y="2743200"/>
-            <a:ext cx="3291840" cy="822960"/>
+            <a:off x="4663440" y="1280160"/>
+            <a:ext cx="3886200" cy="3200400"/>
           </a:xfrm>
           <a:prstGeom prst="rect">
             <a:avLst/>
@@ -10539,173 +13420,124 @@
               <a:buNone/>
             </a:pPr>
             <a:r>
-              <a:rPr lang="en-US" sz="1500" dirty="0">
-                <a:solidFill>
-                  <a:schemeClr val="bg1"/>
+              <a:rPr lang="en-US" sz="1300" b="1" dirty="0">
+                <a:solidFill>
+                  <a:schemeClr val="tx1"/>
                 </a:solidFill>
               </a:rPr>
-              <a:t>Our AUC, Llama-2-7B-chat</a:t>
-            </a:r>
-            <a:endParaRPr lang="en-US" sz="1500" dirty="0"/>
+              <a:t>AUC = chance a random hallucinated answer gets a higher score than a random truthful one</a:t>
+            </a:r>
+            <a:endParaRPr lang="en-US" sz="1300" dirty="0"/>
           </a:p>
           <a:p>
             <a:pPr indent="0" marL="0">
               <a:buNone/>
             </a:pPr>
             <a:r>
-              <a:rPr lang="en-US" sz="1500" dirty="0">
-                <a:solidFill>
-                  <a:schemeClr val="bg1"/>
+              <a:rPr lang="en-US" sz="600" dirty="0">
+                <a:solidFill>
+                  <a:schemeClr val="tx1"/>
                 </a:solidFill>
               </a:rPr>
-              <a:t>(4-bit, 5-fold CV)</a:t>
-            </a:r>
-            <a:endParaRPr lang="en-US" sz="1500" dirty="0"/>
-          </a:p>
-        </p:txBody>
-      </p:sp>
-      <p:sp>
-        <p:nvSpPr>
-          <p:cNvPr id="6" name="Shape 4"/>
-          <p:cNvSpPr/>
-          <p:nvPr/>
-        </p:nvSpPr>
-        <p:spPr>
-          <a:xfrm>
-            <a:off x="4663440" y="1188720"/>
-            <a:ext cx="4023360" cy="3108960"/>
-          </a:xfrm>
-          <a:prstGeom prst="roundRect">
-            <a:avLst>
-              <a:gd name="adj" fmla="val 2353"/>
-            </a:avLst>
-          </a:prstGeom>
-          <a:solidFill>
-            <a:schemeClr val="bg2"/>
-          </a:solidFill>
-          <a:ln/>
-        </p:spPr>
-      </p:sp>
-      <p:sp>
-        <p:nvSpPr>
-          <p:cNvPr id="7" name="Text 5"/>
-          <p:cNvSpPr txBox="1"/>
-          <p:nvPr/>
-        </p:nvSpPr>
-        <p:spPr>
-          <a:xfrm>
-            <a:off x="4937760" y="1463040"/>
-            <a:ext cx="3474720" cy="1188720"/>
-          </a:xfrm>
-          <a:prstGeom prst="rect">
-            <a:avLst/>
-          </a:prstGeom>
-          <a:noFill/>
-          <a:ln/>
-        </p:spPr>
-        <p:txBody>
-          <a:bodyPr wrap="square" lIns="0" tIns="0" rIns="0" bIns="0" rtlCol="0" anchor="t"/>
-          <a:lstStyle/>
+              <a:t> </a:t>
+            </a:r>
+            <a:endParaRPr lang="en-US" sz="1300" dirty="0"/>
+          </a:p>
           <a:p>
             <a:pPr indent="0" marL="0">
               <a:buNone/>
             </a:pPr>
             <a:r>
-              <a:rPr lang="en-US" sz="6600" b="1" dirty="0">
-                <a:solidFill>
-                  <a:schemeClr val="accent3"/>
-                </a:solidFill>
-                <a:latin typeface="Cambria" pitchFamily="34" charset="0"/>
-                <a:ea typeface="Cambria" pitchFamily="34" charset="-122"/>
-                <a:cs typeface="Cambria" pitchFamily="34" charset="-120"/>
+              <a:rPr lang="en-US" sz="1300" dirty="0">
+                <a:solidFill>
+                  <a:schemeClr val="tx1"/>
+                </a:solidFill>
               </a:rPr>
-              <a:t>0.7325</a:t>
-            </a:r>
-            <a:endParaRPr lang="en-US" sz="6600" dirty="0"/>
-          </a:p>
-        </p:txBody>
-      </p:sp>
-      <p:sp>
-        <p:nvSpPr>
-          <p:cNvPr id="8" name="Text 6"/>
-          <p:cNvSpPr txBox="1"/>
-          <p:nvPr/>
-        </p:nvSpPr>
-        <p:spPr>
-          <a:xfrm>
-            <a:off x="4937760" y="2743200"/>
-            <a:ext cx="3474720" cy="822960"/>
-          </a:xfrm>
-          <a:prstGeom prst="rect">
-            <a:avLst/>
-          </a:prstGeom>
-          <a:noFill/>
-          <a:ln/>
-        </p:spPr>
-        <p:txBody>
-          <a:bodyPr wrap="square" lIns="0" tIns="0" rIns="0" bIns="0" rtlCol="0" anchor="t"/>
-          <a:lstStyle/>
+              <a:t>1.0 = perfect    0.5 = coin flip</a:t>
+            </a:r>
+            <a:endParaRPr lang="en-US" sz="1300" dirty="0"/>
+          </a:p>
           <a:p>
             <a:pPr indent="0" marL="0">
               <a:buNone/>
             </a:pPr>
             <a:r>
-              <a:rPr lang="en-US" sz="1500" dirty="0">
+              <a:rPr lang="en-US" sz="1300" dirty="0">
                 <a:solidFill>
                   <a:schemeClr val="tx1"/>
                 </a:solidFill>
               </a:rPr>
-              <a:t>Paper's AUC, Llama-2-7B-chat</a:t>
-            </a:r>
-            <a:endParaRPr lang="en-US" sz="1500" dirty="0"/>
+              <a:t>Ours (Llama-2-7B): 0.739 → right about 74% of the time</a:t>
+            </a:r>
+            <a:endParaRPr lang="en-US" sz="1300" dirty="0"/>
           </a:p>
           <a:p>
             <a:pPr indent="0" marL="0">
               <a:buNone/>
             </a:pPr>
             <a:r>
-              <a:rPr lang="en-US" sz="1500" dirty="0">
+              <a:rPr lang="en-US" sz="600" dirty="0">
                 <a:solidFill>
                   <a:schemeClr val="tx1"/>
                 </a:solidFill>
               </a:rPr>
-              <a:t>(Sun et al., ICLR 2025)</a:t>
-            </a:r>
-            <a:endParaRPr lang="en-US" sz="1500" dirty="0"/>
-          </a:p>
-        </p:txBody>
-      </p:sp>
-      <p:sp>
-        <p:nvSpPr>
-          <p:cNvPr id="9" name="Text 7"/>
-          <p:cNvSpPr txBox="1"/>
-          <p:nvPr/>
-        </p:nvSpPr>
-        <p:spPr>
-          <a:xfrm>
-            <a:off x="457200" y="4389120"/>
-            <a:ext cx="8229600" cy="320040"/>
-          </a:xfrm>
-          <a:prstGeom prst="rect">
-            <a:avLst/>
-          </a:prstGeom>
-          <a:noFill/>
-          <a:ln/>
-        </p:spPr>
-        <p:txBody>
-          <a:bodyPr wrap="square" lIns="0" tIns="0" rIns="0" bIns="0" rtlCol="0" anchor="t"/>
-          <a:lstStyle/>
+              <a:t> </a:t>
+            </a:r>
+            <a:endParaRPr lang="en-US" sz="1300" dirty="0"/>
+          </a:p>
           <a:p>
             <a:pPr indent="0" marL="0">
               <a:buNone/>
             </a:pPr>
             <a:r>
+              <a:rPr lang="en-US" sz="1300" b="1" dirty="0">
+                <a:solidFill>
+                  <a:schemeClr val="tx1"/>
+                </a:solidFill>
+              </a:rPr>
+              <a:t>Toy example</a:t>
+            </a:r>
+            <a:endParaRPr lang="en-US" sz="1300" dirty="0"/>
+          </a:p>
+          <a:p>
+            <a:pPr indent="0" marL="0">
+              <a:buNone/>
+            </a:pPr>
+            <a:r>
               <a:rPr lang="en-US" sz="1300" dirty="0">
                 <a:solidFill>
-                  <a:schemeClr val="accent3"/>
+                  <a:schemeClr val="tx1"/>
                 </a:solidFill>
               </a:rPr>
-              <a:t>Difference 0.006, well inside the fold-to-fold spread of ±0.034.</a:t>
+              <a:t>Hallucinated scores 0.9, 0.6, 0.3; truthful 0.7, 0.4, 0.2. Of the 9 (H, T) pairs the hallucinated one is higher in 7 → AUC = 7/9 = 0.78.</a:t>
+            </a:r>
+            <a:endParaRPr lang="en-US" sz="1300" dirty="0"/>
+          </a:p>
+          <a:p>
+            <a:pPr indent="0" marL="0">
+              <a:buNone/>
+            </a:pPr>
+            <a:r>
+              <a:rPr lang="en-US" sz="600" dirty="0">
+                <a:solidFill>
+                  <a:schemeClr val="tx1"/>
+                </a:solidFill>
+              </a:rPr>
+              <a:t> </a:t>
+            </a:r>
+            <a:endParaRPr lang="en-US" sz="1300" dirty="0"/>
+          </a:p>
+          <a:p>
+            <a:pPr indent="0" marL="0">
+              <a:buNone/>
+            </a:pPr>
+            <a:r>
+              <a:rPr lang="en-US" sz="1300" dirty="0">
+                <a:solidFill>
+                  <a:schemeClr val="tx1"/>
+                </a:solidFill>
+              </a:rPr>
+              <a:t>Why AUC: needs no cut-off threshold, so it compares detectors fairly; it is the paper's main metric.</a:t>
             </a:r>
             <a:endParaRPr lang="en-US" sz="1300" dirty="0"/>
           </a:p>
@@ -10813,42 +13645,26 @@
                   <a:schemeClr val="tx2"/>
                 </a:solidFill>
               </a:rPr>
-              <a:t>ReDeEP beats both baselines on every backbone</a:t>
+              <a:t>Four LLaMA models, one 6 GB laptop GPU, the paper's test set</a:t>
             </a:r>
             <a:endParaRPr lang="en-US" sz="2400" dirty="0"/>
           </a:p>
         </p:txBody>
       </p:sp>
-      <p:graphicFrame>
-        <p:nvGraphicFramePr>
-          <p:cNvPr id="3" name="Chart 0" descr=""/>
-          <p:cNvGraphicFramePr/>
-          <p:nvPr/>
-        </p:nvGraphicFramePr>
-        <p:xfrm>
-          <a:off x="457200" y="1051560"/>
-          <a:ext cx="5852160" cy="3566160"/>
-        </p:xfrm>
-        <a:graphic xmlns:a="http://schemas.openxmlformats.org/drawingml/2006/main">
-          <a:graphicData uri="http://schemas.openxmlformats.org/drawingml/2006/chart">
-            <c:chart xmlns:c="http://schemas.openxmlformats.org/drawingml/2006/chart" r:id="rId1"/>
-          </a:graphicData>
-        </a:graphic>
-      </p:graphicFrame>
-      <p:sp>
-        <p:nvSpPr>
-          <p:cNvPr id="4" name="Shape 1"/>
+      <p:sp>
+        <p:nvSpPr>
+          <p:cNvPr id="3" name="Shape 1"/>
           <p:cNvSpPr/>
           <p:nvPr/>
         </p:nvSpPr>
         <p:spPr>
           <a:xfrm>
-            <a:off x="6583680" y="1188720"/>
-            <a:ext cx="2103120" cy="3291840"/>
+            <a:off x="457200" y="1188720"/>
+            <a:ext cx="1874520" cy="1737360"/>
           </a:xfrm>
           <a:prstGeom prst="roundRect">
             <a:avLst>
-              <a:gd name="adj" fmla="val 3478"/>
+              <a:gd name="adj" fmla="val 4211"/>
             </a:avLst>
           </a:prstGeom>
           <a:solidFill>
@@ -10859,14 +13675,14 @@
       </p:sp>
       <p:sp>
         <p:nvSpPr>
-          <p:cNvPr id="5" name="Text 2"/>
+          <p:cNvPr id="4" name="Text 2"/>
           <p:cNvSpPr txBox="1"/>
           <p:nvPr/>
         </p:nvSpPr>
         <p:spPr>
           <a:xfrm>
-            <a:off x="6766560" y="1371600"/>
-            <a:ext cx="1783080" cy="3017520"/>
+            <a:off x="594360" y="1325880"/>
+            <a:ext cx="1600200" cy="731520"/>
           </a:xfrm>
           <a:prstGeom prst="rect">
             <a:avLst/>
@@ -10882,15 +13698,40 @@
               <a:buNone/>
             </a:pPr>
             <a:r>
-              <a:rPr lang="en-US" sz="2200" b="1" dirty="0">
+              <a:rPr lang="en-US" sz="3600" b="1" dirty="0">
                 <a:solidFill>
                   <a:schemeClr val="accent2"/>
                 </a:solidFill>
+                <a:latin typeface="Cambria" pitchFamily="34" charset="0"/>
+                <a:ea typeface="Cambria" pitchFamily="34" charset="-122"/>
+                <a:cs typeface="Cambria" pitchFamily="34" charset="-120"/>
               </a:rPr>
-              <a:t>+0.06 to +0.11</a:t>
-            </a:r>
-            <a:endParaRPr lang="en-US" sz="1300" dirty="0"/>
-          </a:p>
+              <a:t>415</a:t>
+            </a:r>
+            <a:endParaRPr lang="en-US" sz="3600" dirty="0"/>
+          </a:p>
+        </p:txBody>
+      </p:sp>
+      <p:sp>
+        <p:nvSpPr>
+          <p:cNvPr id="5" name="Text 3"/>
+          <p:cNvSpPr txBox="1"/>
+          <p:nvPr/>
+        </p:nvSpPr>
+        <p:spPr>
+          <a:xfrm>
+            <a:off x="594360" y="2103120"/>
+            <a:ext cx="1600200" cy="731520"/>
+          </a:xfrm>
+          <a:prstGeom prst="rect">
+            <a:avLst/>
+          </a:prstGeom>
+          <a:noFill/>
+          <a:ln/>
+        </p:spPr>
+        <p:txBody>
+          <a:bodyPr wrap="square" lIns="0" tIns="0" rIns="0" bIns="0" rtlCol="0" anchor="t"/>
+          <a:lstStyle/>
           <a:p>
             <a:pPr indent="0" marL="0">
               <a:buNone/>
@@ -10901,7 +13742,7 @@
                   <a:schemeClr val="tx1"/>
                 </a:solidFill>
               </a:rPr>
-              <a:t>AUC over the baselines</a:t>
+              <a:t>RAGTruth test responses</a:t>
             </a:r>
             <a:endParaRPr lang="en-US" sz="1300" dirty="0"/>
           </a:p>
@@ -10915,24 +13756,93 @@
                   <a:schemeClr val="tx1"/>
                 </a:solidFill>
               </a:rPr>
-              <a:t> </a:t>
+              <a:t>(212 hallucinated)</a:t>
             </a:r>
             <a:endParaRPr lang="en-US" sz="1300" dirty="0"/>
           </a:p>
+        </p:txBody>
+      </p:sp>
+      <p:sp>
+        <p:nvSpPr>
+          <p:cNvPr id="6" name="Shape 4"/>
+          <p:cNvSpPr/>
+          <p:nvPr/>
+        </p:nvSpPr>
+        <p:spPr>
+          <a:xfrm>
+            <a:off x="2560320" y="1188720"/>
+            <a:ext cx="1874520" cy="1737360"/>
+          </a:xfrm>
+          <a:prstGeom prst="roundRect">
+            <a:avLst>
+              <a:gd name="adj" fmla="val 4211"/>
+            </a:avLst>
+          </a:prstGeom>
+          <a:solidFill>
+            <a:schemeClr val="bg2"/>
+          </a:solidFill>
+          <a:ln/>
+        </p:spPr>
+      </p:sp>
+      <p:sp>
+        <p:nvSpPr>
+          <p:cNvPr id="7" name="Text 5"/>
+          <p:cNvSpPr txBox="1"/>
+          <p:nvPr/>
+        </p:nvSpPr>
+        <p:spPr>
+          <a:xfrm>
+            <a:off x="2697480" y="1325880"/>
+            <a:ext cx="1600200" cy="731520"/>
+          </a:xfrm>
+          <a:prstGeom prst="rect">
+            <a:avLst/>
+          </a:prstGeom>
+          <a:noFill/>
+          <a:ln/>
+        </p:spPr>
+        <p:txBody>
+          <a:bodyPr wrap="square" lIns="0" tIns="0" rIns="0" bIns="0" rtlCol="0" anchor="t"/>
+          <a:lstStyle/>
           <a:p>
             <a:pPr indent="0" marL="0">
               <a:buNone/>
             </a:pPr>
             <a:r>
-              <a:rPr lang="en-US" sz="1300" b="1" dirty="0">
-                <a:solidFill>
-                  <a:schemeClr val="tx1"/>
-                </a:solidFill>
+              <a:rPr lang="en-US" sz="3600" b="1" dirty="0">
+                <a:solidFill>
+                  <a:schemeClr val="accent2"/>
+                </a:solidFill>
+                <a:latin typeface="Cambria" pitchFamily="34" charset="0"/>
+                <a:ea typeface="Cambria" pitchFamily="34" charset="-122"/>
+                <a:cs typeface="Cambria" pitchFamily="34" charset="-120"/>
               </a:rPr>
-              <a:t>Size barely matters</a:t>
-            </a:r>
-            <a:endParaRPr lang="en-US" sz="1300" dirty="0"/>
-          </a:p>
+              <a:t>4</a:t>
+            </a:r>
+            <a:endParaRPr lang="en-US" sz="3600" dirty="0"/>
+          </a:p>
+        </p:txBody>
+      </p:sp>
+      <p:sp>
+        <p:nvSpPr>
+          <p:cNvPr id="8" name="Text 6"/>
+          <p:cNvSpPr txBox="1"/>
+          <p:nvPr/>
+        </p:nvSpPr>
+        <p:spPr>
+          <a:xfrm>
+            <a:off x="2697480" y="2103120"/>
+            <a:ext cx="1600200" cy="731520"/>
+          </a:xfrm>
+          <a:prstGeom prst="rect">
+            <a:avLst/>
+          </a:prstGeom>
+          <a:noFill/>
+          <a:ln/>
+        </p:spPr>
+        <p:txBody>
+          <a:bodyPr wrap="square" lIns="0" tIns="0" rIns="0" bIns="0" rtlCol="0" anchor="t"/>
+          <a:lstStyle/>
           <a:p>
             <a:pPr indent="0" marL="0">
               <a:buNone/>
@@ -10943,9 +13853,317 @@
                   <a:schemeClr val="tx1"/>
                 </a:solidFill>
               </a:rPr>
-              <a:t>1.1B TinyLlama scores highest (0.771); 3B and 7B are within noise.</a:t>
+              <a:t>LLaMA backbones,</a:t>
             </a:r>
             <a:endParaRPr lang="en-US" sz="1300" dirty="0"/>
+          </a:p>
+          <a:p>
+            <a:pPr indent="0" marL="0">
+              <a:buNone/>
+            </a:pPr>
+            <a:r>
+              <a:rPr lang="en-US" sz="1300" dirty="0">
+                <a:solidFill>
+                  <a:schemeClr val="tx1"/>
+                </a:solidFill>
+              </a:rPr>
+              <a:t>1.1B to 7B</a:t>
+            </a:r>
+            <a:endParaRPr lang="en-US" sz="1300" dirty="0"/>
+          </a:p>
+        </p:txBody>
+      </p:sp>
+      <p:sp>
+        <p:nvSpPr>
+          <p:cNvPr id="9" name="Shape 7"/>
+          <p:cNvSpPr/>
+          <p:nvPr/>
+        </p:nvSpPr>
+        <p:spPr>
+          <a:xfrm>
+            <a:off x="4663440" y="1188720"/>
+            <a:ext cx="1874520" cy="1737360"/>
+          </a:xfrm>
+          <a:prstGeom prst="roundRect">
+            <a:avLst>
+              <a:gd name="adj" fmla="val 4211"/>
+            </a:avLst>
+          </a:prstGeom>
+          <a:solidFill>
+            <a:schemeClr val="bg2"/>
+          </a:solidFill>
+          <a:ln/>
+        </p:spPr>
+      </p:sp>
+      <p:sp>
+        <p:nvSpPr>
+          <p:cNvPr id="10" name="Text 8"/>
+          <p:cNvSpPr txBox="1"/>
+          <p:nvPr/>
+        </p:nvSpPr>
+        <p:spPr>
+          <a:xfrm>
+            <a:off x="4800600" y="1325880"/>
+            <a:ext cx="1600200" cy="731520"/>
+          </a:xfrm>
+          <a:prstGeom prst="rect">
+            <a:avLst/>
+          </a:prstGeom>
+          <a:noFill/>
+          <a:ln/>
+        </p:spPr>
+        <p:txBody>
+          <a:bodyPr wrap="square" lIns="0" tIns="0" rIns="0" bIns="0" rtlCol="0" anchor="t"/>
+          <a:lstStyle/>
+          <a:p>
+            <a:pPr indent="0" marL="0">
+              <a:buNone/>
+            </a:pPr>
+            <a:r>
+              <a:rPr lang="en-US" sz="3600" b="1" dirty="0">
+                <a:solidFill>
+                  <a:schemeClr val="accent2"/>
+                </a:solidFill>
+                <a:latin typeface="Cambria" pitchFamily="34" charset="0"/>
+                <a:ea typeface="Cambria" pitchFamily="34" charset="-122"/>
+                <a:cs typeface="Cambria" pitchFamily="34" charset="-120"/>
+              </a:rPr>
+              <a:t>6 GB</a:t>
+            </a:r>
+            <a:endParaRPr lang="en-US" sz="3600" dirty="0"/>
+          </a:p>
+        </p:txBody>
+      </p:sp>
+      <p:sp>
+        <p:nvSpPr>
+          <p:cNvPr id="11" name="Text 9"/>
+          <p:cNvSpPr txBox="1"/>
+          <p:nvPr/>
+        </p:nvSpPr>
+        <p:spPr>
+          <a:xfrm>
+            <a:off x="4800600" y="2103120"/>
+            <a:ext cx="1600200" cy="731520"/>
+          </a:xfrm>
+          <a:prstGeom prst="rect">
+            <a:avLst/>
+          </a:prstGeom>
+          <a:noFill/>
+          <a:ln/>
+        </p:spPr>
+        <p:txBody>
+          <a:bodyPr wrap="square" lIns="0" tIns="0" rIns="0" bIns="0" rtlCol="0" anchor="t"/>
+          <a:lstStyle/>
+          <a:p>
+            <a:pPr indent="0" marL="0">
+              <a:buNone/>
+            </a:pPr>
+            <a:r>
+              <a:rPr lang="en-US" sz="1300" dirty="0">
+                <a:solidFill>
+                  <a:schemeClr val="tx1"/>
+                </a:solidFill>
+              </a:rPr>
+              <a:t>RTX 4050 VRAM;</a:t>
+            </a:r>
+            <a:endParaRPr lang="en-US" sz="1300" dirty="0"/>
+          </a:p>
+          <a:p>
+            <a:pPr indent="0" marL="0">
+              <a:buNone/>
+            </a:pPr>
+            <a:r>
+              <a:rPr lang="en-US" sz="1300" dirty="0">
+                <a:solidFill>
+                  <a:schemeClr val="tx1"/>
+                </a:solidFill>
+              </a:rPr>
+              <a:t>3B and 7B in 4-bit</a:t>
+            </a:r>
+            <a:endParaRPr lang="en-US" sz="1300" dirty="0"/>
+          </a:p>
+        </p:txBody>
+      </p:sp>
+      <p:sp>
+        <p:nvSpPr>
+          <p:cNvPr id="12" name="Shape 10"/>
+          <p:cNvSpPr/>
+          <p:nvPr/>
+        </p:nvSpPr>
+        <p:spPr>
+          <a:xfrm>
+            <a:off x="6766560" y="1188720"/>
+            <a:ext cx="1874520" cy="1737360"/>
+          </a:xfrm>
+          <a:prstGeom prst="roundRect">
+            <a:avLst>
+              <a:gd name="adj" fmla="val 4211"/>
+            </a:avLst>
+          </a:prstGeom>
+          <a:solidFill>
+            <a:schemeClr val="bg2"/>
+          </a:solidFill>
+          <a:ln/>
+        </p:spPr>
+      </p:sp>
+      <p:sp>
+        <p:nvSpPr>
+          <p:cNvPr id="13" name="Text 11"/>
+          <p:cNvSpPr txBox="1"/>
+          <p:nvPr/>
+        </p:nvSpPr>
+        <p:spPr>
+          <a:xfrm>
+            <a:off x="6903720" y="1325880"/>
+            <a:ext cx="1600200" cy="731520"/>
+          </a:xfrm>
+          <a:prstGeom prst="rect">
+            <a:avLst/>
+          </a:prstGeom>
+          <a:noFill/>
+          <a:ln/>
+        </p:spPr>
+        <p:txBody>
+          <a:bodyPr wrap="square" lIns="0" tIns="0" rIns="0" bIns="0" rtlCol="0" anchor="t"/>
+          <a:lstStyle/>
+          <a:p>
+            <a:pPr indent="0" marL="0">
+              <a:buNone/>
+            </a:pPr>
+            <a:r>
+              <a:rPr lang="en-US" sz="3600" b="1" dirty="0">
+                <a:solidFill>
+                  <a:schemeClr val="accent2"/>
+                </a:solidFill>
+                <a:latin typeface="Cambria" pitchFamily="34" charset="0"/>
+                <a:ea typeface="Cambria" pitchFamily="34" charset="-122"/>
+                <a:cs typeface="Cambria" pitchFamily="34" charset="-120"/>
+              </a:rPr>
+              <a:t>5-fold</a:t>
+            </a:r>
+            <a:endParaRPr lang="en-US" sz="3600" dirty="0"/>
+          </a:p>
+        </p:txBody>
+      </p:sp>
+      <p:sp>
+        <p:nvSpPr>
+          <p:cNvPr id="14" name="Text 12"/>
+          <p:cNvSpPr txBox="1"/>
+          <p:nvPr/>
+        </p:nvSpPr>
+        <p:spPr>
+          <a:xfrm>
+            <a:off x="6903720" y="2103120"/>
+            <a:ext cx="1600200" cy="731520"/>
+          </a:xfrm>
+          <a:prstGeom prst="rect">
+            <a:avLst/>
+          </a:prstGeom>
+          <a:noFill/>
+          <a:ln/>
+        </p:spPr>
+        <p:txBody>
+          <a:bodyPr wrap="square" lIns="0" tIns="0" rIns="0" bIns="0" rtlCol="0" anchor="t"/>
+          <a:lstStyle/>
+          <a:p>
+            <a:pPr indent="0" marL="0">
+              <a:buNone/>
+            </a:pPr>
+            <a:r>
+              <a:rPr lang="en-US" sz="1300" dirty="0">
+                <a:solidFill>
+                  <a:schemeClr val="tx1"/>
+                </a:solidFill>
+              </a:rPr>
+              <a:t>stratified</a:t>
+            </a:r>
+            <a:endParaRPr lang="en-US" sz="1300" dirty="0"/>
+          </a:p>
+          <a:p>
+            <a:pPr indent="0" marL="0">
+              <a:buNone/>
+            </a:pPr>
+            <a:r>
+              <a:rPr lang="en-US" sz="1300" dirty="0">
+                <a:solidFill>
+                  <a:schemeClr val="tx1"/>
+                </a:solidFill>
+              </a:rPr>
+              <a:t>cross-validation</a:t>
+            </a:r>
+            <a:endParaRPr lang="en-US" sz="1300" dirty="0"/>
+          </a:p>
+        </p:txBody>
+      </p:sp>
+      <p:sp>
+        <p:nvSpPr>
+          <p:cNvPr id="15" name="Text 13"/>
+          <p:cNvSpPr txBox="1"/>
+          <p:nvPr/>
+        </p:nvSpPr>
+        <p:spPr>
+          <a:xfrm>
+            <a:off x="457200" y="3200400"/>
+            <a:ext cx="8229600" cy="1280160"/>
+          </a:xfrm>
+          <a:prstGeom prst="rect">
+            <a:avLst/>
+          </a:prstGeom>
+          <a:noFill/>
+          <a:ln/>
+        </p:spPr>
+        <p:txBody>
+          <a:bodyPr wrap="square" lIns="0" tIns="0" rIns="0" bIns="0" rtlCol="0" anchor="t"/>
+          <a:lstStyle/>
+          <a:p>
+            <a:pPr indent="0" marL="0">
+              <a:buNone/>
+            </a:pPr>
+            <a:r>
+              <a:rPr lang="en-US" sz="1400" b="1" dirty="0">
+                <a:solidFill>
+                  <a:schemeClr val="tx1"/>
+                </a:solidFill>
+              </a:rPr>
+              <a:t>Backbones: </a:t>
+            </a:r>
+            <a:pPr indent="0" marL="0">
+              <a:buNone/>
+            </a:pPr>
+            <a:r>
+              <a:rPr lang="en-US" sz="1400" dirty="0">
+                <a:solidFill>
+                  <a:schemeClr val="tx1"/>
+                </a:solidFill>
+              </a:rPr>
+              <a:t>TinyLlama-1.1B-Chat, Llama-3.2-1B-Instruct, Llama-3.2-3B-Instruct, Llama-2-7B-chat (the paper's model).</a:t>
+            </a:r>
+            <a:endParaRPr lang="en-US" sz="1400" dirty="0"/>
+          </a:p>
+          <a:p>
+            <a:pPr indent="0" marL="0">
+              <a:buNone/>
+            </a:pPr>
+            <a:r>
+              <a:rPr lang="en-US" sz="1400" b="1" dirty="0">
+                <a:solidFill>
+                  <a:schemeClr val="tx1"/>
+                </a:solidFill>
+              </a:rPr>
+              <a:t>Responses: </a:t>
+            </a:r>
+            <a:pPr indent="0" marL="0">
+              <a:buNone/>
+            </a:pPr>
+            <a:r>
+              <a:rPr lang="en-US" sz="1400" dirty="0">
+                <a:solidFill>
+                  <a:schemeClr val="tx1"/>
+                </a:solidFill>
+              </a:rPr>
+              <a:t>all generated by llama-2-7b-chat, as in the paper. Copying heads and FFN layers are re-selected inside each training fold.</a:t>
+            </a:r>
+            <a:endParaRPr lang="en-US" sz="1400" dirty="0"/>
           </a:p>
         </p:txBody>
       </p:sp>
@@ -11051,7 +14269,7 @@
                   <a:schemeClr val="tx2"/>
                 </a:solidFill>
               </a:rPr>
-              <a:t>Extension: keep the answer, corrupt the passage</a:t>
+              <a:t>The reproduction matches the paper on its own model</a:t>
             </a:r>
             <a:endParaRPr lang="en-US" sz="2400" dirty="0"/>
           </a:p>
@@ -11066,85 +14284,29 @@
         <p:spPr>
           <a:xfrm>
             <a:off x="457200" y="1188720"/>
-            <a:ext cx="2560320" cy="2377440"/>
+            <a:ext cx="3840480" cy="3108960"/>
           </a:xfrm>
           <a:prstGeom prst="roundRect">
             <a:avLst>
-              <a:gd name="adj" fmla="val 3077"/>
+              <a:gd name="adj" fmla="val 2353"/>
             </a:avLst>
           </a:prstGeom>
           <a:solidFill>
-            <a:schemeClr val="bg2"/>
+            <a:schemeClr val="tx2"/>
           </a:solidFill>
           <a:ln/>
         </p:spPr>
       </p:sp>
       <p:sp>
         <p:nvSpPr>
-          <p:cNvPr id="4" name="Shape 2"/>
-          <p:cNvSpPr/>
+          <p:cNvPr id="4" name="Text 2"/>
+          <p:cNvSpPr txBox="1"/>
           <p:nvPr/>
         </p:nvSpPr>
         <p:spPr>
           <a:xfrm>
-            <a:off x="640080" y="1371600"/>
-            <a:ext cx="457200" cy="457200"/>
-          </a:xfrm>
-          <a:prstGeom prst="ellipse">
-            <a:avLst/>
-          </a:prstGeom>
-          <a:solidFill>
-            <a:schemeClr val="accent2"/>
-          </a:solidFill>
-          <a:ln/>
-        </p:spPr>
-      </p:sp>
-      <p:sp>
-        <p:nvSpPr>
-          <p:cNvPr id="5" name="Text 3"/>
-          <p:cNvSpPr txBox="1"/>
-          <p:nvPr/>
-        </p:nvSpPr>
-        <p:spPr>
-          <a:xfrm>
-            <a:off x="640080" y="1371600"/>
-            <a:ext cx="457200" cy="457200"/>
-          </a:xfrm>
-          <a:prstGeom prst="rect">
-            <a:avLst/>
-          </a:prstGeom>
-          <a:noFill/>
-          <a:ln/>
-        </p:spPr>
-        <p:txBody>
-          <a:bodyPr wrap="square" lIns="0" tIns="0" rIns="0" bIns="0" rtlCol="0" anchor="ctr"/>
-          <a:lstStyle/>
-          <a:p>
-            <a:pPr algn="ctr" indent="0" marL="0">
-              <a:buNone/>
-            </a:pPr>
-            <a:r>
-              <a:rPr lang="en-US" sz="1600" b="1" dirty="0">
-                <a:solidFill>
-                  <a:schemeClr val="bg1"/>
-                </a:solidFill>
-              </a:rPr>
-              <a:t>1</a:t>
-            </a:r>
-            <a:endParaRPr lang="en-US" sz="1600" dirty="0"/>
-          </a:p>
-        </p:txBody>
-      </p:sp>
-      <p:sp>
-        <p:nvSpPr>
-          <p:cNvPr id="6" name="Text 4"/>
-          <p:cNvSpPr txBox="1"/>
-          <p:nvPr/>
-        </p:nvSpPr>
-        <p:spPr>
-          <a:xfrm>
-            <a:off x="640080" y="1965960"/>
-            <a:ext cx="2194560" cy="365760"/>
+            <a:off x="731520" y="1463040"/>
+            <a:ext cx="3291840" cy="1188720"/>
           </a:xfrm>
           <a:prstGeom prst="rect">
             <a:avLst/>
@@ -11160,27 +14322,30 @@
               <a:buNone/>
             </a:pPr>
             <a:r>
-              <a:rPr lang="en-US" sz="1600" b="1" dirty="0">
-                <a:solidFill>
-                  <a:schemeClr val="tx2"/>
-                </a:solidFill>
+              <a:rPr lang="en-US" sz="6600" b="1" dirty="0">
+                <a:solidFill>
+                  <a:schemeClr val="accent1"/>
+                </a:solidFill>
+                <a:latin typeface="Cambria" pitchFamily="34" charset="0"/>
+                <a:ea typeface="Cambria" pitchFamily="34" charset="-122"/>
+                <a:cs typeface="Cambria" pitchFamily="34" charset="-120"/>
               </a:rPr>
-              <a:t>Accurate</a:t>
-            </a:r>
-            <a:endParaRPr lang="en-US" sz="1600" dirty="0"/>
+              <a:t>0.739</a:t>
+            </a:r>
+            <a:endParaRPr lang="en-US" sz="6600" dirty="0"/>
           </a:p>
         </p:txBody>
       </p:sp>
       <p:sp>
         <p:nvSpPr>
-          <p:cNvPr id="7" name="Text 5"/>
+          <p:cNvPr id="5" name="Text 3"/>
           <p:cNvSpPr txBox="1"/>
           <p:nvPr/>
         </p:nvSpPr>
         <p:spPr>
           <a:xfrm>
-            <a:off x="640080" y="2377440"/>
-            <a:ext cx="2194560" cy="1097280"/>
+            <a:off x="731520" y="2743200"/>
+            <a:ext cx="3291840" cy="822960"/>
           </a:xfrm>
           <a:prstGeom prst="rect">
             <a:avLst/>
@@ -11196,31 +14361,45 @@
               <a:buNone/>
             </a:pPr>
             <a:r>
-              <a:rPr lang="en-US" sz="1300" dirty="0">
-                <a:solidFill>
-                  <a:schemeClr val="tx1"/>
+              <a:rPr lang="en-US" sz="1500" dirty="0">
+                <a:solidFill>
+                  <a:schemeClr val="bg1"/>
                 </a:solidFill>
               </a:rPr>
-              <a:t>The real RAGTruth passage. The control.</a:t>
-            </a:r>
-            <a:endParaRPr lang="en-US" sz="1300" dirty="0"/>
+              <a:t>Our AUC, Llama-2-7B-chat</a:t>
+            </a:r>
+            <a:endParaRPr lang="en-US" sz="1500" dirty="0"/>
+          </a:p>
+          <a:p>
+            <a:pPr indent="0" marL="0">
+              <a:buNone/>
+            </a:pPr>
+            <a:r>
+              <a:rPr lang="en-US" sz="1500" dirty="0">
+                <a:solidFill>
+                  <a:schemeClr val="bg1"/>
+                </a:solidFill>
+              </a:rPr>
+              <a:t>(4-bit, 5-fold CV)</a:t>
+            </a:r>
+            <a:endParaRPr lang="en-US" sz="1500" dirty="0"/>
           </a:p>
         </p:txBody>
       </p:sp>
       <p:sp>
         <p:nvSpPr>
-          <p:cNvPr id="8" name="Shape 6"/>
+          <p:cNvPr id="6" name="Shape 4"/>
           <p:cNvSpPr/>
           <p:nvPr/>
         </p:nvSpPr>
         <p:spPr>
           <a:xfrm>
-            <a:off x="3291840" y="1188720"/>
-            <a:ext cx="2560320" cy="2377440"/>
+            <a:off x="4663440" y="1188720"/>
+            <a:ext cx="4023360" cy="3108960"/>
           </a:xfrm>
           <a:prstGeom prst="roundRect">
             <a:avLst>
-              <a:gd name="adj" fmla="val 3077"/>
+              <a:gd name="adj" fmla="val 2353"/>
             </a:avLst>
           </a:prstGeom>
           <a:solidFill>
@@ -11231,70 +14410,14 @@
       </p:sp>
       <p:sp>
         <p:nvSpPr>
-          <p:cNvPr id="9" name="Shape 7"/>
-          <p:cNvSpPr/>
+          <p:cNvPr id="7" name="Text 5"/>
+          <p:cNvSpPr txBox="1"/>
           <p:nvPr/>
         </p:nvSpPr>
         <p:spPr>
           <a:xfrm>
-            <a:off x="3474720" y="1371600"/>
-            <a:ext cx="457200" cy="457200"/>
-          </a:xfrm>
-          <a:prstGeom prst="ellipse">
-            <a:avLst/>
-          </a:prstGeom>
-          <a:solidFill>
-            <a:schemeClr val="accent2"/>
-          </a:solidFill>
-          <a:ln/>
-        </p:spPr>
-      </p:sp>
-      <p:sp>
-        <p:nvSpPr>
-          <p:cNvPr id="10" name="Text 8"/>
-          <p:cNvSpPr txBox="1"/>
-          <p:nvPr/>
-        </p:nvSpPr>
-        <p:spPr>
-          <a:xfrm>
-            <a:off x="3474720" y="1371600"/>
-            <a:ext cx="457200" cy="457200"/>
-          </a:xfrm>
-          <a:prstGeom prst="rect">
-            <a:avLst/>
-          </a:prstGeom>
-          <a:noFill/>
-          <a:ln/>
-        </p:spPr>
-        <p:txBody>
-          <a:bodyPr wrap="square" lIns="0" tIns="0" rIns="0" bIns="0" rtlCol="0" anchor="ctr"/>
-          <a:lstStyle/>
-          <a:p>
-            <a:pPr algn="ctr" indent="0" marL="0">
-              <a:buNone/>
-            </a:pPr>
-            <a:r>
-              <a:rPr lang="en-US" sz="1600" b="1" dirty="0">
-                <a:solidFill>
-                  <a:schemeClr val="bg1"/>
-                </a:solidFill>
-              </a:rPr>
-              <a:t>2</a:t>
-            </a:r>
-            <a:endParaRPr lang="en-US" sz="1600" dirty="0"/>
-          </a:p>
-        </p:txBody>
-      </p:sp>
-      <p:sp>
-        <p:nvSpPr>
-          <p:cNvPr id="11" name="Text 9"/>
-          <p:cNvSpPr txBox="1"/>
-          <p:nvPr/>
-        </p:nvSpPr>
-        <p:spPr>
-          <a:xfrm>
-            <a:off x="3474720" y="1965960"/>
-            <a:ext cx="2194560" cy="365760"/>
+            <a:off x="4937760" y="1463040"/>
+            <a:ext cx="3474720" cy="1188720"/>
           </a:xfrm>
           <a:prstGeom prst="rect">
             <a:avLst/>
@@ -11310,27 +14433,30 @@
               <a:buNone/>
             </a:pPr>
             <a:r>
-              <a:rPr lang="en-US" sz="1600" b="1" dirty="0">
-                <a:solidFill>
-                  <a:schemeClr val="tx2"/>
-                </a:solidFill>
+              <a:rPr lang="en-US" sz="6600" b="1" dirty="0">
+                <a:solidFill>
+                  <a:schemeClr val="accent3"/>
+                </a:solidFill>
+                <a:latin typeface="Cambria" pitchFamily="34" charset="0"/>
+                <a:ea typeface="Cambria" pitchFamily="34" charset="-122"/>
+                <a:cs typeface="Cambria" pitchFamily="34" charset="-120"/>
               </a:rPr>
-              <a:t>Irrelevant passage</a:t>
-            </a:r>
-            <a:endParaRPr lang="en-US" sz="1600" dirty="0"/>
+              <a:t>0.7325</a:t>
+            </a:r>
+            <a:endParaRPr lang="en-US" sz="6600" dirty="0"/>
           </a:p>
         </p:txBody>
       </p:sp>
       <p:sp>
         <p:nvSpPr>
-          <p:cNvPr id="12" name="Text 10"/>
+          <p:cNvPr id="8" name="Text 6"/>
           <p:cNvSpPr txBox="1"/>
           <p:nvPr/>
         </p:nvSpPr>
         <p:spPr>
           <a:xfrm>
-            <a:off x="3474720" y="2377440"/>
-            <a:ext cx="2194560" cy="1097280"/>
+            <a:off x="4937760" y="2743200"/>
+            <a:ext cx="3474720" cy="822960"/>
           </a:xfrm>
           <a:prstGeom prst="rect">
             <a:avLst/>
@@ -11346,105 +14472,41 @@
               <a:buNone/>
             </a:pPr>
             <a:r>
-              <a:rPr lang="en-US" sz="1300" dirty="0">
+              <a:rPr lang="en-US" sz="1500" dirty="0">
                 <a:solidFill>
                   <a:schemeClr val="tx1"/>
                 </a:solidFill>
               </a:rPr>
-              <a:t>A passage from a different source on the same task type. Nothing in the answer is supported.</a:t>
-            </a:r>
-            <a:endParaRPr lang="en-US" sz="1300" dirty="0"/>
+              <a:t>Paper's AUC, Llama-2-7B-chat</a:t>
+            </a:r>
+            <a:endParaRPr lang="en-US" sz="1500" dirty="0"/>
+          </a:p>
+          <a:p>
+            <a:pPr indent="0" marL="0">
+              <a:buNone/>
+            </a:pPr>
+            <a:r>
+              <a:rPr lang="en-US" sz="1500" dirty="0">
+                <a:solidFill>
+                  <a:schemeClr val="tx1"/>
+                </a:solidFill>
+              </a:rPr>
+              <a:t>(Sun et al., ICLR 2025)</a:t>
+            </a:r>
+            <a:endParaRPr lang="en-US" sz="1500" dirty="0"/>
           </a:p>
         </p:txBody>
       </p:sp>
       <p:sp>
         <p:nvSpPr>
-          <p:cNvPr id="13" name="Shape 11"/>
-          <p:cNvSpPr/>
+          <p:cNvPr id="9" name="Text 7"/>
+          <p:cNvSpPr txBox="1"/>
           <p:nvPr/>
         </p:nvSpPr>
         <p:spPr>
           <a:xfrm>
-            <a:off x="6126480" y="1188720"/>
-            <a:ext cx="2560320" cy="2377440"/>
-          </a:xfrm>
-          <a:prstGeom prst="roundRect">
-            <a:avLst>
-              <a:gd name="adj" fmla="val 3077"/>
-            </a:avLst>
-          </a:prstGeom>
-          <a:solidFill>
-            <a:schemeClr val="bg2"/>
-          </a:solidFill>
-          <a:ln/>
-        </p:spPr>
-      </p:sp>
-      <p:sp>
-        <p:nvSpPr>
-          <p:cNvPr id="14" name="Shape 12"/>
-          <p:cNvSpPr/>
-          <p:nvPr/>
-        </p:nvSpPr>
-        <p:spPr>
-          <a:xfrm>
-            <a:off x="6309360" y="1371600"/>
-            <a:ext cx="457200" cy="457200"/>
-          </a:xfrm>
-          <a:prstGeom prst="ellipse">
-            <a:avLst/>
-          </a:prstGeom>
-          <a:solidFill>
-            <a:schemeClr val="accent1"/>
-          </a:solidFill>
-          <a:ln/>
-        </p:spPr>
-      </p:sp>
-      <p:sp>
-        <p:nvSpPr>
-          <p:cNvPr id="15" name="Text 13"/>
-          <p:cNvSpPr txBox="1"/>
-          <p:nvPr/>
-        </p:nvSpPr>
-        <p:spPr>
-          <a:xfrm>
-            <a:off x="6309360" y="1371600"/>
-            <a:ext cx="457200" cy="457200"/>
-          </a:xfrm>
-          <a:prstGeom prst="rect">
-            <a:avLst/>
-          </a:prstGeom>
-          <a:noFill/>
-          <a:ln/>
-        </p:spPr>
-        <p:txBody>
-          <a:bodyPr wrap="square" lIns="0" tIns="0" rIns="0" bIns="0" rtlCol="0" anchor="ctr"/>
-          <a:lstStyle/>
-          <a:p>
-            <a:pPr algn="ctr" indent="0" marL="0">
-              <a:buNone/>
-            </a:pPr>
-            <a:r>
-              <a:rPr lang="en-US" sz="1600" b="1" dirty="0">
-                <a:solidFill>
-                  <a:schemeClr val="bg1"/>
-                </a:solidFill>
-              </a:rPr>
-              <a:t>3</a:t>
-            </a:r>
-            <a:endParaRPr lang="en-US" sz="1600" dirty="0"/>
-          </a:p>
-        </p:txBody>
-      </p:sp>
-      <p:sp>
-        <p:nvSpPr>
-          <p:cNvPr id="16" name="Text 14"/>
-          <p:cNvSpPr txBox="1"/>
-          <p:nvPr/>
-        </p:nvSpPr>
-        <p:spPr>
-          <a:xfrm>
-            <a:off x="6309360" y="1965960"/>
-            <a:ext cx="2194560" cy="365760"/>
+            <a:off x="457200" y="4389120"/>
+            <a:ext cx="8229600" cy="320040"/>
           </a:xfrm>
           <a:prstGeom prst="rect">
             <a:avLst/>
@@ -11460,86 +14522,14 @@
               <a:buNone/>
             </a:pPr>
             <a:r>
-              <a:rPr lang="en-US" sz="1600" b="1" dirty="0">
-                <a:solidFill>
-                  <a:schemeClr val="tx2"/>
+              <a:rPr lang="en-US" sz="1300" dirty="0">
+                <a:solidFill>
+                  <a:schemeClr val="accent3"/>
                 </a:solidFill>
               </a:rPr>
-              <a:t>Numbers corrupted</a:t>
-            </a:r>
-            <a:endParaRPr lang="en-US" sz="1600" dirty="0"/>
-          </a:p>
-        </p:txBody>
-      </p:sp>
-      <p:sp>
-        <p:nvSpPr>
-          <p:cNvPr id="17" name="Text 15"/>
-          <p:cNvSpPr txBox="1"/>
-          <p:nvPr/>
-        </p:nvSpPr>
-        <p:spPr>
-          <a:xfrm>
-            <a:off x="6309360" y="2377440"/>
-            <a:ext cx="2194560" cy="1097280"/>
-          </a:xfrm>
-          <a:prstGeom prst="rect">
-            <a:avLst/>
-          </a:prstGeom>
-          <a:noFill/>
-          <a:ln/>
-        </p:spPr>
-        <p:txBody>
-          <a:bodyPr wrap="square" lIns="0" tIns="0" rIns="0" bIns="0" rtlCol="0" anchor="t"/>
-          <a:lstStyle/>
-          <a:p>
-            <a:pPr indent="0" marL="0">
-              <a:buNone/>
-            </a:pPr>
-            <a:r>
-              <a:rPr lang="en-US" sz="1300" dirty="0">
-                <a:solidFill>
-                  <a:schemeClr val="tx1"/>
-                </a:solidFill>
-              </a:rPr>
-              <a:t>Every number in the real passage scaled by 1.3–3×. Numbers the answer copied are now contradicted.</a:t>
+              <a:t>Difference 0.006, well inside the fold-to-fold spread of ±0.034.</a:t>
             </a:r>
             <a:endParaRPr lang="en-US" sz="1300" dirty="0"/>
-          </a:p>
-        </p:txBody>
-      </p:sp>
-      <p:sp>
-        <p:nvSpPr>
-          <p:cNvPr id="18" name="Text 16"/>
-          <p:cNvSpPr txBox="1"/>
-          <p:nvPr/>
-        </p:nvSpPr>
-        <p:spPr>
-          <a:xfrm>
-            <a:off x="457200" y="3840480"/>
-            <a:ext cx="8229600" cy="640080"/>
-          </a:xfrm>
-          <a:prstGeom prst="rect">
-            <a:avLst/>
-          </a:prstGeom>
-          <a:noFill/>
-          <a:ln/>
-        </p:spPr>
-        <p:txBody>
-          <a:bodyPr wrap="square" lIns="0" tIns="0" rIns="0" bIns="0" rtlCol="0" anchor="t"/>
-          <a:lstStyle/>
-          <a:p>
-            <a:pPr indent="0" marL="0">
-              <a:buNone/>
-            </a:pPr>
-            <a:r>
-              <a:rPr lang="en-US" sz="1400" dirty="0">
-                <a:solidFill>
-                  <a:schemeClr val="tx1"/>
-                </a:solidFill>
-              </a:rPr>
-              <a:t>A faithful detector should flag both corrupted conditions. 150 held-out responses per backbone; detector refit on the other 265.</a:t>
-            </a:r>
-            <a:endParaRPr lang="en-US" sz="1400" dirty="0"/>
           </a:p>
         </p:txBody>
       </p:sp>
@@ -11645,7 +14635,7 @@
                   <a:schemeClr val="tx2"/>
                 </a:solidFill>
               </a:rPr>
-              <a:t>It flags off-topic passages but misses contradicted numbers</a:t>
+              <a:t>ReDeEP beats both baselines on every backbone</a:t>
             </a:r>
             <a:endParaRPr lang="en-US" sz="2400" dirty="0"/>
           </a:p>
@@ -11659,7 +14649,7 @@
         </p:nvGraphicFramePr>
         <p:xfrm>
           <a:off x="457200" y="1051560"/>
-          <a:ext cx="5120640" cy="3566160"/>
+          <a:ext cx="5852160" cy="3566160"/>
         </p:xfrm>
         <a:graphic xmlns:a="http://schemas.openxmlformats.org/drawingml/2006/main">
           <a:graphicData uri="http://schemas.openxmlformats.org/drawingml/2006/chart">
@@ -11675,12 +14665,12 @@
         </p:nvSpPr>
         <p:spPr>
           <a:xfrm>
-            <a:off x="5852160" y="1188720"/>
-            <a:ext cx="2834640" cy="3291840"/>
+            <a:off x="6583680" y="1188720"/>
+            <a:ext cx="2103120" cy="3291840"/>
           </a:xfrm>
           <a:prstGeom prst="roundRect">
             <a:avLst>
-              <a:gd name="adj" fmla="val 2581"/>
+              <a:gd name="adj" fmla="val 3478"/>
             </a:avLst>
           </a:prstGeom>
           <a:solidFill>
@@ -11697,8 +14687,8 @@
         </p:nvSpPr>
         <p:spPr>
           <a:xfrm>
-            <a:off x="6035040" y="1371600"/>
-            <a:ext cx="2514600" cy="3017520"/>
+            <a:off x="6766560" y="1371600"/>
+            <a:ext cx="1783080" cy="3017520"/>
           </a:xfrm>
           <a:prstGeom prst="rect">
             <a:avLst/>
@@ -11714,13 +14704,16 @@
               <a:buNone/>
             </a:pPr>
             <a:r>
-              <a:rPr lang="en-US" sz="1300" b="1" dirty="0">
-                <a:solidFill>
-                  <a:schemeClr val="tx1"/>
+              <a:rPr lang="en-US" sz="2200" b="1" dirty="0">
+                <a:solidFill>
+                  <a:schemeClr val="accent2"/>
                 </a:solidFill>
               </a:rPr>
-              <a:t>Irrelevant: </a:t>
-            </a:r>
+              <a:t>+0.06 to +0.11</a:t>
+            </a:r>
+            <a:endParaRPr lang="en-US" sz="1300" dirty="0"/>
+          </a:p>
+          <a:p>
             <a:pPr indent="0" marL="0">
               <a:buNone/>
             </a:pPr>
@@ -11730,7 +14723,7 @@
                   <a:schemeClr val="tx1"/>
                 </a:solidFill>
               </a:rPr>
-              <a:t>score jumps (p &lt; 0.001). Correct.</a:t>
+              <a:t>AUC over the baselines</a:t>
             </a:r>
             <a:endParaRPr lang="en-US" sz="1300" dirty="0"/>
           </a:p>
@@ -11758,8 +14751,11 @@
                   <a:schemeClr val="tx1"/>
                 </a:solidFill>
               </a:rPr>
-              <a:t>Numbers corrupted: </a:t>
-            </a:r>
+              <a:t>Size barely matters</a:t>
+            </a:r>
+            <a:endParaRPr lang="en-US" sz="1300" dirty="0"/>
+          </a:p>
+          <a:p>
             <a:pPr indent="0" marL="0">
               <a:buNone/>
             </a:pPr>
@@ -11769,7 +14765,7 @@
                   <a:schemeClr val="tx1"/>
                 </a:solidFill>
               </a:rPr>
-              <a:t>no rise. On the 122 answers that state a contradicted number, the score rose in only 52% (TinyLlama) and 31% (Llama-2-7B) of cases.</a:t>
+              <a:t>1.1B TinyLlama scores highest (0.771); 3B and 7B are within noise.</a:t>
             </a:r>
             <a:endParaRPr lang="en-US" sz="1300" dirty="0"/>
           </a:p>
@@ -11877,7 +14873,7 @@
                   <a:schemeClr val="tx2"/>
                 </a:solidFill>
               </a:rPr>
-              <a:t>ReDeEP checks whether an answer is about the passage, not whether it agrees</a:t>
+              <a:t>Extension: keep the answer, corrupt the passage</a:t>
             </a:r>
             <a:endParaRPr lang="en-US" sz="2400" dirty="0"/>
           </a:p>
@@ -11892,11 +14888,11 @@
         <p:spPr>
           <a:xfrm>
             <a:off x="457200" y="1188720"/>
-            <a:ext cx="3931920" cy="1828800"/>
+            <a:ext cx="2560320" cy="2377440"/>
           </a:xfrm>
           <a:prstGeom prst="roundRect">
             <a:avLst>
-              <a:gd name="adj" fmla="val 4000"/>
+              <a:gd name="adj" fmla="val 3077"/>
             </a:avLst>
           </a:prstGeom>
           <a:solidFill>
@@ -11907,14 +14903,70 @@
       </p:sp>
       <p:sp>
         <p:nvSpPr>
-          <p:cNvPr id="4" name="Text 2"/>
+          <p:cNvPr id="4" name="Shape 2"/>
+          <p:cNvSpPr/>
+          <p:nvPr/>
+        </p:nvSpPr>
+        <p:spPr>
+          <a:xfrm>
+            <a:off x="640080" y="1371600"/>
+            <a:ext cx="457200" cy="457200"/>
+          </a:xfrm>
+          <a:prstGeom prst="ellipse">
+            <a:avLst/>
+          </a:prstGeom>
+          <a:solidFill>
+            <a:schemeClr val="accent2"/>
+          </a:solidFill>
+          <a:ln/>
+        </p:spPr>
+      </p:sp>
+      <p:sp>
+        <p:nvSpPr>
+          <p:cNvPr id="5" name="Text 3"/>
           <p:cNvSpPr txBox="1"/>
           <p:nvPr/>
         </p:nvSpPr>
         <p:spPr>
           <a:xfrm>
-            <a:off x="685800" y="1325880"/>
-            <a:ext cx="3474720" cy="365760"/>
+            <a:off x="640080" y="1371600"/>
+            <a:ext cx="457200" cy="457200"/>
+          </a:xfrm>
+          <a:prstGeom prst="rect">
+            <a:avLst/>
+          </a:prstGeom>
+          <a:noFill/>
+          <a:ln/>
+        </p:spPr>
+        <p:txBody>
+          <a:bodyPr wrap="square" lIns="0" tIns="0" rIns="0" bIns="0" rtlCol="0" anchor="ctr"/>
+          <a:lstStyle/>
+          <a:p>
+            <a:pPr algn="ctr" indent="0" marL="0">
+              <a:buNone/>
+            </a:pPr>
+            <a:r>
+              <a:rPr lang="en-US" sz="1600" b="1" dirty="0">
+                <a:solidFill>
+                  <a:schemeClr val="bg1"/>
+                </a:solidFill>
+              </a:rPr>
+              <a:t>1</a:t>
+            </a:r>
+            <a:endParaRPr lang="en-US" sz="1600" dirty="0"/>
+          </a:p>
+        </p:txBody>
+      </p:sp>
+      <p:sp>
+        <p:nvSpPr>
+          <p:cNvPr id="6" name="Text 4"/>
+          <p:cNvSpPr txBox="1"/>
+          <p:nvPr/>
+        </p:nvSpPr>
+        <p:spPr>
+          <a:xfrm>
+            <a:off x="640080" y="1965960"/>
+            <a:ext cx="2194560" cy="365760"/>
           </a:xfrm>
           <a:prstGeom prst="rect">
             <a:avLst/>
@@ -11935,7 +14987,7 @@
                   <a:schemeClr val="tx2"/>
                 </a:solidFill>
               </a:rPr>
-              <a:t>What ECS measures</a:t>
+              <a:t>Accurate</a:t>
             </a:r>
             <a:endParaRPr lang="en-US" sz="1600" dirty="0"/>
           </a:p>
@@ -11943,14 +14995,14 @@
       </p:sp>
       <p:sp>
         <p:nvSpPr>
-          <p:cNvPr id="5" name="Text 3"/>
+          <p:cNvPr id="7" name="Text 5"/>
           <p:cNvSpPr txBox="1"/>
           <p:nvPr/>
         </p:nvSpPr>
         <p:spPr>
           <a:xfrm>
-            <a:off x="685800" y="1737360"/>
-            <a:ext cx="3474720" cy="1463040"/>
+            <a:off x="640080" y="2377440"/>
+            <a:ext cx="2194560" cy="1097280"/>
           </a:xfrm>
           <a:prstGeom prst="rect">
             <a:avLst/>
@@ -11966,31 +15018,31 @@
               <a:buNone/>
             </a:pPr>
             <a:r>
-              <a:rPr lang="en-US" sz="1400" dirty="0">
+              <a:rPr lang="en-US" sz="1300" dirty="0">
                 <a:solidFill>
                   <a:schemeClr val="tx1"/>
                 </a:solidFill>
               </a:rPr>
-              <a:t>Cosine similarity between hidden states: is the answer built from the same content the copying heads read?</a:t>
-            </a:r>
-            <a:endParaRPr lang="en-US" sz="1400" dirty="0"/>
+              <a:t>The real RAGTruth passage. The control.</a:t>
+            </a:r>
+            <a:endParaRPr lang="en-US" sz="1300" dirty="0"/>
           </a:p>
         </p:txBody>
       </p:sp>
       <p:sp>
         <p:nvSpPr>
-          <p:cNvPr id="6" name="Shape 4"/>
+          <p:cNvPr id="8" name="Shape 6"/>
           <p:cNvSpPr/>
           <p:nvPr/>
         </p:nvSpPr>
         <p:spPr>
           <a:xfrm>
-            <a:off x="4754880" y="1188720"/>
-            <a:ext cx="3931920" cy="1828800"/>
+            <a:off x="3291840" y="1188720"/>
+            <a:ext cx="2560320" cy="2377440"/>
           </a:xfrm>
           <a:prstGeom prst="roundRect">
             <a:avLst>
-              <a:gd name="adj" fmla="val 4000"/>
+              <a:gd name="adj" fmla="val 3077"/>
             </a:avLst>
           </a:prstGeom>
           <a:solidFill>
@@ -12001,14 +15053,70 @@
       </p:sp>
       <p:sp>
         <p:nvSpPr>
-          <p:cNvPr id="7" name="Text 5"/>
+          <p:cNvPr id="9" name="Shape 7"/>
+          <p:cNvSpPr/>
+          <p:nvPr/>
+        </p:nvSpPr>
+        <p:spPr>
+          <a:xfrm>
+            <a:off x="3474720" y="1371600"/>
+            <a:ext cx="457200" cy="457200"/>
+          </a:xfrm>
+          <a:prstGeom prst="ellipse">
+            <a:avLst/>
+          </a:prstGeom>
+          <a:solidFill>
+            <a:schemeClr val="accent2"/>
+          </a:solidFill>
+          <a:ln/>
+        </p:spPr>
+      </p:sp>
+      <p:sp>
+        <p:nvSpPr>
+          <p:cNvPr id="10" name="Text 8"/>
           <p:cNvSpPr txBox="1"/>
           <p:nvPr/>
         </p:nvSpPr>
         <p:spPr>
           <a:xfrm>
-            <a:off x="4983480" y="1325880"/>
-            <a:ext cx="3474720" cy="365760"/>
+            <a:off x="3474720" y="1371600"/>
+            <a:ext cx="457200" cy="457200"/>
+          </a:xfrm>
+          <a:prstGeom prst="rect">
+            <a:avLst/>
+          </a:prstGeom>
+          <a:noFill/>
+          <a:ln/>
+        </p:spPr>
+        <p:txBody>
+          <a:bodyPr wrap="square" lIns="0" tIns="0" rIns="0" bIns="0" rtlCol="0" anchor="ctr"/>
+          <a:lstStyle/>
+          <a:p>
+            <a:pPr algn="ctr" indent="0" marL="0">
+              <a:buNone/>
+            </a:pPr>
+            <a:r>
+              <a:rPr lang="en-US" sz="1600" b="1" dirty="0">
+                <a:solidFill>
+                  <a:schemeClr val="bg1"/>
+                </a:solidFill>
+              </a:rPr>
+              <a:t>2</a:t>
+            </a:r>
+            <a:endParaRPr lang="en-US" sz="1600" dirty="0"/>
+          </a:p>
+        </p:txBody>
+      </p:sp>
+      <p:sp>
+        <p:nvSpPr>
+          <p:cNvPr id="11" name="Text 9"/>
+          <p:cNvSpPr txBox="1"/>
+          <p:nvPr/>
+        </p:nvSpPr>
+        <p:spPr>
+          <a:xfrm>
+            <a:off x="3474720" y="1965960"/>
+            <a:ext cx="2194560" cy="365760"/>
           </a:xfrm>
           <a:prstGeom prst="rect">
             <a:avLst/>
@@ -12029,7 +15137,7 @@
                   <a:schemeClr val="tx2"/>
                 </a:solidFill>
               </a:rPr>
-              <a:t>What it cannot see</a:t>
+              <a:t>Irrelevant passage</a:t>
             </a:r>
             <a:endParaRPr lang="en-US" sz="1600" dirty="0"/>
           </a:p>
@@ -12037,14 +15145,14 @@
       </p:sp>
       <p:sp>
         <p:nvSpPr>
-          <p:cNvPr id="8" name="Text 6"/>
+          <p:cNvPr id="12" name="Text 10"/>
           <p:cNvSpPr txBox="1"/>
           <p:nvPr/>
         </p:nvSpPr>
         <p:spPr>
           <a:xfrm>
-            <a:off x="4983480" y="1737360"/>
-            <a:ext cx="3474720" cy="1463040"/>
+            <a:off x="3474720" y="2377440"/>
+            <a:ext cx="2194560" cy="1097280"/>
           </a:xfrm>
           <a:prstGeom prst="rect">
             <a:avLst/>
@@ -12060,49 +15168,69 @@
               <a:buNone/>
             </a:pPr>
             <a:r>
-              <a:rPr lang="en-US" sz="1400" dirty="0">
+              <a:rPr lang="en-US" sz="1300" dirty="0">
                 <a:solidFill>
                   <a:schemeClr val="tx1"/>
                 </a:solidFill>
               </a:rPr>
-              <a:t>A changed number likely barely moves the hidden state, so a contradicted fact still looks “grounded”. In Llama-2-7B, ECS even rose.</a:t>
-            </a:r>
-            <a:endParaRPr lang="en-US" sz="1400" dirty="0"/>
+              <a:t>A passage from a different source on the same task type. Nothing in the answer is supported.</a:t>
+            </a:r>
+            <a:endParaRPr lang="en-US" sz="1300" dirty="0"/>
           </a:p>
         </p:txBody>
       </p:sp>
       <p:sp>
         <p:nvSpPr>
-          <p:cNvPr id="9" name="Shape 7"/>
+          <p:cNvPr id="13" name="Shape 11"/>
           <p:cNvSpPr/>
           <p:nvPr/>
         </p:nvSpPr>
         <p:spPr>
           <a:xfrm>
-            <a:off x="457200" y="3337560"/>
-            <a:ext cx="8229600" cy="914400"/>
+            <a:off x="6126480" y="1188720"/>
+            <a:ext cx="2560320" cy="2377440"/>
           </a:xfrm>
           <a:prstGeom prst="roundRect">
             <a:avLst>
-              <a:gd name="adj" fmla="val 8000"/>
+              <a:gd name="adj" fmla="val 3077"/>
             </a:avLst>
           </a:prstGeom>
           <a:solidFill>
-            <a:schemeClr val="tx2"/>
+            <a:schemeClr val="bg2"/>
           </a:solidFill>
           <a:ln/>
         </p:spPr>
       </p:sp>
       <p:sp>
         <p:nvSpPr>
-          <p:cNvPr id="10" name="Text 8"/>
+          <p:cNvPr id="14" name="Shape 12"/>
+          <p:cNvSpPr/>
+          <p:nvPr/>
+        </p:nvSpPr>
+        <p:spPr>
+          <a:xfrm>
+            <a:off x="6309360" y="1371600"/>
+            <a:ext cx="457200" cy="457200"/>
+          </a:xfrm>
+          <a:prstGeom prst="ellipse">
+            <a:avLst/>
+          </a:prstGeom>
+          <a:solidFill>
+            <a:schemeClr val="accent1"/>
+          </a:solidFill>
+          <a:ln/>
+        </p:spPr>
+      </p:sp>
+      <p:sp>
+        <p:nvSpPr>
+          <p:cNvPr id="15" name="Text 13"/>
           <p:cNvSpPr txBox="1"/>
           <p:nvPr/>
         </p:nvSpPr>
         <p:spPr>
           <a:xfrm>
-            <a:off x="685800" y="3447288"/>
-            <a:ext cx="7772400" cy="685800"/>
+            <a:off x="6309360" y="1371600"/>
+            <a:ext cx="457200" cy="457200"/>
           </a:xfrm>
           <a:prstGeom prst="rect">
             <a:avLst/>
@@ -12114,18 +15242,126 @@
           <a:bodyPr wrap="square" lIns="0" tIns="0" rIns="0" bIns="0" rtlCol="0" anchor="ctr"/>
           <a:lstStyle/>
           <a:p>
+            <a:pPr algn="ctr" indent="0" marL="0">
+              <a:buNone/>
+            </a:pPr>
+            <a:r>
+              <a:rPr lang="en-US" sz="1600" b="1" dirty="0">
+                <a:solidFill>
+                  <a:schemeClr val="bg1"/>
+                </a:solidFill>
+              </a:rPr>
+              <a:t>3</a:t>
+            </a:r>
+            <a:endParaRPr lang="en-US" sz="1600" dirty="0"/>
+          </a:p>
+        </p:txBody>
+      </p:sp>
+      <p:sp>
+        <p:nvSpPr>
+          <p:cNvPr id="16" name="Text 14"/>
+          <p:cNvSpPr txBox="1"/>
+          <p:nvPr/>
+        </p:nvSpPr>
+        <p:spPr>
+          <a:xfrm>
+            <a:off x="6309360" y="1965960"/>
+            <a:ext cx="2194560" cy="365760"/>
+          </a:xfrm>
+          <a:prstGeom prst="rect">
+            <a:avLst/>
+          </a:prstGeom>
+          <a:noFill/>
+          <a:ln/>
+        </p:spPr>
+        <p:txBody>
+          <a:bodyPr wrap="square" lIns="0" tIns="0" rIns="0" bIns="0" rtlCol="0" anchor="t"/>
+          <a:lstStyle/>
+          <a:p>
             <a:pPr indent="0" marL="0">
               <a:buNone/>
             </a:pPr>
             <a:r>
-              <a:rPr lang="en-US" sz="1500" b="1" dirty="0">
-                <a:solidFill>
-                  <a:schemeClr val="bg1"/>
+              <a:rPr lang="en-US" sz="1600" b="1" dirty="0">
+                <a:solidFill>
+                  <a:schemeClr val="tx2"/>
                 </a:solidFill>
               </a:rPr>
-              <a:t>Implication: pair ReDeEP with a fact-level check (numbers, entities) before trusting it on knowledge conflicts.</a:t>
-            </a:r>
-            <a:endParaRPr lang="en-US" sz="1500" dirty="0"/>
+              <a:t>Numbers corrupted</a:t>
+            </a:r>
+            <a:endParaRPr lang="en-US" sz="1600" dirty="0"/>
+          </a:p>
+        </p:txBody>
+      </p:sp>
+      <p:sp>
+        <p:nvSpPr>
+          <p:cNvPr id="17" name="Text 15"/>
+          <p:cNvSpPr txBox="1"/>
+          <p:nvPr/>
+        </p:nvSpPr>
+        <p:spPr>
+          <a:xfrm>
+            <a:off x="6309360" y="2377440"/>
+            <a:ext cx="2194560" cy="1097280"/>
+          </a:xfrm>
+          <a:prstGeom prst="rect">
+            <a:avLst/>
+          </a:prstGeom>
+          <a:noFill/>
+          <a:ln/>
+        </p:spPr>
+        <p:txBody>
+          <a:bodyPr wrap="square" lIns="0" tIns="0" rIns="0" bIns="0" rtlCol="0" anchor="t"/>
+          <a:lstStyle/>
+          <a:p>
+            <a:pPr indent="0" marL="0">
+              <a:buNone/>
+            </a:pPr>
+            <a:r>
+              <a:rPr lang="en-US" sz="1300" dirty="0">
+                <a:solidFill>
+                  <a:schemeClr val="tx1"/>
+                </a:solidFill>
+              </a:rPr>
+              <a:t>Every number in the real passage scaled by 1.3–3×. Numbers the answer copied are now contradicted.</a:t>
+            </a:r>
+            <a:endParaRPr lang="en-US" sz="1300" dirty="0"/>
+          </a:p>
+        </p:txBody>
+      </p:sp>
+      <p:sp>
+        <p:nvSpPr>
+          <p:cNvPr id="18" name="Text 16"/>
+          <p:cNvSpPr txBox="1"/>
+          <p:nvPr/>
+        </p:nvSpPr>
+        <p:spPr>
+          <a:xfrm>
+            <a:off x="457200" y="3840480"/>
+            <a:ext cx="8229600" cy="640080"/>
+          </a:xfrm>
+          <a:prstGeom prst="rect">
+            <a:avLst/>
+          </a:prstGeom>
+          <a:noFill/>
+          <a:ln/>
+        </p:spPr>
+        <p:txBody>
+          <a:bodyPr wrap="square" lIns="0" tIns="0" rIns="0" bIns="0" rtlCol="0" anchor="t"/>
+          <a:lstStyle/>
+          <a:p>
+            <a:pPr indent="0" marL="0">
+              <a:buNone/>
+            </a:pPr>
+            <a:r>
+              <a:rPr lang="en-US" sz="1400" dirty="0">
+                <a:solidFill>
+                  <a:schemeClr val="tx1"/>
+                </a:solidFill>
+              </a:rPr>
+              <a:t>A faithful detector should flag both corrupted conditions. 150 held-out responses per backbone; detector refit on the other 265.</a:t>
+            </a:r>
+            <a:endParaRPr lang="en-US" sz="1400" dirty="0"/>
           </a:p>
         </p:txBody>
       </p:sp>
